--- a/Emerging-Technologies-for-the-Circular-Economy/ETCE-L00-Organization.pptx
+++ b/Emerging-Technologies-for-the-Circular-Economy/ETCE-L00-Organization.pptx
@@ -198,7 +198,7 @@
                 <a:uFillTx/>
                 <a:latin typeface="Times New Roman"/>
               </a:rPr>
-              <a:t> </a:t>
+              <a:t>&lt;header&gt;</a:t>
             </a:r>
             <a:endParaRPr lang="en-GB" sz="1400" b="0" u="none" strike="noStrike">
               <a:solidFill>
@@ -264,7 +264,7 @@
                 <a:uFillTx/>
                 <a:latin typeface="Times New Roman"/>
               </a:rPr>
-              <a:t> </a:t>
+              <a:t>&lt;date/time&gt;</a:t>
             </a:r>
             <a:endParaRPr lang="en-GB" sz="1400" b="0" u="none" strike="noStrike">
               <a:solidFill>
@@ -330,7 +330,7 @@
                 <a:uFillTx/>
                 <a:latin typeface="Times New Roman"/>
               </a:rPr>
-              <a:t> </a:t>
+              <a:t>&lt;footer&gt;</a:t>
             </a:r>
             <a:endParaRPr lang="en-GB" sz="1400" b="0" u="none" strike="noStrike">
               <a:solidFill>
@@ -387,7 +387,7 @@
             <a:pPr indent="0" algn="r">
               <a:buNone/>
             </a:pPr>
-            <a:fld id="{3F53C510-9DAA-4D4A-AE43-3614C91D1CE6}" type="slidenum">
+            <a:fld id="{879E444B-E30D-475B-B15F-6ACF850D7C9B}" type="slidenum">
               <a:rPr lang="en-GB" sz="1400" b="0" u="none" strike="noStrike">
                 <a:solidFill>
                   <a:srgbClr val="000000"/>
@@ -396,7 +396,7 @@
                 <a:uFillTx/>
                 <a:latin typeface="Times New Roman"/>
               </a:rPr>
-              <a:t>1</a:t>
+              <a:t>&lt;number&gt;</a:t>
             </a:fld>
             <a:endParaRPr lang="en-GB" sz="1400" b="0" u="none" strike="noStrike">
               <a:solidFill>
@@ -445,7 +445,7 @@
         <p:spPr>
           <a:xfrm>
             <a:off x="533520" y="763560"/>
-            <a:ext cx="6687000" cy="3755160"/>
+            <a:ext cx="6686640" cy="3754800"/>
           </a:xfrm>
           <a:prstGeom prst="rect">
             <a:avLst/>
@@ -468,7 +468,7 @@
         <p:spPr>
           <a:xfrm>
             <a:off x="777240" y="4777560"/>
-            <a:ext cx="6200640" cy="4509000"/>
+            <a:ext cx="6200280" cy="4508640"/>
           </a:xfrm>
           <a:prstGeom prst="rect">
             <a:avLst/>
@@ -506,7 +506,7 @@
         <p:spPr>
           <a:xfrm>
             <a:off x="4399200" y="9555480"/>
-            <a:ext cx="3355920" cy="485640"/>
+            <a:ext cx="3355560" cy="485280"/>
           </a:xfrm>
           <a:prstGeom prst="rect">
             <a:avLst/>
@@ -532,7 +532,7 @@
                 <a:spcPct val="100000"/>
               </a:lnSpc>
             </a:pPr>
-            <a:fld id="{52C8C152-FFA5-4725-AC3B-3046F341062A}" type="slidenum">
+            <a:fld id="{E1568866-2270-4426-B4FF-0227019D46C8}" type="slidenum">
               <a:rPr lang="de-DE" sz="1800" b="0" u="none" strike="noStrike">
                 <a:solidFill>
                   <a:srgbClr val="000000"/>
@@ -590,7 +590,7 @@
         <p:spPr>
           <a:xfrm>
             <a:off x="533520" y="763560"/>
-            <a:ext cx="6687000" cy="3755160"/>
+            <a:ext cx="6686640" cy="3754800"/>
           </a:xfrm>
           <a:prstGeom prst="rect">
             <a:avLst/>
@@ -613,7 +613,7 @@
         <p:spPr>
           <a:xfrm>
             <a:off x="777240" y="4777560"/>
-            <a:ext cx="6200640" cy="4509000"/>
+            <a:ext cx="6200280" cy="4508640"/>
           </a:xfrm>
           <a:prstGeom prst="rect">
             <a:avLst/>
@@ -651,7 +651,7 @@
         <p:spPr>
           <a:xfrm>
             <a:off x="4399200" y="9555480"/>
-            <a:ext cx="3355920" cy="485640"/>
+            <a:ext cx="3355560" cy="485280"/>
           </a:xfrm>
           <a:prstGeom prst="rect">
             <a:avLst/>
@@ -677,7 +677,7 @@
                 <a:spcPct val="100000"/>
               </a:lnSpc>
             </a:pPr>
-            <a:fld id="{26E714DA-6665-4011-AEB3-01BA468D3BB3}" type="slidenum">
+            <a:fld id="{4FD8CFF9-9021-42A4-B8C4-0A87BADA8CE7}" type="slidenum">
               <a:rPr lang="de-DE" sz="1800" b="0" u="none" strike="noStrike">
                 <a:solidFill>
                   <a:srgbClr val="000000"/>
@@ -735,7 +735,7 @@
         <p:spPr>
           <a:xfrm>
             <a:off x="533520" y="763560"/>
-            <a:ext cx="6687000" cy="3755160"/>
+            <a:ext cx="6686640" cy="3754800"/>
           </a:xfrm>
           <a:prstGeom prst="rect">
             <a:avLst/>
@@ -758,7 +758,7 @@
         <p:spPr>
           <a:xfrm>
             <a:off x="777240" y="4777560"/>
-            <a:ext cx="6200640" cy="4509000"/>
+            <a:ext cx="6200280" cy="4508640"/>
           </a:xfrm>
           <a:prstGeom prst="rect">
             <a:avLst/>
@@ -796,7 +796,7 @@
         <p:spPr>
           <a:xfrm>
             <a:off x="4399200" y="9555480"/>
-            <a:ext cx="3355920" cy="485640"/>
+            <a:ext cx="3355560" cy="485280"/>
           </a:xfrm>
           <a:prstGeom prst="rect">
             <a:avLst/>
@@ -822,7 +822,7 @@
                 <a:spcPct val="100000"/>
               </a:lnSpc>
             </a:pPr>
-            <a:fld id="{FCD11DC7-F3A4-463F-9584-DD56F89D8616}" type="slidenum">
+            <a:fld id="{DA4F1473-DE45-45FD-9C43-25034E849BDD}" type="slidenum">
               <a:rPr lang="de-DE" sz="1800" b="0" u="none" strike="noStrike">
                 <a:solidFill>
                   <a:srgbClr val="000000"/>
@@ -927,7 +927,7 @@
         <p:spPr>
           <a:xfrm>
             <a:off x="11444760" y="0"/>
-            <a:ext cx="735480" cy="6844320"/>
+            <a:ext cx="735120" cy="6843960"/>
           </a:xfrm>
           <a:prstGeom prst="rect">
             <a:avLst/>
@@ -978,7 +978,7 @@
         <p:spPr>
           <a:xfrm>
             <a:off x="11438640" y="6453360"/>
-            <a:ext cx="752400" cy="363960"/>
+            <a:ext cx="752040" cy="363960"/>
           </a:xfrm>
           <a:prstGeom prst="rect">
             <a:avLst/>
@@ -1004,7 +1004,7 @@
                 <a:spcPct val="100000"/>
               </a:lnSpc>
             </a:pPr>
-            <a:fld id="{C0DD334B-B2E1-490D-B4DD-CBBF9A095BBE}" type="slidenum">
+            <a:fld id="{FBE718C1-133E-4566-B2A3-203333DA34AF}" type="slidenum">
               <a:rPr lang="en-US" sz="1800" b="0" u="none" strike="noStrike">
                 <a:solidFill>
                   <a:srgbClr val="808080"/>
@@ -1036,7 +1036,7 @@
         <p:spPr>
           <a:xfrm>
             <a:off x="912240" y="1268280"/>
-            <a:ext cx="9202320" cy="355680"/>
+            <a:ext cx="9201960" cy="355320"/>
           </a:xfrm>
           <a:prstGeom prst="rect">
             <a:avLst/>
@@ -1087,7 +1087,7 @@
         <p:spPr>
           <a:xfrm>
             <a:off x="0" y="0"/>
-            <a:ext cx="3046320" cy="556200"/>
+            <a:ext cx="3045960" cy="555840"/>
           </a:xfrm>
           <a:prstGeom prst="rect">
             <a:avLst/>
@@ -1111,7 +1111,7 @@
         <p:spPr>
           <a:xfrm>
             <a:off x="7430400" y="134640"/>
-            <a:ext cx="3692160" cy="508320"/>
+            <a:ext cx="3691800" cy="507960"/>
           </a:xfrm>
           <a:prstGeom prst="rect">
             <a:avLst/>
@@ -1131,7 +1131,7 @@
         <p:spPr>
           <a:xfrm>
             <a:off x="912240" y="1268280"/>
-            <a:ext cx="9202320" cy="355680"/>
+            <a:ext cx="9201960" cy="355320"/>
           </a:xfrm>
           <a:prstGeom prst="rect">
             <a:avLst/>
@@ -1178,7 +1178,7 @@
         <p:spPr>
           <a:xfrm>
             <a:off x="11444760" y="0"/>
-            <a:ext cx="735480" cy="6844320"/>
+            <a:ext cx="735120" cy="6843960"/>
           </a:xfrm>
           <a:prstGeom prst="rect">
             <a:avLst/>
@@ -1229,7 +1229,7 @@
         <p:spPr>
           <a:xfrm>
             <a:off x="0" y="6642720"/>
-            <a:ext cx="12178440" cy="211320"/>
+            <a:ext cx="12178080" cy="211320"/>
           </a:xfrm>
           <a:prstGeom prst="rect">
             <a:avLst/>
@@ -1626,7 +1626,7 @@
         <p:spPr>
           <a:xfrm>
             <a:off x="11444760" y="0"/>
-            <a:ext cx="735480" cy="6844320"/>
+            <a:ext cx="735120" cy="6843960"/>
           </a:xfrm>
           <a:prstGeom prst="rect">
             <a:avLst/>
@@ -1677,7 +1677,7 @@
         <p:spPr>
           <a:xfrm>
             <a:off x="11438640" y="6453360"/>
-            <a:ext cx="752400" cy="363960"/>
+            <a:ext cx="752040" cy="363960"/>
           </a:xfrm>
           <a:prstGeom prst="rect">
             <a:avLst/>
@@ -1703,7 +1703,7 @@
                 <a:spcPct val="100000"/>
               </a:lnSpc>
             </a:pPr>
-            <a:fld id="{109BED17-C2DB-4A0A-8F8B-D93E47F57D12}" type="slidenum">
+            <a:fld id="{F1B6D0F4-E45F-40E5-9A20-77B6880BA39A}" type="slidenum">
               <a:rPr lang="en-US" sz="1800" b="0" u="none" strike="noStrike">
                 <a:solidFill>
                   <a:srgbClr val="808080"/>
@@ -1735,7 +1735,7 @@
         <p:spPr>
           <a:xfrm>
             <a:off x="912240" y="1268280"/>
-            <a:ext cx="9202320" cy="355680"/>
+            <a:ext cx="9201960" cy="355320"/>
           </a:xfrm>
           <a:prstGeom prst="rect">
             <a:avLst/>
@@ -1786,7 +1786,7 @@
         <p:spPr>
           <a:xfrm>
             <a:off x="0" y="0"/>
-            <a:ext cx="3046320" cy="556200"/>
+            <a:ext cx="3045960" cy="555840"/>
           </a:xfrm>
           <a:prstGeom prst="rect">
             <a:avLst/>
@@ -1810,7 +1810,7 @@
         <p:spPr>
           <a:xfrm>
             <a:off x="7430400" y="134640"/>
-            <a:ext cx="3692160" cy="508320"/>
+            <a:ext cx="3691800" cy="507960"/>
           </a:xfrm>
           <a:prstGeom prst="rect">
             <a:avLst/>
@@ -1830,7 +1830,7 @@
         <p:spPr>
           <a:xfrm>
             <a:off x="11444760" y="0"/>
-            <a:ext cx="735480" cy="6844320"/>
+            <a:ext cx="735120" cy="6843960"/>
           </a:xfrm>
           <a:prstGeom prst="rect">
             <a:avLst/>
@@ -1881,7 +1881,7 @@
         <p:spPr>
           <a:xfrm>
             <a:off x="11438640" y="6453360"/>
-            <a:ext cx="752400" cy="363960"/>
+            <a:ext cx="752040" cy="363960"/>
           </a:xfrm>
           <a:prstGeom prst="rect">
             <a:avLst/>
@@ -1907,7 +1907,7 @@
                 <a:spcPct val="100000"/>
               </a:lnSpc>
             </a:pPr>
-            <a:fld id="{BA74F8D6-0A22-43E8-9DBD-3DA31DCF3451}" type="slidenum">
+            <a:fld id="{0E7EF338-C880-4B08-AA39-07CE3E39630F}" type="slidenum">
               <a:rPr lang="en-US" sz="1800" b="0" u="none" strike="noStrike">
                 <a:solidFill>
                   <a:srgbClr val="808080"/>
@@ -1939,7 +1939,7 @@
         <p:spPr>
           <a:xfrm>
             <a:off x="0" y="6642720"/>
-            <a:ext cx="12178440" cy="211320"/>
+            <a:ext cx="12178080" cy="211320"/>
           </a:xfrm>
           <a:prstGeom prst="rect">
             <a:avLst/>
@@ -2329,7 +2329,7 @@
         <p:spPr>
           <a:xfrm>
             <a:off x="527400" y="1412640"/>
-            <a:ext cx="10355400" cy="1141920"/>
+            <a:ext cx="10355040" cy="1141560"/>
           </a:xfrm>
           <a:prstGeom prst="rect">
             <a:avLst/>
@@ -2387,7 +2387,7 @@
         <p:spPr>
           <a:xfrm>
             <a:off x="527400" y="2852640"/>
-            <a:ext cx="10355400" cy="2362680"/>
+            <a:ext cx="10355040" cy="2362320"/>
           </a:xfrm>
           <a:prstGeom prst="rect">
             <a:avLst/>
@@ -2643,7 +2643,7 @@
         <p:spPr>
           <a:xfrm>
             <a:off x="335520" y="764640"/>
-            <a:ext cx="10739520" cy="490320"/>
+            <a:ext cx="10739160" cy="489960"/>
           </a:xfrm>
           <a:prstGeom prst="rect">
             <a:avLst/>
@@ -2701,7 +2701,7 @@
         <p:spPr>
           <a:xfrm>
             <a:off x="335520" y="1268280"/>
-            <a:ext cx="10739520" cy="5027040"/>
+            <a:ext cx="10739160" cy="5026680"/>
           </a:xfrm>
           <a:prstGeom prst="rect">
             <a:avLst/>
@@ -3183,7 +3183,7 @@
         <p:spPr>
           <a:xfrm>
             <a:off x="335520" y="764640"/>
-            <a:ext cx="10738080" cy="488880"/>
+            <a:ext cx="10737720" cy="488520"/>
           </a:xfrm>
           <a:prstGeom prst="rect">
             <a:avLst/>
@@ -3271,7 +3271,7 @@
         <p:spPr>
           <a:xfrm>
             <a:off x="335520" y="1268640"/>
-            <a:ext cx="10738080" cy="5025600"/>
+            <a:ext cx="10737720" cy="5025240"/>
           </a:xfrm>
           <a:prstGeom prst="rect">
             <a:avLst/>
@@ -3754,7 +3754,7 @@
         <p:spPr>
           <a:xfrm>
             <a:off x="335520" y="764640"/>
-            <a:ext cx="10739520" cy="490320"/>
+            <a:ext cx="10739160" cy="489960"/>
           </a:xfrm>
           <a:prstGeom prst="rect">
             <a:avLst/>
@@ -3812,7 +3812,7 @@
         <p:spPr>
           <a:xfrm>
             <a:off x="335520" y="1268280"/>
-            <a:ext cx="10739520" cy="5027040"/>
+            <a:ext cx="10739160" cy="5026680"/>
           </a:xfrm>
           <a:prstGeom prst="rect">
             <a:avLst/>
@@ -4230,7 +4230,7 @@
         <p:spPr>
           <a:xfrm>
             <a:off x="5040000" y="1080000"/>
-            <a:ext cx="1799640" cy="685800"/>
+            <a:ext cx="5760000" cy="2650680"/>
           </a:xfrm>
           <a:prstGeom prst="rect">
             <a:avLst/>
@@ -4264,8 +4264,9 @@
                 <a:effectLst/>
                 <a:uFillTx/>
                 <a:latin typeface="Arial"/>
-              </a:rPr>
-              <a:t>TODO</a:t>
+                <a:ea typeface="DejaVu Sans"/>
+              </a:rPr>
+              <a:t>TODO – please clarify somewhere how the MC work → self-evaluating</a:t>
             </a:r>
             <a:endParaRPr lang="en-GB" sz="4200" b="0" u="none" strike="noStrike">
               <a:solidFill>
@@ -4317,7 +4318,7 @@
         <p:spPr>
           <a:xfrm>
             <a:off x="335520" y="764640"/>
-            <a:ext cx="10739520" cy="490320"/>
+            <a:ext cx="10739160" cy="489960"/>
           </a:xfrm>
           <a:prstGeom prst="rect">
             <a:avLst/>
@@ -4375,7 +4376,7 @@
         <p:spPr>
           <a:xfrm>
             <a:off x="335520" y="1268640"/>
-            <a:ext cx="10739520" cy="5027040"/>
+            <a:ext cx="10739160" cy="5026680"/>
           </a:xfrm>
           <a:prstGeom prst="rect">
             <a:avLst/>
@@ -4611,7 +4612,7 @@
         <p:spPr>
           <a:xfrm>
             <a:off x="4655880" y="476640"/>
-            <a:ext cx="2425680" cy="351720"/>
+            <a:ext cx="2425320" cy="351360"/>
           </a:xfrm>
           <a:prstGeom prst="rect">
             <a:avLst/>
@@ -4658,7 +4659,7 @@
         <p:spPr>
           <a:xfrm>
             <a:off x="5040000" y="1080000"/>
-            <a:ext cx="1799640" cy="685800"/>
+            <a:ext cx="1799280" cy="685440"/>
           </a:xfrm>
           <a:prstGeom prst="rect">
             <a:avLst/>
@@ -4692,6 +4693,7 @@
                 <a:effectLst/>
                 <a:uFillTx/>
                 <a:latin typeface="Arial"/>
+                <a:ea typeface="DejaVu Sans"/>
               </a:rPr>
               <a:t>TODO</a:t>
             </a:r>
@@ -4745,7 +4747,7 @@
         <p:spPr>
           <a:xfrm>
             <a:off x="335520" y="768240"/>
-            <a:ext cx="10739520" cy="490320"/>
+            <a:ext cx="10739160" cy="489960"/>
           </a:xfrm>
           <a:prstGeom prst="rect">
             <a:avLst/>
@@ -4803,7 +4805,7 @@
         <p:spPr>
           <a:xfrm>
             <a:off x="388800" y="1488600"/>
-            <a:ext cx="10713240" cy="3505320"/>
+            <a:ext cx="10712880" cy="3505320"/>
           </a:xfrm>
           <a:prstGeom prst="rect">
             <a:avLst/>
@@ -5188,7 +5190,7 @@
         <p:spPr>
           <a:xfrm>
             <a:off x="5040000" y="1080000"/>
-            <a:ext cx="1799640" cy="685800"/>
+            <a:ext cx="1799280" cy="685440"/>
           </a:xfrm>
           <a:prstGeom prst="rect">
             <a:avLst/>
@@ -5222,6 +5224,7 @@
                 <a:effectLst/>
                 <a:uFillTx/>
                 <a:latin typeface="Arial"/>
+                <a:ea typeface="DejaVu Sans"/>
               </a:rPr>
               <a:t>TODO</a:t>
             </a:r>
@@ -5275,7 +5278,7 @@
         <p:spPr>
           <a:xfrm>
             <a:off x="335520" y="768240"/>
-            <a:ext cx="10739520" cy="490320"/>
+            <a:ext cx="10739160" cy="489960"/>
           </a:xfrm>
           <a:prstGeom prst="rect">
             <a:avLst/>
@@ -5333,7 +5336,7 @@
         <p:spPr>
           <a:xfrm>
             <a:off x="388800" y="1488600"/>
-            <a:ext cx="10713240" cy="3505320"/>
+            <a:ext cx="10712880" cy="3505320"/>
           </a:xfrm>
           <a:prstGeom prst="rect">
             <a:avLst/>
@@ -5742,7 +5745,7 @@
         <p:spPr>
           <a:xfrm>
             <a:off x="5040000" y="1080000"/>
-            <a:ext cx="1799640" cy="685800"/>
+            <a:ext cx="1799280" cy="685440"/>
           </a:xfrm>
           <a:prstGeom prst="rect">
             <a:avLst/>
@@ -5776,6 +5779,7 @@
                 <a:effectLst/>
                 <a:uFillTx/>
                 <a:latin typeface="Arial"/>
+                <a:ea typeface="DejaVu Sans"/>
               </a:rPr>
               <a:t>TODO</a:t>
             </a:r>
@@ -5829,7 +5833,7 @@
         <p:spPr>
           <a:xfrm>
             <a:off x="335520" y="764640"/>
-            <a:ext cx="10739520" cy="490320"/>
+            <a:ext cx="10739160" cy="489960"/>
           </a:xfrm>
           <a:prstGeom prst="rect">
             <a:avLst/>
@@ -5891,7 +5895,7 @@
         <p:spPr>
           <a:xfrm>
             <a:off x="3200400" y="685800"/>
-            <a:ext cx="5274360" cy="5999040"/>
+            <a:ext cx="5274000" cy="5998680"/>
           </a:xfrm>
           <a:prstGeom prst="rect">
             <a:avLst/>
@@ -5911,7 +5915,7 @@
         <p:spPr>
           <a:xfrm>
             <a:off x="5040000" y="1080000"/>
-            <a:ext cx="1799640" cy="685800"/>
+            <a:ext cx="1799280" cy="685440"/>
           </a:xfrm>
           <a:prstGeom prst="rect">
             <a:avLst/>
@@ -5945,6 +5949,7 @@
                 <a:effectLst/>
                 <a:uFillTx/>
                 <a:latin typeface="Arial"/>
+                <a:ea typeface="DejaVu Sans"/>
               </a:rPr>
               <a:t>TODO</a:t>
             </a:r>
@@ -5998,7 +6003,7 @@
         <p:spPr>
           <a:xfrm>
             <a:off x="335520" y="764640"/>
-            <a:ext cx="10739520" cy="490320"/>
+            <a:ext cx="10739160" cy="489960"/>
           </a:xfrm>
           <a:prstGeom prst="rect">
             <a:avLst/>
@@ -6060,7 +6065,7 @@
         <p:spPr>
           <a:xfrm>
             <a:off x="1600200" y="1600200"/>
-            <a:ext cx="8360640" cy="4629240"/>
+            <a:ext cx="8360280" cy="4628880"/>
           </a:xfrm>
           <a:prstGeom prst="rect">
             <a:avLst/>
@@ -6080,7 +6085,7 @@
         <p:spPr>
           <a:xfrm>
             <a:off x="5040000" y="1080000"/>
-            <a:ext cx="1799640" cy="685800"/>
+            <a:ext cx="1799280" cy="685440"/>
           </a:xfrm>
           <a:prstGeom prst="rect">
             <a:avLst/>
@@ -6114,6 +6119,7 @@
                 <a:effectLst/>
                 <a:uFillTx/>
                 <a:latin typeface="Arial"/>
+                <a:ea typeface="DejaVu Sans"/>
               </a:rPr>
               <a:t>TODO</a:t>
             </a:r>
@@ -6167,7 +6173,7 @@
         <p:spPr>
           <a:xfrm>
             <a:off x="335520" y="764640"/>
-            <a:ext cx="10739520" cy="490320"/>
+            <a:ext cx="10739160" cy="489960"/>
           </a:xfrm>
           <a:prstGeom prst="rect">
             <a:avLst/>
@@ -6225,7 +6231,7 @@
         <p:spPr>
           <a:xfrm>
             <a:off x="335520" y="1268640"/>
-            <a:ext cx="10739520" cy="5027040"/>
+            <a:ext cx="10739160" cy="5026680"/>
           </a:xfrm>
           <a:prstGeom prst="rect">
             <a:avLst/>
@@ -6496,7 +6502,7 @@
         <p:spPr>
           <a:xfrm>
             <a:off x="335520" y="764640"/>
-            <a:ext cx="10737720" cy="488520"/>
+            <a:ext cx="10737360" cy="488160"/>
           </a:xfrm>
           <a:prstGeom prst="rect">
             <a:avLst/>
@@ -6554,7 +6560,7 @@
         <p:spPr>
           <a:xfrm>
             <a:off x="335520" y="1268280"/>
-            <a:ext cx="10737720" cy="5025240"/>
+            <a:ext cx="10737360" cy="5024880"/>
           </a:xfrm>
           <a:prstGeom prst="rect">
             <a:avLst/>
@@ -6660,7 +6666,7 @@
         <p:spPr>
           <a:xfrm>
             <a:off x="6285600" y="2132640"/>
-            <a:ext cx="507240" cy="487080"/>
+            <a:ext cx="506880" cy="486720"/>
           </a:xfrm>
           <a:prstGeom prst="star5">
             <a:avLst>
@@ -6723,7 +6729,7 @@
         <p:spPr>
           <a:xfrm>
             <a:off x="4089960" y="2247480"/>
-            <a:ext cx="2275560" cy="363960"/>
+            <a:ext cx="2275200" cy="363960"/>
           </a:xfrm>
           <a:prstGeom prst="rect">
             <a:avLst/>
@@ -6835,7 +6841,7 @@
         <p:spPr>
           <a:xfrm>
             <a:off x="335520" y="764640"/>
-            <a:ext cx="10737360" cy="488160"/>
+            <a:ext cx="10737000" cy="487800"/>
           </a:xfrm>
           <a:prstGeom prst="rect">
             <a:avLst/>
@@ -6893,7 +6899,7 @@
         <p:spPr>
           <a:xfrm>
             <a:off x="335520" y="1268640"/>
-            <a:ext cx="10737360" cy="5024880"/>
+            <a:ext cx="10737000" cy="5024520"/>
           </a:xfrm>
           <a:prstGeom prst="rect">
             <a:avLst/>
@@ -6960,7 +6966,7 @@
         <p:spPr>
           <a:xfrm>
             <a:off x="336600" y="3429000"/>
-            <a:ext cx="10855080" cy="2046960"/>
+            <a:ext cx="10854720" cy="2046600"/>
           </a:xfrm>
           <a:prstGeom prst="rect">
             <a:avLst/>
@@ -7173,7 +7179,7 @@
         <p:spPr>
           <a:xfrm>
             <a:off x="335520" y="764640"/>
-            <a:ext cx="10737720" cy="488520"/>
+            <a:ext cx="10737360" cy="488160"/>
           </a:xfrm>
           <a:prstGeom prst="rect">
             <a:avLst/>
@@ -7231,7 +7237,7 @@
         <p:spPr>
           <a:xfrm>
             <a:off x="335520" y="1268640"/>
-            <a:ext cx="10737720" cy="5025240"/>
+            <a:ext cx="10737360" cy="5024880"/>
           </a:xfrm>
           <a:prstGeom prst="rect">
             <a:avLst/>
@@ -7790,7 +7796,7 @@
         <p:spPr>
           <a:xfrm>
             <a:off x="335520" y="764640"/>
-            <a:ext cx="10739520" cy="490320"/>
+            <a:ext cx="10739160" cy="489960"/>
           </a:xfrm>
           <a:prstGeom prst="rect">
             <a:avLst/>
@@ -7848,7 +7854,7 @@
         <p:spPr>
           <a:xfrm>
             <a:off x="335520" y="1268640"/>
-            <a:ext cx="10739520" cy="5027040"/>
+            <a:ext cx="10739160" cy="5026680"/>
           </a:xfrm>
           <a:prstGeom prst="rect">
             <a:avLst/>
@@ -8167,7 +8173,7 @@
         <p:spPr>
           <a:xfrm>
             <a:off x="335520" y="1268640"/>
-            <a:ext cx="10739520" cy="5027040"/>
+            <a:ext cx="10739160" cy="5026680"/>
           </a:xfrm>
           <a:prstGeom prst="rect">
             <a:avLst/>
@@ -8231,7 +8237,7 @@
         <p:spPr>
           <a:xfrm>
             <a:off x="335520" y="764640"/>
-            <a:ext cx="10739520" cy="490320"/>
+            <a:ext cx="10739160" cy="489960"/>
           </a:xfrm>
           <a:prstGeom prst="rect">
             <a:avLst/>
@@ -8308,7 +8314,7 @@
         <p:spPr>
           <a:xfrm>
             <a:off x="335520" y="764640"/>
-            <a:ext cx="10739520" cy="490320"/>
+            <a:ext cx="10739160" cy="489960"/>
           </a:xfrm>
           <a:prstGeom prst="rect">
             <a:avLst/>
@@ -8370,7 +8376,7 @@
         <p:spPr>
           <a:xfrm>
             <a:off x="4923720" y="1257120"/>
-            <a:ext cx="1462320" cy="2163600"/>
+            <a:ext cx="1461960" cy="2163240"/>
           </a:xfrm>
           <a:prstGeom prst="rect">
             <a:avLst/>
@@ -8394,7 +8400,7 @@
         <p:spPr>
           <a:xfrm>
             <a:off x="2207880" y="4110120"/>
-            <a:ext cx="1776240" cy="1768320"/>
+            <a:ext cx="1775880" cy="1767960"/>
           </a:xfrm>
           <a:prstGeom prst="rect">
             <a:avLst/>
@@ -8414,7 +8420,7 @@
         <p:spPr>
           <a:xfrm>
             <a:off x="3859200" y="3373200"/>
-            <a:ext cx="3627000" cy="668520"/>
+            <a:ext cx="3626640" cy="668160"/>
           </a:xfrm>
           <a:prstGeom prst="rect">
             <a:avLst/>
@@ -8475,7 +8481,7 @@
         <p:spPr>
           <a:xfrm>
             <a:off x="1312200" y="5920200"/>
-            <a:ext cx="3627000" cy="668520"/>
+            <a:ext cx="3626640" cy="668160"/>
           </a:xfrm>
           <a:prstGeom prst="rect">
             <a:avLst/>
@@ -8542,7 +8548,7 @@
         <p:spPr>
           <a:xfrm>
             <a:off x="1312200" y="5807160"/>
-            <a:ext cx="3627000" cy="668520"/>
+            <a:ext cx="3626640" cy="668160"/>
           </a:xfrm>
           <a:prstGeom prst="rect">
             <a:avLst/>
@@ -8603,7 +8609,7 @@
         <p:spPr>
           <a:xfrm>
             <a:off x="4860000" y="5920200"/>
-            <a:ext cx="3627000" cy="668520"/>
+            <a:ext cx="3626640" cy="668160"/>
           </a:xfrm>
           <a:prstGeom prst="rect">
             <a:avLst/>
@@ -8650,7 +8656,7 @@
         <p:spPr>
           <a:xfrm>
             <a:off x="6300000" y="5807160"/>
-            <a:ext cx="3627000" cy="668520"/>
+            <a:ext cx="3626640" cy="668160"/>
           </a:xfrm>
           <a:prstGeom prst="rect">
             <a:avLst/>
@@ -8716,7 +8722,7 @@
         <p:spPr>
           <a:xfrm>
             <a:off x="7203960" y="4143960"/>
-            <a:ext cx="1795680" cy="1795680"/>
+            <a:ext cx="1795320" cy="1795320"/>
           </a:xfrm>
           <a:prstGeom prst="rect">
             <a:avLst/>
@@ -8766,7 +8772,7 @@
         <p:spPr>
           <a:xfrm>
             <a:off x="542880" y="721800"/>
-            <a:ext cx="10343880" cy="484560"/>
+            <a:ext cx="10343520" cy="484200"/>
           </a:xfrm>
           <a:prstGeom prst="rect">
             <a:avLst/>
@@ -8824,7 +8830,7 @@
         <p:spPr>
           <a:xfrm>
             <a:off x="451800" y="1709280"/>
-            <a:ext cx="8211240" cy="4339440"/>
+            <a:ext cx="8210880" cy="4339080"/>
           </a:xfrm>
           <a:prstGeom prst="rect">
             <a:avLst/>
@@ -8871,7 +8877,7 @@
         <p:spPr>
           <a:xfrm>
             <a:off x="609480" y="1769400"/>
-            <a:ext cx="10574280" cy="4842360"/>
+            <a:ext cx="10573920" cy="4842000"/>
           </a:xfrm>
           <a:prstGeom prst="rect">
             <a:avLst/>
@@ -9352,7 +9358,7 @@
         <p:spPr>
           <a:xfrm>
             <a:off x="542880" y="721800"/>
-            <a:ext cx="10343880" cy="484560"/>
+            <a:ext cx="10343520" cy="484200"/>
           </a:xfrm>
           <a:prstGeom prst="rect">
             <a:avLst/>
@@ -9410,7 +9416,7 @@
         <p:spPr>
           <a:xfrm>
             <a:off x="451800" y="1709280"/>
-            <a:ext cx="8211240" cy="4339440"/>
+            <a:ext cx="8210880" cy="4339080"/>
           </a:xfrm>
           <a:prstGeom prst="rect">
             <a:avLst/>
@@ -9457,7 +9463,7 @@
         <p:spPr>
           <a:xfrm>
             <a:off x="609480" y="1769400"/>
-            <a:ext cx="10574280" cy="4842360"/>
+            <a:ext cx="10573920" cy="4842000"/>
           </a:xfrm>
           <a:prstGeom prst="rect">
             <a:avLst/>
@@ -9738,7 +9744,7 @@
         <p:spPr>
           <a:xfrm>
             <a:off x="542880" y="721800"/>
-            <a:ext cx="10343880" cy="484560"/>
+            <a:ext cx="10343520" cy="484200"/>
           </a:xfrm>
           <a:prstGeom prst="rect">
             <a:avLst/>
@@ -9796,7 +9802,7 @@
         <p:spPr>
           <a:xfrm>
             <a:off x="451800" y="1709280"/>
-            <a:ext cx="8211240" cy="4339440"/>
+            <a:ext cx="8210880" cy="4339080"/>
           </a:xfrm>
           <a:prstGeom prst="rect">
             <a:avLst/>
@@ -9843,7 +9849,7 @@
         <p:spPr>
           <a:xfrm>
             <a:off x="609480" y="1769400"/>
-            <a:ext cx="10574280" cy="4842360"/>
+            <a:ext cx="10573920" cy="4842000"/>
           </a:xfrm>
           <a:prstGeom prst="rect">
             <a:avLst/>
@@ -10124,7 +10130,7 @@
         <p:spPr>
           <a:xfrm>
             <a:off x="335520" y="764640"/>
-            <a:ext cx="10739520" cy="490320"/>
+            <a:ext cx="10739160" cy="489960"/>
           </a:xfrm>
           <a:prstGeom prst="rect">
             <a:avLst/>
@@ -10197,7 +10203,7 @@
         <p:spPr>
           <a:xfrm>
             <a:off x="335520" y="2408400"/>
-            <a:ext cx="10739520" cy="3887280"/>
+            <a:ext cx="10739160" cy="3886920"/>
           </a:xfrm>
           <a:prstGeom prst="rect">
             <a:avLst/>
@@ -10438,7 +10444,7 @@
         <p:spPr>
           <a:xfrm>
             <a:off x="335520" y="764640"/>
-            <a:ext cx="10739520" cy="490320"/>
+            <a:ext cx="10739160" cy="489960"/>
           </a:xfrm>
           <a:prstGeom prst="rect">
             <a:avLst/>
@@ -10496,7 +10502,7 @@
         <p:spPr>
           <a:xfrm>
             <a:off x="335520" y="1268640"/>
-            <a:ext cx="10739520" cy="5027040"/>
+            <a:ext cx="10739160" cy="5026680"/>
           </a:xfrm>
           <a:prstGeom prst="rect">
             <a:avLst/>
@@ -10685,19 +10691,7 @@
                 <a:latin typeface="DejaVu Sans"/>
                 <a:ea typeface="DejaVu Sans"/>
               </a:rPr>
-              <a:t>01.06.2026 → </a:t>
-            </a:r>
-            <a:r>
-              <a:rPr lang="en-US" sz="1800" b="0" u="none" strike="noStrike">
-                <a:solidFill>
-                  <a:srgbClr val="000000"/>
-                </a:solidFill>
-                <a:effectLst/>
-                <a:uFillTx/>
-                <a:latin typeface="DejaVu Sans"/>
-                <a:ea typeface="DejaVu Sans"/>
-              </a:rPr>
-              <a:t>Lifecycle Assessment – LCA 2 (L04)</a:t>
+              <a:t>01.06.2026 → Lifecycle Assessment – LCA 2 (L04)</a:t>
             </a:r>
             <a:endParaRPr lang="en-GB" sz="1800" b="0" u="none" strike="noStrike">
               <a:solidFill>
@@ -10877,19 +10871,7 @@
                 <a:latin typeface="DejaVu Sans"/>
                 <a:ea typeface="DejaVu Sans"/>
               </a:rPr>
-              <a:t>06.07.2026 → </a:t>
-            </a:r>
-            <a:r>
-              <a:rPr lang="en-US" sz="1800" b="0" u="none" strike="noStrike">
-                <a:solidFill>
-                  <a:srgbClr val="000000"/>
-                </a:solidFill>
-                <a:effectLst/>
-                <a:uFillTx/>
-                <a:latin typeface="DejaVu Sans"/>
-                <a:ea typeface="DejaVu Sans"/>
-              </a:rPr>
-              <a:t>IoT Applications II – Biodiversity Monitoring (L10)</a:t>
+              <a:t>06.07.2026 → IoT Applications II – Biodiversity Monitoring (L10)</a:t>
             </a:r>
             <a:endParaRPr lang="en-GB" sz="1800" b="0" u="none" strike="noStrike">
               <a:solidFill>
@@ -11031,7 +11013,7 @@
         <p:spPr>
           <a:xfrm>
             <a:off x="335520" y="764640"/>
-            <a:ext cx="10739520" cy="490320"/>
+            <a:ext cx="10739160" cy="489960"/>
           </a:xfrm>
           <a:prstGeom prst="rect">
             <a:avLst/>
@@ -11089,7 +11071,7 @@
         <p:spPr>
           <a:xfrm>
             <a:off x="335520" y="1268640"/>
-            <a:ext cx="10739520" cy="5027040"/>
+            <a:ext cx="10739160" cy="5026680"/>
           </a:xfrm>
           <a:prstGeom prst="rect">
             <a:avLst/>
@@ -11780,7 +11762,7 @@
         <p:spPr>
           <a:xfrm>
             <a:off x="5040000" y="1080000"/>
-            <a:ext cx="1799640" cy="685800"/>
+            <a:ext cx="1799280" cy="685440"/>
           </a:xfrm>
           <a:prstGeom prst="rect">
             <a:avLst/>
@@ -11814,6 +11796,7 @@
                 <a:effectLst/>
                 <a:uFillTx/>
                 <a:latin typeface="Arial"/>
+                <a:ea typeface="DejaVu Sans"/>
               </a:rPr>
               <a:t>TODO</a:t>
             </a:r>

--- a/Emerging-Technologies-for-the-Circular-Economy/ETCE-L00-Organization.pptx
+++ b/Emerging-Technologies-for-the-Circular-Economy/ETCE-L00-Organization.pptx
@@ -398,7 +398,7 @@
             <a:pPr indent="0" algn="r">
               <a:buNone/>
             </a:pPr>
-            <a:fld id="{1394D578-B9EA-40DB-B90B-F69503C79590}" type="slidenum">
+            <a:fld id="{0C4E021F-0DC6-41A5-9DDC-447EAB13DB95}" type="slidenum">
               <a:rPr lang="en-US" sz="1400" b="0" u="none" strike="noStrike">
                 <a:solidFill>
                   <a:srgbClr val="000000"/>
@@ -456,7 +456,7 @@
         <p:spPr>
           <a:xfrm>
             <a:off x="533520" y="763560"/>
-            <a:ext cx="6686280" cy="3754440"/>
+            <a:ext cx="6685920" cy="3754080"/>
           </a:xfrm>
           <a:prstGeom prst="rect">
             <a:avLst/>
@@ -479,7 +479,7 @@
         <p:spPr>
           <a:xfrm>
             <a:off x="777240" y="4777560"/>
-            <a:ext cx="6199920" cy="4508280"/>
+            <a:ext cx="6199560" cy="4507920"/>
           </a:xfrm>
           <a:prstGeom prst="rect">
             <a:avLst/>
@@ -517,7 +517,7 @@
         <p:spPr>
           <a:xfrm>
             <a:off x="4399200" y="9555480"/>
-            <a:ext cx="3355200" cy="484920"/>
+            <a:ext cx="3354840" cy="484560"/>
           </a:xfrm>
           <a:prstGeom prst="rect">
             <a:avLst/>
@@ -543,7 +543,7 @@
                 <a:spcPct val="100000"/>
               </a:lnSpc>
             </a:pPr>
-            <a:fld id="{7CF87859-8EC1-4412-86B9-1AD288D2FEEC}" type="slidenum">
+            <a:fld id="{C9A34377-79F7-43B6-B771-A25990933F4F}" type="slidenum">
               <a:rPr lang="de-DE" sz="1800" b="0" u="none" strike="noStrike">
                 <a:solidFill>
                   <a:srgbClr val="000000"/>
@@ -601,7 +601,7 @@
         <p:spPr>
           <a:xfrm>
             <a:off x="533520" y="763560"/>
-            <a:ext cx="6686280" cy="3754440"/>
+            <a:ext cx="6685920" cy="3754080"/>
           </a:xfrm>
           <a:prstGeom prst="rect">
             <a:avLst/>
@@ -624,7 +624,7 @@
         <p:spPr>
           <a:xfrm>
             <a:off x="777240" y="4777560"/>
-            <a:ext cx="6199920" cy="4508280"/>
+            <a:ext cx="6199560" cy="4507920"/>
           </a:xfrm>
           <a:prstGeom prst="rect">
             <a:avLst/>
@@ -662,7 +662,7 @@
         <p:spPr>
           <a:xfrm>
             <a:off x="4399200" y="9555480"/>
-            <a:ext cx="3355200" cy="484920"/>
+            <a:ext cx="3354840" cy="484560"/>
           </a:xfrm>
           <a:prstGeom prst="rect">
             <a:avLst/>
@@ -688,7 +688,7 @@
                 <a:spcPct val="100000"/>
               </a:lnSpc>
             </a:pPr>
-            <a:fld id="{A3E56F4A-F811-47D2-BDF4-06074B29EF60}" type="slidenum">
+            <a:fld id="{24E2D19B-3E56-4A53-BEF3-D92E263EAD02}" type="slidenum">
               <a:rPr lang="de-DE" sz="1800" b="0" u="none" strike="noStrike">
                 <a:solidFill>
                   <a:srgbClr val="000000"/>
@@ -746,7 +746,7 @@
         <p:spPr>
           <a:xfrm>
             <a:off x="533520" y="763560"/>
-            <a:ext cx="6686280" cy="3754440"/>
+            <a:ext cx="6685920" cy="3754080"/>
           </a:xfrm>
           <a:prstGeom prst="rect">
             <a:avLst/>
@@ -769,7 +769,7 @@
         <p:spPr>
           <a:xfrm>
             <a:off x="777240" y="4777560"/>
-            <a:ext cx="6199920" cy="4508280"/>
+            <a:ext cx="6199560" cy="4507920"/>
           </a:xfrm>
           <a:prstGeom prst="rect">
             <a:avLst/>
@@ -807,7 +807,7 @@
         <p:spPr>
           <a:xfrm>
             <a:off x="4399200" y="9555480"/>
-            <a:ext cx="3355200" cy="484920"/>
+            <a:ext cx="3354840" cy="484560"/>
           </a:xfrm>
           <a:prstGeom prst="rect">
             <a:avLst/>
@@ -833,7 +833,7 @@
                 <a:spcPct val="100000"/>
               </a:lnSpc>
             </a:pPr>
-            <a:fld id="{8DDDEFD7-26A8-4A75-98D8-34E2226B1DB5}" type="slidenum">
+            <a:fld id="{56801E0E-BEC0-406A-8658-DE8ADE853C03}" type="slidenum">
               <a:rPr lang="de-DE" sz="1800" b="0" u="none" strike="noStrike">
                 <a:solidFill>
                   <a:srgbClr val="000000"/>
@@ -843,7 +843,7 @@
                 <a:latin typeface="+mn-lt"/>
                 <a:ea typeface="+mn-ea"/>
               </a:rPr>
-              <a:t>&lt;number&gt;</a:t>
+              <a:t>6</a:t>
             </a:fld>
             <a:endParaRPr lang="en-US" sz="1800" b="0" u="none" strike="noStrike">
               <a:solidFill>
@@ -938,7 +938,7 @@
         <p:spPr>
           <a:xfrm>
             <a:off x="11444760" y="0"/>
-            <a:ext cx="734760" cy="6843600"/>
+            <a:ext cx="734400" cy="6843240"/>
           </a:xfrm>
           <a:prstGeom prst="rect">
             <a:avLst/>
@@ -983,7 +983,7 @@
         <p:spPr>
           <a:xfrm>
             <a:off x="11438640" y="6453360"/>
-            <a:ext cx="751680" cy="363960"/>
+            <a:ext cx="751320" cy="363960"/>
           </a:xfrm>
           <a:prstGeom prst="rect">
             <a:avLst/>
@@ -1009,7 +1009,7 @@
                 <a:spcPct val="100000"/>
               </a:lnSpc>
             </a:pPr>
-            <a:fld id="{44BC923B-347E-4ADC-A1E6-DB686A3D3CF2}" type="slidenum">
+            <a:fld id="{2116B04D-B101-4370-8F3A-853A6966F364}" type="slidenum">
               <a:rPr lang="en-US" sz="1800" b="0" u="none" strike="noStrike">
                 <a:solidFill>
                   <a:srgbClr val="808080"/>
@@ -1041,7 +1041,7 @@
         <p:spPr>
           <a:xfrm>
             <a:off x="912240" y="1268280"/>
-            <a:ext cx="9201600" cy="354960"/>
+            <a:ext cx="9201240" cy="354600"/>
           </a:xfrm>
           <a:prstGeom prst="rect">
             <a:avLst/>
@@ -1086,7 +1086,7 @@
         <p:spPr>
           <a:xfrm>
             <a:off x="0" y="0"/>
-            <a:ext cx="3045600" cy="555480"/>
+            <a:ext cx="3045240" cy="555120"/>
           </a:xfrm>
           <a:prstGeom prst="rect">
             <a:avLst/>
@@ -1110,7 +1110,7 @@
         <p:spPr>
           <a:xfrm>
             <a:off x="7430400" y="134640"/>
-            <a:ext cx="3691440" cy="507600"/>
+            <a:ext cx="3691080" cy="507240"/>
           </a:xfrm>
           <a:prstGeom prst="rect">
             <a:avLst/>
@@ -1130,7 +1130,7 @@
         <p:spPr>
           <a:xfrm>
             <a:off x="912240" y="1268280"/>
-            <a:ext cx="9201600" cy="354960"/>
+            <a:ext cx="9201240" cy="354600"/>
           </a:xfrm>
           <a:prstGeom prst="rect">
             <a:avLst/>
@@ -1171,7 +1171,7 @@
         <p:spPr>
           <a:xfrm>
             <a:off x="11444760" y="0"/>
-            <a:ext cx="734760" cy="6843600"/>
+            <a:ext cx="734400" cy="6843240"/>
           </a:xfrm>
           <a:prstGeom prst="rect">
             <a:avLst/>
@@ -1216,7 +1216,7 @@
         <p:spPr>
           <a:xfrm>
             <a:off x="0" y="6642720"/>
-            <a:ext cx="12177720" cy="211320"/>
+            <a:ext cx="12177360" cy="211320"/>
           </a:xfrm>
           <a:prstGeom prst="rect">
             <a:avLst/>
@@ -1295,6 +1295,9 @@
           <a:lstStyle>
             <a:lvl1pPr indent="0" algn="l">
               <a:buNone/>
+              <a:tabLst>
+                <a:tab pos="0" algn="l"/>
+              </a:tabLst>
               <a:defRPr lang="en-US" sz="4400" b="0" u="none" strike="noStrike">
                 <a:solidFill>
                   <a:srgbClr val="000000"/>
@@ -1308,6 +1311,9 @@
           <a:p>
             <a:pPr indent="0" algn="l">
               <a:buNone/>
+              <a:tabLst>
+                <a:tab pos="0" algn="l"/>
+              </a:tabLst>
             </a:pPr>
             <a:r>
               <a:rPr lang="en-US" sz="4400" b="0" u="none" strike="noStrike">
@@ -1717,7 +1723,7 @@
         <p:spPr>
           <a:xfrm>
             <a:off x="11444760" y="0"/>
-            <a:ext cx="734760" cy="6843600"/>
+            <a:ext cx="734400" cy="6843240"/>
           </a:xfrm>
           <a:prstGeom prst="rect">
             <a:avLst/>
@@ -1762,7 +1768,7 @@
         <p:spPr>
           <a:xfrm>
             <a:off x="11438640" y="6453360"/>
-            <a:ext cx="751680" cy="363960"/>
+            <a:ext cx="751320" cy="363960"/>
           </a:xfrm>
           <a:prstGeom prst="rect">
             <a:avLst/>
@@ -1788,7 +1794,7 @@
                 <a:spcPct val="100000"/>
               </a:lnSpc>
             </a:pPr>
-            <a:fld id="{DC8154F4-2805-43C5-A840-742C6C171F80}" type="slidenum">
+            <a:fld id="{2DB44041-47ED-4434-BAAA-AB31F9FF40D3}" type="slidenum">
               <a:rPr lang="en-US" sz="1800" b="0" u="none" strike="noStrike">
                 <a:solidFill>
                   <a:srgbClr val="808080"/>
@@ -1820,7 +1826,7 @@
         <p:spPr>
           <a:xfrm>
             <a:off x="912240" y="1268280"/>
-            <a:ext cx="9201600" cy="354960"/>
+            <a:ext cx="9201240" cy="354600"/>
           </a:xfrm>
           <a:prstGeom prst="rect">
             <a:avLst/>
@@ -1865,7 +1871,7 @@
         <p:spPr>
           <a:xfrm>
             <a:off x="0" y="0"/>
-            <a:ext cx="3045600" cy="555480"/>
+            <a:ext cx="3045240" cy="555120"/>
           </a:xfrm>
           <a:prstGeom prst="rect">
             <a:avLst/>
@@ -1889,7 +1895,7 @@
         <p:spPr>
           <a:xfrm>
             <a:off x="7430400" y="134640"/>
-            <a:ext cx="3691440" cy="507600"/>
+            <a:ext cx="3691080" cy="507240"/>
           </a:xfrm>
           <a:prstGeom prst="rect">
             <a:avLst/>
@@ -1909,7 +1915,7 @@
         <p:spPr>
           <a:xfrm>
             <a:off x="11444760" y="0"/>
-            <a:ext cx="734760" cy="6843600"/>
+            <a:ext cx="734400" cy="6843240"/>
           </a:xfrm>
           <a:prstGeom prst="rect">
             <a:avLst/>
@@ -1954,7 +1960,7 @@
         <p:spPr>
           <a:xfrm>
             <a:off x="11438640" y="6453360"/>
-            <a:ext cx="751680" cy="363960"/>
+            <a:ext cx="751320" cy="363960"/>
           </a:xfrm>
           <a:prstGeom prst="rect">
             <a:avLst/>
@@ -1980,7 +1986,7 @@
                 <a:spcPct val="100000"/>
               </a:lnSpc>
             </a:pPr>
-            <a:fld id="{142CA675-D764-447D-AD69-60313855A84E}" type="slidenum">
+            <a:fld id="{D371301A-A820-4D81-9DBA-640B3FACFD6B}" type="slidenum">
               <a:rPr lang="en-US" sz="1800" b="0" u="none" strike="noStrike">
                 <a:solidFill>
                   <a:srgbClr val="808080"/>
@@ -2012,7 +2018,7 @@
         <p:spPr>
           <a:xfrm>
             <a:off x="0" y="6642720"/>
-            <a:ext cx="12177720" cy="211320"/>
+            <a:ext cx="12177360" cy="211320"/>
           </a:xfrm>
           <a:prstGeom prst="rect">
             <a:avLst/>
@@ -2091,6 +2097,9 @@
           <a:lstStyle>
             <a:lvl1pPr indent="0" algn="l">
               <a:buNone/>
+              <a:tabLst>
+                <a:tab pos="0" algn="l"/>
+              </a:tabLst>
               <a:defRPr lang="en-US" sz="4400" b="0" u="none" strike="noStrike">
                 <a:solidFill>
                   <a:srgbClr val="000000"/>
@@ -2104,6 +2113,9 @@
           <a:p>
             <a:pPr indent="0" algn="l">
               <a:buNone/>
+              <a:tabLst>
+                <a:tab pos="0" algn="l"/>
+              </a:tabLst>
             </a:pPr>
             <a:r>
               <a:rPr lang="en-US" sz="4400" b="0" u="none" strike="noStrike">
@@ -2506,7 +2518,7 @@
         <p:spPr>
           <a:xfrm>
             <a:off x="527400" y="1412640"/>
-            <a:ext cx="10354680" cy="1141200"/>
+            <a:ext cx="10354320" cy="1140840"/>
           </a:xfrm>
           <a:prstGeom prst="rect">
             <a:avLst/>
@@ -2542,103 +2554,7 @@
                 <a:latin typeface="DejaVu Sans"/>
                 <a:ea typeface="DejaVu Sans"/>
               </a:rPr>
-              <a:t>Emerg</a:t>
-            </a:r>
-            <a:r>
-              <a:rPr lang="en-US" sz="3200" b="1" u="none" strike="noStrike">
-                <a:solidFill>
-                  <a:srgbClr val="008C4F"/>
-                </a:solidFill>
-                <a:effectLst/>
-                <a:uFillTx/>
-                <a:latin typeface="DejaVu Sans"/>
-                <a:ea typeface="DejaVu Sans"/>
-              </a:rPr>
-              <a:t>ing </a:t>
-            </a:r>
-            <a:r>
-              <a:rPr lang="en-US" sz="3200" b="1" u="none" strike="noStrike">
-                <a:solidFill>
-                  <a:srgbClr val="008C4F"/>
-                </a:solidFill>
-                <a:effectLst/>
-                <a:uFillTx/>
-                <a:latin typeface="DejaVu Sans"/>
-                <a:ea typeface="DejaVu Sans"/>
-              </a:rPr>
-              <a:t>Techno</a:t>
-            </a:r>
-            <a:r>
-              <a:rPr lang="en-US" sz="3200" b="1" u="none" strike="noStrike">
-                <a:solidFill>
-                  <a:srgbClr val="008C4F"/>
-                </a:solidFill>
-                <a:effectLst/>
-                <a:uFillTx/>
-                <a:latin typeface="DejaVu Sans"/>
-                <a:ea typeface="DejaVu Sans"/>
-              </a:rPr>
-              <a:t>logies </a:t>
-            </a:r>
-            <a:r>
-              <a:rPr lang="en-US" sz="3200" b="1" u="none" strike="noStrike">
-                <a:solidFill>
-                  <a:srgbClr val="008C4F"/>
-                </a:solidFill>
-                <a:effectLst/>
-                <a:uFillTx/>
-                <a:latin typeface="DejaVu Sans"/>
-                <a:ea typeface="DejaVu Sans"/>
-              </a:rPr>
-              <a:t>for the </a:t>
-            </a:r>
-            <a:r>
-              <a:rPr lang="en-US" sz="3200" b="1" u="none" strike="noStrike">
-                <a:solidFill>
-                  <a:srgbClr val="008C4F"/>
-                </a:solidFill>
-                <a:effectLst/>
-                <a:uFillTx/>
-                <a:latin typeface="DejaVu Sans"/>
-                <a:ea typeface="DejaVu Sans"/>
-              </a:rPr>
-              <a:t>Circula</a:t>
-            </a:r>
-            <a:r>
-              <a:rPr lang="en-US" sz="3200" b="1" u="none" strike="noStrike">
-                <a:solidFill>
-                  <a:srgbClr val="008C4F"/>
-                </a:solidFill>
-                <a:effectLst/>
-                <a:uFillTx/>
-                <a:latin typeface="DejaVu Sans"/>
-                <a:ea typeface="DejaVu Sans"/>
-              </a:rPr>
-              <a:t>r </a:t>
-            </a:r>
-            <a:r>
-              <a:rPr lang="en-US" sz="3200" b="1" u="none" strike="noStrike">
-                <a:solidFill>
-                  <a:srgbClr val="008C4F"/>
-                </a:solidFill>
-                <a:effectLst/>
-                <a:uFillTx/>
-                <a:latin typeface="DejaVu Sans"/>
-                <a:ea typeface="DejaVu Sans"/>
-              </a:rPr>
-              <a:t>Econo</a:t>
-            </a:r>
-            <a:r>
-              <a:rPr lang="en-US" sz="3200" b="1" u="none" strike="noStrike">
-                <a:solidFill>
-                  <a:srgbClr val="008C4F"/>
-                </a:solidFill>
-                <a:effectLst/>
-                <a:uFillTx/>
-                <a:latin typeface="DejaVu Sans"/>
-                <a:ea typeface="DejaVu Sans"/>
-              </a:rPr>
-              <a:t>my</a:t>
+              <a:t>Emerging Technologies for the Circular Economy</a:t>
             </a:r>
             <a:endParaRPr lang="en-US" sz="3200" b="0" u="none" strike="noStrike">
               <a:solidFill>
@@ -2660,7 +2576,7 @@
         <p:spPr>
           <a:xfrm>
             <a:off x="527400" y="2852640"/>
-            <a:ext cx="10354680" cy="2361960"/>
+            <a:ext cx="10354320" cy="2361600"/>
           </a:xfrm>
           <a:prstGeom prst="rect">
             <a:avLst/>
@@ -2916,7 +2832,7 @@
         <p:spPr>
           <a:xfrm>
             <a:off x="335520" y="764640"/>
-            <a:ext cx="10738800" cy="489600"/>
+            <a:ext cx="10738440" cy="489240"/>
           </a:xfrm>
           <a:prstGeom prst="rect">
             <a:avLst/>
@@ -2974,7 +2890,7 @@
         <p:spPr>
           <a:xfrm>
             <a:off x="335520" y="1268280"/>
-            <a:ext cx="10738800" cy="5026320"/>
+            <a:ext cx="10738440" cy="5025960"/>
           </a:xfrm>
           <a:prstGeom prst="rect">
             <a:avLst/>
@@ -3456,7 +3372,7 @@
         <p:spPr>
           <a:xfrm>
             <a:off x="335520" y="764640"/>
-            <a:ext cx="10737360" cy="488160"/>
+            <a:ext cx="10737000" cy="487800"/>
           </a:xfrm>
           <a:prstGeom prst="rect">
             <a:avLst/>
@@ -3544,7 +3460,7 @@
         <p:spPr>
           <a:xfrm>
             <a:off x="335520" y="1268640"/>
-            <a:ext cx="10737360" cy="5024880"/>
+            <a:ext cx="10737000" cy="5024520"/>
           </a:xfrm>
           <a:prstGeom prst="rect">
             <a:avLst/>
@@ -4027,7 +3943,7 @@
         <p:spPr>
           <a:xfrm>
             <a:off x="335520" y="764640"/>
-            <a:ext cx="10738800" cy="489600"/>
+            <a:ext cx="10738440" cy="489240"/>
           </a:xfrm>
           <a:prstGeom prst="rect">
             <a:avLst/>
@@ -4085,7 +4001,7 @@
         <p:spPr>
           <a:xfrm>
             <a:off x="335520" y="1268280"/>
-            <a:ext cx="10738800" cy="5026320"/>
+            <a:ext cx="10738440" cy="5025960"/>
           </a:xfrm>
           <a:prstGeom prst="rect">
             <a:avLst/>
@@ -4337,19 +4253,7 @@
                 <a:latin typeface="DejaVu Sans"/>
                 <a:ea typeface="DejaVu Sans"/>
               </a:rPr>
-              <a:t>Submission deadline (coding exercises) is always Monday at 1:59pm (right before the </a:t>
-            </a:r>
-            <a:r>
-              <a:rPr lang="en-GB" sz="1800" b="0" u="none" strike="noStrike">
-                <a:solidFill>
-                  <a:srgbClr val="000000"/>
-                </a:solidFill>
-                <a:effectLst/>
-                <a:uFillTx/>
-                <a:latin typeface="DejaVu Sans"/>
-                <a:ea typeface="DejaVu Sans"/>
-              </a:rPr>
-              <a:t>next lecture)</a:t>
+              <a:t>Submission deadline (coding exercises) is always Monday at 1:59pm (right before the next lecture)</a:t>
             </a:r>
             <a:endParaRPr lang="en-US" sz="1800" b="0" u="none" strike="noStrike">
               <a:solidFill>
@@ -4581,7 +4485,7 @@
         <p:spPr>
           <a:xfrm>
             <a:off x="335520" y="764640"/>
-            <a:ext cx="10738800" cy="489600"/>
+            <a:ext cx="10738440" cy="489240"/>
           </a:xfrm>
           <a:prstGeom prst="rect">
             <a:avLst/>
@@ -4639,7 +4543,7 @@
         <p:spPr>
           <a:xfrm>
             <a:off x="335520" y="1600200"/>
-            <a:ext cx="4465080" cy="4694760"/>
+            <a:ext cx="4464720" cy="4694400"/>
           </a:xfrm>
           <a:prstGeom prst="rect">
             <a:avLst/>
@@ -4743,7 +4647,7 @@
             <a:r>
               <a:rPr lang="de-DE" sz="1800" b="0" u="sng" strike="noStrike">
                 <a:solidFill>
-                  <a:srgbClr val="000000"/>
+                  <a:srgbClr val="0000FF"/>
                 </a:solidFill>
                 <a:effectLst/>
                 <a:uFillTx/>
@@ -4768,7 +4672,7 @@
             <a:r>
               <a:rPr lang="de-DE" sz="1800" b="0" u="none" strike="noStrike">
                 <a:solidFill>
-                  <a:srgbClr val="000000"/>
+                  <a:srgbClr val="0000FF"/>
                 </a:solidFill>
                 <a:effectLst/>
                 <a:uFillTx/>
@@ -4810,7 +4714,7 @@
         <p:spPr>
           <a:xfrm>
             <a:off x="4655880" y="476640"/>
-            <a:ext cx="2424960" cy="351000"/>
+            <a:ext cx="2424600" cy="350640"/>
           </a:xfrm>
           <a:prstGeom prst="rect">
             <a:avLst/>
@@ -4855,7 +4759,7 @@
         <p:spPr>
           <a:xfrm>
             <a:off x="5715000" y="1448280"/>
-            <a:ext cx="4857480" cy="4760280"/>
+            <a:ext cx="4857120" cy="4759920"/>
           </a:xfrm>
           <a:prstGeom prst="rect">
             <a:avLst/>
@@ -4905,7 +4809,7 @@
         <p:spPr>
           <a:xfrm>
             <a:off x="335520" y="764640"/>
-            <a:ext cx="10738800" cy="489600"/>
+            <a:ext cx="10738440" cy="489240"/>
           </a:xfrm>
           <a:prstGeom prst="rect">
             <a:avLst/>
@@ -4963,7 +4867,7 @@
         <p:spPr>
           <a:xfrm>
             <a:off x="335520" y="1600200"/>
-            <a:ext cx="4465080" cy="4694760"/>
+            <a:ext cx="4464720" cy="4694400"/>
           </a:xfrm>
           <a:prstGeom prst="rect">
             <a:avLst/>
@@ -5065,7 +4969,7 @@
         <p:spPr>
           <a:xfrm>
             <a:off x="4655880" y="476640"/>
-            <a:ext cx="2424960" cy="351000"/>
+            <a:ext cx="2424600" cy="350640"/>
           </a:xfrm>
           <a:prstGeom prst="rect">
             <a:avLst/>
@@ -5110,7 +5014,7 @@
         <p:spPr>
           <a:xfrm>
             <a:off x="5715000" y="1448280"/>
-            <a:ext cx="4857480" cy="4760280"/>
+            <a:ext cx="4857120" cy="4759920"/>
           </a:xfrm>
           <a:prstGeom prst="rect">
             <a:avLst/>
@@ -5130,7 +5034,7 @@
         <p:spPr>
           <a:xfrm>
             <a:off x="5943600" y="5535000"/>
-            <a:ext cx="457200" cy="228600"/>
+            <a:ext cx="456840" cy="228240"/>
           </a:xfrm>
           <a:prstGeom prst="rightArrow">
             <a:avLst>
@@ -5208,7 +5112,7 @@
         <p:spPr>
           <a:xfrm>
             <a:off x="335520" y="764640"/>
-            <a:ext cx="10738800" cy="489600"/>
+            <a:ext cx="10738440" cy="489240"/>
           </a:xfrm>
           <a:prstGeom prst="rect">
             <a:avLst/>
@@ -5266,7 +5170,7 @@
         <p:spPr>
           <a:xfrm>
             <a:off x="335520" y="1600200"/>
-            <a:ext cx="4465080" cy="4694760"/>
+            <a:ext cx="4464720" cy="4694400"/>
           </a:xfrm>
           <a:prstGeom prst="rect">
             <a:avLst/>
@@ -5403,7 +5307,7 @@
         <p:spPr>
           <a:xfrm>
             <a:off x="4655880" y="476640"/>
-            <a:ext cx="2424960" cy="351000"/>
+            <a:ext cx="2424600" cy="350640"/>
           </a:xfrm>
           <a:prstGeom prst="rect">
             <a:avLst/>
@@ -5449,7 +5353,7 @@
         <p:spPr>
           <a:xfrm>
             <a:off x="5785920" y="1484280"/>
-            <a:ext cx="5293440" cy="4002120"/>
+            <a:ext cx="5293080" cy="4001760"/>
           </a:xfrm>
           <a:prstGeom prst="rect">
             <a:avLst/>
@@ -5469,7 +5373,7 @@
         <p:spPr>
           <a:xfrm>
             <a:off x="5680800" y="4343400"/>
-            <a:ext cx="457200" cy="228600"/>
+            <a:ext cx="456840" cy="228240"/>
           </a:xfrm>
           <a:prstGeom prst="rightArrow">
             <a:avLst>
@@ -5547,7 +5451,7 @@
         <p:spPr>
           <a:xfrm>
             <a:off x="335520" y="764640"/>
-            <a:ext cx="10738800" cy="489600"/>
+            <a:ext cx="10738440" cy="489240"/>
           </a:xfrm>
           <a:prstGeom prst="rect">
             <a:avLst/>
@@ -5605,7 +5509,7 @@
         <p:spPr>
           <a:xfrm>
             <a:off x="335520" y="1600200"/>
-            <a:ext cx="4465080" cy="4694760"/>
+            <a:ext cx="4464720" cy="4694400"/>
           </a:xfrm>
           <a:prstGeom prst="rect">
             <a:avLst/>
@@ -5777,7 +5681,7 @@
         <p:spPr>
           <a:xfrm>
             <a:off x="4655880" y="476640"/>
-            <a:ext cx="2424960" cy="351000"/>
+            <a:ext cx="2424600" cy="350640"/>
           </a:xfrm>
           <a:prstGeom prst="rect">
             <a:avLst/>
@@ -5817,13 +5721,13 @@
         </p:nvPicPr>
         <p:blipFill>
           <a:blip r:embed="rId1"/>
-          <a:srcRect l="0" t="0" r="0" b="26233"/>
+          <a:srcRect l="0" t="0" r="0" b="26231"/>
           <a:stretch/>
         </p:blipFill>
         <p:spPr>
           <a:xfrm>
             <a:off x="6172200" y="1600200"/>
-            <a:ext cx="4876560" cy="4264200"/>
+            <a:ext cx="4876200" cy="4263840"/>
           </a:xfrm>
           <a:prstGeom prst="rect">
             <a:avLst/>
@@ -5843,7 +5747,7 @@
         <p:spPr>
           <a:xfrm>
             <a:off x="6172200" y="4716000"/>
-            <a:ext cx="457200" cy="228600"/>
+            <a:ext cx="456840" cy="228240"/>
           </a:xfrm>
           <a:prstGeom prst="rightArrow">
             <a:avLst>
@@ -5921,7 +5825,7 @@
         <p:spPr>
           <a:xfrm>
             <a:off x="335520" y="764640"/>
-            <a:ext cx="10738800" cy="489600"/>
+            <a:ext cx="10738440" cy="489240"/>
           </a:xfrm>
           <a:prstGeom prst="rect">
             <a:avLst/>
@@ -5979,7 +5883,7 @@
         <p:spPr>
           <a:xfrm>
             <a:off x="335520" y="1600200"/>
-            <a:ext cx="4465080" cy="4694760"/>
+            <a:ext cx="4464720" cy="4694400"/>
           </a:xfrm>
           <a:prstGeom prst="rect">
             <a:avLst/>
@@ -6186,7 +6090,7 @@
         <p:spPr>
           <a:xfrm>
             <a:off x="4655880" y="476640"/>
-            <a:ext cx="2424960" cy="351000"/>
+            <a:ext cx="2424600" cy="350640"/>
           </a:xfrm>
           <a:prstGeom prst="rect">
             <a:avLst/>
@@ -6231,7 +6135,7 @@
         <p:spPr>
           <a:xfrm>
             <a:off x="6172200" y="1600200"/>
-            <a:ext cx="4343400" cy="4620240"/>
+            <a:ext cx="4343040" cy="4619880"/>
           </a:xfrm>
           <a:prstGeom prst="rect">
             <a:avLst/>
@@ -6281,7 +6185,7 @@
         <p:spPr>
           <a:xfrm>
             <a:off x="335520" y="764640"/>
-            <a:ext cx="10738800" cy="489600"/>
+            <a:ext cx="10738440" cy="489240"/>
           </a:xfrm>
           <a:prstGeom prst="rect">
             <a:avLst/>
@@ -6339,7 +6243,7 @@
         <p:spPr>
           <a:xfrm>
             <a:off x="335520" y="1600200"/>
-            <a:ext cx="10408680" cy="2743200"/>
+            <a:ext cx="10408320" cy="2742840"/>
           </a:xfrm>
           <a:prstGeom prst="rect">
             <a:avLst/>
@@ -6441,7 +6345,7 @@
         <p:spPr>
           <a:xfrm>
             <a:off x="4655880" y="476640"/>
-            <a:ext cx="2424960" cy="351000"/>
+            <a:ext cx="2424600" cy="350640"/>
           </a:xfrm>
           <a:prstGeom prst="rect">
             <a:avLst/>
@@ -6481,13 +6385,13 @@
         </p:nvPicPr>
         <p:blipFill>
           <a:blip r:embed="rId1"/>
-          <a:srcRect l="0" t="0" r="16553" b="0"/>
+          <a:srcRect l="0" t="0" r="16551" b="0"/>
           <a:stretch/>
         </p:blipFill>
         <p:spPr>
           <a:xfrm>
             <a:off x="1067400" y="4343400"/>
-            <a:ext cx="9219600" cy="1962360"/>
+            <a:ext cx="9219240" cy="1962000"/>
           </a:xfrm>
           <a:prstGeom prst="rect">
             <a:avLst/>
@@ -6537,7 +6441,7 @@
         <p:spPr>
           <a:xfrm>
             <a:off x="335520" y="764640"/>
-            <a:ext cx="10738800" cy="489600"/>
+            <a:ext cx="10738440" cy="489240"/>
           </a:xfrm>
           <a:prstGeom prst="rect">
             <a:avLst/>
@@ -6595,7 +6499,7 @@
         <p:spPr>
           <a:xfrm>
             <a:off x="335520" y="1600200"/>
-            <a:ext cx="10408680" cy="2743200"/>
+            <a:ext cx="10408320" cy="2742840"/>
           </a:xfrm>
           <a:prstGeom prst="rect">
             <a:avLst/>
@@ -6732,7 +6636,7 @@
         <p:spPr>
           <a:xfrm>
             <a:off x="4655880" y="476640"/>
-            <a:ext cx="2424960" cy="351000"/>
+            <a:ext cx="2424600" cy="350640"/>
           </a:xfrm>
           <a:prstGeom prst="rect">
             <a:avLst/>
@@ -6777,7 +6681,7 @@
         <p:spPr>
           <a:xfrm>
             <a:off x="2057400" y="3657600"/>
-            <a:ext cx="6495840" cy="2685600"/>
+            <a:ext cx="6495480" cy="2685240"/>
           </a:xfrm>
           <a:prstGeom prst="rect">
             <a:avLst/>
@@ -6827,7 +6731,7 @@
         <p:spPr>
           <a:xfrm>
             <a:off x="335520" y="764640"/>
-            <a:ext cx="10736640" cy="487440"/>
+            <a:ext cx="10736280" cy="487080"/>
           </a:xfrm>
           <a:prstGeom prst="rect">
             <a:avLst/>
@@ -6885,7 +6789,7 @@
         <p:spPr>
           <a:xfrm>
             <a:off x="335520" y="1268640"/>
-            <a:ext cx="10736640" cy="5024160"/>
+            <a:ext cx="10736280" cy="5023800"/>
           </a:xfrm>
           <a:prstGeom prst="rect">
             <a:avLst/>
@@ -6926,7 +6830,7 @@
         <p:spPr>
           <a:xfrm>
             <a:off x="336600" y="3429000"/>
-            <a:ext cx="10854360" cy="2046240"/>
+            <a:ext cx="10854000" cy="2045880"/>
           </a:xfrm>
           <a:prstGeom prst="rect">
             <a:avLst/>
@@ -7139,7 +7043,7 @@
         <p:spPr>
           <a:xfrm>
             <a:off x="335520" y="764640"/>
-            <a:ext cx="10738800" cy="489600"/>
+            <a:ext cx="10738440" cy="489240"/>
           </a:xfrm>
           <a:prstGeom prst="rect">
             <a:avLst/>
@@ -7197,7 +7101,7 @@
         <p:spPr>
           <a:xfrm>
             <a:off x="335520" y="1600200"/>
-            <a:ext cx="10408680" cy="2743200"/>
+            <a:ext cx="10408320" cy="2742840"/>
           </a:xfrm>
           <a:prstGeom prst="rect">
             <a:avLst/>
@@ -7369,7 +7273,7 @@
         <p:spPr>
           <a:xfrm>
             <a:off x="4655880" y="476640"/>
-            <a:ext cx="2424960" cy="351000"/>
+            <a:ext cx="2424600" cy="350640"/>
           </a:xfrm>
           <a:prstGeom prst="rect">
             <a:avLst/>
@@ -7414,7 +7318,7 @@
         <p:spPr>
           <a:xfrm>
             <a:off x="2124360" y="3706200"/>
-            <a:ext cx="5876640" cy="2694600"/>
+            <a:ext cx="5876280" cy="2694240"/>
           </a:xfrm>
           <a:prstGeom prst="rect">
             <a:avLst/>
@@ -7464,7 +7368,7 @@
         <p:spPr>
           <a:xfrm>
             <a:off x="335520" y="764640"/>
-            <a:ext cx="10738800" cy="489600"/>
+            <a:ext cx="10738440" cy="489240"/>
           </a:xfrm>
           <a:prstGeom prst="rect">
             <a:avLst/>
@@ -7522,7 +7426,7 @@
         <p:spPr>
           <a:xfrm>
             <a:off x="335520" y="1600200"/>
-            <a:ext cx="10408680" cy="2743200"/>
+            <a:ext cx="10408320" cy="2742840"/>
           </a:xfrm>
           <a:prstGeom prst="rect">
             <a:avLst/>
@@ -7694,7 +7598,7 @@
         <p:spPr>
           <a:xfrm>
             <a:off x="4655880" y="476640"/>
-            <a:ext cx="2424960" cy="351000"/>
+            <a:ext cx="2424600" cy="350640"/>
           </a:xfrm>
           <a:prstGeom prst="rect">
             <a:avLst/>
@@ -7734,13 +7638,13 @@
         </p:nvPicPr>
         <p:blipFill>
           <a:blip r:embed="rId1"/>
-          <a:srcRect l="0" t="24696" r="0" b="0"/>
+          <a:srcRect l="0" t="24691" r="0" b="0"/>
           <a:stretch/>
         </p:blipFill>
         <p:spPr>
           <a:xfrm>
             <a:off x="5063400" y="3056400"/>
-            <a:ext cx="5656680" cy="3657240"/>
+            <a:ext cx="5656320" cy="3656880"/>
           </a:xfrm>
           <a:prstGeom prst="rect">
             <a:avLst/>
@@ -7790,7 +7694,7 @@
         <p:spPr>
           <a:xfrm>
             <a:off x="335520" y="764640"/>
-            <a:ext cx="10738800" cy="489600"/>
+            <a:ext cx="10738440" cy="489240"/>
           </a:xfrm>
           <a:prstGeom prst="rect">
             <a:avLst/>
@@ -7848,7 +7752,7 @@
         <p:spPr>
           <a:xfrm>
             <a:off x="335520" y="1600200"/>
-            <a:ext cx="10408680" cy="2743200"/>
+            <a:ext cx="10408320" cy="2742840"/>
           </a:xfrm>
           <a:prstGeom prst="rect">
             <a:avLst/>
@@ -8013,19 +7917,13 @@
             </a:endParaRPr>
           </a:p>
           <a:p>
-            <a:pPr marL="432000" lvl="1" indent="-216000">
+            <a:pPr>
               <a:lnSpc>
                 <a:spcPct val="100000"/>
               </a:lnSpc>
               <a:spcBef>
                 <a:spcPts val="360"/>
               </a:spcBef>
-              <a:buClr>
-                <a:srgbClr val="000000"/>
-              </a:buClr>
-              <a:buSzPct val="45000"/>
-              <a:buFont typeface="Wingdings" charset="2"/>
-              <a:buChar char=""/>
             </a:pPr>
             <a:endParaRPr lang="en-US" sz="1800" b="0" u="none" strike="noStrike">
               <a:solidFill>
@@ -8047,7 +7945,7 @@
         <p:spPr>
           <a:xfrm>
             <a:off x="4655880" y="476640"/>
-            <a:ext cx="2424960" cy="351000"/>
+            <a:ext cx="2424600" cy="350640"/>
           </a:xfrm>
           <a:prstGeom prst="rect">
             <a:avLst/>
@@ -8118,7 +8016,7 @@
         <p:spPr>
           <a:xfrm>
             <a:off x="335520" y="764640"/>
-            <a:ext cx="10738800" cy="489600"/>
+            <a:ext cx="10738440" cy="489240"/>
           </a:xfrm>
           <a:prstGeom prst="rect">
             <a:avLst/>
@@ -8176,7 +8074,7 @@
         <p:spPr>
           <a:xfrm>
             <a:off x="335520" y="1600200"/>
-            <a:ext cx="10408680" cy="2743200"/>
+            <a:ext cx="10408320" cy="2742840"/>
           </a:xfrm>
           <a:prstGeom prst="rect">
             <a:avLst/>
@@ -8377,19 +8275,13 @@
             </a:endParaRPr>
           </a:p>
           <a:p>
-            <a:pPr marL="432000" lvl="1" indent="-216000">
+            <a:pPr>
               <a:lnSpc>
                 <a:spcPct val="100000"/>
               </a:lnSpc>
               <a:spcBef>
                 <a:spcPts val="360"/>
               </a:spcBef>
-              <a:buClr>
-                <a:srgbClr val="000000"/>
-              </a:buClr>
-              <a:buSzPct val="45000"/>
-              <a:buFont typeface="Wingdings" charset="2"/>
-              <a:buChar char=""/>
             </a:pPr>
             <a:endParaRPr lang="en-US" sz="1800" b="0" u="none" strike="noStrike">
               <a:solidFill>
@@ -8411,7 +8303,7 @@
         <p:spPr>
           <a:xfrm>
             <a:off x="4655880" y="476640"/>
-            <a:ext cx="2424960" cy="351000"/>
+            <a:ext cx="2424600" cy="350640"/>
           </a:xfrm>
           <a:prstGeom prst="rect">
             <a:avLst/>
@@ -8456,7 +8348,7 @@
         <p:spPr>
           <a:xfrm>
             <a:off x="2372040" y="3657600"/>
-            <a:ext cx="7229160" cy="2857320"/>
+            <a:ext cx="7228800" cy="2856960"/>
           </a:xfrm>
           <a:prstGeom prst="rect">
             <a:avLst/>
@@ -8506,7 +8398,7 @@
         <p:spPr>
           <a:xfrm>
             <a:off x="335520" y="764640"/>
-            <a:ext cx="10738800" cy="489600"/>
+            <a:ext cx="10738440" cy="489240"/>
           </a:xfrm>
           <a:prstGeom prst="rect">
             <a:avLst/>
@@ -8564,7 +8456,7 @@
         <p:spPr>
           <a:xfrm>
             <a:off x="335520" y="1600200"/>
-            <a:ext cx="10408680" cy="2743200"/>
+            <a:ext cx="10408320" cy="2742840"/>
           </a:xfrm>
           <a:prstGeom prst="rect">
             <a:avLst/>
@@ -8801,19 +8693,13 @@
             </a:endParaRPr>
           </a:p>
           <a:p>
-            <a:pPr marL="432000" lvl="1" indent="-216000">
+            <a:pPr>
               <a:lnSpc>
                 <a:spcPct val="100000"/>
               </a:lnSpc>
               <a:spcBef>
                 <a:spcPts val="360"/>
               </a:spcBef>
-              <a:buClr>
-                <a:srgbClr val="000000"/>
-              </a:buClr>
-              <a:buSzPct val="45000"/>
-              <a:buFont typeface="Wingdings" charset="2"/>
-              <a:buChar char=""/>
             </a:pPr>
             <a:endParaRPr lang="en-US" sz="1800" b="0" u="none" strike="noStrike">
               <a:solidFill>
@@ -8835,7 +8721,7 @@
         <p:spPr>
           <a:xfrm>
             <a:off x="4655880" y="476640"/>
-            <a:ext cx="2424960" cy="351000"/>
+            <a:ext cx="2424600" cy="350640"/>
           </a:xfrm>
           <a:prstGeom prst="rect">
             <a:avLst/>
@@ -8880,7 +8766,7 @@
         <p:spPr>
           <a:xfrm>
             <a:off x="2971800" y="3777480"/>
-            <a:ext cx="6172200" cy="2623320"/>
+            <a:ext cx="6171840" cy="2622960"/>
           </a:xfrm>
           <a:prstGeom prst="rect">
             <a:avLst/>
@@ -8930,7 +8816,7 @@
         <p:spPr>
           <a:xfrm>
             <a:off x="335520" y="764640"/>
-            <a:ext cx="10738800" cy="489600"/>
+            <a:ext cx="10738440" cy="489240"/>
           </a:xfrm>
           <a:prstGeom prst="rect">
             <a:avLst/>
@@ -8988,7 +8874,7 @@
         <p:spPr>
           <a:xfrm>
             <a:off x="335520" y="1600200"/>
-            <a:ext cx="10408680" cy="2743200"/>
+            <a:ext cx="10408320" cy="2742840"/>
           </a:xfrm>
           <a:prstGeom prst="rect">
             <a:avLst/>
@@ -9261,19 +9147,13 @@
             </a:endParaRPr>
           </a:p>
           <a:p>
-            <a:pPr marL="432000" lvl="1" indent="-216000">
+            <a:pPr>
               <a:lnSpc>
                 <a:spcPct val="100000"/>
               </a:lnSpc>
               <a:spcBef>
                 <a:spcPts val="360"/>
               </a:spcBef>
-              <a:buClr>
-                <a:srgbClr val="000000"/>
-              </a:buClr>
-              <a:buSzPct val="45000"/>
-              <a:buFont typeface="Wingdings" charset="2"/>
-              <a:buChar char=""/>
             </a:pPr>
             <a:endParaRPr lang="en-US" sz="1800" b="0" u="none" strike="noStrike">
               <a:solidFill>
@@ -9295,7 +9175,7 @@
         <p:spPr>
           <a:xfrm>
             <a:off x="4655880" y="476640"/>
-            <a:ext cx="2424960" cy="351000"/>
+            <a:ext cx="2424600" cy="350640"/>
           </a:xfrm>
           <a:prstGeom prst="rect">
             <a:avLst/>
@@ -9366,7 +9246,7 @@
         <p:spPr>
           <a:xfrm>
             <a:off x="335520" y="768240"/>
-            <a:ext cx="10738800" cy="489600"/>
+            <a:ext cx="10738440" cy="489240"/>
           </a:xfrm>
           <a:prstGeom prst="rect">
             <a:avLst/>
@@ -9424,7 +9304,7 @@
         <p:spPr>
           <a:xfrm>
             <a:off x="388800" y="1488600"/>
-            <a:ext cx="10712520" cy="3505320"/>
+            <a:ext cx="10712160" cy="3505320"/>
           </a:xfrm>
           <a:prstGeom prst="rect">
             <a:avLst/>
@@ -9460,19 +9340,7 @@
                 <a:latin typeface="DejaVu Sans"/>
                 <a:ea typeface="Arial"/>
               </a:rPr>
-              <a:t>Every student enrolled in this course is advised to take the knowledge quiz in first two weeks of </a:t>
-            </a:r>
-            <a:r>
-              <a:rPr lang="de-DE" sz="1400" b="1" u="none" strike="noStrike">
-                <a:solidFill>
-                  <a:srgbClr val="008C4F"/>
-                </a:solidFill>
-                <a:effectLst/>
-                <a:uFillTx/>
-                <a:latin typeface="DejaVu Sans"/>
-                <a:ea typeface="Arial"/>
-              </a:rPr>
-              <a:t>the course.  </a:t>
+              <a:t>Every student enrolled in this course is advised to take the knowledge quiz in first two weeks of the course.  </a:t>
             </a:r>
             <a:endParaRPr lang="en-US" sz="1400" b="0" u="none" strike="noStrike">
               <a:solidFill>
@@ -9661,19 +9529,7 @@
                 <a:latin typeface="DejaVu Sans"/>
                 <a:ea typeface="Arial Unicode MS"/>
               </a:rPr>
-              <a:t>A review of basic concepts of Cryptography and Circular Economy is recommended for Week 1 and Week 2 </a:t>
-            </a:r>
-            <a:r>
-              <a:rPr lang="de-DE" sz="1400" b="0" u="none" strike="noStrike">
-                <a:solidFill>
-                  <a:srgbClr val="000000"/>
-                </a:solidFill>
-                <a:effectLst/>
-                <a:uFillTx/>
-                <a:latin typeface="DejaVu Sans"/>
-                <a:ea typeface="Arial Unicode MS"/>
-              </a:rPr>
-              <a:t>respectively</a:t>
+              <a:t>A review of basic concepts of Cryptography and Circular Economy is recommended for Week 1 and Week 2 respectively</a:t>
             </a:r>
             <a:endParaRPr lang="en-US" sz="1400" b="0" u="none" strike="noStrike">
               <a:solidFill>
@@ -9863,7 +9719,7 @@
         <p:spPr>
           <a:xfrm>
             <a:off x="335520" y="768240"/>
-            <a:ext cx="10738800" cy="489600"/>
+            <a:ext cx="10738440" cy="489240"/>
           </a:xfrm>
           <a:prstGeom prst="rect">
             <a:avLst/>
@@ -9921,7 +9777,7 @@
         <p:spPr>
           <a:xfrm>
             <a:off x="388800" y="1488600"/>
-            <a:ext cx="10712520" cy="3505320"/>
+            <a:ext cx="10712160" cy="3505320"/>
           </a:xfrm>
           <a:prstGeom prst="rect">
             <a:avLst/>
@@ -9957,19 +9813,7 @@
                 <a:latin typeface="DejaVu Sans"/>
                 <a:ea typeface="Arial"/>
               </a:rPr>
-              <a:t>Every student enrolled in this course is advised to take the knowledge quiz in first two weeks of the </a:t>
-            </a:r>
-            <a:r>
-              <a:rPr lang="de-DE" sz="1400" b="1" u="none" strike="noStrike">
-                <a:solidFill>
-                  <a:srgbClr val="008C4F"/>
-                </a:solidFill>
-                <a:effectLst/>
-                <a:uFillTx/>
-                <a:latin typeface="DejaVu Sans"/>
-                <a:ea typeface="Arial"/>
-              </a:rPr>
-              <a:t>course.  </a:t>
+              <a:t>Every student enrolled in this course is advised to take the knowledge quiz in first two weeks of the course.  </a:t>
             </a:r>
             <a:endParaRPr lang="en-US" sz="1400" b="0" u="none" strike="noStrike">
               <a:solidFill>
@@ -10158,19 +10002,7 @@
                 <a:latin typeface="DejaVu Sans"/>
                 <a:ea typeface="Arial Unicode MS"/>
               </a:rPr>
-              <a:t>A review of basic concepts of Cryptography and Circular Economy is recommended for Week 1 and Week 2 </a:t>
-            </a:r>
-            <a:r>
-              <a:rPr lang="de-DE" sz="1400" b="0" u="none" strike="noStrike">
-                <a:solidFill>
-                  <a:srgbClr val="000000"/>
-                </a:solidFill>
-                <a:effectLst/>
-                <a:uFillTx/>
-                <a:latin typeface="DejaVu Sans"/>
-                <a:ea typeface="Arial Unicode MS"/>
-              </a:rPr>
-              <a:t>respectively</a:t>
+              <a:t>A review of basic concepts of Cryptography and Circular Economy is recommended for Week 1 and Week 2 respectively</a:t>
             </a:r>
             <a:endParaRPr lang="en-US" sz="1400" b="0" u="none" strike="noStrike">
               <a:solidFill>
@@ -10384,7 +10216,7 @@
         <p:spPr>
           <a:xfrm>
             <a:off x="335520" y="764640"/>
-            <a:ext cx="10738800" cy="489600"/>
+            <a:ext cx="10738440" cy="489240"/>
           </a:xfrm>
           <a:prstGeom prst="rect">
             <a:avLst/>
@@ -10446,7 +10278,7 @@
         <p:spPr>
           <a:xfrm>
             <a:off x="3200400" y="685800"/>
-            <a:ext cx="5273640" cy="5998320"/>
+            <a:ext cx="5273280" cy="5997960"/>
           </a:xfrm>
           <a:prstGeom prst="rect">
             <a:avLst/>
@@ -10496,7 +10328,7 @@
         <p:spPr>
           <a:xfrm>
             <a:off x="335520" y="764640"/>
-            <a:ext cx="10738800" cy="489600"/>
+            <a:ext cx="10738440" cy="489240"/>
           </a:xfrm>
           <a:prstGeom prst="rect">
             <a:avLst/>
@@ -10558,7 +10390,7 @@
         <p:spPr>
           <a:xfrm>
             <a:off x="1600200" y="1600200"/>
-            <a:ext cx="8359920" cy="4628520"/>
+            <a:ext cx="8359560" cy="4628160"/>
           </a:xfrm>
           <a:prstGeom prst="rect">
             <a:avLst/>
@@ -10608,7 +10440,7 @@
         <p:spPr>
           <a:xfrm>
             <a:off x="335520" y="764640"/>
-            <a:ext cx="10738800" cy="489600"/>
+            <a:ext cx="10738440" cy="489240"/>
           </a:xfrm>
           <a:prstGeom prst="rect">
             <a:avLst/>
@@ -10670,7 +10502,7 @@
         <p:spPr>
           <a:xfrm>
             <a:off x="4923720" y="1257120"/>
-            <a:ext cx="1461600" cy="2162880"/>
+            <a:ext cx="1461240" cy="2162520"/>
           </a:xfrm>
           <a:prstGeom prst="rect">
             <a:avLst/>
@@ -10694,7 +10526,7 @@
         <p:spPr>
           <a:xfrm>
             <a:off x="2207880" y="4110120"/>
-            <a:ext cx="1775520" cy="1767600"/>
+            <a:ext cx="1775160" cy="1767240"/>
           </a:xfrm>
           <a:prstGeom prst="rect">
             <a:avLst/>
@@ -10714,7 +10546,7 @@
         <p:spPr>
           <a:xfrm>
             <a:off x="3859200" y="3373200"/>
-            <a:ext cx="3626280" cy="667800"/>
+            <a:ext cx="3625920" cy="667440"/>
           </a:xfrm>
           <a:prstGeom prst="rect">
             <a:avLst/>
@@ -10775,7 +10607,7 @@
         <p:spPr>
           <a:xfrm>
             <a:off x="1312200" y="5920200"/>
-            <a:ext cx="3626280" cy="667800"/>
+            <a:ext cx="3625920" cy="667440"/>
           </a:xfrm>
           <a:prstGeom prst="rect">
             <a:avLst/>
@@ -10816,7 +10648,7 @@
         <p:spPr>
           <a:xfrm>
             <a:off x="1312200" y="5807160"/>
-            <a:ext cx="3626280" cy="667800"/>
+            <a:ext cx="3625920" cy="667440"/>
           </a:xfrm>
           <a:prstGeom prst="rect">
             <a:avLst/>
@@ -10877,7 +10709,7 @@
         <p:spPr>
           <a:xfrm>
             <a:off x="4860000" y="5920200"/>
-            <a:ext cx="3626280" cy="667800"/>
+            <a:ext cx="3625920" cy="667440"/>
           </a:xfrm>
           <a:prstGeom prst="rect">
             <a:avLst/>
@@ -10918,7 +10750,7 @@
         <p:spPr>
           <a:xfrm>
             <a:off x="6300000" y="5807160"/>
-            <a:ext cx="3626280" cy="667800"/>
+            <a:ext cx="3625920" cy="667440"/>
           </a:xfrm>
           <a:prstGeom prst="rect">
             <a:avLst/>
@@ -10984,7 +10816,7 @@
         <p:spPr>
           <a:xfrm>
             <a:off x="7203960" y="4143960"/>
-            <a:ext cx="1794960" cy="1794960"/>
+            <a:ext cx="1794600" cy="1794600"/>
           </a:xfrm>
           <a:prstGeom prst="rect">
             <a:avLst/>
@@ -11034,7 +10866,7 @@
         <p:spPr>
           <a:xfrm>
             <a:off x="335520" y="764640"/>
-            <a:ext cx="10738800" cy="489600"/>
+            <a:ext cx="10738440" cy="489240"/>
           </a:xfrm>
           <a:prstGeom prst="rect">
             <a:avLst/>
@@ -11092,7 +10924,7 @@
         <p:spPr>
           <a:xfrm>
             <a:off x="335520" y="1268640"/>
-            <a:ext cx="10738800" cy="5026320"/>
+            <a:ext cx="10738440" cy="5025960"/>
           </a:xfrm>
           <a:prstGeom prst="rect">
             <a:avLst/>
@@ -11363,7 +11195,7 @@
         <p:spPr>
           <a:xfrm>
             <a:off x="335520" y="764640"/>
-            <a:ext cx="10737000" cy="487800"/>
+            <a:ext cx="10736640" cy="487440"/>
           </a:xfrm>
           <a:prstGeom prst="rect">
             <a:avLst/>
@@ -11421,7 +11253,7 @@
         <p:spPr>
           <a:xfrm>
             <a:off x="335520" y="1268280"/>
-            <a:ext cx="10737000" cy="5024520"/>
+            <a:ext cx="10736640" cy="5024160"/>
           </a:xfrm>
           <a:prstGeom prst="rect">
             <a:avLst/>
@@ -11527,7 +11359,7 @@
         <p:spPr>
           <a:xfrm>
             <a:off x="6285600" y="2132640"/>
-            <a:ext cx="506520" cy="486360"/>
+            <a:ext cx="506160" cy="486000"/>
           </a:xfrm>
           <a:prstGeom prst="star5">
             <a:avLst>
@@ -11584,7 +11416,7 @@
         <p:spPr>
           <a:xfrm>
             <a:off x="4089960" y="2247480"/>
-            <a:ext cx="2274840" cy="363960"/>
+            <a:ext cx="2274480" cy="363960"/>
           </a:xfrm>
           <a:prstGeom prst="rect">
             <a:avLst/>
@@ -11696,7 +11528,7 @@
         <p:spPr>
           <a:xfrm>
             <a:off x="335520" y="764640"/>
-            <a:ext cx="10737000" cy="487800"/>
+            <a:ext cx="10736640" cy="487440"/>
           </a:xfrm>
           <a:prstGeom prst="rect">
             <a:avLst/>
@@ -11754,7 +11586,7 @@
         <p:spPr>
           <a:xfrm>
             <a:off x="335520" y="1268640"/>
-            <a:ext cx="10737000" cy="5024520"/>
+            <a:ext cx="10736640" cy="5024160"/>
           </a:xfrm>
           <a:prstGeom prst="rect">
             <a:avLst/>
@@ -11823,7 +11655,7 @@
                 <a:latin typeface="DejaVu Sans"/>
                 <a:ea typeface="DejaVu Sans"/>
               </a:rPr>
-              <a:t> need to buy a book to pass </a:t>
+              <a:t> need to buy a book to pass the </a:t>
             </a:r>
             <a:r>
               <a:rPr lang="en-US" sz="1800" b="0" u="none" strike="noStrike">
@@ -11835,7 +11667,7 @@
                 <a:latin typeface="DejaVu Sans"/>
                 <a:ea typeface="DejaVu Sans"/>
               </a:rPr>
-              <a:t>the exam.</a:t>
+              <a:t>exam.</a:t>
             </a:r>
             <a:endParaRPr lang="en-US" sz="1800" b="0" u="none" strike="noStrike">
               <a:solidFill>
@@ -11973,7 +11805,7 @@
                 <a:latin typeface="DejaVu Sans"/>
                 <a:ea typeface="DejaVu Sans"/>
               </a:rPr>
-              <a:t>Limits To Growth: The </a:t>
+              <a:t>Limits To Growth: The 30-</a:t>
             </a:r>
             <a:r>
               <a:rPr lang="en-US" sz="1800" b="0" i="1" u="none" strike="noStrike">
@@ -11985,7 +11817,7 @@
                 <a:latin typeface="DejaVu Sans"/>
                 <a:ea typeface="DejaVu Sans"/>
               </a:rPr>
-              <a:t>30-Year Update</a:t>
+              <a:t>Year Update</a:t>
             </a:r>
             <a:r>
               <a:rPr lang="en-US" sz="1800" b="0" u="none" strike="noStrike">
@@ -12349,7 +12181,7 @@
         <p:spPr>
           <a:xfrm>
             <a:off x="335520" y="764640"/>
-            <a:ext cx="10738800" cy="489600"/>
+            <a:ext cx="10738440" cy="489240"/>
           </a:xfrm>
           <a:prstGeom prst="rect">
             <a:avLst/>
@@ -12407,7 +12239,7 @@
         <p:spPr>
           <a:xfrm>
             <a:off x="335520" y="1268640"/>
-            <a:ext cx="10738800" cy="5026320"/>
+            <a:ext cx="10738440" cy="5025960"/>
           </a:xfrm>
           <a:prstGeom prst="rect">
             <a:avLst/>
@@ -12726,7 +12558,7 @@
         <p:spPr>
           <a:xfrm>
             <a:off x="335520" y="1268640"/>
-            <a:ext cx="10738800" cy="5026320"/>
+            <a:ext cx="10738440" cy="5025960"/>
           </a:xfrm>
           <a:prstGeom prst="rect">
             <a:avLst/>
@@ -12790,7 +12622,7 @@
         <p:spPr>
           <a:xfrm>
             <a:off x="335520" y="764640"/>
-            <a:ext cx="10738800" cy="489600"/>
+            <a:ext cx="10738440" cy="489240"/>
           </a:xfrm>
           <a:prstGeom prst="rect">
             <a:avLst/>
@@ -12861,7 +12693,7 @@
         <p:spPr>
           <a:xfrm>
             <a:off x="542880" y="721800"/>
-            <a:ext cx="10343160" cy="483840"/>
+            <a:ext cx="10342800" cy="483480"/>
           </a:xfrm>
           <a:prstGeom prst="rect">
             <a:avLst/>
@@ -12919,7 +12751,7 @@
         <p:spPr>
           <a:xfrm>
             <a:off x="451800" y="1709280"/>
-            <a:ext cx="8210520" cy="4338720"/>
+            <a:ext cx="8210160" cy="4338360"/>
           </a:xfrm>
           <a:prstGeom prst="rect">
             <a:avLst/>
@@ -12960,7 +12792,7 @@
         <p:spPr>
           <a:xfrm>
             <a:off x="609480" y="1769400"/>
-            <a:ext cx="10573560" cy="4841640"/>
+            <a:ext cx="10573200" cy="4841280"/>
           </a:xfrm>
           <a:prstGeom prst="rect">
             <a:avLst/>
@@ -13441,7 +13273,7 @@
         <p:spPr>
           <a:xfrm>
             <a:off x="542880" y="721800"/>
-            <a:ext cx="10343160" cy="483840"/>
+            <a:ext cx="10342800" cy="483480"/>
           </a:xfrm>
           <a:prstGeom prst="rect">
             <a:avLst/>
@@ -13499,7 +13331,7 @@
         <p:spPr>
           <a:xfrm>
             <a:off x="451800" y="1709280"/>
-            <a:ext cx="8210520" cy="4338720"/>
+            <a:ext cx="8210160" cy="4338360"/>
           </a:xfrm>
           <a:prstGeom prst="rect">
             <a:avLst/>
@@ -13540,7 +13372,7 @@
         <p:spPr>
           <a:xfrm>
             <a:off x="609480" y="1769400"/>
-            <a:ext cx="10573560" cy="4841640"/>
+            <a:ext cx="10573200" cy="4841280"/>
           </a:xfrm>
           <a:prstGeom prst="rect">
             <a:avLst/>
@@ -13821,7 +13653,7 @@
         <p:spPr>
           <a:xfrm>
             <a:off x="542880" y="721800"/>
-            <a:ext cx="10343160" cy="483840"/>
+            <a:ext cx="10342800" cy="483480"/>
           </a:xfrm>
           <a:prstGeom prst="rect">
             <a:avLst/>
@@ -13879,7 +13711,7 @@
         <p:spPr>
           <a:xfrm>
             <a:off x="451800" y="1709280"/>
-            <a:ext cx="8210520" cy="4338720"/>
+            <a:ext cx="8210160" cy="4338360"/>
           </a:xfrm>
           <a:prstGeom prst="rect">
             <a:avLst/>
@@ -13920,7 +13752,7 @@
         <p:spPr>
           <a:xfrm>
             <a:off x="609480" y="1769400"/>
-            <a:ext cx="10573560" cy="4841640"/>
+            <a:ext cx="10573200" cy="4841280"/>
           </a:xfrm>
           <a:prstGeom prst="rect">
             <a:avLst/>
@@ -14201,7 +14033,7 @@
         <p:spPr>
           <a:xfrm>
             <a:off x="335520" y="764640"/>
-            <a:ext cx="10738800" cy="489600"/>
+            <a:ext cx="10738440" cy="489240"/>
           </a:xfrm>
           <a:prstGeom prst="rect">
             <a:avLst/>
@@ -14274,7 +14106,7 @@
         <p:spPr>
           <a:xfrm>
             <a:off x="335520" y="2408400"/>
-            <a:ext cx="10738800" cy="3886560"/>
+            <a:ext cx="10738440" cy="3886200"/>
           </a:xfrm>
           <a:prstGeom prst="rect">
             <a:avLst/>
@@ -14319,19 +14151,7 @@
                 <a:latin typeface="DejaVu Sans"/>
                 <a:ea typeface="DejaVu Sans"/>
               </a:rPr>
-              <a:t>Basic understanding of the concept of the </a:t>
-            </a:r>
-            <a:r>
-              <a:rPr lang="en-US" sz="1800" b="0" u="none" strike="noStrike">
-                <a:solidFill>
-                  <a:srgbClr val="000000"/>
-                </a:solidFill>
-                <a:effectLst/>
-                <a:uFillTx/>
-                <a:latin typeface="DejaVu Sans"/>
-                <a:ea typeface="DejaVu Sans"/>
-              </a:rPr>
-              <a:t>circular economy</a:t>
+              <a:t>Basic understanding of the concept of the circular economy</a:t>
             </a:r>
             <a:endParaRPr lang="en-US" sz="1800" b="0" u="none" strike="noStrike">
               <a:solidFill>
@@ -14367,31 +14187,7 @@
                 <a:latin typeface="DejaVu Sans"/>
                 <a:ea typeface="DejaVu Sans"/>
               </a:rPr>
-              <a:t>Basic understanding of emerging technologies </a:t>
-            </a:r>
-            <a:r>
-              <a:rPr lang="en-US" sz="1800" b="0" u="none" strike="noStrike">
-                <a:solidFill>
-                  <a:srgbClr val="000000"/>
-                </a:solidFill>
-                <a:effectLst/>
-                <a:uFillTx/>
-                <a:latin typeface="DejaVu Sans"/>
-                <a:ea typeface="DejaVu Sans"/>
-              </a:rPr>
-              <a:t>at the intersection of digital technologies and </a:t>
-            </a:r>
-            <a:r>
-              <a:rPr lang="en-US" sz="1800" b="0" u="none" strike="noStrike">
-                <a:solidFill>
-                  <a:srgbClr val="000000"/>
-                </a:solidFill>
-                <a:effectLst/>
-                <a:uFillTx/>
-                <a:latin typeface="DejaVu Sans"/>
-                <a:ea typeface="DejaVu Sans"/>
-              </a:rPr>
-              <a:t>sustainability</a:t>
+              <a:t>Basic understanding of emerging technologies at the intersection of digital technologies and sustainability</a:t>
             </a:r>
             <a:endParaRPr lang="en-US" sz="1800" b="0" u="none" strike="noStrike">
               <a:solidFill>
@@ -14427,19 +14223,7 @@
                 <a:latin typeface="DejaVu Sans"/>
                 <a:ea typeface="DejaVu Sans"/>
               </a:rPr>
-              <a:t>Understanding and overview of the Internet of </a:t>
-            </a:r>
-            <a:r>
-              <a:rPr lang="en-US" sz="1800" b="0" u="none" strike="noStrike">
-                <a:solidFill>
-                  <a:srgbClr val="000000"/>
-                </a:solidFill>
-                <a:effectLst/>
-                <a:uFillTx/>
-                <a:latin typeface="DejaVu Sans"/>
-                <a:ea typeface="DejaVu Sans"/>
-              </a:rPr>
-              <a:t>Things and related concepts</a:t>
+              <a:t>Understanding and overview of the Internet of Things and related concepts</a:t>
             </a:r>
             <a:endParaRPr lang="en-US" sz="1800" b="0" u="none" strike="noStrike">
               <a:solidFill>
@@ -14475,31 +14259,7 @@
                 <a:latin typeface="DejaVu Sans"/>
                 <a:ea typeface="DejaVu Sans"/>
               </a:rPr>
-              <a:t>Ability to design smart systems and </a:t>
-            </a:r>
-            <a:r>
-              <a:rPr lang="en-US" sz="1800" b="0" u="none" strike="noStrike">
-                <a:solidFill>
-                  <a:srgbClr val="000000"/>
-                </a:solidFill>
-                <a:effectLst/>
-                <a:uFillTx/>
-                <a:latin typeface="DejaVu Sans"/>
-                <a:ea typeface="DejaVu Sans"/>
-              </a:rPr>
-              <a:t>applications in the context of connected </a:t>
-            </a:r>
-            <a:r>
-              <a:rPr lang="en-US" sz="1800" b="0" u="none" strike="noStrike">
-                <a:solidFill>
-                  <a:srgbClr val="000000"/>
-                </a:solidFill>
-                <a:effectLst/>
-                <a:uFillTx/>
-                <a:latin typeface="DejaVu Sans"/>
-                <a:ea typeface="DejaVu Sans"/>
-              </a:rPr>
-              <a:t>sensor systems and other stakeholders.</a:t>
+              <a:t>Ability to design smart systems and applications in the context of connected sensor systems and other stakeholders.</a:t>
             </a:r>
             <a:endParaRPr lang="en-US" sz="1800" b="0" u="none" strike="noStrike">
               <a:solidFill>
@@ -14535,19 +14295,7 @@
                 <a:latin typeface="DejaVu Sans"/>
                 <a:ea typeface="DejaVu Sans"/>
               </a:rPr>
-              <a:t>Experience in prototyping applications and </a:t>
-            </a:r>
-            <a:r>
-              <a:rPr lang="en-US" sz="1800" b="0" u="none" strike="noStrike">
-                <a:solidFill>
-                  <a:srgbClr val="000000"/>
-                </a:solidFill>
-                <a:effectLst/>
-                <a:uFillTx/>
-                <a:latin typeface="DejaVu Sans"/>
-                <a:ea typeface="DejaVu Sans"/>
-              </a:rPr>
-              <a:t>systems</a:t>
+              <a:t>Experience in prototyping applications and systems</a:t>
             </a:r>
             <a:endParaRPr lang="en-US" sz="1800" b="0" u="none" strike="noStrike">
               <a:solidFill>
@@ -14599,7 +14347,7 @@
         <p:spPr>
           <a:xfrm>
             <a:off x="335520" y="764640"/>
-            <a:ext cx="10738800" cy="489600"/>
+            <a:ext cx="10738440" cy="489240"/>
           </a:xfrm>
           <a:prstGeom prst="rect">
             <a:avLst/>
@@ -14657,7 +14405,7 @@
         <p:spPr>
           <a:xfrm>
             <a:off x="335520" y="1268640"/>
-            <a:ext cx="10738800" cy="5026320"/>
+            <a:ext cx="10738440" cy="5025960"/>
           </a:xfrm>
           <a:prstGeom prst="rect">
             <a:avLst/>
@@ -15168,7 +14916,7 @@
         <p:spPr>
           <a:xfrm>
             <a:off x="335520" y="764640"/>
-            <a:ext cx="10738800" cy="489600"/>
+            <a:ext cx="10738440" cy="489240"/>
           </a:xfrm>
           <a:prstGeom prst="rect">
             <a:avLst/>
@@ -15204,7 +14952,7 @@
                 <a:latin typeface="DejaVu Sans"/>
                 <a:ea typeface="DejaVu Sans"/>
               </a:rPr>
-              <a:t>Exercises</a:t>
+              <a:t>Exercise Deadlines</a:t>
             </a:r>
             <a:endParaRPr lang="en-US" sz="2400" b="0" u="none" strike="noStrike">
               <a:solidFill>
@@ -15226,7 +14974,7 @@
         <p:spPr>
           <a:xfrm>
             <a:off x="335520" y="1268640"/>
-            <a:ext cx="10738800" cy="5026320"/>
+            <a:ext cx="10738440" cy="5025960"/>
           </a:xfrm>
           <a:prstGeom prst="rect">
             <a:avLst/>
@@ -15271,7 +15019,7 @@
                 <a:latin typeface="DejaVu Sans"/>
                 <a:ea typeface="DejaVu Sans"/>
               </a:rPr>
-              <a:t>04.05.2026 </a:t>
+              <a:t>11.05.2026 </a:t>
             </a:r>
             <a:r>
               <a:rPr lang="en-US" sz="1800" b="0" u="none" strike="noStrike">
@@ -15331,19 +15079,7 @@
                 <a:latin typeface="DejaVu Sans"/>
                 <a:ea typeface="DejaVu Sans"/>
               </a:rPr>
-              <a:t>11.05.2026</a:t>
-            </a:r>
-            <a:r>
-              <a:rPr lang="de-DE" sz="1800" b="0" u="none" strike="noStrike">
-                <a:solidFill>
-                  <a:srgbClr val="000000"/>
-                </a:solidFill>
-                <a:effectLst/>
-                <a:uFillTx/>
-                <a:latin typeface="DejaVu Sans"/>
-                <a:ea typeface="DejaVu Sans"/>
-              </a:rPr>
-              <a:t> </a:t>
+              <a:t>18.05.2026 </a:t>
             </a:r>
             <a:r>
               <a:rPr lang="en-US" sz="1800" b="0" u="none" strike="noStrike">
@@ -15403,7 +15139,7 @@
                 <a:latin typeface="DejaVu Sans"/>
                 <a:ea typeface="DejaVu Sans"/>
               </a:rPr>
-              <a:t>18.05.2026 </a:t>
+              <a:t>01.06.2026 </a:t>
             </a:r>
             <a:r>
               <a:rPr lang="en-US" sz="1800" b="0" u="none" strike="noStrike">
@@ -15463,7 +15199,7 @@
                 <a:latin typeface="DejaVu Sans"/>
                 <a:ea typeface="DejaVu Sans"/>
               </a:rPr>
-              <a:t>25.05.2026 </a:t>
+              <a:t>08.06.2026 </a:t>
             </a:r>
             <a:r>
               <a:rPr lang="en-US" sz="1800" b="0" u="none" strike="noStrike">
@@ -15523,7 +15259,7 @@
                 <a:latin typeface="DejaVu Sans"/>
                 <a:ea typeface="DejaVu Sans"/>
               </a:rPr>
-              <a:t>01.06.2026 </a:t>
+              <a:t>15.06.2026 </a:t>
             </a:r>
             <a:r>
               <a:rPr lang="en-US" sz="1800" b="0" u="none" strike="noStrike">
@@ -15583,7 +15319,7 @@
                 <a:latin typeface="DejaVu Sans"/>
                 <a:ea typeface="DejaVu Sans"/>
               </a:rPr>
-              <a:t>08.06.2026 </a:t>
+              <a:t>22.06.2026 </a:t>
             </a:r>
             <a:r>
               <a:rPr lang="en-US" sz="1800" b="0" u="none" strike="noStrike">
@@ -15643,7 +15379,7 @@
                 <a:latin typeface="DejaVu Sans"/>
                 <a:ea typeface="DejaVu Sans"/>
               </a:rPr>
-              <a:t>15.06.2026 </a:t>
+              <a:t>29.06.2026 </a:t>
             </a:r>
             <a:r>
               <a:rPr lang="en-US" sz="1800" b="0" u="none" strike="noStrike">
@@ -15703,7 +15439,7 @@
                 <a:latin typeface="DejaVu Sans"/>
                 <a:ea typeface="DejaVu Sans"/>
               </a:rPr>
-              <a:t>22.06.2026 → Exercise 08 – TBA</a:t>
+              <a:t>06.07.2026 → Exercise 08 – TBA</a:t>
             </a:r>
             <a:endParaRPr lang="en-US" sz="1800" b="0" u="none" strike="noStrike">
               <a:solidFill>
@@ -15739,7 +15475,7 @@
                 <a:latin typeface="DejaVu Sans"/>
                 <a:ea typeface="DejaVu Sans"/>
               </a:rPr>
-              <a:t>29.06.2026 → Exercise 09 – TBA</a:t>
+              <a:t>13.07.2026 → Exercise 09 – TBA</a:t>
             </a:r>
             <a:endParaRPr lang="en-US" sz="1800" b="0" u="none" strike="noStrike">
               <a:solidFill>
@@ -15775,7 +15511,7 @@
                 <a:latin typeface="DejaVu Sans"/>
                 <a:ea typeface="DejaVu Sans"/>
               </a:rPr>
-              <a:t>06.07.2026 → Exercise 10 – TBA</a:t>
+              <a:t>20.07.2026 → Exercise 10 – TBA</a:t>
             </a:r>
             <a:endParaRPr lang="en-US" sz="1800" b="0" u="none" strike="noStrike">
               <a:solidFill>

--- a/Emerging-Technologies-for-the-Circular-Economy/ETCE-L00-Organization.pptx
+++ b/Emerging-Technologies-for-the-Circular-Economy/ETCE-L00-Organization.pptx
@@ -398,7 +398,7 @@
             <a:pPr indent="0" algn="r">
               <a:buNone/>
             </a:pPr>
-            <a:fld id="{0C4E021F-0DC6-41A5-9DDC-447EAB13DB95}" type="slidenum">
+            <a:fld id="{0D836A76-16D0-4805-9E3A-B92640A35110}" type="slidenum">
               <a:rPr lang="en-US" sz="1400" b="0" u="none" strike="noStrike">
                 <a:solidFill>
                   <a:srgbClr val="000000"/>
@@ -456,7 +456,7 @@
         <p:spPr>
           <a:xfrm>
             <a:off x="533520" y="763560"/>
-            <a:ext cx="6685920" cy="3754080"/>
+            <a:ext cx="6685560" cy="3753720"/>
           </a:xfrm>
           <a:prstGeom prst="rect">
             <a:avLst/>
@@ -479,7 +479,7 @@
         <p:spPr>
           <a:xfrm>
             <a:off x="777240" y="4777560"/>
-            <a:ext cx="6199560" cy="4507920"/>
+            <a:ext cx="6199200" cy="4507560"/>
           </a:xfrm>
           <a:prstGeom prst="rect">
             <a:avLst/>
@@ -517,7 +517,7 @@
         <p:spPr>
           <a:xfrm>
             <a:off x="4399200" y="9555480"/>
-            <a:ext cx="3354840" cy="484560"/>
+            <a:ext cx="3354480" cy="484200"/>
           </a:xfrm>
           <a:prstGeom prst="rect">
             <a:avLst/>
@@ -543,7 +543,7 @@
                 <a:spcPct val="100000"/>
               </a:lnSpc>
             </a:pPr>
-            <a:fld id="{C9A34377-79F7-43B6-B771-A25990933F4F}" type="slidenum">
+            <a:fld id="{0D40A4AC-0372-4FA0-AF98-28FC6F22663E}" type="slidenum">
               <a:rPr lang="de-DE" sz="1800" b="0" u="none" strike="noStrike">
                 <a:solidFill>
                   <a:srgbClr val="000000"/>
@@ -553,7 +553,7 @@
                 <a:latin typeface="+mn-lt"/>
                 <a:ea typeface="+mn-ea"/>
               </a:rPr>
-              <a:t>6</a:t>
+              <a:t>&lt;number&gt;</a:t>
             </a:fld>
             <a:endParaRPr lang="en-US" sz="1800" b="0" u="none" strike="noStrike">
               <a:solidFill>
@@ -601,7 +601,7 @@
         <p:spPr>
           <a:xfrm>
             <a:off x="533520" y="763560"/>
-            <a:ext cx="6685920" cy="3754080"/>
+            <a:ext cx="6685560" cy="3753720"/>
           </a:xfrm>
           <a:prstGeom prst="rect">
             <a:avLst/>
@@ -624,7 +624,7 @@
         <p:spPr>
           <a:xfrm>
             <a:off x="777240" y="4777560"/>
-            <a:ext cx="6199560" cy="4507920"/>
+            <a:ext cx="6199200" cy="4507560"/>
           </a:xfrm>
           <a:prstGeom prst="rect">
             <a:avLst/>
@@ -662,7 +662,7 @@
         <p:spPr>
           <a:xfrm>
             <a:off x="4399200" y="9555480"/>
-            <a:ext cx="3354840" cy="484560"/>
+            <a:ext cx="3354480" cy="484200"/>
           </a:xfrm>
           <a:prstGeom prst="rect">
             <a:avLst/>
@@ -688,7 +688,7 @@
                 <a:spcPct val="100000"/>
               </a:lnSpc>
             </a:pPr>
-            <a:fld id="{24E2D19B-3E56-4A53-BEF3-D92E263EAD02}" type="slidenum">
+            <a:fld id="{0DD80586-B625-4B60-A442-EBF77632FB18}" type="slidenum">
               <a:rPr lang="de-DE" sz="1800" b="0" u="none" strike="noStrike">
                 <a:solidFill>
                   <a:srgbClr val="000000"/>
@@ -698,7 +698,7 @@
                 <a:latin typeface="+mn-lt"/>
                 <a:ea typeface="+mn-ea"/>
               </a:rPr>
-              <a:t>6</a:t>
+              <a:t>&lt;number&gt;</a:t>
             </a:fld>
             <a:endParaRPr lang="en-US" sz="1800" b="0" u="none" strike="noStrike">
               <a:solidFill>
@@ -746,7 +746,7 @@
         <p:spPr>
           <a:xfrm>
             <a:off x="533520" y="763560"/>
-            <a:ext cx="6685920" cy="3754080"/>
+            <a:ext cx="6685560" cy="3753720"/>
           </a:xfrm>
           <a:prstGeom prst="rect">
             <a:avLst/>
@@ -769,7 +769,7 @@
         <p:spPr>
           <a:xfrm>
             <a:off x="777240" y="4777560"/>
-            <a:ext cx="6199560" cy="4507920"/>
+            <a:ext cx="6199200" cy="4507560"/>
           </a:xfrm>
           <a:prstGeom prst="rect">
             <a:avLst/>
@@ -807,7 +807,7 @@
         <p:spPr>
           <a:xfrm>
             <a:off x="4399200" y="9555480"/>
-            <a:ext cx="3354840" cy="484560"/>
+            <a:ext cx="3354480" cy="484200"/>
           </a:xfrm>
           <a:prstGeom prst="rect">
             <a:avLst/>
@@ -833,7 +833,7 @@
                 <a:spcPct val="100000"/>
               </a:lnSpc>
             </a:pPr>
-            <a:fld id="{56801E0E-BEC0-406A-8658-DE8ADE853C03}" type="slidenum">
+            <a:fld id="{54DFABAE-9F00-42E0-A0EB-3F4D370E7516}" type="slidenum">
               <a:rPr lang="de-DE" sz="1800" b="0" u="none" strike="noStrike">
                 <a:solidFill>
                   <a:srgbClr val="000000"/>
@@ -843,7 +843,7 @@
                 <a:latin typeface="+mn-lt"/>
                 <a:ea typeface="+mn-ea"/>
               </a:rPr>
-              <a:t>6</a:t>
+              <a:t>&lt;number&gt;</a:t>
             </a:fld>
             <a:endParaRPr lang="en-US" sz="1800" b="0" u="none" strike="noStrike">
               <a:solidFill>
@@ -938,7 +938,7 @@
         <p:spPr>
           <a:xfrm>
             <a:off x="11444760" y="0"/>
-            <a:ext cx="734400" cy="6843240"/>
+            <a:ext cx="734040" cy="6842880"/>
           </a:xfrm>
           <a:prstGeom prst="rect">
             <a:avLst/>
@@ -983,7 +983,7 @@
         <p:spPr>
           <a:xfrm>
             <a:off x="11438640" y="6453360"/>
-            <a:ext cx="751320" cy="363960"/>
+            <a:ext cx="750960" cy="363960"/>
           </a:xfrm>
           <a:prstGeom prst="rect">
             <a:avLst/>
@@ -1009,7 +1009,7 @@
                 <a:spcPct val="100000"/>
               </a:lnSpc>
             </a:pPr>
-            <a:fld id="{2116B04D-B101-4370-8F3A-853A6966F364}" type="slidenum">
+            <a:fld id="{F3DE66F9-D69E-4BDD-96B5-110D2F844C29}" type="slidenum">
               <a:rPr lang="en-US" sz="1800" b="0" u="none" strike="noStrike">
                 <a:solidFill>
                   <a:srgbClr val="808080"/>
@@ -1019,7 +1019,7 @@
                 <a:latin typeface="Arial"/>
                 <a:ea typeface="DejaVu Sans"/>
               </a:rPr>
-              <a:t>&lt;number&gt;</a:t>
+              <a:t>9</a:t>
             </a:fld>
             <a:endParaRPr lang="en-US" sz="1800" b="0" u="none" strike="noStrike">
               <a:solidFill>
@@ -1041,7 +1041,7 @@
         <p:spPr>
           <a:xfrm>
             <a:off x="912240" y="1268280"/>
-            <a:ext cx="9201240" cy="354600"/>
+            <a:ext cx="9200880" cy="354240"/>
           </a:xfrm>
           <a:prstGeom prst="rect">
             <a:avLst/>
@@ -1086,7 +1086,7 @@
         <p:spPr>
           <a:xfrm>
             <a:off x="0" y="0"/>
-            <a:ext cx="3045240" cy="555120"/>
+            <a:ext cx="3044880" cy="554760"/>
           </a:xfrm>
           <a:prstGeom prst="rect">
             <a:avLst/>
@@ -1110,7 +1110,7 @@
         <p:spPr>
           <a:xfrm>
             <a:off x="7430400" y="134640"/>
-            <a:ext cx="3691080" cy="507240"/>
+            <a:ext cx="3690720" cy="506880"/>
           </a:xfrm>
           <a:prstGeom prst="rect">
             <a:avLst/>
@@ -1130,7 +1130,7 @@
         <p:spPr>
           <a:xfrm>
             <a:off x="912240" y="1268280"/>
-            <a:ext cx="9201240" cy="354600"/>
+            <a:ext cx="9200880" cy="354240"/>
           </a:xfrm>
           <a:prstGeom prst="rect">
             <a:avLst/>
@@ -1171,7 +1171,7 @@
         <p:spPr>
           <a:xfrm>
             <a:off x="11444760" y="0"/>
-            <a:ext cx="734400" cy="6843240"/>
+            <a:ext cx="734040" cy="6842880"/>
           </a:xfrm>
           <a:prstGeom prst="rect">
             <a:avLst/>
@@ -1216,7 +1216,7 @@
         <p:spPr>
           <a:xfrm>
             <a:off x="0" y="6642720"/>
-            <a:ext cx="12177360" cy="211320"/>
+            <a:ext cx="12177000" cy="211320"/>
           </a:xfrm>
           <a:prstGeom prst="rect">
             <a:avLst/>
@@ -1723,7 +1723,7 @@
         <p:spPr>
           <a:xfrm>
             <a:off x="11444760" y="0"/>
-            <a:ext cx="734400" cy="6843240"/>
+            <a:ext cx="734040" cy="6842880"/>
           </a:xfrm>
           <a:prstGeom prst="rect">
             <a:avLst/>
@@ -1768,7 +1768,7 @@
         <p:spPr>
           <a:xfrm>
             <a:off x="11438640" y="6453360"/>
-            <a:ext cx="751320" cy="363960"/>
+            <a:ext cx="750960" cy="363960"/>
           </a:xfrm>
           <a:prstGeom prst="rect">
             <a:avLst/>
@@ -1794,7 +1794,7 @@
                 <a:spcPct val="100000"/>
               </a:lnSpc>
             </a:pPr>
-            <a:fld id="{2DB44041-47ED-4434-BAAA-AB31F9FF40D3}" type="slidenum">
+            <a:fld id="{BE17FC44-5FB6-4EC4-A4B3-CEBCC7B83E4E}" type="slidenum">
               <a:rPr lang="en-US" sz="1800" b="0" u="none" strike="noStrike">
                 <a:solidFill>
                   <a:srgbClr val="808080"/>
@@ -1826,7 +1826,7 @@
         <p:spPr>
           <a:xfrm>
             <a:off x="912240" y="1268280"/>
-            <a:ext cx="9201240" cy="354600"/>
+            <a:ext cx="9200880" cy="354240"/>
           </a:xfrm>
           <a:prstGeom prst="rect">
             <a:avLst/>
@@ -1871,7 +1871,7 @@
         <p:spPr>
           <a:xfrm>
             <a:off x="0" y="0"/>
-            <a:ext cx="3045240" cy="555120"/>
+            <a:ext cx="3044880" cy="554760"/>
           </a:xfrm>
           <a:prstGeom prst="rect">
             <a:avLst/>
@@ -1895,7 +1895,7 @@
         <p:spPr>
           <a:xfrm>
             <a:off x="7430400" y="134640"/>
-            <a:ext cx="3691080" cy="507240"/>
+            <a:ext cx="3690720" cy="506880"/>
           </a:xfrm>
           <a:prstGeom prst="rect">
             <a:avLst/>
@@ -1915,7 +1915,7 @@
         <p:spPr>
           <a:xfrm>
             <a:off x="11444760" y="0"/>
-            <a:ext cx="734400" cy="6843240"/>
+            <a:ext cx="734040" cy="6842880"/>
           </a:xfrm>
           <a:prstGeom prst="rect">
             <a:avLst/>
@@ -1960,7 +1960,7 @@
         <p:spPr>
           <a:xfrm>
             <a:off x="11438640" y="6453360"/>
-            <a:ext cx="751320" cy="363960"/>
+            <a:ext cx="750960" cy="363960"/>
           </a:xfrm>
           <a:prstGeom prst="rect">
             <a:avLst/>
@@ -1986,7 +1986,7 @@
                 <a:spcPct val="100000"/>
               </a:lnSpc>
             </a:pPr>
-            <a:fld id="{D371301A-A820-4D81-9DBA-640B3FACFD6B}" type="slidenum">
+            <a:fld id="{A3743244-226C-4120-BA35-4AA26D2F2CA6}" type="slidenum">
               <a:rPr lang="en-US" sz="1800" b="0" u="none" strike="noStrike">
                 <a:solidFill>
                   <a:srgbClr val="808080"/>
@@ -2018,7 +2018,7 @@
         <p:spPr>
           <a:xfrm>
             <a:off x="0" y="6642720"/>
-            <a:ext cx="12177360" cy="211320"/>
+            <a:ext cx="12177000" cy="211320"/>
           </a:xfrm>
           <a:prstGeom prst="rect">
             <a:avLst/>
@@ -2518,7 +2518,7 @@
         <p:spPr>
           <a:xfrm>
             <a:off x="527400" y="1412640"/>
-            <a:ext cx="10354320" cy="1140840"/>
+            <a:ext cx="10353960" cy="1140480"/>
           </a:xfrm>
           <a:prstGeom prst="rect">
             <a:avLst/>
@@ -2576,7 +2576,7 @@
         <p:spPr>
           <a:xfrm>
             <a:off x="527400" y="2852640"/>
-            <a:ext cx="10354320" cy="2361600"/>
+            <a:ext cx="10353960" cy="2361240"/>
           </a:xfrm>
           <a:prstGeom prst="rect">
             <a:avLst/>
@@ -2832,7 +2832,7 @@
         <p:spPr>
           <a:xfrm>
             <a:off x="335520" y="764640"/>
-            <a:ext cx="10738440" cy="489240"/>
+            <a:ext cx="10738080" cy="488880"/>
           </a:xfrm>
           <a:prstGeom prst="rect">
             <a:avLst/>
@@ -2890,7 +2890,7 @@
         <p:spPr>
           <a:xfrm>
             <a:off x="335520" y="1268280"/>
-            <a:ext cx="10738440" cy="5025960"/>
+            <a:ext cx="10738080" cy="5025600"/>
           </a:xfrm>
           <a:prstGeom prst="rect">
             <a:avLst/>
@@ -3372,7 +3372,7 @@
         <p:spPr>
           <a:xfrm>
             <a:off x="335520" y="764640"/>
-            <a:ext cx="10737000" cy="487800"/>
+            <a:ext cx="10736640" cy="487440"/>
           </a:xfrm>
           <a:prstGeom prst="rect">
             <a:avLst/>
@@ -3460,7 +3460,7 @@
         <p:spPr>
           <a:xfrm>
             <a:off x="335520" y="1268640"/>
-            <a:ext cx="10737000" cy="5024520"/>
+            <a:ext cx="10736640" cy="5024160"/>
           </a:xfrm>
           <a:prstGeom prst="rect">
             <a:avLst/>
@@ -3943,7 +3943,7 @@
         <p:spPr>
           <a:xfrm>
             <a:off x="335520" y="764640"/>
-            <a:ext cx="10738440" cy="489240"/>
+            <a:ext cx="10738080" cy="488880"/>
           </a:xfrm>
           <a:prstGeom prst="rect">
             <a:avLst/>
@@ -4001,7 +4001,7 @@
         <p:spPr>
           <a:xfrm>
             <a:off x="335520" y="1268280"/>
-            <a:ext cx="10738440" cy="5025960"/>
+            <a:ext cx="10738080" cy="5025600"/>
           </a:xfrm>
           <a:prstGeom prst="rect">
             <a:avLst/>
@@ -4485,7 +4485,7 @@
         <p:spPr>
           <a:xfrm>
             <a:off x="335520" y="764640"/>
-            <a:ext cx="10738440" cy="489240"/>
+            <a:ext cx="10738080" cy="488880"/>
           </a:xfrm>
           <a:prstGeom prst="rect">
             <a:avLst/>
@@ -4543,7 +4543,7 @@
         <p:spPr>
           <a:xfrm>
             <a:off x="335520" y="1600200"/>
-            <a:ext cx="4464720" cy="4694400"/>
+            <a:ext cx="4464360" cy="4694040"/>
           </a:xfrm>
           <a:prstGeom prst="rect">
             <a:avLst/>
@@ -4714,7 +4714,7 @@
         <p:spPr>
           <a:xfrm>
             <a:off x="4655880" y="476640"/>
-            <a:ext cx="2424600" cy="350640"/>
+            <a:ext cx="2424240" cy="350280"/>
           </a:xfrm>
           <a:prstGeom prst="rect">
             <a:avLst/>
@@ -4759,7 +4759,7 @@
         <p:spPr>
           <a:xfrm>
             <a:off x="5715000" y="1448280"/>
-            <a:ext cx="4857120" cy="4759920"/>
+            <a:ext cx="4856760" cy="4759560"/>
           </a:xfrm>
           <a:prstGeom prst="rect">
             <a:avLst/>
@@ -4809,7 +4809,7 @@
         <p:spPr>
           <a:xfrm>
             <a:off x="335520" y="764640"/>
-            <a:ext cx="10738440" cy="489240"/>
+            <a:ext cx="10738080" cy="488880"/>
           </a:xfrm>
           <a:prstGeom prst="rect">
             <a:avLst/>
@@ -4867,7 +4867,7 @@
         <p:spPr>
           <a:xfrm>
             <a:off x="335520" y="1600200"/>
-            <a:ext cx="4464720" cy="4694400"/>
+            <a:ext cx="4464360" cy="4694040"/>
           </a:xfrm>
           <a:prstGeom prst="rect">
             <a:avLst/>
@@ -4969,7 +4969,7 @@
         <p:spPr>
           <a:xfrm>
             <a:off x="4655880" y="476640"/>
-            <a:ext cx="2424600" cy="350640"/>
+            <a:ext cx="2424240" cy="350280"/>
           </a:xfrm>
           <a:prstGeom prst="rect">
             <a:avLst/>
@@ -5014,7 +5014,7 @@
         <p:spPr>
           <a:xfrm>
             <a:off x="5715000" y="1448280"/>
-            <a:ext cx="4857120" cy="4759920"/>
+            <a:ext cx="4856760" cy="4759560"/>
           </a:xfrm>
           <a:prstGeom prst="rect">
             <a:avLst/>
@@ -5034,7 +5034,7 @@
         <p:spPr>
           <a:xfrm>
             <a:off x="5943600" y="5535000"/>
-            <a:ext cx="456840" cy="228240"/>
+            <a:ext cx="456480" cy="227880"/>
           </a:xfrm>
           <a:prstGeom prst="rightArrow">
             <a:avLst>
@@ -5112,7 +5112,7 @@
         <p:spPr>
           <a:xfrm>
             <a:off x="335520" y="764640"/>
-            <a:ext cx="10738440" cy="489240"/>
+            <a:ext cx="10738080" cy="488880"/>
           </a:xfrm>
           <a:prstGeom prst="rect">
             <a:avLst/>
@@ -5170,7 +5170,7 @@
         <p:spPr>
           <a:xfrm>
             <a:off x="335520" y="1600200"/>
-            <a:ext cx="4464720" cy="4694400"/>
+            <a:ext cx="4464360" cy="4694040"/>
           </a:xfrm>
           <a:prstGeom prst="rect">
             <a:avLst/>
@@ -5307,7 +5307,7 @@
         <p:spPr>
           <a:xfrm>
             <a:off x="4655880" y="476640"/>
-            <a:ext cx="2424600" cy="350640"/>
+            <a:ext cx="2424240" cy="350280"/>
           </a:xfrm>
           <a:prstGeom prst="rect">
             <a:avLst/>
@@ -5353,7 +5353,7 @@
         <p:spPr>
           <a:xfrm>
             <a:off x="5785920" y="1484280"/>
-            <a:ext cx="5293080" cy="4001760"/>
+            <a:ext cx="5292720" cy="4001400"/>
           </a:xfrm>
           <a:prstGeom prst="rect">
             <a:avLst/>
@@ -5373,7 +5373,7 @@
         <p:spPr>
           <a:xfrm>
             <a:off x="5680800" y="4343400"/>
-            <a:ext cx="456840" cy="228240"/>
+            <a:ext cx="456480" cy="227880"/>
           </a:xfrm>
           <a:prstGeom prst="rightArrow">
             <a:avLst>
@@ -5451,7 +5451,7 @@
         <p:spPr>
           <a:xfrm>
             <a:off x="335520" y="764640"/>
-            <a:ext cx="10738440" cy="489240"/>
+            <a:ext cx="10738080" cy="488880"/>
           </a:xfrm>
           <a:prstGeom prst="rect">
             <a:avLst/>
@@ -5509,7 +5509,7 @@
         <p:spPr>
           <a:xfrm>
             <a:off x="335520" y="1600200"/>
-            <a:ext cx="4464720" cy="4694400"/>
+            <a:ext cx="4464360" cy="4694040"/>
           </a:xfrm>
           <a:prstGeom prst="rect">
             <a:avLst/>
@@ -5681,7 +5681,7 @@
         <p:spPr>
           <a:xfrm>
             <a:off x="4655880" y="476640"/>
-            <a:ext cx="2424600" cy="350640"/>
+            <a:ext cx="2424240" cy="350280"/>
           </a:xfrm>
           <a:prstGeom prst="rect">
             <a:avLst/>
@@ -5727,7 +5727,7 @@
         <p:spPr>
           <a:xfrm>
             <a:off x="6172200" y="1600200"/>
-            <a:ext cx="4876200" cy="4263840"/>
+            <a:ext cx="4875840" cy="4263480"/>
           </a:xfrm>
           <a:prstGeom prst="rect">
             <a:avLst/>
@@ -5747,7 +5747,7 @@
         <p:spPr>
           <a:xfrm>
             <a:off x="6172200" y="4716000"/>
-            <a:ext cx="456840" cy="228240"/>
+            <a:ext cx="456480" cy="227880"/>
           </a:xfrm>
           <a:prstGeom prst="rightArrow">
             <a:avLst>
@@ -5825,7 +5825,7 @@
         <p:spPr>
           <a:xfrm>
             <a:off x="335520" y="764640"/>
-            <a:ext cx="10738440" cy="489240"/>
+            <a:ext cx="10738080" cy="488880"/>
           </a:xfrm>
           <a:prstGeom prst="rect">
             <a:avLst/>
@@ -5883,7 +5883,7 @@
         <p:spPr>
           <a:xfrm>
             <a:off x="335520" y="1600200"/>
-            <a:ext cx="4464720" cy="4694400"/>
+            <a:ext cx="4464360" cy="4694040"/>
           </a:xfrm>
           <a:prstGeom prst="rect">
             <a:avLst/>
@@ -6090,7 +6090,7 @@
         <p:spPr>
           <a:xfrm>
             <a:off x="4655880" y="476640"/>
-            <a:ext cx="2424600" cy="350640"/>
+            <a:ext cx="2424240" cy="350280"/>
           </a:xfrm>
           <a:prstGeom prst="rect">
             <a:avLst/>
@@ -6135,7 +6135,7 @@
         <p:spPr>
           <a:xfrm>
             <a:off x="6172200" y="1600200"/>
-            <a:ext cx="4343040" cy="4619880"/>
+            <a:ext cx="4342680" cy="4619520"/>
           </a:xfrm>
           <a:prstGeom prst="rect">
             <a:avLst/>
@@ -6185,7 +6185,7 @@
         <p:spPr>
           <a:xfrm>
             <a:off x="335520" y="764640"/>
-            <a:ext cx="10738440" cy="489240"/>
+            <a:ext cx="10738080" cy="488880"/>
           </a:xfrm>
           <a:prstGeom prst="rect">
             <a:avLst/>
@@ -6243,7 +6243,7 @@
         <p:spPr>
           <a:xfrm>
             <a:off x="335520" y="1600200"/>
-            <a:ext cx="10408320" cy="2742840"/>
+            <a:ext cx="10407960" cy="2742480"/>
           </a:xfrm>
           <a:prstGeom prst="rect">
             <a:avLst/>
@@ -6345,7 +6345,7 @@
         <p:spPr>
           <a:xfrm>
             <a:off x="4655880" y="476640"/>
-            <a:ext cx="2424600" cy="350640"/>
+            <a:ext cx="2424240" cy="350280"/>
           </a:xfrm>
           <a:prstGeom prst="rect">
             <a:avLst/>
@@ -6385,13 +6385,13 @@
         </p:nvPicPr>
         <p:blipFill>
           <a:blip r:embed="rId1"/>
-          <a:srcRect l="0" t="0" r="16551" b="0"/>
+          <a:srcRect l="0" t="0" r="16549" b="0"/>
           <a:stretch/>
         </p:blipFill>
         <p:spPr>
           <a:xfrm>
             <a:off x="1067400" y="4343400"/>
-            <a:ext cx="9219240" cy="1962000"/>
+            <a:ext cx="9218880" cy="1961640"/>
           </a:xfrm>
           <a:prstGeom prst="rect">
             <a:avLst/>
@@ -6441,7 +6441,7 @@
         <p:spPr>
           <a:xfrm>
             <a:off x="335520" y="764640"/>
-            <a:ext cx="10738440" cy="489240"/>
+            <a:ext cx="10738080" cy="488880"/>
           </a:xfrm>
           <a:prstGeom prst="rect">
             <a:avLst/>
@@ -6499,7 +6499,7 @@
         <p:spPr>
           <a:xfrm>
             <a:off x="335520" y="1600200"/>
-            <a:ext cx="10408320" cy="2742840"/>
+            <a:ext cx="10407960" cy="2742480"/>
           </a:xfrm>
           <a:prstGeom prst="rect">
             <a:avLst/>
@@ -6636,7 +6636,7 @@
         <p:spPr>
           <a:xfrm>
             <a:off x="4655880" y="476640"/>
-            <a:ext cx="2424600" cy="350640"/>
+            <a:ext cx="2424240" cy="350280"/>
           </a:xfrm>
           <a:prstGeom prst="rect">
             <a:avLst/>
@@ -6681,7 +6681,7 @@
         <p:spPr>
           <a:xfrm>
             <a:off x="2057400" y="3657600"/>
-            <a:ext cx="6495480" cy="2685240"/>
+            <a:ext cx="6495120" cy="2684880"/>
           </a:xfrm>
           <a:prstGeom prst="rect">
             <a:avLst/>
@@ -6731,7 +6731,7 @@
         <p:spPr>
           <a:xfrm>
             <a:off x="335520" y="764640"/>
-            <a:ext cx="10736280" cy="487080"/>
+            <a:ext cx="10735920" cy="486720"/>
           </a:xfrm>
           <a:prstGeom prst="rect">
             <a:avLst/>
@@ -6789,7 +6789,7 @@
         <p:spPr>
           <a:xfrm>
             <a:off x="335520" y="1268640"/>
-            <a:ext cx="10736280" cy="5023800"/>
+            <a:ext cx="10735920" cy="5023440"/>
           </a:xfrm>
           <a:prstGeom prst="rect">
             <a:avLst/>
@@ -6830,7 +6830,7 @@
         <p:spPr>
           <a:xfrm>
             <a:off x="336600" y="3429000"/>
-            <a:ext cx="10854000" cy="2045880"/>
+            <a:ext cx="10853640" cy="2045520"/>
           </a:xfrm>
           <a:prstGeom prst="rect">
             <a:avLst/>
@@ -7043,7 +7043,7 @@
         <p:spPr>
           <a:xfrm>
             <a:off x="335520" y="764640"/>
-            <a:ext cx="10738440" cy="489240"/>
+            <a:ext cx="10738080" cy="488880"/>
           </a:xfrm>
           <a:prstGeom prst="rect">
             <a:avLst/>
@@ -7101,7 +7101,7 @@
         <p:spPr>
           <a:xfrm>
             <a:off x="335520" y="1600200"/>
-            <a:ext cx="10408320" cy="2742840"/>
+            <a:ext cx="10407960" cy="2742480"/>
           </a:xfrm>
           <a:prstGeom prst="rect">
             <a:avLst/>
@@ -7273,7 +7273,7 @@
         <p:spPr>
           <a:xfrm>
             <a:off x="4655880" y="476640"/>
-            <a:ext cx="2424600" cy="350640"/>
+            <a:ext cx="2424240" cy="350280"/>
           </a:xfrm>
           <a:prstGeom prst="rect">
             <a:avLst/>
@@ -7318,7 +7318,7 @@
         <p:spPr>
           <a:xfrm>
             <a:off x="2124360" y="3706200"/>
-            <a:ext cx="5876280" cy="2694240"/>
+            <a:ext cx="5875920" cy="2693880"/>
           </a:xfrm>
           <a:prstGeom prst="rect">
             <a:avLst/>
@@ -7368,7 +7368,7 @@
         <p:spPr>
           <a:xfrm>
             <a:off x="335520" y="764640"/>
-            <a:ext cx="10738440" cy="489240"/>
+            <a:ext cx="10738080" cy="488880"/>
           </a:xfrm>
           <a:prstGeom prst="rect">
             <a:avLst/>
@@ -7426,7 +7426,7 @@
         <p:spPr>
           <a:xfrm>
             <a:off x="335520" y="1600200"/>
-            <a:ext cx="10408320" cy="2742840"/>
+            <a:ext cx="10407960" cy="2742480"/>
           </a:xfrm>
           <a:prstGeom prst="rect">
             <a:avLst/>
@@ -7598,7 +7598,7 @@
         <p:spPr>
           <a:xfrm>
             <a:off x="4655880" y="476640"/>
-            <a:ext cx="2424600" cy="350640"/>
+            <a:ext cx="2424240" cy="350280"/>
           </a:xfrm>
           <a:prstGeom prst="rect">
             <a:avLst/>
@@ -7638,13 +7638,13 @@
         </p:nvPicPr>
         <p:blipFill>
           <a:blip r:embed="rId1"/>
-          <a:srcRect l="0" t="24691" r="0" b="0"/>
+          <a:srcRect l="0" t="24687" r="0" b="0"/>
           <a:stretch/>
         </p:blipFill>
         <p:spPr>
           <a:xfrm>
             <a:off x="5063400" y="3056400"/>
-            <a:ext cx="5656320" cy="3656880"/>
+            <a:ext cx="5655960" cy="3656520"/>
           </a:xfrm>
           <a:prstGeom prst="rect">
             <a:avLst/>
@@ -7694,7 +7694,7 @@
         <p:spPr>
           <a:xfrm>
             <a:off x="335520" y="764640"/>
-            <a:ext cx="10738440" cy="489240"/>
+            <a:ext cx="10738080" cy="488880"/>
           </a:xfrm>
           <a:prstGeom prst="rect">
             <a:avLst/>
@@ -7752,7 +7752,7 @@
         <p:spPr>
           <a:xfrm>
             <a:off x="335520" y="1600200"/>
-            <a:ext cx="10408320" cy="2742840"/>
+            <a:ext cx="10407960" cy="2742480"/>
           </a:xfrm>
           <a:prstGeom prst="rect">
             <a:avLst/>
@@ -7945,7 +7945,7 @@
         <p:spPr>
           <a:xfrm>
             <a:off x="4655880" y="476640"/>
-            <a:ext cx="2424600" cy="350640"/>
+            <a:ext cx="2424240" cy="350280"/>
           </a:xfrm>
           <a:prstGeom prst="rect">
             <a:avLst/>
@@ -8016,7 +8016,7 @@
         <p:spPr>
           <a:xfrm>
             <a:off x="335520" y="764640"/>
-            <a:ext cx="10738440" cy="489240"/>
+            <a:ext cx="10738080" cy="488880"/>
           </a:xfrm>
           <a:prstGeom prst="rect">
             <a:avLst/>
@@ -8074,7 +8074,7 @@
         <p:spPr>
           <a:xfrm>
             <a:off x="335520" y="1600200"/>
-            <a:ext cx="10408320" cy="2742840"/>
+            <a:ext cx="10407960" cy="2742480"/>
           </a:xfrm>
           <a:prstGeom prst="rect">
             <a:avLst/>
@@ -8303,7 +8303,7 @@
         <p:spPr>
           <a:xfrm>
             <a:off x="4655880" y="476640"/>
-            <a:ext cx="2424600" cy="350640"/>
+            <a:ext cx="2424240" cy="350280"/>
           </a:xfrm>
           <a:prstGeom prst="rect">
             <a:avLst/>
@@ -8348,7 +8348,7 @@
         <p:spPr>
           <a:xfrm>
             <a:off x="2372040" y="3657600"/>
-            <a:ext cx="7228800" cy="2856960"/>
+            <a:ext cx="7228440" cy="2856600"/>
           </a:xfrm>
           <a:prstGeom prst="rect">
             <a:avLst/>
@@ -8398,7 +8398,7 @@
         <p:spPr>
           <a:xfrm>
             <a:off x="335520" y="764640"/>
-            <a:ext cx="10738440" cy="489240"/>
+            <a:ext cx="10738080" cy="488880"/>
           </a:xfrm>
           <a:prstGeom prst="rect">
             <a:avLst/>
@@ -8456,7 +8456,7 @@
         <p:spPr>
           <a:xfrm>
             <a:off x="335520" y="1600200"/>
-            <a:ext cx="10408320" cy="2742840"/>
+            <a:ext cx="10407960" cy="2742480"/>
           </a:xfrm>
           <a:prstGeom prst="rect">
             <a:avLst/>
@@ -8721,7 +8721,7 @@
         <p:spPr>
           <a:xfrm>
             <a:off x="4655880" y="476640"/>
-            <a:ext cx="2424600" cy="350640"/>
+            <a:ext cx="2424240" cy="350280"/>
           </a:xfrm>
           <a:prstGeom prst="rect">
             <a:avLst/>
@@ -8766,7 +8766,7 @@
         <p:spPr>
           <a:xfrm>
             <a:off x="2971800" y="3777480"/>
-            <a:ext cx="6171840" cy="2622960"/>
+            <a:ext cx="6171480" cy="2622600"/>
           </a:xfrm>
           <a:prstGeom prst="rect">
             <a:avLst/>
@@ -8816,7 +8816,7 @@
         <p:spPr>
           <a:xfrm>
             <a:off x="335520" y="764640"/>
-            <a:ext cx="10738440" cy="489240"/>
+            <a:ext cx="10738080" cy="488880"/>
           </a:xfrm>
           <a:prstGeom prst="rect">
             <a:avLst/>
@@ -8874,7 +8874,7 @@
         <p:spPr>
           <a:xfrm>
             <a:off x="335520" y="1600200"/>
-            <a:ext cx="10408320" cy="2742840"/>
+            <a:ext cx="10407960" cy="2742480"/>
           </a:xfrm>
           <a:prstGeom prst="rect">
             <a:avLst/>
@@ -9175,7 +9175,7 @@
         <p:spPr>
           <a:xfrm>
             <a:off x="4655880" y="476640"/>
-            <a:ext cx="2424600" cy="350640"/>
+            <a:ext cx="2424240" cy="350280"/>
           </a:xfrm>
           <a:prstGeom prst="rect">
             <a:avLst/>
@@ -9246,7 +9246,7 @@
         <p:spPr>
           <a:xfrm>
             <a:off x="335520" y="768240"/>
-            <a:ext cx="10738440" cy="489240"/>
+            <a:ext cx="10738080" cy="488880"/>
           </a:xfrm>
           <a:prstGeom prst="rect">
             <a:avLst/>
@@ -9304,7 +9304,7 @@
         <p:spPr>
           <a:xfrm>
             <a:off x="388800" y="1488600"/>
-            <a:ext cx="10712160" cy="3505320"/>
+            <a:ext cx="10711800" cy="3505320"/>
           </a:xfrm>
           <a:prstGeom prst="rect">
             <a:avLst/>
@@ -9719,7 +9719,7 @@
         <p:spPr>
           <a:xfrm>
             <a:off x="335520" y="768240"/>
-            <a:ext cx="10738440" cy="489240"/>
+            <a:ext cx="10738080" cy="488880"/>
           </a:xfrm>
           <a:prstGeom prst="rect">
             <a:avLst/>
@@ -9777,7 +9777,7 @@
         <p:spPr>
           <a:xfrm>
             <a:off x="388800" y="1488600"/>
-            <a:ext cx="10712160" cy="3505320"/>
+            <a:ext cx="10711800" cy="3505320"/>
           </a:xfrm>
           <a:prstGeom prst="rect">
             <a:avLst/>
@@ -10216,7 +10216,7 @@
         <p:spPr>
           <a:xfrm>
             <a:off x="335520" y="764640"/>
-            <a:ext cx="10738440" cy="489240"/>
+            <a:ext cx="10738080" cy="488880"/>
           </a:xfrm>
           <a:prstGeom prst="rect">
             <a:avLst/>
@@ -10278,7 +10278,7 @@
         <p:spPr>
           <a:xfrm>
             <a:off x="3200400" y="685800"/>
-            <a:ext cx="5273280" cy="5997960"/>
+            <a:ext cx="5272920" cy="5997600"/>
           </a:xfrm>
           <a:prstGeom prst="rect">
             <a:avLst/>
@@ -10328,7 +10328,7 @@
         <p:spPr>
           <a:xfrm>
             <a:off x="335520" y="764640"/>
-            <a:ext cx="10738440" cy="489240"/>
+            <a:ext cx="10738080" cy="488880"/>
           </a:xfrm>
           <a:prstGeom prst="rect">
             <a:avLst/>
@@ -10390,7 +10390,7 @@
         <p:spPr>
           <a:xfrm>
             <a:off x="1600200" y="1600200"/>
-            <a:ext cx="8359560" cy="4628160"/>
+            <a:ext cx="8359200" cy="4627800"/>
           </a:xfrm>
           <a:prstGeom prst="rect">
             <a:avLst/>
@@ -10440,7 +10440,7 @@
         <p:spPr>
           <a:xfrm>
             <a:off x="335520" y="764640"/>
-            <a:ext cx="10738440" cy="489240"/>
+            <a:ext cx="10738080" cy="488880"/>
           </a:xfrm>
           <a:prstGeom prst="rect">
             <a:avLst/>
@@ -10502,7 +10502,7 @@
         <p:spPr>
           <a:xfrm>
             <a:off x="4923720" y="1257120"/>
-            <a:ext cx="1461240" cy="2162520"/>
+            <a:ext cx="1460880" cy="2162160"/>
           </a:xfrm>
           <a:prstGeom prst="rect">
             <a:avLst/>
@@ -10526,7 +10526,7 @@
         <p:spPr>
           <a:xfrm>
             <a:off x="2207880" y="4110120"/>
-            <a:ext cx="1775160" cy="1767240"/>
+            <a:ext cx="1774800" cy="1766880"/>
           </a:xfrm>
           <a:prstGeom prst="rect">
             <a:avLst/>
@@ -10546,7 +10546,7 @@
         <p:spPr>
           <a:xfrm>
             <a:off x="3859200" y="3373200"/>
-            <a:ext cx="3625920" cy="667440"/>
+            <a:ext cx="3625560" cy="667080"/>
           </a:xfrm>
           <a:prstGeom prst="rect">
             <a:avLst/>
@@ -10607,7 +10607,7 @@
         <p:spPr>
           <a:xfrm>
             <a:off x="1312200" y="5920200"/>
-            <a:ext cx="3625920" cy="667440"/>
+            <a:ext cx="3625560" cy="667080"/>
           </a:xfrm>
           <a:prstGeom prst="rect">
             <a:avLst/>
@@ -10648,7 +10648,7 @@
         <p:spPr>
           <a:xfrm>
             <a:off x="1312200" y="5807160"/>
-            <a:ext cx="3625920" cy="667440"/>
+            <a:ext cx="3625560" cy="667080"/>
           </a:xfrm>
           <a:prstGeom prst="rect">
             <a:avLst/>
@@ -10709,7 +10709,7 @@
         <p:spPr>
           <a:xfrm>
             <a:off x="4860000" y="5920200"/>
-            <a:ext cx="3625920" cy="667440"/>
+            <a:ext cx="3625560" cy="667080"/>
           </a:xfrm>
           <a:prstGeom prst="rect">
             <a:avLst/>
@@ -10750,7 +10750,7 @@
         <p:spPr>
           <a:xfrm>
             <a:off x="6300000" y="5807160"/>
-            <a:ext cx="3625920" cy="667440"/>
+            <a:ext cx="3625560" cy="667080"/>
           </a:xfrm>
           <a:prstGeom prst="rect">
             <a:avLst/>
@@ -10816,7 +10816,7 @@
         <p:spPr>
           <a:xfrm>
             <a:off x="7203960" y="4143960"/>
-            <a:ext cx="1794600" cy="1794600"/>
+            <a:ext cx="1794240" cy="1794240"/>
           </a:xfrm>
           <a:prstGeom prst="rect">
             <a:avLst/>
@@ -10866,7 +10866,7 @@
         <p:spPr>
           <a:xfrm>
             <a:off x="335520" y="764640"/>
-            <a:ext cx="10738440" cy="489240"/>
+            <a:ext cx="10738080" cy="488880"/>
           </a:xfrm>
           <a:prstGeom prst="rect">
             <a:avLst/>
@@ -10924,7 +10924,7 @@
         <p:spPr>
           <a:xfrm>
             <a:off x="335520" y="1268640"/>
-            <a:ext cx="10738440" cy="5025960"/>
+            <a:ext cx="10738080" cy="5025600"/>
           </a:xfrm>
           <a:prstGeom prst="rect">
             <a:avLst/>
@@ -11195,7 +11195,7 @@
         <p:spPr>
           <a:xfrm>
             <a:off x="335520" y="764640"/>
-            <a:ext cx="10736640" cy="487440"/>
+            <a:ext cx="10736280" cy="487080"/>
           </a:xfrm>
           <a:prstGeom prst="rect">
             <a:avLst/>
@@ -11253,7 +11253,7 @@
         <p:spPr>
           <a:xfrm>
             <a:off x="335520" y="1268280"/>
-            <a:ext cx="10736640" cy="5024160"/>
+            <a:ext cx="10736280" cy="5023800"/>
           </a:xfrm>
           <a:prstGeom prst="rect">
             <a:avLst/>
@@ -11359,7 +11359,7 @@
         <p:spPr>
           <a:xfrm>
             <a:off x="6285600" y="2132640"/>
-            <a:ext cx="506160" cy="486000"/>
+            <a:ext cx="505800" cy="485640"/>
           </a:xfrm>
           <a:prstGeom prst="star5">
             <a:avLst>
@@ -11416,7 +11416,7 @@
         <p:spPr>
           <a:xfrm>
             <a:off x="4089960" y="2247480"/>
-            <a:ext cx="2274480" cy="363960"/>
+            <a:ext cx="2274120" cy="363960"/>
           </a:xfrm>
           <a:prstGeom prst="rect">
             <a:avLst/>
@@ -11528,7 +11528,7 @@
         <p:spPr>
           <a:xfrm>
             <a:off x="335520" y="764640"/>
-            <a:ext cx="10736640" cy="487440"/>
+            <a:ext cx="10736280" cy="487080"/>
           </a:xfrm>
           <a:prstGeom prst="rect">
             <a:avLst/>
@@ -11586,7 +11586,7 @@
         <p:spPr>
           <a:xfrm>
             <a:off x="335520" y="1268640"/>
-            <a:ext cx="10736640" cy="5024160"/>
+            <a:ext cx="10736280" cy="5023800"/>
           </a:xfrm>
           <a:prstGeom prst="rect">
             <a:avLst/>
@@ -11655,19 +11655,7 @@
                 <a:latin typeface="DejaVu Sans"/>
                 <a:ea typeface="DejaVu Sans"/>
               </a:rPr>
-              <a:t> need to buy a book to pass the </a:t>
-            </a:r>
-            <a:r>
-              <a:rPr lang="en-US" sz="1800" b="0" u="none" strike="noStrike">
-                <a:solidFill>
-                  <a:srgbClr val="000000"/>
-                </a:solidFill>
-                <a:effectLst/>
-                <a:uFillTx/>
-                <a:latin typeface="DejaVu Sans"/>
-                <a:ea typeface="DejaVu Sans"/>
-              </a:rPr>
-              <a:t>exam.</a:t>
+              <a:t> need to buy a book to pass the exam.</a:t>
             </a:r>
             <a:endParaRPr lang="en-US" sz="1800" b="0" u="none" strike="noStrike">
               <a:solidFill>
@@ -11745,19 +11733,7 @@
                 <a:latin typeface="DejaVu Sans"/>
                 <a:ea typeface="DejaVu Sans"/>
               </a:rPr>
-              <a:t> </a:t>
-            </a:r>
-            <a:r>
-              <a:rPr lang="en-US" sz="1800" b="0" u="none" strike="noStrike">
-                <a:solidFill>
-                  <a:srgbClr val="000000"/>
-                </a:solidFill>
-                <a:effectLst/>
-                <a:uFillTx/>
-                <a:latin typeface="DejaVu Sans"/>
-                <a:ea typeface="DejaVu Sans"/>
-              </a:rPr>
-              <a:t>(1972).</a:t>
+              <a:t> (1972).</a:t>
             </a:r>
             <a:endParaRPr lang="en-US" sz="1800" b="0" u="none" strike="noStrike">
               <a:solidFill>
@@ -11805,19 +11781,7 @@
                 <a:latin typeface="DejaVu Sans"/>
                 <a:ea typeface="DejaVu Sans"/>
               </a:rPr>
-              <a:t>Limits To Growth: The 30-</a:t>
-            </a:r>
-            <a:r>
-              <a:rPr lang="en-US" sz="1800" b="0" i="1" u="none" strike="noStrike">
-                <a:solidFill>
-                  <a:srgbClr val="000000"/>
-                </a:solidFill>
-                <a:effectLst/>
-                <a:uFillTx/>
-                <a:latin typeface="DejaVu Sans"/>
-                <a:ea typeface="DejaVu Sans"/>
-              </a:rPr>
-              <a:t>Year Update</a:t>
+              <a:t>Limits To Growth: The 30-Year Update</a:t>
             </a:r>
             <a:r>
               <a:rPr lang="en-US" sz="1800" b="0" u="none" strike="noStrike">
@@ -12181,7 +12145,7 @@
         <p:spPr>
           <a:xfrm>
             <a:off x="335520" y="764640"/>
-            <a:ext cx="10738440" cy="489240"/>
+            <a:ext cx="10738080" cy="488880"/>
           </a:xfrm>
           <a:prstGeom prst="rect">
             <a:avLst/>
@@ -12239,7 +12203,7 @@
         <p:spPr>
           <a:xfrm>
             <a:off x="335520" y="1268640"/>
-            <a:ext cx="10738440" cy="5025960"/>
+            <a:ext cx="10738080" cy="5025600"/>
           </a:xfrm>
           <a:prstGeom prst="rect">
             <a:avLst/>
@@ -12558,7 +12522,7 @@
         <p:spPr>
           <a:xfrm>
             <a:off x="335520" y="1268640"/>
-            <a:ext cx="10738440" cy="5025960"/>
+            <a:ext cx="10738080" cy="5025600"/>
           </a:xfrm>
           <a:prstGeom prst="rect">
             <a:avLst/>
@@ -12622,7 +12586,7 @@
         <p:spPr>
           <a:xfrm>
             <a:off x="335520" y="764640"/>
-            <a:ext cx="10738440" cy="489240"/>
+            <a:ext cx="10738080" cy="488880"/>
           </a:xfrm>
           <a:prstGeom prst="rect">
             <a:avLst/>
@@ -12693,7 +12657,7 @@
         <p:spPr>
           <a:xfrm>
             <a:off x="542880" y="721800"/>
-            <a:ext cx="10342800" cy="483480"/>
+            <a:ext cx="10342440" cy="483120"/>
           </a:xfrm>
           <a:prstGeom prst="rect">
             <a:avLst/>
@@ -12751,7 +12715,7 @@
         <p:spPr>
           <a:xfrm>
             <a:off x="451800" y="1709280"/>
-            <a:ext cx="8210160" cy="4338360"/>
+            <a:ext cx="8209800" cy="4338000"/>
           </a:xfrm>
           <a:prstGeom prst="rect">
             <a:avLst/>
@@ -12792,7 +12756,7 @@
         <p:spPr>
           <a:xfrm>
             <a:off x="609480" y="1769400"/>
-            <a:ext cx="10573200" cy="4841280"/>
+            <a:ext cx="10572840" cy="4840920"/>
           </a:xfrm>
           <a:prstGeom prst="rect">
             <a:avLst/>
@@ -13273,7 +13237,7 @@
         <p:spPr>
           <a:xfrm>
             <a:off x="542880" y="721800"/>
-            <a:ext cx="10342800" cy="483480"/>
+            <a:ext cx="10342440" cy="483120"/>
           </a:xfrm>
           <a:prstGeom prst="rect">
             <a:avLst/>
@@ -13331,7 +13295,7 @@
         <p:spPr>
           <a:xfrm>
             <a:off x="451800" y="1709280"/>
-            <a:ext cx="8210160" cy="4338360"/>
+            <a:ext cx="8209800" cy="4338000"/>
           </a:xfrm>
           <a:prstGeom prst="rect">
             <a:avLst/>
@@ -13372,7 +13336,7 @@
         <p:spPr>
           <a:xfrm>
             <a:off x="609480" y="1769400"/>
-            <a:ext cx="10573200" cy="4841280"/>
+            <a:ext cx="10572840" cy="4840920"/>
           </a:xfrm>
           <a:prstGeom prst="rect">
             <a:avLst/>
@@ -13653,7 +13617,7 @@
         <p:spPr>
           <a:xfrm>
             <a:off x="542880" y="721800"/>
-            <a:ext cx="10342800" cy="483480"/>
+            <a:ext cx="10342440" cy="483120"/>
           </a:xfrm>
           <a:prstGeom prst="rect">
             <a:avLst/>
@@ -13711,7 +13675,7 @@
         <p:spPr>
           <a:xfrm>
             <a:off x="451800" y="1709280"/>
-            <a:ext cx="8210160" cy="4338360"/>
+            <a:ext cx="8209800" cy="4338000"/>
           </a:xfrm>
           <a:prstGeom prst="rect">
             <a:avLst/>
@@ -13752,7 +13716,7 @@
         <p:spPr>
           <a:xfrm>
             <a:off x="609480" y="1769400"/>
-            <a:ext cx="10573200" cy="4841280"/>
+            <a:ext cx="10572840" cy="4840920"/>
           </a:xfrm>
           <a:prstGeom prst="rect">
             <a:avLst/>
@@ -14033,7 +13997,7 @@
         <p:spPr>
           <a:xfrm>
             <a:off x="335520" y="764640"/>
-            <a:ext cx="10738440" cy="489240"/>
+            <a:ext cx="10738080" cy="488880"/>
           </a:xfrm>
           <a:prstGeom prst="rect">
             <a:avLst/>
@@ -14106,7 +14070,7 @@
         <p:spPr>
           <a:xfrm>
             <a:off x="335520" y="2408400"/>
-            <a:ext cx="10738440" cy="3886200"/>
+            <a:ext cx="10738080" cy="3885840"/>
           </a:xfrm>
           <a:prstGeom prst="rect">
             <a:avLst/>
@@ -14347,7 +14311,7 @@
         <p:spPr>
           <a:xfrm>
             <a:off x="335520" y="764640"/>
-            <a:ext cx="10738440" cy="489240"/>
+            <a:ext cx="10738080" cy="488880"/>
           </a:xfrm>
           <a:prstGeom prst="rect">
             <a:avLst/>
@@ -14405,7 +14369,7 @@
         <p:spPr>
           <a:xfrm>
             <a:off x="335520" y="1268640"/>
-            <a:ext cx="10738440" cy="5025960"/>
+            <a:ext cx="10738080" cy="5025600"/>
           </a:xfrm>
           <a:prstGeom prst="rect">
             <a:avLst/>
@@ -14916,7 +14880,7 @@
         <p:spPr>
           <a:xfrm>
             <a:off x="335520" y="764640"/>
-            <a:ext cx="10738440" cy="489240"/>
+            <a:ext cx="10738080" cy="488880"/>
           </a:xfrm>
           <a:prstGeom prst="rect">
             <a:avLst/>
@@ -14952,7 +14916,7 @@
                 <a:latin typeface="DejaVu Sans"/>
                 <a:ea typeface="DejaVu Sans"/>
               </a:rPr>
-              <a:t>Exercise Deadlines</a:t>
+              <a:t>Exercises (Deadlines)</a:t>
             </a:r>
             <a:endParaRPr lang="en-US" sz="2400" b="0" u="none" strike="noStrike">
               <a:solidFill>
@@ -14974,7 +14938,7 @@
         <p:spPr>
           <a:xfrm>
             <a:off x="335520" y="1268640"/>
-            <a:ext cx="10738440" cy="5025960"/>
+            <a:ext cx="10738080" cy="5025600"/>
           </a:xfrm>
           <a:prstGeom prst="rect">
             <a:avLst/>

--- a/Emerging-Technologies-for-the-Circular-Economy/ETCE-L00-Organization.pptx
+++ b/Emerging-Technologies-for-the-Circular-Economy/ETCE-L00-Organization.pptx
@@ -78,8 +78,8 @@
         </p:nvSpPr>
         <p:spPr>
           <a:xfrm>
-            <a:off x="533520" y="764280"/>
-            <a:ext cx="6704640" cy="3771360"/>
+            <a:off x="216000" y="812520"/>
+            <a:ext cx="7127280" cy="4008960"/>
           </a:xfrm>
           <a:prstGeom prst="rect">
             <a:avLst/>
@@ -90,12 +90,13 @@
           </a:ln>
         </p:spPr>
         <p:txBody>
-          <a:bodyPr lIns="0" tIns="0" rIns="0" bIns="0" anchor="ctr">
+          <a:bodyPr lIns="0" rIns="0" tIns="0" bIns="0" anchor="ctr">
             <a:noAutofit/>
           </a:bodyPr>
           <a:p>
-            <a:r>
-              <a:rPr lang="en-US" sz="4400" b="0" u="none" strike="noStrike">
+            <a:pPr algn="ctr"/>
+            <a:r>
+              <a:rPr lang="en-GB" sz="4400" b="0" u="none" strike="noStrike">
                 <a:solidFill>
                   <a:srgbClr val="000000"/>
                 </a:solidFill>
@@ -105,7 +106,7 @@
               </a:rPr>
               <a:t>Click to move the slide</a:t>
             </a:r>
-            <a:endParaRPr lang="en-US" sz="4400" b="0" u="none" strike="noStrike">
+            <a:endParaRPr lang="en-GB" sz="4400" b="0" u="none" strike="noStrike">
               <a:solidFill>
                 <a:srgbClr val="000000"/>
               </a:solidFill>
@@ -128,8 +129,8 @@
         </p:nvSpPr>
         <p:spPr>
           <a:xfrm>
-            <a:off x="777240" y="4777560"/>
-            <a:ext cx="6217560" cy="4525920"/>
+            <a:off x="756000" y="5078520"/>
+            <a:ext cx="6047640" cy="4811040"/>
           </a:xfrm>
           <a:prstGeom prst="rect">
             <a:avLst/>
@@ -140,15 +141,15 @@
           </a:ln>
         </p:spPr>
         <p:txBody>
-          <a:bodyPr lIns="0" tIns="0" rIns="0" bIns="0" anchor="t">
+          <a:bodyPr lIns="0" rIns="0" tIns="0" bIns="0" anchor="t">
             <a:noAutofit/>
           </a:bodyPr>
           <a:p>
-            <a:pPr indent="0" algn="l">
+            <a:pPr indent="0">
               <a:buNone/>
             </a:pPr>
             <a:r>
-              <a:rPr lang="en-US" sz="2000" b="0" u="none" strike="noStrike">
+              <a:rPr lang="en-GB" sz="2000" b="0" u="none" strike="noStrike">
                 <a:solidFill>
                   <a:srgbClr val="000000"/>
                 </a:solidFill>
@@ -158,7 +159,7 @@
               </a:rPr>
               <a:t>Click to edit the notes format</a:t>
             </a:r>
-            <a:endParaRPr lang="en-US" sz="2000" b="0" u="none" strike="noStrike">
+            <a:endParaRPr lang="en-GB" sz="2000" b="0" u="none" strike="noStrike">
               <a:solidFill>
                 <a:srgbClr val="000000"/>
               </a:solidFill>
@@ -182,7 +183,7 @@
         <p:spPr>
           <a:xfrm>
             <a:off x="0" y="0"/>
-            <a:ext cx="3372840" cy="502560"/>
+            <a:ext cx="3280680" cy="534240"/>
           </a:xfrm>
           <a:prstGeom prst="rect">
             <a:avLst/>
@@ -193,15 +194,15 @@
           </a:ln>
         </p:spPr>
         <p:txBody>
-          <a:bodyPr lIns="0" tIns="0" rIns="0" bIns="0" anchor="t">
+          <a:bodyPr lIns="0" rIns="0" tIns="0" bIns="0" anchor="t">
             <a:noAutofit/>
           </a:bodyPr>
           <a:p>
-            <a:pPr indent="0" algn="l">
+            <a:pPr indent="0">
               <a:buNone/>
             </a:pPr>
             <a:r>
-              <a:rPr lang="en-US" sz="1400" b="0" u="none" strike="noStrike">
+              <a:rPr lang="en-GB" sz="1400" b="0" u="none" strike="noStrike">
                 <a:solidFill>
                   <a:srgbClr val="000000"/>
                 </a:solidFill>
@@ -211,7 +212,7 @@
               </a:rPr>
               <a:t> </a:t>
             </a:r>
-            <a:endParaRPr lang="en-US" sz="1400" b="0" u="none" strike="noStrike">
+            <a:endParaRPr lang="en-GB" sz="1400" b="0" u="none" strike="noStrike">
               <a:solidFill>
                 <a:srgbClr val="000000"/>
               </a:solidFill>
@@ -234,8 +235,8 @@
         </p:nvSpPr>
         <p:spPr>
           <a:xfrm>
-            <a:off x="4399200" y="0"/>
-            <a:ext cx="3372840" cy="502560"/>
+            <a:off x="4278960" y="0"/>
+            <a:ext cx="3280680" cy="534240"/>
           </a:xfrm>
           <a:prstGeom prst="rect">
             <a:avLst/>
@@ -246,13 +247,13 @@
           </a:ln>
         </p:spPr>
         <p:txBody>
-          <a:bodyPr lIns="0" tIns="0" rIns="0" bIns="0" anchor="t">
+          <a:bodyPr lIns="0" rIns="0" tIns="0" bIns="0" anchor="t">
             <a:noAutofit/>
           </a:bodyPr>
           <a:lstStyle>
             <a:lvl1pPr indent="0" algn="r">
               <a:buNone/>
-              <a:defRPr lang="en-US" sz="1400" b="0" u="none" strike="noStrike">
+              <a:defRPr lang="en-GB" sz="1400" b="0" u="none" strike="noStrike">
                 <a:solidFill>
                   <a:srgbClr val="000000"/>
                 </a:solidFill>
@@ -267,7 +268,7 @@
               <a:buNone/>
             </a:pPr>
             <a:r>
-              <a:rPr lang="en-US" sz="1400" b="0" u="none" strike="noStrike">
+              <a:rPr lang="en-GB" sz="1400" b="0" u="none" strike="noStrike">
                 <a:solidFill>
                   <a:srgbClr val="000000"/>
                 </a:solidFill>
@@ -277,7 +278,7 @@
               </a:rPr>
               <a:t> </a:t>
             </a:r>
-            <a:endParaRPr lang="en-US" sz="1400" b="0" u="none" strike="noStrike">
+            <a:endParaRPr lang="en-GB" sz="1400" b="0" u="none" strike="noStrike">
               <a:solidFill>
                 <a:srgbClr val="000000"/>
               </a:solidFill>
@@ -300,8 +301,8 @@
         </p:nvSpPr>
         <p:spPr>
           <a:xfrm>
-            <a:off x="0" y="9555480"/>
-            <a:ext cx="3372840" cy="502560"/>
+            <a:off x="0" y="10157400"/>
+            <a:ext cx="3280680" cy="534240"/>
           </a:xfrm>
           <a:prstGeom prst="rect">
             <a:avLst/>
@@ -312,13 +313,13 @@
           </a:ln>
         </p:spPr>
         <p:txBody>
-          <a:bodyPr lIns="0" tIns="0" rIns="0" bIns="0" anchor="b">
+          <a:bodyPr lIns="0" rIns="0" tIns="0" bIns="0" anchor="b">
             <a:noAutofit/>
           </a:bodyPr>
           <a:lstStyle>
-            <a:lvl1pPr indent="0" algn="l">
+            <a:lvl1pPr indent="0">
               <a:buNone/>
-              <a:defRPr lang="en-US" sz="1400" b="0" u="none" strike="noStrike">
+              <a:defRPr lang="en-GB" sz="1400" b="0" u="none" strike="noStrike">
                 <a:solidFill>
                   <a:srgbClr val="000000"/>
                 </a:solidFill>
@@ -329,11 +330,11 @@
             </a:lvl1pPr>
           </a:lstStyle>
           <a:p>
-            <a:pPr indent="0" algn="l">
+            <a:pPr indent="0">
               <a:buNone/>
             </a:pPr>
             <a:r>
-              <a:rPr lang="en-US" sz="1400" b="0" u="none" strike="noStrike">
+              <a:rPr lang="en-GB" sz="1400" b="0" u="none" strike="noStrike">
                 <a:solidFill>
                   <a:srgbClr val="000000"/>
                 </a:solidFill>
@@ -343,7 +344,7 @@
               </a:rPr>
               <a:t> </a:t>
             </a:r>
-            <a:endParaRPr lang="en-US" sz="1400" b="0" u="none" strike="noStrike">
+            <a:endParaRPr lang="en-GB" sz="1400" b="0" u="none" strike="noStrike">
               <a:solidFill>
                 <a:srgbClr val="000000"/>
               </a:solidFill>
@@ -366,8 +367,8 @@
         </p:nvSpPr>
         <p:spPr>
           <a:xfrm>
-            <a:off x="4399200" y="9555480"/>
-            <a:ext cx="3372840" cy="502560"/>
+            <a:off x="4278960" y="10157400"/>
+            <a:ext cx="3280680" cy="534240"/>
           </a:xfrm>
           <a:prstGeom prst="rect">
             <a:avLst/>
@@ -378,13 +379,13 @@
           </a:ln>
         </p:spPr>
         <p:txBody>
-          <a:bodyPr lIns="0" tIns="0" rIns="0" bIns="0" anchor="b">
+          <a:bodyPr lIns="0" rIns="0" tIns="0" bIns="0" anchor="b">
             <a:noAutofit/>
           </a:bodyPr>
           <a:lstStyle>
             <a:lvl1pPr indent="0" algn="r">
               <a:buNone/>
-              <a:defRPr lang="en-US" sz="1400" b="0" u="none" strike="noStrike">
+              <a:defRPr lang="en-GB" sz="1400" b="0" u="none" strike="noStrike">
                 <a:solidFill>
                   <a:srgbClr val="000000"/>
                 </a:solidFill>
@@ -398,8 +399,8 @@
             <a:pPr indent="0" algn="r">
               <a:buNone/>
             </a:pPr>
-            <a:fld id="{0D836A76-16D0-4805-9E3A-B92640A35110}" type="slidenum">
-              <a:rPr lang="en-US" sz="1400" b="0" u="none" strike="noStrike">
+            <a:fld id="{B0A17268-9E79-4542-8AAC-F1949D7BFCB4}" type="slidenum">
+              <a:rPr lang="en-GB" sz="1400" b="0" u="none" strike="noStrike">
                 <a:solidFill>
                   <a:srgbClr val="000000"/>
                 </a:solidFill>
@@ -409,7 +410,7 @@
               </a:rPr>
               <a:t>1</a:t>
             </a:fld>
-            <a:endParaRPr lang="en-US" sz="1400" b="0" u="none" strike="noStrike">
+            <a:endParaRPr lang="en-GB" sz="1400" b="0" u="none" strike="noStrike">
               <a:solidFill>
                 <a:srgbClr val="000000"/>
               </a:solidFill>
@@ -456,7 +457,7 @@
         <p:spPr>
           <a:xfrm>
             <a:off x="533520" y="763560"/>
-            <a:ext cx="6685560" cy="3753720"/>
+            <a:ext cx="6685200" cy="3753360"/>
           </a:xfrm>
           <a:prstGeom prst="rect">
             <a:avLst/>
@@ -479,7 +480,7 @@
         <p:spPr>
           <a:xfrm>
             <a:off x="777240" y="4777560"/>
-            <a:ext cx="6199200" cy="4507560"/>
+            <a:ext cx="6198840" cy="4507200"/>
           </a:xfrm>
           <a:prstGeom prst="rect">
             <a:avLst/>
@@ -490,14 +491,14 @@
           </a:ln>
         </p:spPr>
         <p:txBody>
-          <a:bodyPr lIns="0" tIns="0" rIns="0" bIns="0" anchor="t">
+          <a:bodyPr lIns="0" rIns="0" tIns="0" bIns="0" anchor="t">
             <a:noAutofit/>
           </a:bodyPr>
           <a:p>
-            <a:pPr indent="0" algn="l">
+            <a:pPr indent="0">
               <a:buNone/>
             </a:pPr>
-            <a:endParaRPr lang="en-US" sz="1800" b="0" u="none" strike="noStrike">
+            <a:endParaRPr lang="en-GB" sz="1800" b="0" u="none" strike="noStrike">
               <a:solidFill>
                 <a:srgbClr val="000000"/>
               </a:solidFill>
@@ -517,7 +518,7 @@
         <p:spPr>
           <a:xfrm>
             <a:off x="4399200" y="9555480"/>
-            <a:ext cx="3354480" cy="484200"/>
+            <a:ext cx="3354120" cy="483840"/>
           </a:xfrm>
           <a:prstGeom prst="rect">
             <a:avLst/>
@@ -534,7 +535,7 @@
           <a:fontRef idx="minor"/>
         </p:style>
         <p:txBody>
-          <a:bodyPr lIns="0" tIns="0" rIns="0" bIns="0" anchor="b">
+          <a:bodyPr lIns="0" rIns="0" tIns="0" bIns="0" anchor="b">
             <a:noAutofit/>
           </a:bodyPr>
           <a:p>
@@ -543,7 +544,7 @@
                 <a:spcPct val="100000"/>
               </a:lnSpc>
             </a:pPr>
-            <a:fld id="{0D40A4AC-0372-4FA0-AF98-28FC6F22663E}" type="slidenum">
+            <a:fld id="{A1A74BD8-D386-4624-BC82-43EA43A858BB}" type="slidenum">
               <a:rPr lang="de-DE" sz="1800" b="0" u="none" strike="noStrike">
                 <a:solidFill>
                   <a:srgbClr val="000000"/>
@@ -555,7 +556,7 @@
               </a:rPr>
               <a:t>&lt;number&gt;</a:t>
             </a:fld>
-            <a:endParaRPr lang="en-US" sz="1800" b="0" u="none" strike="noStrike">
+            <a:endParaRPr lang="en-GB" sz="1800" b="0" u="none" strike="noStrike">
               <a:solidFill>
                 <a:srgbClr val="000000"/>
               </a:solidFill>
@@ -601,7 +602,7 @@
         <p:spPr>
           <a:xfrm>
             <a:off x="533520" y="763560"/>
-            <a:ext cx="6685560" cy="3753720"/>
+            <a:ext cx="6685200" cy="3753360"/>
           </a:xfrm>
           <a:prstGeom prst="rect">
             <a:avLst/>
@@ -624,7 +625,7 @@
         <p:spPr>
           <a:xfrm>
             <a:off x="777240" y="4777560"/>
-            <a:ext cx="6199200" cy="4507560"/>
+            <a:ext cx="6198840" cy="4507200"/>
           </a:xfrm>
           <a:prstGeom prst="rect">
             <a:avLst/>
@@ -635,14 +636,14 @@
           </a:ln>
         </p:spPr>
         <p:txBody>
-          <a:bodyPr lIns="0" tIns="0" rIns="0" bIns="0" anchor="t">
+          <a:bodyPr lIns="0" rIns="0" tIns="0" bIns="0" anchor="t">
             <a:noAutofit/>
           </a:bodyPr>
           <a:p>
-            <a:pPr indent="0" algn="l">
+            <a:pPr indent="0">
               <a:buNone/>
             </a:pPr>
-            <a:endParaRPr lang="en-US" sz="1800" b="0" u="none" strike="noStrike">
+            <a:endParaRPr lang="en-GB" sz="1800" b="0" u="none" strike="noStrike">
               <a:solidFill>
                 <a:srgbClr val="000000"/>
               </a:solidFill>
@@ -662,7 +663,7 @@
         <p:spPr>
           <a:xfrm>
             <a:off x="4399200" y="9555480"/>
-            <a:ext cx="3354480" cy="484200"/>
+            <a:ext cx="3354120" cy="483840"/>
           </a:xfrm>
           <a:prstGeom prst="rect">
             <a:avLst/>
@@ -679,7 +680,7 @@
           <a:fontRef idx="minor"/>
         </p:style>
         <p:txBody>
-          <a:bodyPr lIns="0" tIns="0" rIns="0" bIns="0" anchor="b">
+          <a:bodyPr lIns="0" rIns="0" tIns="0" bIns="0" anchor="b">
             <a:noAutofit/>
           </a:bodyPr>
           <a:p>
@@ -688,7 +689,7 @@
                 <a:spcPct val="100000"/>
               </a:lnSpc>
             </a:pPr>
-            <a:fld id="{0DD80586-B625-4B60-A442-EBF77632FB18}" type="slidenum">
+            <a:fld id="{C835CDDE-7D65-49F1-84DC-C93A50968996}" type="slidenum">
               <a:rPr lang="de-DE" sz="1800" b="0" u="none" strike="noStrike">
                 <a:solidFill>
                   <a:srgbClr val="000000"/>
@@ -700,7 +701,7 @@
               </a:rPr>
               <a:t>&lt;number&gt;</a:t>
             </a:fld>
-            <a:endParaRPr lang="en-US" sz="1800" b="0" u="none" strike="noStrike">
+            <a:endParaRPr lang="en-GB" sz="1800" b="0" u="none" strike="noStrike">
               <a:solidFill>
                 <a:srgbClr val="000000"/>
               </a:solidFill>
@@ -746,7 +747,7 @@
         <p:spPr>
           <a:xfrm>
             <a:off x="533520" y="763560"/>
-            <a:ext cx="6685560" cy="3753720"/>
+            <a:ext cx="6685200" cy="3753360"/>
           </a:xfrm>
           <a:prstGeom prst="rect">
             <a:avLst/>
@@ -769,7 +770,7 @@
         <p:spPr>
           <a:xfrm>
             <a:off x="777240" y="4777560"/>
-            <a:ext cx="6199200" cy="4507560"/>
+            <a:ext cx="6198840" cy="4507200"/>
           </a:xfrm>
           <a:prstGeom prst="rect">
             <a:avLst/>
@@ -780,14 +781,14 @@
           </a:ln>
         </p:spPr>
         <p:txBody>
-          <a:bodyPr lIns="0" tIns="0" rIns="0" bIns="0" anchor="t">
+          <a:bodyPr lIns="0" rIns="0" tIns="0" bIns="0" anchor="t">
             <a:noAutofit/>
           </a:bodyPr>
           <a:p>
-            <a:pPr indent="0" algn="l">
+            <a:pPr indent="0">
               <a:buNone/>
             </a:pPr>
-            <a:endParaRPr lang="en-US" sz="1800" b="0" u="none" strike="noStrike">
+            <a:endParaRPr lang="en-GB" sz="1800" b="0" u="none" strike="noStrike">
               <a:solidFill>
                 <a:srgbClr val="000000"/>
               </a:solidFill>
@@ -807,7 +808,7 @@
         <p:spPr>
           <a:xfrm>
             <a:off x="4399200" y="9555480"/>
-            <a:ext cx="3354480" cy="484200"/>
+            <a:ext cx="3354120" cy="483840"/>
           </a:xfrm>
           <a:prstGeom prst="rect">
             <a:avLst/>
@@ -824,7 +825,7 @@
           <a:fontRef idx="minor"/>
         </p:style>
         <p:txBody>
-          <a:bodyPr lIns="0" tIns="0" rIns="0" bIns="0" anchor="b">
+          <a:bodyPr lIns="0" rIns="0" tIns="0" bIns="0" anchor="b">
             <a:noAutofit/>
           </a:bodyPr>
           <a:p>
@@ -833,7 +834,7 @@
                 <a:spcPct val="100000"/>
               </a:lnSpc>
             </a:pPr>
-            <a:fld id="{54DFABAE-9F00-42E0-A0EB-3F4D370E7516}" type="slidenum">
+            <a:fld id="{EB96B70B-F33D-4F47-B4DC-A7DECDD1BF59}" type="slidenum">
               <a:rPr lang="de-DE" sz="1800" b="0" u="none" strike="noStrike">
                 <a:solidFill>
                   <a:srgbClr val="000000"/>
@@ -845,7 +846,7 @@
               </a:rPr>
               <a:t>&lt;number&gt;</a:t>
             </a:fld>
-            <a:endParaRPr lang="en-US" sz="1800" b="0" u="none" strike="noStrike">
+            <a:endParaRPr lang="en-GB" sz="1800" b="0" u="none" strike="noStrike">
               <a:solidFill>
                 <a:srgbClr val="000000"/>
               </a:solidFill>
@@ -911,7 +912,7 @@
     <p:bg>
       <p:bgPr>
         <a:solidFill>
-          <a:srgbClr val="FFFFFF"/>
+          <a:srgbClr val="ffffff"/>
         </a:solidFill>
       </p:bgPr>
     </p:bg>
@@ -938,7 +939,7 @@
         <p:spPr>
           <a:xfrm>
             <a:off x="11444760" y="0"/>
-            <a:ext cx="734040" cy="6842880"/>
+            <a:ext cx="733680" cy="6842520"/>
           </a:xfrm>
           <a:prstGeom prst="rect">
             <a:avLst/>
@@ -959,17 +960,23 @@
           <a:fontRef idx="minor"/>
         </p:style>
         <p:txBody>
-          <a:bodyPr lIns="90000" tIns="45000" rIns="90000" bIns="45000" anchor="t">
+          <a:bodyPr lIns="90000" rIns="90000" tIns="45000" bIns="45000" anchor="t">
             <a:noAutofit/>
           </a:bodyPr>
           <a:p>
-            <a:endParaRPr lang="en-GB" sz="1800" b="0" u="none" strike="noStrike">
-              <a:solidFill>
-                <a:srgbClr val="FFFFFF"/>
-              </a:solidFill>
-              <a:effectLst/>
-              <a:uFillTx/>
-              <a:latin typeface="Arial"/>
+            <a:pPr>
+              <a:lnSpc>
+                <a:spcPct val="100000"/>
+              </a:lnSpc>
+            </a:pPr>
+            <a:endParaRPr lang="en-GB" sz="1800" b="0" u="none" strike="noStrike">
+              <a:solidFill>
+                <a:srgbClr val="ffffff"/>
+              </a:solidFill>
+              <a:effectLst/>
+              <a:uFillTx/>
+              <a:latin typeface="Arial"/>
+              <a:ea typeface="DejaVu Sans"/>
             </a:endParaRPr>
           </a:p>
         </p:txBody>
@@ -983,7 +990,7 @@
         <p:spPr>
           <a:xfrm>
             <a:off x="11438640" y="6453360"/>
-            <a:ext cx="750960" cy="363960"/>
+            <a:ext cx="750600" cy="363960"/>
           </a:xfrm>
           <a:prstGeom prst="rect">
             <a:avLst/>
@@ -1000,7 +1007,7 @@
           <a:fontRef idx="minor"/>
         </p:style>
         <p:txBody>
-          <a:bodyPr lIns="90000" tIns="45000" rIns="90000" bIns="45000" anchor="t">
+          <a:bodyPr lIns="90000" rIns="90000" tIns="45000" bIns="45000" anchor="t">
             <a:spAutoFit/>
           </a:bodyPr>
           <a:p>
@@ -1009,7 +1016,7 @@
                 <a:spcPct val="100000"/>
               </a:lnSpc>
             </a:pPr>
-            <a:fld id="{F3DE66F9-D69E-4BDD-96B5-110D2F844C29}" type="slidenum">
+            <a:fld id="{960A0A2B-4E8C-43E5-8FBA-D57EFBBB1B5E}" type="slidenum">
               <a:rPr lang="en-US" sz="1800" b="0" u="none" strike="noStrike">
                 <a:solidFill>
                   <a:srgbClr val="808080"/>
@@ -1019,9 +1026,9 @@
                 <a:latin typeface="Arial"/>
                 <a:ea typeface="DejaVu Sans"/>
               </a:rPr>
-              <a:t>9</a:t>
+              <a:t>&lt;number&gt;</a:t>
             </a:fld>
-            <a:endParaRPr lang="en-US" sz="1800" b="0" u="none" strike="noStrike">
+            <a:endParaRPr lang="en-GB" sz="1800" b="0" u="none" strike="noStrike">
               <a:solidFill>
                 <a:srgbClr val="000000"/>
               </a:solidFill>
@@ -1041,7 +1048,7 @@
         <p:spPr>
           <a:xfrm>
             <a:off x="912240" y="1268280"/>
-            <a:ext cx="9200880" cy="354240"/>
+            <a:ext cx="9200520" cy="353880"/>
           </a:xfrm>
           <a:prstGeom prst="rect">
             <a:avLst/>
@@ -1058,17 +1065,23 @@
           <a:fontRef idx="minor"/>
         </p:style>
         <p:txBody>
-          <a:bodyPr lIns="90000" tIns="45000" rIns="90000" bIns="45000" anchor="t">
+          <a:bodyPr lIns="90000" rIns="90000" tIns="45000" bIns="45000" anchor="t">
             <a:noAutofit/>
           </a:bodyPr>
           <a:p>
-            <a:endParaRPr lang="en-GB" sz="1800" b="0" u="none" strike="noStrike">
-              <a:solidFill>
-                <a:srgbClr val="000000"/>
-              </a:solidFill>
-              <a:effectLst/>
-              <a:uFillTx/>
-              <a:latin typeface="Arial"/>
+            <a:pPr>
+              <a:lnSpc>
+                <a:spcPct val="100000"/>
+              </a:lnSpc>
+            </a:pPr>
+            <a:endParaRPr lang="en-GB" sz="1800" b="0" u="none" strike="noStrike">
+              <a:solidFill>
+                <a:srgbClr val="000000"/>
+              </a:solidFill>
+              <a:effectLst/>
+              <a:uFillTx/>
+              <a:latin typeface="Arial"/>
+              <a:ea typeface="DejaVu Sans"/>
             </a:endParaRPr>
           </a:p>
         </p:txBody>
@@ -1086,7 +1099,7 @@
         <p:spPr>
           <a:xfrm>
             <a:off x="0" y="0"/>
-            <a:ext cx="3044880" cy="554760"/>
+            <a:ext cx="3044520" cy="554400"/>
           </a:xfrm>
           <a:prstGeom prst="rect">
             <a:avLst/>
@@ -1110,7 +1123,7 @@
         <p:spPr>
           <a:xfrm>
             <a:off x="7430400" y="134640"/>
-            <a:ext cx="3690720" cy="506880"/>
+            <a:ext cx="3690360" cy="506520"/>
           </a:xfrm>
           <a:prstGeom prst="rect">
             <a:avLst/>
@@ -1130,7 +1143,7 @@
         <p:spPr>
           <a:xfrm>
             <a:off x="912240" y="1268280"/>
-            <a:ext cx="9200880" cy="354240"/>
+            <a:ext cx="9200520" cy="353880"/>
           </a:xfrm>
           <a:prstGeom prst="rect">
             <a:avLst/>
@@ -1147,17 +1160,23 @@
           <a:fontRef idx="minor"/>
         </p:style>
         <p:txBody>
-          <a:bodyPr lIns="90000" tIns="45000" rIns="90000" bIns="45000" anchor="t">
+          <a:bodyPr lIns="90000" rIns="90000" tIns="45000" bIns="45000" anchor="t">
             <a:noAutofit/>
           </a:bodyPr>
           <a:p>
-            <a:endParaRPr lang="en-GB" sz="1800" b="0" u="none" strike="noStrike">
-              <a:solidFill>
-                <a:srgbClr val="000000"/>
-              </a:solidFill>
-              <a:effectLst/>
-              <a:uFillTx/>
-              <a:latin typeface="Arial"/>
+            <a:pPr>
+              <a:lnSpc>
+                <a:spcPct val="100000"/>
+              </a:lnSpc>
+            </a:pPr>
+            <a:endParaRPr lang="en-GB" sz="1800" b="0" u="none" strike="noStrike">
+              <a:solidFill>
+                <a:srgbClr val="000000"/>
+              </a:solidFill>
+              <a:effectLst/>
+              <a:uFillTx/>
+              <a:latin typeface="Arial"/>
+              <a:ea typeface="DejaVu Sans"/>
             </a:endParaRPr>
           </a:p>
         </p:txBody>
@@ -1171,7 +1190,7 @@
         <p:spPr>
           <a:xfrm>
             <a:off x="11444760" y="0"/>
-            <a:ext cx="734040" cy="6842880"/>
+            <a:ext cx="733680" cy="6842520"/>
           </a:xfrm>
           <a:prstGeom prst="rect">
             <a:avLst/>
@@ -1192,17 +1211,23 @@
           <a:fontRef idx="minor"/>
         </p:style>
         <p:txBody>
-          <a:bodyPr lIns="90000" tIns="45000" rIns="90000" bIns="45000" anchor="t">
+          <a:bodyPr lIns="90000" rIns="90000" tIns="45000" bIns="45000" anchor="t">
             <a:noAutofit/>
           </a:bodyPr>
           <a:p>
-            <a:endParaRPr lang="en-GB" sz="1800" b="0" u="none" strike="noStrike">
-              <a:solidFill>
-                <a:srgbClr val="FFFFFF"/>
-              </a:solidFill>
-              <a:effectLst/>
-              <a:uFillTx/>
-              <a:latin typeface="Arial"/>
+            <a:pPr>
+              <a:lnSpc>
+                <a:spcPct val="100000"/>
+              </a:lnSpc>
+            </a:pPr>
+            <a:endParaRPr lang="en-GB" sz="1800" b="0" u="none" strike="noStrike">
+              <a:solidFill>
+                <a:srgbClr val="ffffff"/>
+              </a:solidFill>
+              <a:effectLst/>
+              <a:uFillTx/>
+              <a:latin typeface="Arial"/>
+              <a:ea typeface="DejaVu Sans"/>
             </a:endParaRPr>
           </a:p>
         </p:txBody>
@@ -1216,7 +1241,7 @@
         <p:spPr>
           <a:xfrm>
             <a:off x="0" y="6642720"/>
-            <a:ext cx="12177000" cy="211320"/>
+            <a:ext cx="12176640" cy="211320"/>
           </a:xfrm>
           <a:prstGeom prst="rect">
             <a:avLst/>
@@ -1233,7 +1258,7 @@
           <a:fontRef idx="minor"/>
         </p:style>
         <p:txBody>
-          <a:bodyPr lIns="90000" tIns="45000" rIns="90000" bIns="45000" anchor="t">
+          <a:bodyPr lIns="90000" rIns="90000" tIns="45000" bIns="45000" anchor="t">
             <a:spAutoFit/>
           </a:bodyPr>
           <a:p>
@@ -1245,7 +1270,7 @@
             <a:r>
               <a:rPr lang="en-US" sz="800" b="0" u="none" strike="noStrike">
                 <a:solidFill>
-                  <a:srgbClr val="A6A6A6"/>
+                  <a:srgbClr val="a6a6a6"/>
                 </a:solidFill>
                 <a:effectLst/>
                 <a:uFillTx/>
@@ -1254,7 +1279,7 @@
               </a:rPr>
               <a:t>Emerging Technologies for the Circular Economy – TU Clausthal</a:t>
             </a:r>
-            <a:endParaRPr lang="en-US" sz="800" b="0" u="none" strike="noStrike">
+            <a:endParaRPr lang="en-GB" sz="800" b="0" u="none" strike="noStrike">
               <a:solidFill>
                 <a:srgbClr val="000000"/>
               </a:solidFill>
@@ -1289,44 +1314,25 @@
           </a:ln>
         </p:spPr>
         <p:txBody>
-          <a:bodyPr lIns="0" tIns="0" rIns="0" bIns="0" anchor="ctr">
+          <a:bodyPr lIns="0" rIns="0" tIns="0" bIns="0" anchor="ctr">
             <a:noAutofit/>
           </a:bodyPr>
-          <a:lstStyle>
-            <a:lvl1pPr indent="0" algn="l">
+          <a:p>
+            <a:pPr indent="0" algn="ctr">
               <a:buNone/>
-              <a:tabLst>
-                <a:tab pos="0" algn="l"/>
-              </a:tabLst>
-              <a:defRPr lang="en-US" sz="4400" b="0" u="none" strike="noStrike">
+            </a:pPr>
+            <a:r>
+              <a:rPr lang="en-GB" sz="4400" b="0" u="none" strike="noStrike">
                 <a:solidFill>
                   <a:srgbClr val="000000"/>
                 </a:solidFill>
                 <a:effectLst/>
                 <a:uFillTx/>
                 <a:latin typeface="Arial"/>
-              </a:defRPr>
-            </a:lvl1pPr>
-          </a:lstStyle>
-          <a:p>
-            <a:pPr indent="0" algn="l">
-              <a:buNone/>
-              <a:tabLst>
-                <a:tab pos="0" algn="l"/>
-              </a:tabLst>
-            </a:pPr>
-            <a:r>
-              <a:rPr lang="en-US" sz="4400" b="0" u="none" strike="noStrike">
-                <a:solidFill>
-                  <a:srgbClr val="000000"/>
-                </a:solidFill>
-                <a:effectLst/>
-                <a:uFillTx/>
-                <a:latin typeface="Arial"/>
               </a:rPr>
               <a:t>Click to edit the title text format</a:t>
             </a:r>
-            <a:endParaRPr lang="en-US" sz="4400" b="0" u="none" strike="noStrike">
+            <a:endParaRPr lang="en-GB" sz="4400" b="0" u="none" strike="noStrike">
               <a:solidFill>
                 <a:srgbClr val="000000"/>
               </a:solidFill>
@@ -1361,316 +1367,225 @@
           </a:ln>
         </p:spPr>
         <p:txBody>
-          <a:bodyPr lIns="0" tIns="0" rIns="0" bIns="0" anchor="t">
+          <a:bodyPr lIns="0" rIns="0" tIns="0" bIns="0" anchor="t">
             <a:normAutofit/>
           </a:bodyPr>
-          <a:lstStyle>
-            <a:lvl1pPr algn="l">
+          <a:p>
+            <a:pPr marL="432000" indent="-324000">
+              <a:spcBef>
+                <a:spcPts val="1417"/>
+              </a:spcBef>
               <a:buClr>
                 <a:srgbClr val="000000"/>
               </a:buClr>
+              <a:buSzPct val="45000"/>
               <a:buFont typeface="Wingdings" charset="2"/>
               <a:buChar char=""/>
-              <a:defRPr lang="en-US" sz="3200" b="0" u="none" strike="noStrike">
+            </a:pPr>
+            <a:r>
+              <a:rPr lang="en-GB" sz="3200" b="0" u="none" strike="noStrike">
                 <a:solidFill>
                   <a:srgbClr val="000000"/>
                 </a:solidFill>
                 <a:effectLst/>
                 <a:uFillTx/>
                 <a:latin typeface="Arial"/>
-              </a:defRPr>
-            </a:lvl1pPr>
-            <a:lvl2pPr lvl="1" algn="l">
+              </a:rPr>
+              <a:t>Click to edit the outline text format</a:t>
+            </a:r>
+            <a:endParaRPr lang="en-GB" sz="3200" b="0" u="none" strike="noStrike">
+              <a:solidFill>
+                <a:srgbClr val="000000"/>
+              </a:solidFill>
+              <a:effectLst/>
+              <a:uFillTx/>
+              <a:latin typeface="Arial"/>
+            </a:endParaRPr>
+          </a:p>
+          <a:p>
+            <a:pPr marL="864000" lvl="1" indent="-324000">
+              <a:spcBef>
+                <a:spcPts val="1134"/>
+              </a:spcBef>
               <a:buClr>
                 <a:srgbClr val="000000"/>
               </a:buClr>
               <a:buSzPct val="75000"/>
               <a:buFont typeface="Symbol" charset="2"/>
               <a:buChar char=""/>
-              <a:defRPr lang="en-US" sz="2800" b="0" u="none" strike="noStrike">
+            </a:pPr>
+            <a:r>
+              <a:rPr lang="en-GB" sz="2800" b="0" u="none" strike="noStrike">
                 <a:solidFill>
                   <a:srgbClr val="000000"/>
                 </a:solidFill>
                 <a:effectLst/>
                 <a:uFillTx/>
                 <a:latin typeface="Arial"/>
-              </a:defRPr>
-            </a:lvl2pPr>
-            <a:lvl3pPr lvl="2" algn="l">
+              </a:rPr>
+              <a:t>Second Outline Level</a:t>
+            </a:r>
+            <a:endParaRPr lang="en-GB" sz="2800" b="0" u="none" strike="noStrike">
+              <a:solidFill>
+                <a:srgbClr val="000000"/>
+              </a:solidFill>
+              <a:effectLst/>
+              <a:uFillTx/>
+              <a:latin typeface="Arial"/>
+            </a:endParaRPr>
+          </a:p>
+          <a:p>
+            <a:pPr marL="1296000" lvl="2" indent="-288000">
+              <a:spcBef>
+                <a:spcPts val="850"/>
+              </a:spcBef>
               <a:buClr>
                 <a:srgbClr val="000000"/>
               </a:buClr>
               <a:buSzPct val="45000"/>
               <a:buFont typeface="Wingdings" charset="2"/>
               <a:buChar char=""/>
-              <a:defRPr lang="en-US" sz="2400" b="0" u="none" strike="noStrike">
+            </a:pPr>
+            <a:r>
+              <a:rPr lang="en-GB" sz="2400" b="0" u="none" strike="noStrike">
                 <a:solidFill>
                   <a:srgbClr val="000000"/>
                 </a:solidFill>
                 <a:effectLst/>
                 <a:uFillTx/>
                 <a:latin typeface="Arial"/>
-              </a:defRPr>
-            </a:lvl3pPr>
-            <a:lvl4pPr lvl="3" algn="l">
+              </a:rPr>
+              <a:t>Third Outline Level</a:t>
+            </a:r>
+            <a:endParaRPr lang="en-GB" sz="2400" b="0" u="none" strike="noStrike">
+              <a:solidFill>
+                <a:srgbClr val="000000"/>
+              </a:solidFill>
+              <a:effectLst/>
+              <a:uFillTx/>
+              <a:latin typeface="Arial"/>
+            </a:endParaRPr>
+          </a:p>
+          <a:p>
+            <a:pPr marL="1728000" lvl="3" indent="-216000">
+              <a:spcBef>
+                <a:spcPts val="567"/>
+              </a:spcBef>
               <a:buClr>
                 <a:srgbClr val="000000"/>
               </a:buClr>
               <a:buSzPct val="75000"/>
               <a:buFont typeface="Symbol" charset="2"/>
               <a:buChar char=""/>
-              <a:defRPr lang="en-US" sz="2000" b="0" u="none" strike="noStrike">
+            </a:pPr>
+            <a:r>
+              <a:rPr lang="en-GB" sz="2000" b="0" u="none" strike="noStrike">
                 <a:solidFill>
                   <a:srgbClr val="000000"/>
                 </a:solidFill>
                 <a:effectLst/>
                 <a:uFillTx/>
                 <a:latin typeface="Arial"/>
-              </a:defRPr>
-            </a:lvl4pPr>
-            <a:lvl5pPr lvl="4" algn="l">
+              </a:rPr>
+              <a:t>Fourth Outline Level</a:t>
+            </a:r>
+            <a:endParaRPr lang="en-GB" sz="2000" b="0" u="none" strike="noStrike">
+              <a:solidFill>
+                <a:srgbClr val="000000"/>
+              </a:solidFill>
+              <a:effectLst/>
+              <a:uFillTx/>
+              <a:latin typeface="Arial"/>
+            </a:endParaRPr>
+          </a:p>
+          <a:p>
+            <a:pPr marL="2160000" lvl="4" indent="-216000">
+              <a:spcBef>
+                <a:spcPts val="283"/>
+              </a:spcBef>
               <a:buClr>
                 <a:srgbClr val="000000"/>
               </a:buClr>
               <a:buSzPct val="45000"/>
               <a:buFont typeface="Wingdings" charset="2"/>
               <a:buChar char=""/>
-              <a:defRPr lang="en-US" sz="2000" b="0" u="none" strike="noStrike">
+            </a:pPr>
+            <a:r>
+              <a:rPr lang="en-GB" sz="2000" b="0" u="none" strike="noStrike">
                 <a:solidFill>
                   <a:srgbClr val="000000"/>
                 </a:solidFill>
                 <a:effectLst/>
                 <a:uFillTx/>
                 <a:latin typeface="Arial"/>
-              </a:defRPr>
-            </a:lvl5pPr>
-            <a:lvl6pPr lvl="5" algn="l">
+              </a:rPr>
+              <a:t>Fifth Outline Level</a:t>
+            </a:r>
+            <a:endParaRPr lang="en-GB" sz="2000" b="0" u="none" strike="noStrike">
+              <a:solidFill>
+                <a:srgbClr val="000000"/>
+              </a:solidFill>
+              <a:effectLst/>
+              <a:uFillTx/>
+              <a:latin typeface="Arial"/>
+            </a:endParaRPr>
+          </a:p>
+          <a:p>
+            <a:pPr marL="2592000" lvl="5" indent="-216000">
+              <a:spcBef>
+                <a:spcPts val="283"/>
+              </a:spcBef>
               <a:buClr>
                 <a:srgbClr val="000000"/>
               </a:buClr>
               <a:buSzPct val="45000"/>
               <a:buFont typeface="Wingdings" charset="2"/>
               <a:buChar char=""/>
-              <a:defRPr lang="en-US" sz="2000" b="0" u="none" strike="noStrike">
+            </a:pPr>
+            <a:r>
+              <a:rPr lang="en-GB" sz="2000" b="0" u="none" strike="noStrike">
                 <a:solidFill>
                   <a:srgbClr val="000000"/>
                 </a:solidFill>
                 <a:effectLst/>
                 <a:uFillTx/>
                 <a:latin typeface="Arial"/>
-              </a:defRPr>
-            </a:lvl6pPr>
-            <a:lvl7pPr lvl="6" algn="l">
+              </a:rPr>
+              <a:t>Sixth Outline Level</a:t>
+            </a:r>
+            <a:endParaRPr lang="en-GB" sz="2000" b="0" u="none" strike="noStrike">
+              <a:solidFill>
+                <a:srgbClr val="000000"/>
+              </a:solidFill>
+              <a:effectLst/>
+              <a:uFillTx/>
+              <a:latin typeface="Arial"/>
+            </a:endParaRPr>
+          </a:p>
+          <a:p>
+            <a:pPr marL="3024000" lvl="6" indent="-216000">
+              <a:spcBef>
+                <a:spcPts val="283"/>
+              </a:spcBef>
               <a:buClr>
                 <a:srgbClr val="000000"/>
               </a:buClr>
               <a:buSzPct val="45000"/>
               <a:buFont typeface="Wingdings" charset="2"/>
               <a:buChar char=""/>
-              <a:defRPr lang="en-US" sz="2000" b="0" u="none" strike="noStrike">
+            </a:pPr>
+            <a:r>
+              <a:rPr lang="en-GB" sz="2000" b="0" u="none" strike="noStrike">
                 <a:solidFill>
                   <a:srgbClr val="000000"/>
                 </a:solidFill>
                 <a:effectLst/>
                 <a:uFillTx/>
                 <a:latin typeface="Arial"/>
-              </a:defRPr>
-            </a:lvl7pPr>
-          </a:lstStyle>
-          <a:p>
-            <a:pPr indent="-324000" algn="l">
-              <a:buClr>
-                <a:srgbClr val="000000"/>
-              </a:buClr>
-              <a:buFont typeface="Wingdings" charset="2"/>
-              <a:buChar char=""/>
-            </a:pPr>
-            <a:r>
-              <a:rPr lang="en-US" sz="3200" b="0" u="none" strike="noStrike">
-                <a:solidFill>
-                  <a:srgbClr val="000000"/>
-                </a:solidFill>
-                <a:effectLst/>
-                <a:uFillTx/>
-                <a:latin typeface="Arial"/>
-              </a:rPr>
-              <a:t>Click to edit the outline text format</a:t>
-            </a:r>
-            <a:endParaRPr lang="en-US" sz="3200" b="0" u="none" strike="noStrike">
-              <a:solidFill>
-                <a:srgbClr val="000000"/>
-              </a:solidFill>
-              <a:effectLst/>
-              <a:uFillTx/>
-              <a:latin typeface="Arial"/>
-            </a:endParaRPr>
-          </a:p>
-          <a:p>
-            <a:pPr marL="864000" lvl="1" indent="-324000" algn="l">
-              <a:buClr>
-                <a:srgbClr val="000000"/>
-              </a:buClr>
-              <a:buSzPct val="75000"/>
-              <a:buFont typeface="Symbol" charset="2"/>
-              <a:buChar char=""/>
-            </a:pPr>
-            <a:r>
-              <a:rPr lang="en-US" sz="2800" b="0" u="none" strike="noStrike">
-                <a:solidFill>
-                  <a:srgbClr val="000000"/>
-                </a:solidFill>
-                <a:effectLst/>
-                <a:uFillTx/>
-                <a:latin typeface="Arial"/>
-              </a:rPr>
-              <a:t>Second Outline Level</a:t>
-            </a:r>
-            <a:endParaRPr lang="en-US" sz="2800" b="0" u="none" strike="noStrike">
-              <a:solidFill>
-                <a:srgbClr val="000000"/>
-              </a:solidFill>
-              <a:effectLst/>
-              <a:uFillTx/>
-              <a:latin typeface="Arial"/>
-            </a:endParaRPr>
-          </a:p>
-          <a:p>
-            <a:pPr marL="1296000" lvl="2" indent="-288000" algn="l">
-              <a:buClr>
-                <a:srgbClr val="000000"/>
-              </a:buClr>
-              <a:buSzPct val="45000"/>
-              <a:buFont typeface="Wingdings" charset="2"/>
-              <a:buChar char=""/>
-            </a:pPr>
-            <a:r>
-              <a:rPr lang="en-US" sz="2400" b="0" u="none" strike="noStrike">
-                <a:solidFill>
-                  <a:srgbClr val="000000"/>
-                </a:solidFill>
-                <a:effectLst/>
-                <a:uFillTx/>
-                <a:latin typeface="Arial"/>
-              </a:rPr>
-              <a:t>Third Outline Level</a:t>
-            </a:r>
-            <a:endParaRPr lang="en-US" sz="2400" b="0" u="none" strike="noStrike">
-              <a:solidFill>
-                <a:srgbClr val="000000"/>
-              </a:solidFill>
-              <a:effectLst/>
-              <a:uFillTx/>
-              <a:latin typeface="Arial"/>
-            </a:endParaRPr>
-          </a:p>
-          <a:p>
-            <a:pPr marL="1728000" lvl="3" indent="-216000" algn="l">
-              <a:buClr>
-                <a:srgbClr val="000000"/>
-              </a:buClr>
-              <a:buSzPct val="75000"/>
-              <a:buFont typeface="Symbol" charset="2"/>
-              <a:buChar char=""/>
-            </a:pPr>
-            <a:r>
-              <a:rPr lang="en-US" sz="2000" b="0" u="none" strike="noStrike">
-                <a:solidFill>
-                  <a:srgbClr val="000000"/>
-                </a:solidFill>
-                <a:effectLst/>
-                <a:uFillTx/>
-                <a:latin typeface="Arial"/>
-              </a:rPr>
-              <a:t>Fourth Outline Level</a:t>
-            </a:r>
-            <a:endParaRPr lang="en-US" sz="2000" b="0" u="none" strike="noStrike">
-              <a:solidFill>
-                <a:srgbClr val="000000"/>
-              </a:solidFill>
-              <a:effectLst/>
-              <a:uFillTx/>
-              <a:latin typeface="Arial"/>
-            </a:endParaRPr>
-          </a:p>
-          <a:p>
-            <a:pPr marL="2160000" lvl="4" indent="-216000" algn="l">
-              <a:buClr>
-                <a:srgbClr val="000000"/>
-              </a:buClr>
-              <a:buSzPct val="45000"/>
-              <a:buFont typeface="Wingdings" charset="2"/>
-              <a:buChar char=""/>
-            </a:pPr>
-            <a:r>
-              <a:rPr lang="en-US" sz="2000" b="0" u="none" strike="noStrike">
-                <a:solidFill>
-                  <a:srgbClr val="000000"/>
-                </a:solidFill>
-                <a:effectLst/>
-                <a:uFillTx/>
-                <a:latin typeface="Arial"/>
-              </a:rPr>
-              <a:t>Fifth Outline Level</a:t>
-            </a:r>
-            <a:endParaRPr lang="en-US" sz="2000" b="0" u="none" strike="noStrike">
-              <a:solidFill>
-                <a:srgbClr val="000000"/>
-              </a:solidFill>
-              <a:effectLst/>
-              <a:uFillTx/>
-              <a:latin typeface="Arial"/>
-            </a:endParaRPr>
-          </a:p>
-          <a:p>
-            <a:pPr marL="2592000" lvl="5" indent="-216000" algn="l">
-              <a:buClr>
-                <a:srgbClr val="000000"/>
-              </a:buClr>
-              <a:buSzPct val="45000"/>
-              <a:buFont typeface="Wingdings" charset="2"/>
-              <a:buChar char=""/>
-            </a:pPr>
-            <a:r>
-              <a:rPr lang="en-US" sz="2000" b="0" u="none" strike="noStrike">
-                <a:solidFill>
-                  <a:srgbClr val="000000"/>
-                </a:solidFill>
-                <a:effectLst/>
-                <a:uFillTx/>
-                <a:latin typeface="Arial"/>
-              </a:rPr>
-              <a:t>Sixth Outline Level</a:t>
-            </a:r>
-            <a:endParaRPr lang="en-US" sz="2000" b="0" u="none" strike="noStrike">
-              <a:solidFill>
-                <a:srgbClr val="000000"/>
-              </a:solidFill>
-              <a:effectLst/>
-              <a:uFillTx/>
-              <a:latin typeface="Arial"/>
-            </a:endParaRPr>
-          </a:p>
-          <a:p>
-            <a:pPr marL="3024000" lvl="6" indent="-216000" algn="l">
-              <a:buClr>
-                <a:srgbClr val="000000"/>
-              </a:buClr>
-              <a:buSzPct val="45000"/>
-              <a:buFont typeface="Wingdings" charset="2"/>
-              <a:buChar char=""/>
-            </a:pPr>
-            <a:r>
-              <a:rPr lang="en-US" sz="2000" b="0" u="none" strike="noStrike">
-                <a:solidFill>
-                  <a:srgbClr val="000000"/>
-                </a:solidFill>
-                <a:effectLst/>
-                <a:uFillTx/>
-                <a:latin typeface="Arial"/>
               </a:rPr>
               <a:t>Seventh Outline Level</a:t>
             </a:r>
-            <a:endParaRPr lang="en-US" sz="2000" b="0" u="none" strike="noStrike">
+            <a:endParaRPr lang="en-GB" sz="2000" b="0" u="none" strike="noStrike">
               <a:solidFill>
                 <a:srgbClr val="000000"/>
               </a:solidFill>
@@ -1696,7 +1611,7 @@
     <p:bg>
       <p:bgPr>
         <a:solidFill>
-          <a:srgbClr val="FFFFFF"/>
+          <a:srgbClr val="ffffff"/>
         </a:solidFill>
       </p:bgPr>
     </p:bg>
@@ -1723,7 +1638,7 @@
         <p:spPr>
           <a:xfrm>
             <a:off x="11444760" y="0"/>
-            <a:ext cx="734040" cy="6842880"/>
+            <a:ext cx="733680" cy="6842520"/>
           </a:xfrm>
           <a:prstGeom prst="rect">
             <a:avLst/>
@@ -1744,17 +1659,23 @@
           <a:fontRef idx="minor"/>
         </p:style>
         <p:txBody>
-          <a:bodyPr lIns="90000" tIns="45000" rIns="90000" bIns="45000" anchor="t">
+          <a:bodyPr lIns="90000" rIns="90000" tIns="45000" bIns="45000" anchor="t">
             <a:noAutofit/>
           </a:bodyPr>
           <a:p>
-            <a:endParaRPr lang="en-GB" sz="1800" b="0" u="none" strike="noStrike">
-              <a:solidFill>
-                <a:srgbClr val="FFFFFF"/>
-              </a:solidFill>
-              <a:effectLst/>
-              <a:uFillTx/>
-              <a:latin typeface="Arial"/>
+            <a:pPr>
+              <a:lnSpc>
+                <a:spcPct val="100000"/>
+              </a:lnSpc>
+            </a:pPr>
+            <a:endParaRPr lang="en-GB" sz="1800" b="0" u="none" strike="noStrike">
+              <a:solidFill>
+                <a:srgbClr val="ffffff"/>
+              </a:solidFill>
+              <a:effectLst/>
+              <a:uFillTx/>
+              <a:latin typeface="Arial"/>
+              <a:ea typeface="DejaVu Sans"/>
             </a:endParaRPr>
           </a:p>
         </p:txBody>
@@ -1768,7 +1689,7 @@
         <p:spPr>
           <a:xfrm>
             <a:off x="11438640" y="6453360"/>
-            <a:ext cx="750960" cy="363960"/>
+            <a:ext cx="750600" cy="363960"/>
           </a:xfrm>
           <a:prstGeom prst="rect">
             <a:avLst/>
@@ -1785,7 +1706,7 @@
           <a:fontRef idx="minor"/>
         </p:style>
         <p:txBody>
-          <a:bodyPr lIns="90000" tIns="45000" rIns="90000" bIns="45000" anchor="t">
+          <a:bodyPr lIns="90000" rIns="90000" tIns="45000" bIns="45000" anchor="t">
             <a:spAutoFit/>
           </a:bodyPr>
           <a:p>
@@ -1794,7 +1715,7 @@
                 <a:spcPct val="100000"/>
               </a:lnSpc>
             </a:pPr>
-            <a:fld id="{BE17FC44-5FB6-4EC4-A4B3-CEBCC7B83E4E}" type="slidenum">
+            <a:fld id="{AECC3A89-B7DB-434D-9D31-0BC106AB3775}" type="slidenum">
               <a:rPr lang="en-US" sz="1800" b="0" u="none" strike="noStrike">
                 <a:solidFill>
                   <a:srgbClr val="808080"/>
@@ -1804,9 +1725,9 @@
                 <a:latin typeface="Arial"/>
                 <a:ea typeface="DejaVu Sans"/>
               </a:rPr>
-              <a:t>1</a:t>
+              <a:t>&lt;number&gt;</a:t>
             </a:fld>
-            <a:endParaRPr lang="en-US" sz="1800" b="0" u="none" strike="noStrike">
+            <a:endParaRPr lang="en-GB" sz="1800" b="0" u="none" strike="noStrike">
               <a:solidFill>
                 <a:srgbClr val="000000"/>
               </a:solidFill>
@@ -1826,7 +1747,7 @@
         <p:spPr>
           <a:xfrm>
             <a:off x="912240" y="1268280"/>
-            <a:ext cx="9200880" cy="354240"/>
+            <a:ext cx="9200520" cy="353880"/>
           </a:xfrm>
           <a:prstGeom prst="rect">
             <a:avLst/>
@@ -1843,17 +1764,23 @@
           <a:fontRef idx="minor"/>
         </p:style>
         <p:txBody>
-          <a:bodyPr lIns="90000" tIns="45000" rIns="90000" bIns="45000" anchor="t">
+          <a:bodyPr lIns="90000" rIns="90000" tIns="45000" bIns="45000" anchor="t">
             <a:noAutofit/>
           </a:bodyPr>
           <a:p>
-            <a:endParaRPr lang="en-GB" sz="1800" b="0" u="none" strike="noStrike">
-              <a:solidFill>
-                <a:srgbClr val="000000"/>
-              </a:solidFill>
-              <a:effectLst/>
-              <a:uFillTx/>
-              <a:latin typeface="Arial"/>
+            <a:pPr>
+              <a:lnSpc>
+                <a:spcPct val="100000"/>
+              </a:lnSpc>
+            </a:pPr>
+            <a:endParaRPr lang="en-GB" sz="1800" b="0" u="none" strike="noStrike">
+              <a:solidFill>
+                <a:srgbClr val="000000"/>
+              </a:solidFill>
+              <a:effectLst/>
+              <a:uFillTx/>
+              <a:latin typeface="Arial"/>
+              <a:ea typeface="DejaVu Sans"/>
             </a:endParaRPr>
           </a:p>
         </p:txBody>
@@ -1871,7 +1798,7 @@
         <p:spPr>
           <a:xfrm>
             <a:off x="0" y="0"/>
-            <a:ext cx="3044880" cy="554760"/>
+            <a:ext cx="3044520" cy="554400"/>
           </a:xfrm>
           <a:prstGeom prst="rect">
             <a:avLst/>
@@ -1895,7 +1822,7 @@
         <p:spPr>
           <a:xfrm>
             <a:off x="7430400" y="134640"/>
-            <a:ext cx="3690720" cy="506880"/>
+            <a:ext cx="3690360" cy="506520"/>
           </a:xfrm>
           <a:prstGeom prst="rect">
             <a:avLst/>
@@ -1915,7 +1842,7 @@
         <p:spPr>
           <a:xfrm>
             <a:off x="11444760" y="0"/>
-            <a:ext cx="734040" cy="6842880"/>
+            <a:ext cx="733680" cy="6842520"/>
           </a:xfrm>
           <a:prstGeom prst="rect">
             <a:avLst/>
@@ -1936,17 +1863,23 @@
           <a:fontRef idx="minor"/>
         </p:style>
         <p:txBody>
-          <a:bodyPr lIns="90000" tIns="45000" rIns="90000" bIns="45000" anchor="t">
+          <a:bodyPr lIns="90000" rIns="90000" tIns="45000" bIns="45000" anchor="t">
             <a:noAutofit/>
           </a:bodyPr>
           <a:p>
-            <a:endParaRPr lang="en-GB" sz="1800" b="0" u="none" strike="noStrike">
-              <a:solidFill>
-                <a:srgbClr val="FFFFFF"/>
-              </a:solidFill>
-              <a:effectLst/>
-              <a:uFillTx/>
-              <a:latin typeface="Arial"/>
+            <a:pPr>
+              <a:lnSpc>
+                <a:spcPct val="100000"/>
+              </a:lnSpc>
+            </a:pPr>
+            <a:endParaRPr lang="en-GB" sz="1800" b="0" u="none" strike="noStrike">
+              <a:solidFill>
+                <a:srgbClr val="ffffff"/>
+              </a:solidFill>
+              <a:effectLst/>
+              <a:uFillTx/>
+              <a:latin typeface="Arial"/>
+              <a:ea typeface="DejaVu Sans"/>
             </a:endParaRPr>
           </a:p>
         </p:txBody>
@@ -1960,7 +1893,7 @@
         <p:spPr>
           <a:xfrm>
             <a:off x="11438640" y="6453360"/>
-            <a:ext cx="750960" cy="363960"/>
+            <a:ext cx="750600" cy="363960"/>
           </a:xfrm>
           <a:prstGeom prst="rect">
             <a:avLst/>
@@ -1977,7 +1910,7 @@
           <a:fontRef idx="minor"/>
         </p:style>
         <p:txBody>
-          <a:bodyPr lIns="90000" tIns="45000" rIns="90000" bIns="45000" anchor="t">
+          <a:bodyPr lIns="90000" rIns="90000" tIns="45000" bIns="45000" anchor="t">
             <a:spAutoFit/>
           </a:bodyPr>
           <a:p>
@@ -1986,7 +1919,7 @@
                 <a:spcPct val="100000"/>
               </a:lnSpc>
             </a:pPr>
-            <a:fld id="{A3743244-226C-4120-BA35-4AA26D2F2CA6}" type="slidenum">
+            <a:fld id="{2BCBD572-CD9C-4BCD-84F3-731E874DD770}" type="slidenum">
               <a:rPr lang="en-US" sz="1800" b="0" u="none" strike="noStrike">
                 <a:solidFill>
                   <a:srgbClr val="808080"/>
@@ -1996,9 +1929,9 @@
                 <a:latin typeface="Arial"/>
                 <a:ea typeface="DejaVu Sans"/>
               </a:rPr>
-              <a:t>1</a:t>
+              <a:t>&lt;number&gt;</a:t>
             </a:fld>
-            <a:endParaRPr lang="en-US" sz="1800" b="0" u="none" strike="noStrike">
+            <a:endParaRPr lang="en-GB" sz="1800" b="0" u="none" strike="noStrike">
               <a:solidFill>
                 <a:srgbClr val="000000"/>
               </a:solidFill>
@@ -2018,7 +1951,7 @@
         <p:spPr>
           <a:xfrm>
             <a:off x="0" y="6642720"/>
-            <a:ext cx="12177000" cy="211320"/>
+            <a:ext cx="12176640" cy="211320"/>
           </a:xfrm>
           <a:prstGeom prst="rect">
             <a:avLst/>
@@ -2035,7 +1968,7 @@
           <a:fontRef idx="minor"/>
         </p:style>
         <p:txBody>
-          <a:bodyPr lIns="90000" tIns="45000" rIns="90000" bIns="45000" anchor="t">
+          <a:bodyPr lIns="90000" rIns="90000" tIns="45000" bIns="45000" anchor="t">
             <a:spAutoFit/>
           </a:bodyPr>
           <a:p>
@@ -2047,7 +1980,7 @@
             <a:r>
               <a:rPr lang="en-US" sz="800" b="0" u="none" strike="noStrike">
                 <a:solidFill>
-                  <a:srgbClr val="A6A6A6"/>
+                  <a:srgbClr val="a6a6a6"/>
                 </a:solidFill>
                 <a:effectLst/>
                 <a:uFillTx/>
@@ -2056,7 +1989,7 @@
               </a:rPr>
               <a:t>Emerging Technologies for the Circular Economy – TU Clausthal</a:t>
             </a:r>
-            <a:endParaRPr lang="en-US" sz="800" b="0" u="none" strike="noStrike">
+            <a:endParaRPr lang="en-GB" sz="800" b="0" u="none" strike="noStrike">
               <a:solidFill>
                 <a:srgbClr val="000000"/>
               </a:solidFill>
@@ -2091,44 +2024,25 @@
           </a:ln>
         </p:spPr>
         <p:txBody>
-          <a:bodyPr lIns="0" tIns="0" rIns="0" bIns="0" anchor="ctr">
+          <a:bodyPr lIns="0" rIns="0" tIns="0" bIns="0" anchor="ctr">
             <a:noAutofit/>
           </a:bodyPr>
-          <a:lstStyle>
-            <a:lvl1pPr indent="0" algn="l">
+          <a:p>
+            <a:pPr indent="0" algn="ctr">
               <a:buNone/>
-              <a:tabLst>
-                <a:tab pos="0" algn="l"/>
-              </a:tabLst>
-              <a:defRPr lang="en-US" sz="4400" b="0" u="none" strike="noStrike">
+            </a:pPr>
+            <a:r>
+              <a:rPr lang="en-GB" sz="4400" b="0" u="none" strike="noStrike">
                 <a:solidFill>
                   <a:srgbClr val="000000"/>
                 </a:solidFill>
                 <a:effectLst/>
                 <a:uFillTx/>
                 <a:latin typeface="Arial"/>
-              </a:defRPr>
-            </a:lvl1pPr>
-          </a:lstStyle>
-          <a:p>
-            <a:pPr indent="0" algn="l">
-              <a:buNone/>
-              <a:tabLst>
-                <a:tab pos="0" algn="l"/>
-              </a:tabLst>
-            </a:pPr>
-            <a:r>
-              <a:rPr lang="en-US" sz="4400" b="0" u="none" strike="noStrike">
-                <a:solidFill>
-                  <a:srgbClr val="000000"/>
-                </a:solidFill>
-                <a:effectLst/>
-                <a:uFillTx/>
-                <a:latin typeface="Arial"/>
               </a:rPr>
               <a:t>Click to edit the title text format</a:t>
             </a:r>
-            <a:endParaRPr lang="en-US" sz="4400" b="0" u="none" strike="noStrike">
+            <a:endParaRPr lang="en-GB" sz="4400" b="0" u="none" strike="noStrike">
               <a:solidFill>
                 <a:srgbClr val="000000"/>
               </a:solidFill>
@@ -2163,316 +2077,225 @@
           </a:ln>
         </p:spPr>
         <p:txBody>
-          <a:bodyPr lIns="0" tIns="0" rIns="0" bIns="0" anchor="t">
+          <a:bodyPr lIns="0" rIns="0" tIns="0" bIns="0" anchor="t">
             <a:normAutofit/>
           </a:bodyPr>
-          <a:lstStyle>
-            <a:lvl1pPr algn="l">
+          <a:p>
+            <a:pPr marL="432000" indent="-324000">
+              <a:spcBef>
+                <a:spcPts val="1417"/>
+              </a:spcBef>
               <a:buClr>
                 <a:srgbClr val="000000"/>
               </a:buClr>
+              <a:buSzPct val="45000"/>
               <a:buFont typeface="Wingdings" charset="2"/>
               <a:buChar char=""/>
-              <a:defRPr lang="en-US" sz="3200" b="0" u="none" strike="noStrike">
+            </a:pPr>
+            <a:r>
+              <a:rPr lang="en-GB" sz="3200" b="0" u="none" strike="noStrike">
                 <a:solidFill>
                   <a:srgbClr val="000000"/>
                 </a:solidFill>
                 <a:effectLst/>
                 <a:uFillTx/>
                 <a:latin typeface="Arial"/>
-              </a:defRPr>
-            </a:lvl1pPr>
-            <a:lvl2pPr lvl="1" algn="l">
+              </a:rPr>
+              <a:t>Click to edit the outline text format</a:t>
+            </a:r>
+            <a:endParaRPr lang="en-GB" sz="3200" b="0" u="none" strike="noStrike">
+              <a:solidFill>
+                <a:srgbClr val="000000"/>
+              </a:solidFill>
+              <a:effectLst/>
+              <a:uFillTx/>
+              <a:latin typeface="Arial"/>
+            </a:endParaRPr>
+          </a:p>
+          <a:p>
+            <a:pPr marL="864000" lvl="1" indent="-324000">
+              <a:spcBef>
+                <a:spcPts val="1134"/>
+              </a:spcBef>
               <a:buClr>
                 <a:srgbClr val="000000"/>
               </a:buClr>
               <a:buSzPct val="75000"/>
               <a:buFont typeface="Symbol" charset="2"/>
               <a:buChar char=""/>
-              <a:defRPr lang="en-US" sz="2800" b="0" u="none" strike="noStrike">
+            </a:pPr>
+            <a:r>
+              <a:rPr lang="en-GB" sz="2800" b="0" u="none" strike="noStrike">
                 <a:solidFill>
                   <a:srgbClr val="000000"/>
                 </a:solidFill>
                 <a:effectLst/>
                 <a:uFillTx/>
                 <a:latin typeface="Arial"/>
-              </a:defRPr>
-            </a:lvl2pPr>
-            <a:lvl3pPr lvl="2" algn="l">
+              </a:rPr>
+              <a:t>Second Outline Level</a:t>
+            </a:r>
+            <a:endParaRPr lang="en-GB" sz="2800" b="0" u="none" strike="noStrike">
+              <a:solidFill>
+                <a:srgbClr val="000000"/>
+              </a:solidFill>
+              <a:effectLst/>
+              <a:uFillTx/>
+              <a:latin typeface="Arial"/>
+            </a:endParaRPr>
+          </a:p>
+          <a:p>
+            <a:pPr marL="1296000" lvl="2" indent="-288000">
+              <a:spcBef>
+                <a:spcPts val="850"/>
+              </a:spcBef>
               <a:buClr>
                 <a:srgbClr val="000000"/>
               </a:buClr>
               <a:buSzPct val="45000"/>
               <a:buFont typeface="Wingdings" charset="2"/>
               <a:buChar char=""/>
-              <a:defRPr lang="en-US" sz="2400" b="0" u="none" strike="noStrike">
+            </a:pPr>
+            <a:r>
+              <a:rPr lang="en-GB" sz="2400" b="0" u="none" strike="noStrike">
                 <a:solidFill>
                   <a:srgbClr val="000000"/>
                 </a:solidFill>
                 <a:effectLst/>
                 <a:uFillTx/>
                 <a:latin typeface="Arial"/>
-              </a:defRPr>
-            </a:lvl3pPr>
-            <a:lvl4pPr lvl="3" algn="l">
+              </a:rPr>
+              <a:t>Third Outline Level</a:t>
+            </a:r>
+            <a:endParaRPr lang="en-GB" sz="2400" b="0" u="none" strike="noStrike">
+              <a:solidFill>
+                <a:srgbClr val="000000"/>
+              </a:solidFill>
+              <a:effectLst/>
+              <a:uFillTx/>
+              <a:latin typeface="Arial"/>
+            </a:endParaRPr>
+          </a:p>
+          <a:p>
+            <a:pPr marL="1728000" lvl="3" indent="-216000">
+              <a:spcBef>
+                <a:spcPts val="567"/>
+              </a:spcBef>
               <a:buClr>
                 <a:srgbClr val="000000"/>
               </a:buClr>
               <a:buSzPct val="75000"/>
               <a:buFont typeface="Symbol" charset="2"/>
               <a:buChar char=""/>
-              <a:defRPr lang="en-US" sz="2000" b="0" u="none" strike="noStrike">
+            </a:pPr>
+            <a:r>
+              <a:rPr lang="en-GB" sz="2000" b="0" u="none" strike="noStrike">
                 <a:solidFill>
                   <a:srgbClr val="000000"/>
                 </a:solidFill>
                 <a:effectLst/>
                 <a:uFillTx/>
                 <a:latin typeface="Arial"/>
-              </a:defRPr>
-            </a:lvl4pPr>
-            <a:lvl5pPr lvl="4" algn="l">
+              </a:rPr>
+              <a:t>Fourth Outline Level</a:t>
+            </a:r>
+            <a:endParaRPr lang="en-GB" sz="2000" b="0" u="none" strike="noStrike">
+              <a:solidFill>
+                <a:srgbClr val="000000"/>
+              </a:solidFill>
+              <a:effectLst/>
+              <a:uFillTx/>
+              <a:latin typeface="Arial"/>
+            </a:endParaRPr>
+          </a:p>
+          <a:p>
+            <a:pPr marL="2160000" lvl="4" indent="-216000">
+              <a:spcBef>
+                <a:spcPts val="283"/>
+              </a:spcBef>
               <a:buClr>
                 <a:srgbClr val="000000"/>
               </a:buClr>
               <a:buSzPct val="45000"/>
               <a:buFont typeface="Wingdings" charset="2"/>
               <a:buChar char=""/>
-              <a:defRPr lang="en-US" sz="2000" b="0" u="none" strike="noStrike">
+            </a:pPr>
+            <a:r>
+              <a:rPr lang="en-GB" sz="2000" b="0" u="none" strike="noStrike">
                 <a:solidFill>
                   <a:srgbClr val="000000"/>
                 </a:solidFill>
                 <a:effectLst/>
                 <a:uFillTx/>
                 <a:latin typeface="Arial"/>
-              </a:defRPr>
-            </a:lvl5pPr>
-            <a:lvl6pPr lvl="5" algn="l">
+              </a:rPr>
+              <a:t>Fifth Outline Level</a:t>
+            </a:r>
+            <a:endParaRPr lang="en-GB" sz="2000" b="0" u="none" strike="noStrike">
+              <a:solidFill>
+                <a:srgbClr val="000000"/>
+              </a:solidFill>
+              <a:effectLst/>
+              <a:uFillTx/>
+              <a:latin typeface="Arial"/>
+            </a:endParaRPr>
+          </a:p>
+          <a:p>
+            <a:pPr marL="2592000" lvl="5" indent="-216000">
+              <a:spcBef>
+                <a:spcPts val="283"/>
+              </a:spcBef>
               <a:buClr>
                 <a:srgbClr val="000000"/>
               </a:buClr>
               <a:buSzPct val="45000"/>
               <a:buFont typeface="Wingdings" charset="2"/>
               <a:buChar char=""/>
-              <a:defRPr lang="en-US" sz="2000" b="0" u="none" strike="noStrike">
+            </a:pPr>
+            <a:r>
+              <a:rPr lang="en-GB" sz="2000" b="0" u="none" strike="noStrike">
                 <a:solidFill>
                   <a:srgbClr val="000000"/>
                 </a:solidFill>
                 <a:effectLst/>
                 <a:uFillTx/>
                 <a:latin typeface="Arial"/>
-              </a:defRPr>
-            </a:lvl6pPr>
-            <a:lvl7pPr lvl="6" algn="l">
+              </a:rPr>
+              <a:t>Sixth Outline Level</a:t>
+            </a:r>
+            <a:endParaRPr lang="en-GB" sz="2000" b="0" u="none" strike="noStrike">
+              <a:solidFill>
+                <a:srgbClr val="000000"/>
+              </a:solidFill>
+              <a:effectLst/>
+              <a:uFillTx/>
+              <a:latin typeface="Arial"/>
+            </a:endParaRPr>
+          </a:p>
+          <a:p>
+            <a:pPr marL="3024000" lvl="6" indent="-216000">
+              <a:spcBef>
+                <a:spcPts val="283"/>
+              </a:spcBef>
               <a:buClr>
                 <a:srgbClr val="000000"/>
               </a:buClr>
               <a:buSzPct val="45000"/>
               <a:buFont typeface="Wingdings" charset="2"/>
               <a:buChar char=""/>
-              <a:defRPr lang="en-US" sz="2000" b="0" u="none" strike="noStrike">
+            </a:pPr>
+            <a:r>
+              <a:rPr lang="en-GB" sz="2000" b="0" u="none" strike="noStrike">
                 <a:solidFill>
                   <a:srgbClr val="000000"/>
                 </a:solidFill>
                 <a:effectLst/>
                 <a:uFillTx/>
                 <a:latin typeface="Arial"/>
-              </a:defRPr>
-            </a:lvl7pPr>
-          </a:lstStyle>
-          <a:p>
-            <a:pPr indent="-324000" algn="l">
-              <a:buClr>
-                <a:srgbClr val="000000"/>
-              </a:buClr>
-              <a:buFont typeface="Wingdings" charset="2"/>
-              <a:buChar char=""/>
-            </a:pPr>
-            <a:r>
-              <a:rPr lang="en-US" sz="3200" b="0" u="none" strike="noStrike">
-                <a:solidFill>
-                  <a:srgbClr val="000000"/>
-                </a:solidFill>
-                <a:effectLst/>
-                <a:uFillTx/>
-                <a:latin typeface="Arial"/>
-              </a:rPr>
-              <a:t>Click to edit the outline text format</a:t>
-            </a:r>
-            <a:endParaRPr lang="en-US" sz="3200" b="0" u="none" strike="noStrike">
-              <a:solidFill>
-                <a:srgbClr val="000000"/>
-              </a:solidFill>
-              <a:effectLst/>
-              <a:uFillTx/>
-              <a:latin typeface="Arial"/>
-            </a:endParaRPr>
-          </a:p>
-          <a:p>
-            <a:pPr marL="864000" lvl="1" indent="-324000" algn="l">
-              <a:buClr>
-                <a:srgbClr val="000000"/>
-              </a:buClr>
-              <a:buSzPct val="75000"/>
-              <a:buFont typeface="Symbol" charset="2"/>
-              <a:buChar char=""/>
-            </a:pPr>
-            <a:r>
-              <a:rPr lang="en-US" sz="2800" b="0" u="none" strike="noStrike">
-                <a:solidFill>
-                  <a:srgbClr val="000000"/>
-                </a:solidFill>
-                <a:effectLst/>
-                <a:uFillTx/>
-                <a:latin typeface="Arial"/>
-              </a:rPr>
-              <a:t>Second Outline Level</a:t>
-            </a:r>
-            <a:endParaRPr lang="en-US" sz="2800" b="0" u="none" strike="noStrike">
-              <a:solidFill>
-                <a:srgbClr val="000000"/>
-              </a:solidFill>
-              <a:effectLst/>
-              <a:uFillTx/>
-              <a:latin typeface="Arial"/>
-            </a:endParaRPr>
-          </a:p>
-          <a:p>
-            <a:pPr marL="1296000" lvl="2" indent="-288000" algn="l">
-              <a:buClr>
-                <a:srgbClr val="000000"/>
-              </a:buClr>
-              <a:buSzPct val="45000"/>
-              <a:buFont typeface="Wingdings" charset="2"/>
-              <a:buChar char=""/>
-            </a:pPr>
-            <a:r>
-              <a:rPr lang="en-US" sz="2400" b="0" u="none" strike="noStrike">
-                <a:solidFill>
-                  <a:srgbClr val="000000"/>
-                </a:solidFill>
-                <a:effectLst/>
-                <a:uFillTx/>
-                <a:latin typeface="Arial"/>
-              </a:rPr>
-              <a:t>Third Outline Level</a:t>
-            </a:r>
-            <a:endParaRPr lang="en-US" sz="2400" b="0" u="none" strike="noStrike">
-              <a:solidFill>
-                <a:srgbClr val="000000"/>
-              </a:solidFill>
-              <a:effectLst/>
-              <a:uFillTx/>
-              <a:latin typeface="Arial"/>
-            </a:endParaRPr>
-          </a:p>
-          <a:p>
-            <a:pPr marL="1728000" lvl="3" indent="-216000" algn="l">
-              <a:buClr>
-                <a:srgbClr val="000000"/>
-              </a:buClr>
-              <a:buSzPct val="75000"/>
-              <a:buFont typeface="Symbol" charset="2"/>
-              <a:buChar char=""/>
-            </a:pPr>
-            <a:r>
-              <a:rPr lang="en-US" sz="2000" b="0" u="none" strike="noStrike">
-                <a:solidFill>
-                  <a:srgbClr val="000000"/>
-                </a:solidFill>
-                <a:effectLst/>
-                <a:uFillTx/>
-                <a:latin typeface="Arial"/>
-              </a:rPr>
-              <a:t>Fourth Outline Level</a:t>
-            </a:r>
-            <a:endParaRPr lang="en-US" sz="2000" b="0" u="none" strike="noStrike">
-              <a:solidFill>
-                <a:srgbClr val="000000"/>
-              </a:solidFill>
-              <a:effectLst/>
-              <a:uFillTx/>
-              <a:latin typeface="Arial"/>
-            </a:endParaRPr>
-          </a:p>
-          <a:p>
-            <a:pPr marL="2160000" lvl="4" indent="-216000" algn="l">
-              <a:buClr>
-                <a:srgbClr val="000000"/>
-              </a:buClr>
-              <a:buSzPct val="45000"/>
-              <a:buFont typeface="Wingdings" charset="2"/>
-              <a:buChar char=""/>
-            </a:pPr>
-            <a:r>
-              <a:rPr lang="en-US" sz="2000" b="0" u="none" strike="noStrike">
-                <a:solidFill>
-                  <a:srgbClr val="000000"/>
-                </a:solidFill>
-                <a:effectLst/>
-                <a:uFillTx/>
-                <a:latin typeface="Arial"/>
-              </a:rPr>
-              <a:t>Fifth Outline Level</a:t>
-            </a:r>
-            <a:endParaRPr lang="en-US" sz="2000" b="0" u="none" strike="noStrike">
-              <a:solidFill>
-                <a:srgbClr val="000000"/>
-              </a:solidFill>
-              <a:effectLst/>
-              <a:uFillTx/>
-              <a:latin typeface="Arial"/>
-            </a:endParaRPr>
-          </a:p>
-          <a:p>
-            <a:pPr marL="2592000" lvl="5" indent="-216000" algn="l">
-              <a:buClr>
-                <a:srgbClr val="000000"/>
-              </a:buClr>
-              <a:buSzPct val="45000"/>
-              <a:buFont typeface="Wingdings" charset="2"/>
-              <a:buChar char=""/>
-            </a:pPr>
-            <a:r>
-              <a:rPr lang="en-US" sz="2000" b="0" u="none" strike="noStrike">
-                <a:solidFill>
-                  <a:srgbClr val="000000"/>
-                </a:solidFill>
-                <a:effectLst/>
-                <a:uFillTx/>
-                <a:latin typeface="Arial"/>
-              </a:rPr>
-              <a:t>Sixth Outline Level</a:t>
-            </a:r>
-            <a:endParaRPr lang="en-US" sz="2000" b="0" u="none" strike="noStrike">
-              <a:solidFill>
-                <a:srgbClr val="000000"/>
-              </a:solidFill>
-              <a:effectLst/>
-              <a:uFillTx/>
-              <a:latin typeface="Arial"/>
-            </a:endParaRPr>
-          </a:p>
-          <a:p>
-            <a:pPr marL="3024000" lvl="6" indent="-216000" algn="l">
-              <a:buClr>
-                <a:srgbClr val="000000"/>
-              </a:buClr>
-              <a:buSzPct val="45000"/>
-              <a:buFont typeface="Wingdings" charset="2"/>
-              <a:buChar char=""/>
-            </a:pPr>
-            <a:r>
-              <a:rPr lang="en-US" sz="2000" b="0" u="none" strike="noStrike">
-                <a:solidFill>
-                  <a:srgbClr val="000000"/>
-                </a:solidFill>
-                <a:effectLst/>
-                <a:uFillTx/>
-                <a:latin typeface="Arial"/>
               </a:rPr>
               <a:t>Seventh Outline Level</a:t>
             </a:r>
-            <a:endParaRPr lang="en-US" sz="2000" b="0" u="none" strike="noStrike">
+            <a:endParaRPr lang="en-GB" sz="2000" b="0" u="none" strike="noStrike">
               <a:solidFill>
                 <a:srgbClr val="000000"/>
               </a:solidFill>
@@ -2518,7 +2341,7 @@
         <p:spPr>
           <a:xfrm>
             <a:off x="527400" y="1412640"/>
-            <a:ext cx="10353960" cy="1140480"/>
+            <a:ext cx="10353600" cy="1140120"/>
           </a:xfrm>
           <a:prstGeom prst="rect">
             <a:avLst/>
@@ -2535,7 +2358,7 @@
           <a:fontRef idx="minor"/>
         </p:style>
         <p:txBody>
-          <a:bodyPr lIns="90000" tIns="45000" rIns="90000" bIns="45000" anchor="b">
+          <a:bodyPr lIns="90000" rIns="90000" tIns="45000" bIns="45000" anchor="b">
             <a:noAutofit/>
           </a:bodyPr>
           <a:p>
@@ -2547,7 +2370,7 @@
             <a:r>
               <a:rPr lang="en-US" sz="3200" b="1" u="none" strike="noStrike">
                 <a:solidFill>
-                  <a:srgbClr val="008C4F"/>
+                  <a:srgbClr val="008c4f"/>
                 </a:solidFill>
                 <a:effectLst/>
                 <a:uFillTx/>
@@ -2556,7 +2379,7 @@
               </a:rPr>
               <a:t>Emerging Technologies for the Circular Economy</a:t>
             </a:r>
-            <a:endParaRPr lang="en-US" sz="3200" b="0" u="none" strike="noStrike">
+            <a:endParaRPr lang="en-GB" sz="3200" b="0" u="none" strike="noStrike">
               <a:solidFill>
                 <a:srgbClr val="000000"/>
               </a:solidFill>
@@ -2576,7 +2399,7 @@
         <p:spPr>
           <a:xfrm>
             <a:off x="527400" y="2852640"/>
-            <a:ext cx="10353960" cy="2361240"/>
+            <a:ext cx="10353600" cy="2360880"/>
           </a:xfrm>
           <a:prstGeom prst="rect">
             <a:avLst/>
@@ -2593,7 +2416,7 @@
           <a:fontRef idx="minor"/>
         </p:style>
         <p:txBody>
-          <a:bodyPr lIns="90000" tIns="45000" rIns="90000" bIns="45000" anchor="t">
+          <a:bodyPr lIns="90000" rIns="90000" tIns="45000" bIns="45000" anchor="t">
             <a:noAutofit/>
           </a:bodyPr>
           <a:p>
@@ -2605,10 +2428,10 @@
                 <a:spcPts val="479"/>
               </a:spcBef>
               <a:tabLst>
-                <a:tab pos="0" algn="l"/>
+                <a:tab algn="l" pos="0"/>
               </a:tabLst>
             </a:pPr>
-            <a:endParaRPr lang="en-US" sz="2400" b="0" u="none" strike="noStrike">
+            <a:endParaRPr lang="en-GB" sz="2400" b="0" u="none" strike="noStrike">
               <a:solidFill>
                 <a:srgbClr val="000000"/>
               </a:solidFill>
@@ -2626,7 +2449,7 @@
                 <a:spcPts val="479"/>
               </a:spcBef>
               <a:tabLst>
-                <a:tab pos="0" algn="l"/>
+                <a:tab algn="l" pos="0"/>
               </a:tabLst>
             </a:pPr>
             <a:r>
@@ -2641,7 +2464,7 @@
               </a:rPr>
               <a:t>Lecture 0: Organization</a:t>
             </a:r>
-            <a:endParaRPr lang="en-US" sz="2400" b="0" u="none" strike="noStrike">
+            <a:endParaRPr lang="en-GB" sz="2400" b="0" u="none" strike="noStrike">
               <a:solidFill>
                 <a:srgbClr val="000000"/>
               </a:solidFill>
@@ -2659,10 +2482,10 @@
                 <a:spcPts val="479"/>
               </a:spcBef>
               <a:tabLst>
-                <a:tab pos="0" algn="l"/>
+                <a:tab algn="l" pos="0"/>
               </a:tabLst>
             </a:pPr>
-            <a:endParaRPr lang="en-US" sz="2400" b="0" u="none" strike="noStrike">
+            <a:endParaRPr lang="en-GB" sz="2400" b="0" u="none" strike="noStrike">
               <a:solidFill>
                 <a:srgbClr val="000000"/>
               </a:solidFill>
@@ -2680,10 +2503,10 @@
                 <a:spcPts val="241"/>
               </a:spcBef>
               <a:tabLst>
-                <a:tab pos="0" algn="l"/>
+                <a:tab algn="l" pos="0"/>
               </a:tabLst>
             </a:pPr>
-            <a:endParaRPr lang="en-US" sz="2400" b="0" u="none" strike="noStrike">
+            <a:endParaRPr lang="en-GB" sz="2400" b="0" u="none" strike="noStrike">
               <a:solidFill>
                 <a:srgbClr val="000000"/>
               </a:solidFill>
@@ -2701,7 +2524,7 @@
                 <a:spcPts val="320"/>
               </a:spcBef>
               <a:tabLst>
-                <a:tab pos="0" algn="l"/>
+                <a:tab algn="l" pos="0"/>
               </a:tabLst>
             </a:pPr>
             <a:r>
@@ -2716,7 +2539,7 @@
               </a:rPr>
               <a:t>Prof. Dr. Benjamin Leiding</a:t>
             </a:r>
-            <a:endParaRPr lang="en-US" sz="1600" b="0" u="none" strike="noStrike">
+            <a:endParaRPr lang="en-GB" sz="1600" b="0" u="none" strike="noStrike">
               <a:solidFill>
                 <a:srgbClr val="000000"/>
               </a:solidFill>
@@ -2734,7 +2557,7 @@
                 <a:spcPts val="320"/>
               </a:spcBef>
               <a:tabLst>
-                <a:tab pos="0" algn="l"/>
+                <a:tab algn="l" pos="0"/>
               </a:tabLst>
             </a:pPr>
             <a:r>
@@ -2749,7 +2572,7 @@
               </a:rPr>
               <a:t>M.Sc. Anant Sujatanagarjuna</a:t>
             </a:r>
-            <a:endParaRPr lang="en-US" sz="1600" b="0" u="none" strike="noStrike">
+            <a:endParaRPr lang="en-GB" sz="1600" b="0" u="none" strike="noStrike">
               <a:solidFill>
                 <a:srgbClr val="000000"/>
               </a:solidFill>
@@ -2767,7 +2590,7 @@
                 <a:spcPts val="320"/>
               </a:spcBef>
               <a:tabLst>
-                <a:tab pos="0" algn="l"/>
+                <a:tab algn="l" pos="0"/>
               </a:tabLst>
             </a:pPr>
             <a:r>
@@ -2782,7 +2605,7 @@
               </a:rPr>
               <a:t>M.Sc. Chintan Patel</a:t>
             </a:r>
-            <a:endParaRPr lang="en-US" sz="1600" b="0" u="none" strike="noStrike">
+            <a:endParaRPr lang="en-GB" sz="1600" b="0" u="none" strike="noStrike">
               <a:solidFill>
                 <a:srgbClr val="000000"/>
               </a:solidFill>
@@ -2832,7 +2655,7 @@
         <p:spPr>
           <a:xfrm>
             <a:off x="335520" y="764640"/>
-            <a:ext cx="10738080" cy="488880"/>
+            <a:ext cx="10737720" cy="488520"/>
           </a:xfrm>
           <a:prstGeom prst="rect">
             <a:avLst/>
@@ -2849,7 +2672,7 @@
           <a:fontRef idx="minor"/>
         </p:style>
         <p:txBody>
-          <a:bodyPr lIns="90000" tIns="45000" rIns="90000" bIns="45000" anchor="t">
+          <a:bodyPr lIns="90000" rIns="90000" tIns="45000" bIns="45000" anchor="t">
             <a:noAutofit/>
           </a:bodyPr>
           <a:p>
@@ -2870,7 +2693,7 @@
               </a:rPr>
               <a:t>Course Organization</a:t>
             </a:r>
-            <a:endParaRPr lang="en-US" sz="2400" b="0" u="none" strike="noStrike">
+            <a:endParaRPr lang="en-GB" sz="2400" b="0" u="none" strike="noStrike">
               <a:solidFill>
                 <a:srgbClr val="000000"/>
               </a:solidFill>
@@ -2890,7 +2713,7 @@
         <p:spPr>
           <a:xfrm>
             <a:off x="335520" y="1268280"/>
-            <a:ext cx="10738080" cy="5025600"/>
+            <a:ext cx="10737720" cy="5025240"/>
           </a:xfrm>
           <a:prstGeom prst="rect">
             <a:avLst/>
@@ -2907,7 +2730,7 @@
           <a:fontRef idx="minor"/>
         </p:style>
         <p:txBody>
-          <a:bodyPr lIns="90000" tIns="45000" rIns="90000" bIns="45000" anchor="ctr">
+          <a:bodyPr lIns="90000" rIns="90000" tIns="45000" bIns="45000" anchor="ctr">
             <a:noAutofit/>
           </a:bodyPr>
           <a:p>
@@ -2919,7 +2742,7 @@
                 <a:spcPts val="360"/>
               </a:spcBef>
             </a:pPr>
-            <a:endParaRPr lang="en-US" sz="1800" b="0" u="none" strike="noStrike">
+            <a:endParaRPr lang="en-GB" sz="1800" b="0" u="none" strike="noStrike">
               <a:solidFill>
                 <a:srgbClr val="000000"/>
               </a:solidFill>
@@ -2937,7 +2760,7 @@
                 <a:spcPts val="360"/>
               </a:spcBef>
               <a:buClr>
-                <a:srgbClr val="008C4F"/>
+                <a:srgbClr val="008c4f"/>
               </a:buClr>
               <a:buSzPct val="115000"/>
               <a:buFont typeface="Wingdings" charset="2"/>
@@ -2955,7 +2778,7 @@
               </a:rPr>
               <a:t>Organization of the lecture:</a:t>
             </a:r>
-            <a:endParaRPr lang="en-US" sz="1800" b="0" u="none" strike="noStrike">
+            <a:endParaRPr lang="en-GB" sz="1800" b="0" u="none" strike="noStrike">
               <a:solidFill>
                 <a:srgbClr val="000000"/>
               </a:solidFill>
@@ -2973,7 +2796,7 @@
                 <a:spcPts val="360"/>
               </a:spcBef>
               <a:buClr>
-                <a:srgbClr val="008C4F"/>
+                <a:srgbClr val="008c4f"/>
               </a:buClr>
               <a:buSzPct val="45000"/>
               <a:buFont typeface="OpenSymbol"/>
@@ -2994,7 +2817,7 @@
             <a:r>
               <a:rPr lang="en-US" sz="1800" b="0" u="sng" strike="noStrike">
                 <a:solidFill>
-                  <a:srgbClr val="0000FF"/>
+                  <a:srgbClr val="0000ff"/>
                 </a:solidFill>
                 <a:effectLst/>
                 <a:uFillTx/>
@@ -3016,7 +2839,7 @@
               </a:rPr>
               <a:t>)</a:t>
             </a:r>
-            <a:endParaRPr lang="en-US" sz="1800" b="0" u="none" strike="noStrike">
+            <a:endParaRPr lang="en-GB" sz="1800" b="0" u="none" strike="noStrike">
               <a:solidFill>
                 <a:srgbClr val="000000"/>
               </a:solidFill>
@@ -3034,7 +2857,7 @@
                 <a:spcPts val="360"/>
               </a:spcBef>
               <a:buClr>
-                <a:srgbClr val="008C4F"/>
+                <a:srgbClr val="008c4f"/>
               </a:buClr>
               <a:buSzPct val="45000"/>
               <a:buFont typeface="OpenSymbol"/>
@@ -3052,7 +2875,7 @@
               </a:rPr>
               <a:t>Please report bugs!</a:t>
             </a:r>
-            <a:endParaRPr lang="en-US" sz="1800" b="0" u="none" strike="noStrike">
+            <a:endParaRPr lang="en-GB" sz="1800" b="0" u="none" strike="noStrike">
               <a:solidFill>
                 <a:srgbClr val="000000"/>
               </a:solidFill>
@@ -3070,7 +2893,7 @@
                 <a:spcPts val="360"/>
               </a:spcBef>
               <a:buClr>
-                <a:srgbClr val="008C4F"/>
+                <a:srgbClr val="008c4f"/>
               </a:buClr>
               <a:buSzPct val="45000"/>
               <a:buFont typeface="OpenSymbol"/>
@@ -3088,7 +2911,7 @@
               </a:rPr>
               <a:t>Lectures and exercises as live stream (BBB – next slide)</a:t>
             </a:r>
-            <a:endParaRPr lang="en-US" sz="1800" b="0" u="none" strike="noStrike">
+            <a:endParaRPr lang="en-GB" sz="1800" b="0" u="none" strike="noStrike">
               <a:solidFill>
                 <a:srgbClr val="000000"/>
               </a:solidFill>
@@ -3106,7 +2929,7 @@
                 <a:spcPts val="360"/>
               </a:spcBef>
               <a:buClr>
-                <a:srgbClr val="008C4F"/>
+                <a:srgbClr val="008c4f"/>
               </a:buClr>
               <a:buSzPct val="45000"/>
               <a:buFont typeface="OpenSymbol"/>
@@ -3124,7 +2947,7 @@
               </a:rPr>
               <a:t>Lecture recordings will be available on StudIP and on Github</a:t>
             </a:r>
-            <a:endParaRPr lang="en-US" sz="1800" b="0" u="none" strike="noStrike">
+            <a:endParaRPr lang="en-GB" sz="1800" b="0" u="none" strike="noStrike">
               <a:solidFill>
                 <a:srgbClr val="000000"/>
               </a:solidFill>
@@ -3142,7 +2965,7 @@
                 <a:spcPts val="360"/>
               </a:spcBef>
               <a:buClr>
-                <a:srgbClr val="008C4F"/>
+                <a:srgbClr val="008c4f"/>
               </a:buClr>
               <a:buSzPct val="45000"/>
               <a:buFont typeface="OpenSymbol"/>
@@ -3184,7 +3007,7 @@
               </a:rPr>
               <a:t>Time for questions and eventual tutorials related to the exercises</a:t>
             </a:r>
-            <a:endParaRPr lang="en-US" sz="1800" b="0" u="none" strike="noStrike">
+            <a:endParaRPr lang="en-GB" sz="1800" b="0" u="none" strike="noStrike">
               <a:solidFill>
                 <a:srgbClr val="000000"/>
               </a:solidFill>
@@ -3202,7 +3025,7 @@
                 <a:spcPts val="360"/>
               </a:spcBef>
             </a:pPr>
-            <a:endParaRPr lang="en-US" sz="1800" b="0" u="none" strike="noStrike">
+            <a:endParaRPr lang="en-GB" sz="1800" b="0" u="none" strike="noStrike">
               <a:solidFill>
                 <a:srgbClr val="000000"/>
               </a:solidFill>
@@ -3271,7 +3094,7 @@
             <a:r>
               <a:rPr lang="en-GB" sz="1800" b="1" u="sng" strike="noStrike">
                 <a:solidFill>
-                  <a:srgbClr val="C9211E"/>
+                  <a:srgbClr val="c9211e"/>
                 </a:solidFill>
                 <a:effectLst/>
                 <a:uFillTx/>
@@ -3292,7 +3115,7 @@
               </a:rPr>
               <a:t> respond to</a:t>
             </a:r>
-            <a:endParaRPr lang="en-US" sz="1800" b="0" u="none" strike="noStrike">
+            <a:endParaRPr lang="en-GB" sz="1800" b="0" u="none" strike="noStrike">
               <a:solidFill>
                 <a:srgbClr val="000000"/>
               </a:solidFill>
@@ -3322,7 +3145,7 @@
               </a:rPr>
               <a:t>emails written to this specific email address!</a:t>
             </a:r>
-            <a:endParaRPr lang="en-US" sz="1800" b="0" u="none" strike="noStrike">
+            <a:endParaRPr lang="en-GB" sz="1800" b="0" u="none" strike="noStrike">
               <a:solidFill>
                 <a:srgbClr val="000000"/>
               </a:solidFill>
@@ -3372,7 +3195,7 @@
         <p:spPr>
           <a:xfrm>
             <a:off x="335520" y="764640"/>
-            <a:ext cx="10736640" cy="487440"/>
+            <a:ext cx="10736280" cy="487080"/>
           </a:xfrm>
           <a:prstGeom prst="rect">
             <a:avLst/>
@@ -3389,7 +3212,7 @@
           <a:fontRef idx="minor"/>
         </p:style>
         <p:txBody>
-          <a:bodyPr lIns="90000" tIns="45000" rIns="90000" bIns="45000" anchor="t">
+          <a:bodyPr lIns="90000" rIns="90000" tIns="45000" bIns="45000" anchor="t">
             <a:noAutofit/>
           </a:bodyPr>
           <a:p>
@@ -3410,7 +3233,7 @@
               </a:rPr>
               <a:t>Dates/Times/Locations</a:t>
             </a:r>
-            <a:endParaRPr lang="en-US" sz="2400" b="0" u="none" strike="noStrike">
+            <a:endParaRPr lang="en-GB" sz="2400" b="0" u="none" strike="noStrike">
               <a:solidFill>
                 <a:srgbClr val="000000"/>
               </a:solidFill>
@@ -3425,7 +3248,7 @@
                 <a:spcPct val="100000"/>
               </a:lnSpc>
             </a:pPr>
-            <a:endParaRPr lang="en-US" sz="2400" b="0" u="none" strike="noStrike">
+            <a:endParaRPr lang="en-GB" sz="2400" b="0" u="none" strike="noStrike">
               <a:solidFill>
                 <a:srgbClr val="000000"/>
               </a:solidFill>
@@ -3440,7 +3263,7 @@
                 <a:spcPct val="100000"/>
               </a:lnSpc>
             </a:pPr>
-            <a:endParaRPr lang="en-US" sz="2400" b="0" u="none" strike="noStrike">
+            <a:endParaRPr lang="en-GB" sz="2400" b="0" u="none" strike="noStrike">
               <a:solidFill>
                 <a:srgbClr val="000000"/>
               </a:solidFill>
@@ -3460,7 +3283,7 @@
         <p:spPr>
           <a:xfrm>
             <a:off x="335520" y="1268640"/>
-            <a:ext cx="10736640" cy="5024160"/>
+            <a:ext cx="10736280" cy="5023800"/>
           </a:xfrm>
           <a:prstGeom prst="rect">
             <a:avLst/>
@@ -3477,7 +3300,7 @@
           <a:fontRef idx="minor"/>
         </p:style>
         <p:txBody>
-          <a:bodyPr lIns="90000" tIns="45000" rIns="90000" bIns="45000" anchor="ctr">
+          <a:bodyPr lIns="90000" rIns="90000" tIns="45000" bIns="45000" anchor="ctr">
             <a:noAutofit/>
           </a:bodyPr>
           <a:p>
@@ -3489,7 +3312,7 @@
                 <a:spcPts val="360"/>
               </a:spcBef>
             </a:pPr>
-            <a:endParaRPr lang="en-US" sz="1800" b="0" u="none" strike="noStrike">
+            <a:endParaRPr lang="en-GB" sz="1800" b="0" u="none" strike="noStrike">
               <a:solidFill>
                 <a:srgbClr val="000000"/>
               </a:solidFill>
@@ -3507,7 +3330,7 @@
                 <a:spcPts val="360"/>
               </a:spcBef>
               <a:buClr>
-                <a:srgbClr val="008C4F"/>
+                <a:srgbClr val="008c4f"/>
               </a:buClr>
               <a:buSzPct val="80000"/>
               <a:buFont typeface="Wingdings" charset="2"/>
@@ -3525,7 +3348,7 @@
               </a:rPr>
               <a:t>Lecture:</a:t>
             </a:r>
-            <a:endParaRPr lang="en-US" sz="1800" b="0" u="none" strike="noStrike">
+            <a:endParaRPr lang="en-GB" sz="1800" b="0" u="none" strike="noStrike">
               <a:solidFill>
                 <a:srgbClr val="000000"/>
               </a:solidFill>
@@ -3543,7 +3366,7 @@
                 <a:spcPts val="360"/>
               </a:spcBef>
               <a:buClr>
-                <a:srgbClr val="008C4F"/>
+                <a:srgbClr val="008c4f"/>
               </a:buClr>
               <a:buSzPct val="45000"/>
               <a:buFont typeface="OpenSymbol"/>
@@ -3621,7 +3444,7 @@
               </a:rPr>
               <a:t>13.07.2026</a:t>
             </a:r>
-            <a:endParaRPr lang="en-US" sz="1800" b="0" u="none" strike="noStrike">
+            <a:endParaRPr lang="en-GB" sz="1800" b="0" u="none" strike="noStrike">
               <a:solidFill>
                 <a:srgbClr val="000000"/>
               </a:solidFill>
@@ -3639,7 +3462,7 @@
                 <a:spcPts val="360"/>
               </a:spcBef>
               <a:buClr>
-                <a:srgbClr val="008C4F"/>
+                <a:srgbClr val="008c4f"/>
               </a:buClr>
               <a:buSzPct val="45000"/>
               <a:buFont typeface="OpenSymbol"/>
@@ -3660,7 +3483,7 @@
             <a:r>
               <a:rPr lang="en-GB" sz="1800" b="0" u="sng" strike="noStrike">
                 <a:solidFill>
-                  <a:srgbClr val="0000FF"/>
+                  <a:srgbClr val="0000ff"/>
                 </a:solidFill>
                 <a:effectLst/>
                 <a:uFillTx/>
@@ -3682,7 +3505,7 @@
               </a:rPr>
               <a:t>)</a:t>
             </a:r>
-            <a:endParaRPr lang="en-US" sz="1800" b="0" u="none" strike="noStrike">
+            <a:endParaRPr lang="en-GB" sz="1800" b="0" u="none" strike="noStrike">
               <a:solidFill>
                 <a:srgbClr val="000000"/>
               </a:solidFill>
@@ -3700,7 +3523,7 @@
                 <a:spcPts val="360"/>
               </a:spcBef>
             </a:pPr>
-            <a:endParaRPr lang="en-US" sz="1800" b="0" u="none" strike="noStrike">
+            <a:endParaRPr lang="en-GB" sz="1800" b="0" u="none" strike="noStrike">
               <a:solidFill>
                 <a:srgbClr val="000000"/>
               </a:solidFill>
@@ -3718,7 +3541,7 @@
                 <a:spcPts val="360"/>
               </a:spcBef>
               <a:buClr>
-                <a:srgbClr val="008C4F"/>
+                <a:srgbClr val="008c4f"/>
               </a:buClr>
               <a:buSzPct val="80000"/>
               <a:buFont typeface="Wingdings" charset="2"/>
@@ -3736,7 +3559,7 @@
               </a:rPr>
               <a:t>Exercise / Q&amp;A:</a:t>
             </a:r>
-            <a:endParaRPr lang="en-US" sz="1800" b="0" u="none" strike="noStrike">
+            <a:endParaRPr lang="en-GB" sz="1800" b="0" u="none" strike="noStrike">
               <a:solidFill>
                 <a:srgbClr val="000000"/>
               </a:solidFill>
@@ -3754,7 +3577,7 @@
                 <a:spcPts val="360"/>
               </a:spcBef>
               <a:buClr>
-                <a:srgbClr val="008C4F"/>
+                <a:srgbClr val="008c4f"/>
               </a:buClr>
               <a:buSzPct val="45000"/>
               <a:buFont typeface="OpenSymbol"/>
@@ -3832,7 +3655,7 @@
               </a:rPr>
               <a:t>13.07.2026</a:t>
             </a:r>
-            <a:endParaRPr lang="en-US" sz="1800" b="0" u="none" strike="noStrike">
+            <a:endParaRPr lang="en-GB" sz="1800" b="0" u="none" strike="noStrike">
               <a:solidFill>
                 <a:srgbClr val="000000"/>
               </a:solidFill>
@@ -3850,7 +3673,7 @@
                 <a:spcPts val="360"/>
               </a:spcBef>
               <a:buClr>
-                <a:srgbClr val="008C4F"/>
+                <a:srgbClr val="008c4f"/>
               </a:buClr>
               <a:buSzPct val="45000"/>
               <a:buFont typeface="OpenSymbol"/>
@@ -3871,7 +3694,7 @@
             <a:r>
               <a:rPr lang="en-GB" sz="1800" b="0" u="sng" strike="noStrike">
                 <a:solidFill>
-                  <a:srgbClr val="0000FF"/>
+                  <a:srgbClr val="0000ff"/>
                 </a:solidFill>
                 <a:effectLst/>
                 <a:uFillTx/>
@@ -3893,7 +3716,7 @@
               </a:rPr>
               <a:t>)</a:t>
             </a:r>
-            <a:endParaRPr lang="en-US" sz="1800" b="0" u="none" strike="noStrike">
+            <a:endParaRPr lang="en-GB" sz="1800" b="0" u="none" strike="noStrike">
               <a:solidFill>
                 <a:srgbClr val="000000"/>
               </a:solidFill>
@@ -3943,7 +3766,7 @@
         <p:spPr>
           <a:xfrm>
             <a:off x="335520" y="764640"/>
-            <a:ext cx="10738080" cy="488880"/>
+            <a:ext cx="10737720" cy="488520"/>
           </a:xfrm>
           <a:prstGeom prst="rect">
             <a:avLst/>
@@ -3960,7 +3783,7 @@
           <a:fontRef idx="minor"/>
         </p:style>
         <p:txBody>
-          <a:bodyPr lIns="90000" tIns="45000" rIns="90000" bIns="45000" anchor="t">
+          <a:bodyPr lIns="90000" rIns="90000" tIns="45000" bIns="45000" anchor="t">
             <a:noAutofit/>
           </a:bodyPr>
           <a:p>
@@ -3981,7 +3804,7 @@
               </a:rPr>
               <a:t>Exercises </a:t>
             </a:r>
-            <a:endParaRPr lang="en-US" sz="2400" b="0" u="none" strike="noStrike">
+            <a:endParaRPr lang="en-GB" sz="2400" b="0" u="none" strike="noStrike">
               <a:solidFill>
                 <a:srgbClr val="000000"/>
               </a:solidFill>
@@ -4001,7 +3824,7 @@
         <p:spPr>
           <a:xfrm>
             <a:off x="335520" y="1268280"/>
-            <a:ext cx="10738080" cy="5025600"/>
+            <a:ext cx="10737720" cy="5025240"/>
           </a:xfrm>
           <a:prstGeom prst="rect">
             <a:avLst/>
@@ -4018,7 +3841,7 @@
           <a:fontRef idx="minor"/>
         </p:style>
         <p:txBody>
-          <a:bodyPr lIns="90000" tIns="45000" rIns="90000" bIns="45000" anchor="ctr">
+          <a:bodyPr lIns="90000" rIns="90000" tIns="45000" bIns="45000" anchor="ctr">
             <a:noAutofit/>
           </a:bodyPr>
           <a:p>
@@ -4027,7 +3850,7 @@
                 <a:spcPct val="100000"/>
               </a:lnSpc>
             </a:pPr>
-            <a:endParaRPr lang="en-US" sz="1800" b="0" u="none" strike="noStrike">
+            <a:endParaRPr lang="en-GB" sz="1800" b="0" u="none" strike="noStrike">
               <a:solidFill>
                 <a:srgbClr val="000000"/>
               </a:solidFill>
@@ -4045,7 +3868,7 @@
                 <a:spcPts val="360"/>
               </a:spcBef>
               <a:buClr>
-                <a:srgbClr val="008C4F"/>
+                <a:srgbClr val="008c4f"/>
               </a:buClr>
               <a:buSzPct val="115000"/>
               <a:buFont typeface="Wingdings" charset="2"/>
@@ -4111,7 +3934,7 @@
               </a:rPr>
               <a:t>no group submissions</a:t>
             </a:r>
-            <a:endParaRPr lang="en-US" sz="1800" b="0" u="none" strike="noStrike">
+            <a:endParaRPr lang="en-GB" sz="1800" b="0" u="none" strike="noStrike">
               <a:solidFill>
                 <a:srgbClr val="000000"/>
               </a:solidFill>
@@ -4129,7 +3952,7 @@
                 <a:spcPts val="360"/>
               </a:spcBef>
               <a:buClr>
-                <a:srgbClr val="008C4F"/>
+                <a:srgbClr val="008c4f"/>
               </a:buClr>
               <a:buSzPct val="115000"/>
               <a:buFont typeface="Wingdings" charset="2"/>
@@ -4147,7 +3970,7 @@
               </a:rPr>
               <a:t>Multiple-Choice or coding exercises</a:t>
             </a:r>
-            <a:endParaRPr lang="en-US" sz="1800" b="0" u="none" strike="noStrike">
+            <a:endParaRPr lang="en-GB" sz="1800" b="0" u="none" strike="noStrike">
               <a:solidFill>
                 <a:srgbClr val="000000"/>
               </a:solidFill>
@@ -4165,7 +3988,7 @@
                 <a:spcPts val="360"/>
               </a:spcBef>
               <a:buClr>
-                <a:srgbClr val="008C4F"/>
+                <a:srgbClr val="008c4f"/>
               </a:buClr>
               <a:buSzPct val="115000"/>
               <a:buFont typeface="Wingdings" charset="2"/>
@@ -4183,7 +4006,7 @@
               </a:rPr>
               <a:t>Multiple-Choice exercises are considered “self-evaluations” and are not submitted</a:t>
             </a:r>
-            <a:endParaRPr lang="en-US" sz="1800" b="0" u="none" strike="noStrike">
+            <a:endParaRPr lang="en-GB" sz="1800" b="0" u="none" strike="noStrike">
               <a:solidFill>
                 <a:srgbClr val="000000"/>
               </a:solidFill>
@@ -4201,7 +4024,7 @@
                 <a:spcPts val="360"/>
               </a:spcBef>
               <a:buClr>
-                <a:srgbClr val="008C4F"/>
+                <a:srgbClr val="008c4f"/>
               </a:buClr>
               <a:buSzPct val="115000"/>
               <a:buFont typeface="Wingdings" charset="2"/>
@@ -4219,7 +4042,7 @@
               </a:rPr>
               <a:t>7-14 days to submit (depending on the task)</a:t>
             </a:r>
-            <a:endParaRPr lang="en-US" sz="1800" b="0" u="none" strike="noStrike">
+            <a:endParaRPr lang="en-GB" sz="1800" b="0" u="none" strike="noStrike">
               <a:solidFill>
                 <a:srgbClr val="000000"/>
               </a:solidFill>
@@ -4237,7 +4060,7 @@
                 <a:spcPts val="360"/>
               </a:spcBef>
               <a:buClr>
-                <a:srgbClr val="008C4F"/>
+                <a:srgbClr val="008c4f"/>
               </a:buClr>
               <a:buSzPct val="115000"/>
               <a:buFont typeface="Wingdings" charset="2"/>
@@ -4255,7 +4078,7 @@
               </a:rPr>
               <a:t>Submission deadline (coding exercises) is always Monday at 1:59pm (right before the next lecture)</a:t>
             </a:r>
-            <a:endParaRPr lang="en-US" sz="1800" b="0" u="none" strike="noStrike">
+            <a:endParaRPr lang="en-GB" sz="1800" b="0" u="none" strike="noStrike">
               <a:solidFill>
                 <a:srgbClr val="000000"/>
               </a:solidFill>
@@ -4273,7 +4096,7 @@
                 <a:spcPts val="360"/>
               </a:spcBef>
               <a:buClr>
-                <a:srgbClr val="008C4F"/>
+                <a:srgbClr val="008c4f"/>
               </a:buClr>
               <a:buSzPct val="115000"/>
               <a:buFont typeface="Wingdings" charset="2"/>
@@ -4327,7 +4150,7 @@
               </a:rPr>
               <a:t>mandatory</a:t>
             </a:r>
-            <a:endParaRPr lang="en-US" sz="1800" b="0" u="none" strike="noStrike">
+            <a:endParaRPr lang="en-GB" sz="1800" b="0" u="none" strike="noStrike">
               <a:solidFill>
                 <a:srgbClr val="000000"/>
               </a:solidFill>
@@ -4345,7 +4168,7 @@
                 <a:spcPts val="360"/>
               </a:spcBef>
               <a:buClr>
-                <a:srgbClr val="008C4F"/>
+                <a:srgbClr val="008c4f"/>
               </a:buClr>
               <a:buSzPct val="115000"/>
               <a:buFont typeface="Wingdings" charset="2"/>
@@ -4354,7 +4177,7 @@
             <a:r>
               <a:rPr lang="en-GB" sz="1800" b="1" u="sng" strike="noStrike">
                 <a:solidFill>
-                  <a:srgbClr val="C9211E"/>
+                  <a:srgbClr val="c9211e"/>
                 </a:solidFill>
                 <a:effectLst/>
                 <a:uFillTx/>
@@ -4363,7 +4186,7 @@
               </a:rPr>
               <a:t>You pass by receiving a grade greater than 0.</a:t>
             </a:r>
-            <a:endParaRPr lang="en-US" sz="1800" b="0" u="none" strike="noStrike">
+            <a:endParaRPr lang="en-GB" sz="1800" b="0" u="none" strike="noStrike">
               <a:solidFill>
                 <a:srgbClr val="000000"/>
               </a:solidFill>
@@ -4381,7 +4204,7 @@
                 <a:spcPts val="360"/>
               </a:spcBef>
               <a:buClr>
-                <a:srgbClr val="008C4F"/>
+                <a:srgbClr val="008c4f"/>
               </a:buClr>
               <a:buSzPct val="115000"/>
               <a:buFont typeface="Wingdings" charset="2"/>
@@ -4399,7 +4222,7 @@
               </a:rPr>
               <a:t>You will receive feedback on your submission</a:t>
             </a:r>
-            <a:endParaRPr lang="en-US" sz="1800" b="0" u="none" strike="noStrike">
+            <a:endParaRPr lang="en-GB" sz="1800" b="0" u="none" strike="noStrike">
               <a:solidFill>
                 <a:srgbClr val="000000"/>
               </a:solidFill>
@@ -4417,7 +4240,7 @@
                 <a:spcPts val="360"/>
               </a:spcBef>
               <a:buClr>
-                <a:srgbClr val="008C4F"/>
+                <a:srgbClr val="008c4f"/>
               </a:buClr>
               <a:buSzPct val="115000"/>
               <a:buFont typeface="Wingdings" charset="2"/>
@@ -4435,7 +4258,7 @@
               </a:rPr>
               <a:t>Exercise = learning feedback</a:t>
             </a:r>
-            <a:endParaRPr lang="en-US" sz="1800" b="0" u="none" strike="noStrike">
+            <a:endParaRPr lang="en-GB" sz="1800" b="0" u="none" strike="noStrike">
               <a:solidFill>
                 <a:srgbClr val="000000"/>
               </a:solidFill>
@@ -4485,7 +4308,7 @@
         <p:spPr>
           <a:xfrm>
             <a:off x="335520" y="764640"/>
-            <a:ext cx="10738080" cy="488880"/>
+            <a:ext cx="10737720" cy="488520"/>
           </a:xfrm>
           <a:prstGeom prst="rect">
             <a:avLst/>
@@ -4502,7 +4325,7 @@
           <a:fontRef idx="minor"/>
         </p:style>
         <p:txBody>
-          <a:bodyPr lIns="90000" tIns="45000" rIns="90000" bIns="45000" anchor="t">
+          <a:bodyPr lIns="90000" rIns="90000" tIns="45000" bIns="45000" anchor="t">
             <a:noAutofit/>
           </a:bodyPr>
           <a:p>
@@ -4523,7 +4346,7 @@
               </a:rPr>
               <a:t>Coding Exercise Submission and Grading</a:t>
             </a:r>
-            <a:endParaRPr lang="en-US" sz="2400" b="0" u="none" strike="noStrike">
+            <a:endParaRPr lang="en-GB" sz="2400" b="0" u="none" strike="noStrike">
               <a:solidFill>
                 <a:srgbClr val="000000"/>
               </a:solidFill>
@@ -4543,7 +4366,7 @@
         <p:spPr>
           <a:xfrm>
             <a:off x="335520" y="1600200"/>
-            <a:ext cx="4464360" cy="4694040"/>
+            <a:ext cx="4464000" cy="4693680"/>
           </a:xfrm>
           <a:prstGeom prst="rect">
             <a:avLst/>
@@ -4560,7 +4383,7 @@
           <a:fontRef idx="minor"/>
         </p:style>
         <p:txBody>
-          <a:bodyPr lIns="90000" tIns="45000" rIns="90000" bIns="45000" anchor="t">
+          <a:bodyPr lIns="90000" rIns="90000" tIns="45000" bIns="45000" anchor="t">
             <a:noAutofit/>
           </a:bodyPr>
           <a:p>
@@ -4572,7 +4395,7 @@
                 <a:spcPts val="360"/>
               </a:spcBef>
               <a:buClr>
-                <a:srgbClr val="008C4F"/>
+                <a:srgbClr val="008c4f"/>
               </a:buClr>
               <a:buSzPct val="115000"/>
               <a:buFont typeface="Wingdings 2" charset="2"/>
@@ -4590,7 +4413,7 @@
               </a:rPr>
               <a:t>Coding exercises are graded semi-automatically. Due to this it is highly important that you follow the required submission format. Otherwise the grading process will fail and you will receive 0 points.</a:t>
             </a:r>
-            <a:endParaRPr lang="en-US" sz="1800" b="0" u="none" strike="noStrike">
+            <a:endParaRPr lang="en-GB" sz="1800" b="0" u="none" strike="noStrike">
               <a:solidFill>
                 <a:srgbClr val="000000"/>
               </a:solidFill>
@@ -4608,7 +4431,7 @@
                 <a:spcPts val="360"/>
               </a:spcBef>
             </a:pPr>
-            <a:endParaRPr lang="en-US" sz="1800" b="0" u="none" strike="noStrike">
+            <a:endParaRPr lang="en-GB" sz="1800" b="0" u="none" strike="noStrike">
               <a:solidFill>
                 <a:srgbClr val="000000"/>
               </a:solidFill>
@@ -4626,7 +4449,7 @@
                 <a:spcPts val="360"/>
               </a:spcBef>
               <a:buClr>
-                <a:srgbClr val="008C4F"/>
+                <a:srgbClr val="008c4f"/>
               </a:buClr>
               <a:buSzPct val="115000"/>
               <a:buFont typeface="Wingdings 2" charset="2"/>
@@ -4647,7 +4470,7 @@
             <a:r>
               <a:rPr lang="de-DE" sz="1800" b="0" u="sng" strike="noStrike">
                 <a:solidFill>
-                  <a:srgbClr val="0000FF"/>
+                  <a:srgbClr val="0000ff"/>
                 </a:solidFill>
                 <a:effectLst/>
                 <a:uFillTx/>
@@ -4672,7 +4495,7 @@
             <a:r>
               <a:rPr lang="de-DE" sz="1800" b="0" u="none" strike="noStrike">
                 <a:solidFill>
-                  <a:srgbClr val="0000FF"/>
+                  <a:srgbClr val="0000ff"/>
                 </a:solidFill>
                 <a:effectLst/>
                 <a:uFillTx/>
@@ -4694,7 +4517,7 @@
               </a:rPr>
               <a:t>.</a:t>
             </a:r>
-            <a:endParaRPr lang="en-US" sz="1800" b="0" u="none" strike="noStrike">
+            <a:endParaRPr lang="en-GB" sz="1800" b="0" u="none" strike="noStrike">
               <a:solidFill>
                 <a:srgbClr val="000000"/>
               </a:solidFill>
@@ -4714,7 +4537,7 @@
         <p:spPr>
           <a:xfrm>
             <a:off x="4655880" y="476640"/>
-            <a:ext cx="2424240" cy="350280"/>
+            <a:ext cx="2423880" cy="349920"/>
           </a:xfrm>
           <a:prstGeom prst="rect">
             <a:avLst/>
@@ -4731,17 +4554,23 @@
           <a:fontRef idx="minor"/>
         </p:style>
         <p:txBody>
-          <a:bodyPr lIns="90000" tIns="45000" rIns="90000" bIns="45000" anchor="t">
+          <a:bodyPr lIns="90000" rIns="90000" tIns="45000" bIns="45000" anchor="t">
             <a:noAutofit/>
           </a:bodyPr>
           <a:p>
-            <a:endParaRPr lang="en-GB" sz="1800" b="0" u="none" strike="noStrike">
-              <a:solidFill>
-                <a:srgbClr val="000000"/>
-              </a:solidFill>
-              <a:effectLst/>
-              <a:uFillTx/>
-              <a:latin typeface="Arial"/>
+            <a:pPr>
+              <a:lnSpc>
+                <a:spcPct val="100000"/>
+              </a:lnSpc>
+            </a:pPr>
+            <a:endParaRPr lang="en-GB" sz="1800" b="0" u="none" strike="noStrike">
+              <a:solidFill>
+                <a:srgbClr val="000000"/>
+              </a:solidFill>
+              <a:effectLst/>
+              <a:uFillTx/>
+              <a:latin typeface="Arial"/>
+              <a:ea typeface="DejaVu Sans"/>
             </a:endParaRPr>
           </a:p>
         </p:txBody>
@@ -4759,7 +4588,7 @@
         <p:spPr>
           <a:xfrm>
             <a:off x="5715000" y="1448280"/>
-            <a:ext cx="4856760" cy="4759560"/>
+            <a:ext cx="4856400" cy="4759200"/>
           </a:xfrm>
           <a:prstGeom prst="rect">
             <a:avLst/>
@@ -4809,7 +4638,7 @@
         <p:spPr>
           <a:xfrm>
             <a:off x="335520" y="764640"/>
-            <a:ext cx="10738080" cy="488880"/>
+            <a:ext cx="10737720" cy="488520"/>
           </a:xfrm>
           <a:prstGeom prst="rect">
             <a:avLst/>
@@ -4826,7 +4655,7 @@
           <a:fontRef idx="minor"/>
         </p:style>
         <p:txBody>
-          <a:bodyPr lIns="90000" tIns="45000" rIns="90000" bIns="45000" anchor="t">
+          <a:bodyPr lIns="90000" rIns="90000" tIns="45000" bIns="45000" anchor="t">
             <a:noAutofit/>
           </a:bodyPr>
           <a:p>
@@ -4847,7 +4676,7 @@
               </a:rPr>
               <a:t>Coding Exercise Submission and Grading</a:t>
             </a:r>
-            <a:endParaRPr lang="en-US" sz="2400" b="0" u="none" strike="noStrike">
+            <a:endParaRPr lang="en-GB" sz="2400" b="0" u="none" strike="noStrike">
               <a:solidFill>
                 <a:srgbClr val="000000"/>
               </a:solidFill>
@@ -4867,7 +4696,7 @@
         <p:spPr>
           <a:xfrm>
             <a:off x="335520" y="1600200"/>
-            <a:ext cx="4464360" cy="4694040"/>
+            <a:ext cx="4464000" cy="4693680"/>
           </a:xfrm>
           <a:prstGeom prst="rect">
             <a:avLst/>
@@ -4884,7 +4713,7 @@
           <a:fontRef idx="minor"/>
         </p:style>
         <p:txBody>
-          <a:bodyPr lIns="90000" tIns="45000" rIns="90000" bIns="45000" anchor="t">
+          <a:bodyPr lIns="90000" rIns="90000" tIns="45000" bIns="45000" anchor="t">
             <a:noAutofit/>
           </a:bodyPr>
           <a:p>
@@ -4896,7 +4725,7 @@
                 <a:spcPts val="360"/>
               </a:spcBef>
               <a:buClr>
-                <a:srgbClr val="008C4F"/>
+                <a:srgbClr val="008c4f"/>
               </a:buClr>
               <a:buSzPct val="115000"/>
               <a:buFont typeface="Wingdings 2" charset="2"/>
@@ -4914,7 +4743,7 @@
               </a:rPr>
               <a:t>Sign-in using your university credentials.</a:t>
             </a:r>
-            <a:endParaRPr lang="en-US" sz="1800" b="0" u="none" strike="noStrike">
+            <a:endParaRPr lang="en-GB" sz="1800" b="0" u="none" strike="noStrike">
               <a:solidFill>
                 <a:srgbClr val="000000"/>
               </a:solidFill>
@@ -4949,7 +4778,7 @@
               </a:rPr>
               <a:t> Click on the “Academic ID” Logo</a:t>
             </a:r>
-            <a:endParaRPr lang="en-US" sz="1800" b="0" u="none" strike="noStrike">
+            <a:endParaRPr lang="en-GB" sz="1800" b="0" u="none" strike="noStrike">
               <a:solidFill>
                 <a:srgbClr val="000000"/>
               </a:solidFill>
@@ -4969,7 +4798,7 @@
         <p:spPr>
           <a:xfrm>
             <a:off x="4655880" y="476640"/>
-            <a:ext cx="2424240" cy="350280"/>
+            <a:ext cx="2423880" cy="349920"/>
           </a:xfrm>
           <a:prstGeom prst="rect">
             <a:avLst/>
@@ -4986,17 +4815,23 @@
           <a:fontRef idx="minor"/>
         </p:style>
         <p:txBody>
-          <a:bodyPr lIns="90000" tIns="45000" rIns="90000" bIns="45000" anchor="t">
+          <a:bodyPr lIns="90000" rIns="90000" tIns="45000" bIns="45000" anchor="t">
             <a:noAutofit/>
           </a:bodyPr>
           <a:p>
-            <a:endParaRPr lang="en-GB" sz="1800" b="0" u="none" strike="noStrike">
-              <a:solidFill>
-                <a:srgbClr val="000000"/>
-              </a:solidFill>
-              <a:effectLst/>
-              <a:uFillTx/>
-              <a:latin typeface="Arial"/>
+            <a:pPr>
+              <a:lnSpc>
+                <a:spcPct val="100000"/>
+              </a:lnSpc>
+            </a:pPr>
+            <a:endParaRPr lang="en-GB" sz="1800" b="0" u="none" strike="noStrike">
+              <a:solidFill>
+                <a:srgbClr val="000000"/>
+              </a:solidFill>
+              <a:effectLst/>
+              <a:uFillTx/>
+              <a:latin typeface="Arial"/>
+              <a:ea typeface="DejaVu Sans"/>
             </a:endParaRPr>
           </a:p>
         </p:txBody>
@@ -5014,7 +4849,7 @@
         <p:spPr>
           <a:xfrm>
             <a:off x="5715000" y="1448280"/>
-            <a:ext cx="4856760" cy="4759560"/>
+            <a:ext cx="4856400" cy="4759200"/>
           </a:xfrm>
           <a:prstGeom prst="rect">
             <a:avLst/>
@@ -5034,7 +4869,7 @@
         <p:spPr>
           <a:xfrm>
             <a:off x="5943600" y="5535000"/>
-            <a:ext cx="456480" cy="227880"/>
+            <a:ext cx="456120" cy="227520"/>
           </a:xfrm>
           <a:prstGeom prst="rightArrow">
             <a:avLst>
@@ -5043,11 +4878,11 @@
             </a:avLst>
           </a:prstGeom>
           <a:solidFill>
-            <a:srgbClr val="008C4F"/>
+            <a:srgbClr val="008c4f"/>
           </a:solidFill>
           <a:ln w="0">
             <a:solidFill>
-              <a:srgbClr val="3465A4"/>
+              <a:srgbClr val="3465a4"/>
             </a:solidFill>
           </a:ln>
         </p:spPr>
@@ -5058,17 +4893,23 @@
           <a:fontRef idx="minor"/>
         </p:style>
         <p:txBody>
-          <a:bodyPr lIns="90000" tIns="45000" rIns="90000" bIns="45000" anchor="ctr">
+          <a:bodyPr lIns="90000" rIns="90000" tIns="45000" bIns="45000" anchor="ctr">
             <a:noAutofit/>
           </a:bodyPr>
           <a:p>
+            <a:pPr>
+              <a:lnSpc>
+                <a:spcPct val="100000"/>
+              </a:lnSpc>
+            </a:pPr>
             <a:endParaRPr lang="en-US" sz="1800" b="0" u="none" strike="noStrike">
               <a:solidFill>
-                <a:srgbClr val="FFFFFF"/>
-              </a:solidFill>
-              <a:effectLst/>
-              <a:uFillTx/>
-              <a:latin typeface="Arial"/>
+                <a:srgbClr val="ffffff"/>
+              </a:solidFill>
+              <a:effectLst/>
+              <a:uFillTx/>
+              <a:latin typeface="Arial"/>
+              <a:ea typeface="DejaVu Sans"/>
             </a:endParaRPr>
           </a:p>
         </p:txBody>
@@ -5112,7 +4953,7 @@
         <p:spPr>
           <a:xfrm>
             <a:off x="335520" y="764640"/>
-            <a:ext cx="10738080" cy="488880"/>
+            <a:ext cx="10737720" cy="488520"/>
           </a:xfrm>
           <a:prstGeom prst="rect">
             <a:avLst/>
@@ -5129,7 +4970,7 @@
           <a:fontRef idx="minor"/>
         </p:style>
         <p:txBody>
-          <a:bodyPr lIns="90000" tIns="45000" rIns="90000" bIns="45000" anchor="t">
+          <a:bodyPr lIns="90000" rIns="90000" tIns="45000" bIns="45000" anchor="t">
             <a:noAutofit/>
           </a:bodyPr>
           <a:p>
@@ -5150,7 +4991,7 @@
               </a:rPr>
               <a:t>Coding Exercise Submission and Grading</a:t>
             </a:r>
-            <a:endParaRPr lang="en-US" sz="2400" b="0" u="none" strike="noStrike">
+            <a:endParaRPr lang="en-GB" sz="2400" b="0" u="none" strike="noStrike">
               <a:solidFill>
                 <a:srgbClr val="000000"/>
               </a:solidFill>
@@ -5170,7 +5011,7 @@
         <p:spPr>
           <a:xfrm>
             <a:off x="335520" y="1600200"/>
-            <a:ext cx="4464360" cy="4694040"/>
+            <a:ext cx="4464000" cy="4693680"/>
           </a:xfrm>
           <a:prstGeom prst="rect">
             <a:avLst/>
@@ -5187,7 +5028,7 @@
           <a:fontRef idx="minor"/>
         </p:style>
         <p:txBody>
-          <a:bodyPr lIns="90000" tIns="45000" rIns="90000" bIns="45000" anchor="t">
+          <a:bodyPr lIns="90000" rIns="90000" tIns="45000" bIns="45000" anchor="t">
             <a:noAutofit/>
           </a:bodyPr>
           <a:p>
@@ -5199,7 +5040,7 @@
                 <a:spcPts val="360"/>
               </a:spcBef>
               <a:buClr>
-                <a:srgbClr val="008C4F"/>
+                <a:srgbClr val="008c4f"/>
               </a:buClr>
               <a:buSzPct val="115000"/>
               <a:buFont typeface="Wingdings 2" charset="2"/>
@@ -5217,7 +5058,7 @@
               </a:rPr>
               <a:t>Sign-in using your university credentials.</a:t>
             </a:r>
-            <a:endParaRPr lang="en-US" sz="1800" b="0" u="none" strike="noStrike">
+            <a:endParaRPr lang="en-GB" sz="1800" b="0" u="none" strike="noStrike">
               <a:solidFill>
                 <a:srgbClr val="000000"/>
               </a:solidFill>
@@ -5252,7 +5093,7 @@
               </a:rPr>
               <a:t>Click on the “Academic ID” Logo</a:t>
             </a:r>
-            <a:endParaRPr lang="en-US" sz="1800" b="0" u="none" strike="noStrike">
+            <a:endParaRPr lang="en-GB" sz="1800" b="0" u="none" strike="noStrike">
               <a:solidFill>
                 <a:srgbClr val="000000"/>
               </a:solidFill>
@@ -5287,7 +5128,7 @@
               </a:rPr>
               <a:t>Enter your university email address.</a:t>
             </a:r>
-            <a:endParaRPr lang="en-US" sz="1800" b="0" u="none" strike="noStrike">
+            <a:endParaRPr lang="en-GB" sz="1800" b="0" u="none" strike="noStrike">
               <a:solidFill>
                 <a:srgbClr val="000000"/>
               </a:solidFill>
@@ -5307,7 +5148,7 @@
         <p:spPr>
           <a:xfrm>
             <a:off x="4655880" y="476640"/>
-            <a:ext cx="2424240" cy="350280"/>
+            <a:ext cx="2423880" cy="349920"/>
           </a:xfrm>
           <a:prstGeom prst="rect">
             <a:avLst/>
@@ -5324,17 +5165,23 @@
           <a:fontRef idx="minor"/>
         </p:style>
         <p:txBody>
-          <a:bodyPr lIns="90000" tIns="45000" rIns="90000" bIns="45000" anchor="t">
+          <a:bodyPr lIns="90000" rIns="90000" tIns="45000" bIns="45000" anchor="t">
             <a:noAutofit/>
           </a:bodyPr>
           <a:p>
-            <a:endParaRPr lang="en-GB" sz="1800" b="0" u="none" strike="noStrike">
-              <a:solidFill>
-                <a:srgbClr val="000000"/>
-              </a:solidFill>
-              <a:effectLst/>
-              <a:uFillTx/>
-              <a:latin typeface="Arial"/>
+            <a:pPr>
+              <a:lnSpc>
+                <a:spcPct val="100000"/>
+              </a:lnSpc>
+            </a:pPr>
+            <a:endParaRPr lang="en-GB" sz="1800" b="0" u="none" strike="noStrike">
+              <a:solidFill>
+                <a:srgbClr val="000000"/>
+              </a:solidFill>
+              <a:effectLst/>
+              <a:uFillTx/>
+              <a:latin typeface="Arial"/>
+              <a:ea typeface="DejaVu Sans"/>
             </a:endParaRPr>
           </a:p>
         </p:txBody>
@@ -5353,7 +5200,7 @@
         <p:spPr>
           <a:xfrm>
             <a:off x="5785920" y="1484280"/>
-            <a:ext cx="5292720" cy="4001400"/>
+            <a:ext cx="5292360" cy="4001040"/>
           </a:xfrm>
           <a:prstGeom prst="rect">
             <a:avLst/>
@@ -5373,7 +5220,7 @@
         <p:spPr>
           <a:xfrm>
             <a:off x="5680800" y="4343400"/>
-            <a:ext cx="456480" cy="227880"/>
+            <a:ext cx="456120" cy="227520"/>
           </a:xfrm>
           <a:prstGeom prst="rightArrow">
             <a:avLst>
@@ -5382,11 +5229,11 @@
             </a:avLst>
           </a:prstGeom>
           <a:solidFill>
-            <a:srgbClr val="008C4F"/>
+            <a:srgbClr val="008c4f"/>
           </a:solidFill>
           <a:ln w="0">
             <a:solidFill>
-              <a:srgbClr val="3465A4"/>
+              <a:srgbClr val="3465a4"/>
             </a:solidFill>
           </a:ln>
         </p:spPr>
@@ -5397,17 +5244,23 @@
           <a:fontRef idx="minor"/>
         </p:style>
         <p:txBody>
-          <a:bodyPr lIns="90000" tIns="45000" rIns="90000" bIns="45000" anchor="ctr">
+          <a:bodyPr lIns="90000" rIns="90000" tIns="45000" bIns="45000" anchor="ctr">
             <a:noAutofit/>
           </a:bodyPr>
           <a:p>
+            <a:pPr>
+              <a:lnSpc>
+                <a:spcPct val="100000"/>
+              </a:lnSpc>
+            </a:pPr>
             <a:endParaRPr lang="en-US" sz="1800" b="0" u="none" strike="noStrike">
               <a:solidFill>
-                <a:srgbClr val="FFFFFF"/>
-              </a:solidFill>
-              <a:effectLst/>
-              <a:uFillTx/>
-              <a:latin typeface="Arial"/>
+                <a:srgbClr val="ffffff"/>
+              </a:solidFill>
+              <a:effectLst/>
+              <a:uFillTx/>
+              <a:latin typeface="Arial"/>
+              <a:ea typeface="DejaVu Sans"/>
             </a:endParaRPr>
           </a:p>
         </p:txBody>
@@ -5451,7 +5304,7 @@
         <p:spPr>
           <a:xfrm>
             <a:off x="335520" y="764640"/>
-            <a:ext cx="10738080" cy="488880"/>
+            <a:ext cx="10737720" cy="488520"/>
           </a:xfrm>
           <a:prstGeom prst="rect">
             <a:avLst/>
@@ -5468,7 +5321,7 @@
           <a:fontRef idx="minor"/>
         </p:style>
         <p:txBody>
-          <a:bodyPr lIns="90000" tIns="45000" rIns="90000" bIns="45000" anchor="t">
+          <a:bodyPr lIns="90000" rIns="90000" tIns="45000" bIns="45000" anchor="t">
             <a:noAutofit/>
           </a:bodyPr>
           <a:p>
@@ -5489,7 +5342,7 @@
               </a:rPr>
               <a:t>Coding Exercise Submission and Grading</a:t>
             </a:r>
-            <a:endParaRPr lang="en-US" sz="2400" b="0" u="none" strike="noStrike">
+            <a:endParaRPr lang="en-GB" sz="2400" b="0" u="none" strike="noStrike">
               <a:solidFill>
                 <a:srgbClr val="000000"/>
               </a:solidFill>
@@ -5509,7 +5362,7 @@
         <p:spPr>
           <a:xfrm>
             <a:off x="335520" y="1600200"/>
-            <a:ext cx="4464360" cy="4694040"/>
+            <a:ext cx="4464000" cy="4693680"/>
           </a:xfrm>
           <a:prstGeom prst="rect">
             <a:avLst/>
@@ -5526,7 +5379,7 @@
           <a:fontRef idx="minor"/>
         </p:style>
         <p:txBody>
-          <a:bodyPr lIns="90000" tIns="45000" rIns="90000" bIns="45000" anchor="t">
+          <a:bodyPr lIns="90000" rIns="90000" tIns="45000" bIns="45000" anchor="t">
             <a:noAutofit/>
           </a:bodyPr>
           <a:p>
@@ -5538,7 +5391,7 @@
                 <a:spcPts val="360"/>
               </a:spcBef>
               <a:buClr>
-                <a:srgbClr val="008C4F"/>
+                <a:srgbClr val="008c4f"/>
               </a:buClr>
               <a:buSzPct val="115000"/>
               <a:buFont typeface="Wingdings 2" charset="2"/>
@@ -5556,7 +5409,7 @@
               </a:rPr>
               <a:t>Sign-in using your university credentials.</a:t>
             </a:r>
-            <a:endParaRPr lang="en-US" sz="1800" b="0" u="none" strike="noStrike">
+            <a:endParaRPr lang="en-GB" sz="1800" b="0" u="none" strike="noStrike">
               <a:solidFill>
                 <a:srgbClr val="000000"/>
               </a:solidFill>
@@ -5591,7 +5444,7 @@
               </a:rPr>
               <a:t>Click on the “Academic ID” Logo</a:t>
             </a:r>
-            <a:endParaRPr lang="en-US" sz="1800" b="0" u="none" strike="noStrike">
+            <a:endParaRPr lang="en-GB" sz="1800" b="0" u="none" strike="noStrike">
               <a:solidFill>
                 <a:srgbClr val="000000"/>
               </a:solidFill>
@@ -5626,7 +5479,7 @@
               </a:rPr>
               <a:t>Enter your university email address.</a:t>
             </a:r>
-            <a:endParaRPr lang="en-US" sz="1800" b="0" u="none" strike="noStrike">
+            <a:endParaRPr lang="en-GB" sz="1800" b="0" u="none" strike="noStrike">
               <a:solidFill>
                 <a:srgbClr val="000000"/>
               </a:solidFill>
@@ -5661,7 +5514,7 @@
               </a:rPr>
               <a:t>Choose “Technische Universität Clausthal” from the drop-down box.</a:t>
             </a:r>
-            <a:endParaRPr lang="en-US" sz="1800" b="0" u="none" strike="noStrike">
+            <a:endParaRPr lang="en-GB" sz="1800" b="0" u="none" strike="noStrike">
               <a:solidFill>
                 <a:srgbClr val="000000"/>
               </a:solidFill>
@@ -5681,7 +5534,7 @@
         <p:spPr>
           <a:xfrm>
             <a:off x="4655880" y="476640"/>
-            <a:ext cx="2424240" cy="350280"/>
+            <a:ext cx="2423880" cy="349920"/>
           </a:xfrm>
           <a:prstGeom prst="rect">
             <a:avLst/>
@@ -5698,17 +5551,23 @@
           <a:fontRef idx="minor"/>
         </p:style>
         <p:txBody>
-          <a:bodyPr lIns="90000" tIns="45000" rIns="90000" bIns="45000" anchor="t">
+          <a:bodyPr lIns="90000" rIns="90000" tIns="45000" bIns="45000" anchor="t">
             <a:noAutofit/>
           </a:bodyPr>
           <a:p>
-            <a:endParaRPr lang="en-GB" sz="1800" b="0" u="none" strike="noStrike">
-              <a:solidFill>
-                <a:srgbClr val="000000"/>
-              </a:solidFill>
-              <a:effectLst/>
-              <a:uFillTx/>
-              <a:latin typeface="Arial"/>
+            <a:pPr>
+              <a:lnSpc>
+                <a:spcPct val="100000"/>
+              </a:lnSpc>
+            </a:pPr>
+            <a:endParaRPr lang="en-GB" sz="1800" b="0" u="none" strike="noStrike">
+              <a:solidFill>
+                <a:srgbClr val="000000"/>
+              </a:solidFill>
+              <a:effectLst/>
+              <a:uFillTx/>
+              <a:latin typeface="Arial"/>
+              <a:ea typeface="DejaVu Sans"/>
             </a:endParaRPr>
           </a:p>
         </p:txBody>
@@ -5727,7 +5586,7 @@
         <p:spPr>
           <a:xfrm>
             <a:off x="6172200" y="1600200"/>
-            <a:ext cx="4875840" cy="4263480"/>
+            <a:ext cx="4875480" cy="4263120"/>
           </a:xfrm>
           <a:prstGeom prst="rect">
             <a:avLst/>
@@ -5747,7 +5606,7 @@
         <p:spPr>
           <a:xfrm>
             <a:off x="6172200" y="4716000"/>
-            <a:ext cx="456480" cy="227880"/>
+            <a:ext cx="456120" cy="227520"/>
           </a:xfrm>
           <a:prstGeom prst="rightArrow">
             <a:avLst>
@@ -5756,11 +5615,11 @@
             </a:avLst>
           </a:prstGeom>
           <a:solidFill>
-            <a:srgbClr val="008C4F"/>
+            <a:srgbClr val="008c4f"/>
           </a:solidFill>
           <a:ln w="0">
             <a:solidFill>
-              <a:srgbClr val="3465A4"/>
+              <a:srgbClr val="3465a4"/>
             </a:solidFill>
           </a:ln>
         </p:spPr>
@@ -5771,17 +5630,23 @@
           <a:fontRef idx="minor"/>
         </p:style>
         <p:txBody>
-          <a:bodyPr lIns="90000" tIns="45000" rIns="90000" bIns="45000" anchor="ctr">
+          <a:bodyPr lIns="90000" rIns="90000" tIns="45000" bIns="45000" anchor="ctr">
             <a:noAutofit/>
           </a:bodyPr>
           <a:p>
+            <a:pPr>
+              <a:lnSpc>
+                <a:spcPct val="100000"/>
+              </a:lnSpc>
+            </a:pPr>
             <a:endParaRPr lang="en-US" sz="1800" b="0" u="none" strike="noStrike">
               <a:solidFill>
-                <a:srgbClr val="FFFFFF"/>
-              </a:solidFill>
-              <a:effectLst/>
-              <a:uFillTx/>
-              <a:latin typeface="Arial"/>
+                <a:srgbClr val="ffffff"/>
+              </a:solidFill>
+              <a:effectLst/>
+              <a:uFillTx/>
+              <a:latin typeface="Arial"/>
+              <a:ea typeface="DejaVu Sans"/>
             </a:endParaRPr>
           </a:p>
         </p:txBody>
@@ -5825,7 +5690,7 @@
         <p:spPr>
           <a:xfrm>
             <a:off x="335520" y="764640"/>
-            <a:ext cx="10738080" cy="488880"/>
+            <a:ext cx="10737720" cy="488520"/>
           </a:xfrm>
           <a:prstGeom prst="rect">
             <a:avLst/>
@@ -5842,7 +5707,7 @@
           <a:fontRef idx="minor"/>
         </p:style>
         <p:txBody>
-          <a:bodyPr lIns="90000" tIns="45000" rIns="90000" bIns="45000" anchor="t">
+          <a:bodyPr lIns="90000" rIns="90000" tIns="45000" bIns="45000" anchor="t">
             <a:noAutofit/>
           </a:bodyPr>
           <a:p>
@@ -5863,7 +5728,7 @@
               </a:rPr>
               <a:t>Coding Exercise Submission and Grading</a:t>
             </a:r>
-            <a:endParaRPr lang="en-US" sz="2400" b="0" u="none" strike="noStrike">
+            <a:endParaRPr lang="en-GB" sz="2400" b="0" u="none" strike="noStrike">
               <a:solidFill>
                 <a:srgbClr val="000000"/>
               </a:solidFill>
@@ -5883,7 +5748,7 @@
         <p:spPr>
           <a:xfrm>
             <a:off x="335520" y="1600200"/>
-            <a:ext cx="4464360" cy="4694040"/>
+            <a:ext cx="4464000" cy="4693680"/>
           </a:xfrm>
           <a:prstGeom prst="rect">
             <a:avLst/>
@@ -5900,7 +5765,7 @@
           <a:fontRef idx="minor"/>
         </p:style>
         <p:txBody>
-          <a:bodyPr lIns="90000" tIns="45000" rIns="90000" bIns="45000" anchor="t">
+          <a:bodyPr lIns="90000" rIns="90000" tIns="45000" bIns="45000" anchor="t">
             <a:noAutofit/>
           </a:bodyPr>
           <a:p>
@@ -5912,7 +5777,7 @@
                 <a:spcPts val="360"/>
               </a:spcBef>
               <a:buClr>
-                <a:srgbClr val="008C4F"/>
+                <a:srgbClr val="008c4f"/>
               </a:buClr>
               <a:buSzPct val="115000"/>
               <a:buFont typeface="Wingdings 2" charset="2"/>
@@ -5930,7 +5795,7 @@
               </a:rPr>
               <a:t>Sign-in using your university credentials.</a:t>
             </a:r>
-            <a:endParaRPr lang="en-US" sz="1800" b="0" u="none" strike="noStrike">
+            <a:endParaRPr lang="en-GB" sz="1800" b="0" u="none" strike="noStrike">
               <a:solidFill>
                 <a:srgbClr val="000000"/>
               </a:solidFill>
@@ -5965,7 +5830,7 @@
               </a:rPr>
               <a:t>Click on the “Academic ID” Logo</a:t>
             </a:r>
-            <a:endParaRPr lang="en-US" sz="1800" b="0" u="none" strike="noStrike">
+            <a:endParaRPr lang="en-GB" sz="1800" b="0" u="none" strike="noStrike">
               <a:solidFill>
                 <a:srgbClr val="000000"/>
               </a:solidFill>
@@ -6000,7 +5865,7 @@
               </a:rPr>
               <a:t>Enter your university email address.</a:t>
             </a:r>
-            <a:endParaRPr lang="en-US" sz="1800" b="0" u="none" strike="noStrike">
+            <a:endParaRPr lang="en-GB" sz="1800" b="0" u="none" strike="noStrike">
               <a:solidFill>
                 <a:srgbClr val="000000"/>
               </a:solidFill>
@@ -6035,7 +5900,7 @@
               </a:rPr>
               <a:t>Choose “Technische Universität Clausthal” from the drop-down box.</a:t>
             </a:r>
-            <a:endParaRPr lang="en-US" sz="1800" b="0" u="none" strike="noStrike">
+            <a:endParaRPr lang="en-GB" sz="1800" b="0" u="none" strike="noStrike">
               <a:solidFill>
                 <a:srgbClr val="000000"/>
               </a:solidFill>
@@ -6070,7 +5935,7 @@
               </a:rPr>
               <a:t>Login with your usual TU-Clausthal credentials.</a:t>
             </a:r>
-            <a:endParaRPr lang="en-US" sz="1800" b="0" u="none" strike="noStrike">
+            <a:endParaRPr lang="en-GB" sz="1800" b="0" u="none" strike="noStrike">
               <a:solidFill>
                 <a:srgbClr val="000000"/>
               </a:solidFill>
@@ -6090,7 +5955,7 @@
         <p:spPr>
           <a:xfrm>
             <a:off x="4655880" y="476640"/>
-            <a:ext cx="2424240" cy="350280"/>
+            <a:ext cx="2423880" cy="349920"/>
           </a:xfrm>
           <a:prstGeom prst="rect">
             <a:avLst/>
@@ -6107,17 +5972,23 @@
           <a:fontRef idx="minor"/>
         </p:style>
         <p:txBody>
-          <a:bodyPr lIns="90000" tIns="45000" rIns="90000" bIns="45000" anchor="t">
+          <a:bodyPr lIns="90000" rIns="90000" tIns="45000" bIns="45000" anchor="t">
             <a:noAutofit/>
           </a:bodyPr>
           <a:p>
-            <a:endParaRPr lang="en-GB" sz="1800" b="0" u="none" strike="noStrike">
-              <a:solidFill>
-                <a:srgbClr val="000000"/>
-              </a:solidFill>
-              <a:effectLst/>
-              <a:uFillTx/>
-              <a:latin typeface="Arial"/>
+            <a:pPr>
+              <a:lnSpc>
+                <a:spcPct val="100000"/>
+              </a:lnSpc>
+            </a:pPr>
+            <a:endParaRPr lang="en-GB" sz="1800" b="0" u="none" strike="noStrike">
+              <a:solidFill>
+                <a:srgbClr val="000000"/>
+              </a:solidFill>
+              <a:effectLst/>
+              <a:uFillTx/>
+              <a:latin typeface="Arial"/>
+              <a:ea typeface="DejaVu Sans"/>
             </a:endParaRPr>
           </a:p>
         </p:txBody>
@@ -6135,7 +6006,7 @@
         <p:spPr>
           <a:xfrm>
             <a:off x="6172200" y="1600200"/>
-            <a:ext cx="4342680" cy="4619520"/>
+            <a:ext cx="4342320" cy="4619160"/>
           </a:xfrm>
           <a:prstGeom prst="rect">
             <a:avLst/>
@@ -6185,7 +6056,7 @@
         <p:spPr>
           <a:xfrm>
             <a:off x="335520" y="764640"/>
-            <a:ext cx="10738080" cy="488880"/>
+            <a:ext cx="10737720" cy="488520"/>
           </a:xfrm>
           <a:prstGeom prst="rect">
             <a:avLst/>
@@ -6202,7 +6073,7 @@
           <a:fontRef idx="minor"/>
         </p:style>
         <p:txBody>
-          <a:bodyPr lIns="90000" tIns="45000" rIns="90000" bIns="45000" anchor="t">
+          <a:bodyPr lIns="90000" rIns="90000" tIns="45000" bIns="45000" anchor="t">
             <a:noAutofit/>
           </a:bodyPr>
           <a:p>
@@ -6223,7 +6094,7 @@
               </a:rPr>
               <a:t>Coding Exercise Submission and Grading</a:t>
             </a:r>
-            <a:endParaRPr lang="en-US" sz="2400" b="0" u="none" strike="noStrike">
+            <a:endParaRPr lang="en-GB" sz="2400" b="0" u="none" strike="noStrike">
               <a:solidFill>
                 <a:srgbClr val="000000"/>
               </a:solidFill>
@@ -6243,7 +6114,7 @@
         <p:spPr>
           <a:xfrm>
             <a:off x="335520" y="1600200"/>
-            <a:ext cx="10407960" cy="2742480"/>
+            <a:ext cx="10407600" cy="2742120"/>
           </a:xfrm>
           <a:prstGeom prst="rect">
             <a:avLst/>
@@ -6260,7 +6131,7 @@
           <a:fontRef idx="minor"/>
         </p:style>
         <p:txBody>
-          <a:bodyPr lIns="90000" tIns="45000" rIns="90000" bIns="45000" anchor="t">
+          <a:bodyPr lIns="90000" rIns="90000" tIns="45000" bIns="45000" anchor="t">
             <a:noAutofit/>
           </a:bodyPr>
           <a:p>
@@ -6272,7 +6143,7 @@
                 <a:spcPts val="360"/>
               </a:spcBef>
               <a:buClr>
-                <a:srgbClr val="008C4F"/>
+                <a:srgbClr val="008c4f"/>
               </a:buClr>
               <a:buSzPct val="115000"/>
               <a:buFont typeface="Wingdings 2" charset="2"/>
@@ -6290,7 +6161,7 @@
               </a:rPr>
               <a:t>Submitting Assignments</a:t>
             </a:r>
-            <a:endParaRPr lang="en-US" sz="1800" b="0" u="none" strike="noStrike">
+            <a:endParaRPr lang="en-GB" sz="1800" b="0" u="none" strike="noStrike">
               <a:solidFill>
                 <a:srgbClr val="000000"/>
               </a:solidFill>
@@ -6325,7 +6196,7 @@
               </a:rPr>
               <a:t>Click on “ETCE SoSe26 Exercsies”</a:t>
             </a:r>
-            <a:endParaRPr lang="en-US" sz="1800" b="0" u="none" strike="noStrike">
+            <a:endParaRPr lang="en-GB" sz="1800" b="0" u="none" strike="noStrike">
               <a:solidFill>
                 <a:srgbClr val="000000"/>
               </a:solidFill>
@@ -6345,7 +6216,7 @@
         <p:spPr>
           <a:xfrm>
             <a:off x="4655880" y="476640"/>
-            <a:ext cx="2424240" cy="350280"/>
+            <a:ext cx="2423880" cy="349920"/>
           </a:xfrm>
           <a:prstGeom prst="rect">
             <a:avLst/>
@@ -6362,17 +6233,23 @@
           <a:fontRef idx="minor"/>
         </p:style>
         <p:txBody>
-          <a:bodyPr lIns="90000" tIns="45000" rIns="90000" bIns="45000" anchor="t">
+          <a:bodyPr lIns="90000" rIns="90000" tIns="45000" bIns="45000" anchor="t">
             <a:noAutofit/>
           </a:bodyPr>
           <a:p>
-            <a:endParaRPr lang="en-GB" sz="1800" b="0" u="none" strike="noStrike">
-              <a:solidFill>
-                <a:srgbClr val="000000"/>
-              </a:solidFill>
-              <a:effectLst/>
-              <a:uFillTx/>
-              <a:latin typeface="Arial"/>
+            <a:pPr>
+              <a:lnSpc>
+                <a:spcPct val="100000"/>
+              </a:lnSpc>
+            </a:pPr>
+            <a:endParaRPr lang="en-GB" sz="1800" b="0" u="none" strike="noStrike">
+              <a:solidFill>
+                <a:srgbClr val="000000"/>
+              </a:solidFill>
+              <a:effectLst/>
+              <a:uFillTx/>
+              <a:latin typeface="Arial"/>
+              <a:ea typeface="DejaVu Sans"/>
             </a:endParaRPr>
           </a:p>
         </p:txBody>
@@ -6385,13 +6262,13 @@
         </p:nvPicPr>
         <p:blipFill>
           <a:blip r:embed="rId1"/>
-          <a:srcRect l="0" t="0" r="16549" b="0"/>
+          <a:srcRect l="0" t="0" r="16546" b="0"/>
           <a:stretch/>
         </p:blipFill>
         <p:spPr>
           <a:xfrm>
             <a:off x="1067400" y="4343400"/>
-            <a:ext cx="9218880" cy="1961640"/>
+            <a:ext cx="9218520" cy="1961280"/>
           </a:xfrm>
           <a:prstGeom prst="rect">
             <a:avLst/>
@@ -6441,7 +6318,7 @@
         <p:spPr>
           <a:xfrm>
             <a:off x="335520" y="764640"/>
-            <a:ext cx="10738080" cy="488880"/>
+            <a:ext cx="10737720" cy="488520"/>
           </a:xfrm>
           <a:prstGeom prst="rect">
             <a:avLst/>
@@ -6458,7 +6335,7 @@
           <a:fontRef idx="minor"/>
         </p:style>
         <p:txBody>
-          <a:bodyPr lIns="90000" tIns="45000" rIns="90000" bIns="45000" anchor="t">
+          <a:bodyPr lIns="90000" rIns="90000" tIns="45000" bIns="45000" anchor="t">
             <a:noAutofit/>
           </a:bodyPr>
           <a:p>
@@ -6479,7 +6356,7 @@
               </a:rPr>
               <a:t>Coding Exercise Submission and Grading</a:t>
             </a:r>
-            <a:endParaRPr lang="en-US" sz="2400" b="0" u="none" strike="noStrike">
+            <a:endParaRPr lang="en-GB" sz="2400" b="0" u="none" strike="noStrike">
               <a:solidFill>
                 <a:srgbClr val="000000"/>
               </a:solidFill>
@@ -6499,7 +6376,7 @@
         <p:spPr>
           <a:xfrm>
             <a:off x="335520" y="1600200"/>
-            <a:ext cx="10407960" cy="2742480"/>
+            <a:ext cx="10407600" cy="2742120"/>
           </a:xfrm>
           <a:prstGeom prst="rect">
             <a:avLst/>
@@ -6516,7 +6393,7 @@
           <a:fontRef idx="minor"/>
         </p:style>
         <p:txBody>
-          <a:bodyPr lIns="90000" tIns="45000" rIns="90000" bIns="45000" anchor="t">
+          <a:bodyPr lIns="90000" rIns="90000" tIns="45000" bIns="45000" anchor="t">
             <a:noAutofit/>
           </a:bodyPr>
           <a:p>
@@ -6528,7 +6405,7 @@
                 <a:spcPts val="360"/>
               </a:spcBef>
               <a:buClr>
-                <a:srgbClr val="008C4F"/>
+                <a:srgbClr val="008c4f"/>
               </a:buClr>
               <a:buSzPct val="115000"/>
               <a:buFont typeface="Wingdings 2" charset="2"/>
@@ -6546,7 +6423,7 @@
               </a:rPr>
               <a:t>Submitting Assignments</a:t>
             </a:r>
-            <a:endParaRPr lang="en-US" sz="1800" b="0" u="none" strike="noStrike">
+            <a:endParaRPr lang="en-GB" sz="1800" b="0" u="none" strike="noStrike">
               <a:solidFill>
                 <a:srgbClr val="000000"/>
               </a:solidFill>
@@ -6581,7 +6458,7 @@
               </a:rPr>
               <a:t>Click on “ETCE SoSe26 Exercsies”</a:t>
             </a:r>
-            <a:endParaRPr lang="en-US" sz="1800" b="0" u="none" strike="noStrike">
+            <a:endParaRPr lang="en-GB" sz="1800" b="0" u="none" strike="noStrike">
               <a:solidFill>
                 <a:srgbClr val="000000"/>
               </a:solidFill>
@@ -6616,7 +6493,7 @@
               </a:rPr>
               <a:t>Open the folder of the exercise you want to work on.</a:t>
             </a:r>
-            <a:endParaRPr lang="en-US" sz="1800" b="0" u="none" strike="noStrike">
+            <a:endParaRPr lang="en-GB" sz="1800" b="0" u="none" strike="noStrike">
               <a:solidFill>
                 <a:srgbClr val="000000"/>
               </a:solidFill>
@@ -6636,7 +6513,7 @@
         <p:spPr>
           <a:xfrm>
             <a:off x="4655880" y="476640"/>
-            <a:ext cx="2424240" cy="350280"/>
+            <a:ext cx="2423880" cy="349920"/>
           </a:xfrm>
           <a:prstGeom prst="rect">
             <a:avLst/>
@@ -6653,17 +6530,23 @@
           <a:fontRef idx="minor"/>
         </p:style>
         <p:txBody>
-          <a:bodyPr lIns="90000" tIns="45000" rIns="90000" bIns="45000" anchor="t">
+          <a:bodyPr lIns="90000" rIns="90000" tIns="45000" bIns="45000" anchor="t">
             <a:noAutofit/>
           </a:bodyPr>
           <a:p>
-            <a:endParaRPr lang="en-GB" sz="1800" b="0" u="none" strike="noStrike">
-              <a:solidFill>
-                <a:srgbClr val="000000"/>
-              </a:solidFill>
-              <a:effectLst/>
-              <a:uFillTx/>
-              <a:latin typeface="Arial"/>
+            <a:pPr>
+              <a:lnSpc>
+                <a:spcPct val="100000"/>
+              </a:lnSpc>
+            </a:pPr>
+            <a:endParaRPr lang="en-GB" sz="1800" b="0" u="none" strike="noStrike">
+              <a:solidFill>
+                <a:srgbClr val="000000"/>
+              </a:solidFill>
+              <a:effectLst/>
+              <a:uFillTx/>
+              <a:latin typeface="Arial"/>
+              <a:ea typeface="DejaVu Sans"/>
             </a:endParaRPr>
           </a:p>
         </p:txBody>
@@ -6681,7 +6564,7 @@
         <p:spPr>
           <a:xfrm>
             <a:off x="2057400" y="3657600"/>
-            <a:ext cx="6495120" cy="2684880"/>
+            <a:ext cx="6494760" cy="2684520"/>
           </a:xfrm>
           <a:prstGeom prst="rect">
             <a:avLst/>
@@ -6731,7 +6614,7 @@
         <p:spPr>
           <a:xfrm>
             <a:off x="335520" y="764640"/>
-            <a:ext cx="10735920" cy="486720"/>
+            <a:ext cx="10735560" cy="486360"/>
           </a:xfrm>
           <a:prstGeom prst="rect">
             <a:avLst/>
@@ -6748,7 +6631,7 @@
           <a:fontRef idx="minor"/>
         </p:style>
         <p:txBody>
-          <a:bodyPr lIns="90000" tIns="45000" rIns="90000" bIns="45000" anchor="t">
+          <a:bodyPr lIns="90000" rIns="90000" tIns="45000" bIns="45000" anchor="t">
             <a:noAutofit/>
           </a:bodyPr>
           <a:p>
@@ -6769,7 +6652,7 @@
               </a:rPr>
               <a:t>License</a:t>
             </a:r>
-            <a:endParaRPr lang="en-US" sz="2400" b="0" u="none" strike="noStrike">
+            <a:endParaRPr lang="en-GB" sz="2400" b="0" u="none" strike="noStrike">
               <a:solidFill>
                 <a:srgbClr val="000000"/>
               </a:solidFill>
@@ -6789,7 +6672,7 @@
         <p:spPr>
           <a:xfrm>
             <a:off x="335520" y="1268640"/>
-            <a:ext cx="10735920" cy="5023440"/>
+            <a:ext cx="10735560" cy="5023080"/>
           </a:xfrm>
           <a:prstGeom prst="rect">
             <a:avLst/>
@@ -6806,10 +6689,15 @@
           <a:fontRef idx="minor"/>
         </p:style>
         <p:txBody>
-          <a:bodyPr lIns="90000" tIns="45000" rIns="90000" bIns="45000" anchor="t">
+          <a:bodyPr lIns="90000" rIns="90000" tIns="45000" bIns="45000" anchor="t">
             <a:noAutofit/>
           </a:bodyPr>
           <a:p>
+            <a:pPr>
+              <a:lnSpc>
+                <a:spcPct val="100000"/>
+              </a:lnSpc>
+            </a:pPr>
             <a:endParaRPr lang="en-US" sz="1800" b="0" u="none" strike="noStrike">
               <a:solidFill>
                 <a:srgbClr val="000000"/>
@@ -6817,6 +6705,7 @@
               <a:effectLst/>
               <a:uFillTx/>
               <a:latin typeface="Arial"/>
+              <a:ea typeface="DejaVu Sans"/>
             </a:endParaRPr>
           </a:p>
         </p:txBody>
@@ -6830,7 +6719,7 @@
         <p:spPr>
           <a:xfrm>
             <a:off x="336600" y="3429000"/>
-            <a:ext cx="10853640" cy="2045520"/>
+            <a:ext cx="10853280" cy="2045160"/>
           </a:xfrm>
           <a:prstGeom prst="rect">
             <a:avLst/>
@@ -6847,7 +6736,7 @@
           <a:fontRef idx="minor"/>
         </p:style>
         <p:txBody>
-          <a:bodyPr lIns="90000" tIns="45000" rIns="90000" bIns="45000" anchor="t">
+          <a:bodyPr lIns="90000" rIns="90000" tIns="45000" bIns="45000" anchor="t">
             <a:noAutofit/>
           </a:bodyPr>
           <a:p>
@@ -6862,7 +6751,7 @@
                 <a:spcPts val="992"/>
               </a:spcAft>
               <a:buClr>
-                <a:srgbClr val="008C4F"/>
+                <a:srgbClr val="008c4f"/>
               </a:buClr>
               <a:buSzPct val="115000"/>
               <a:buFont typeface="Wingdings 2" charset="2"/>
@@ -6907,7 +6796,7 @@
             <a:r>
               <a:rPr lang="en-US" sz="2000" b="0" u="sng" strike="noStrike">
                 <a:solidFill>
-                  <a:srgbClr val="0000FF"/>
+                  <a:srgbClr val="0000ff"/>
                 </a:solidFill>
                 <a:effectLst/>
                 <a:uFillTx/>
@@ -6920,7 +6809,7 @@
             <a:r>
               <a:rPr lang="en-US" sz="2000" b="0" u="none" strike="noStrike">
                 <a:solidFill>
-                  <a:srgbClr val="0369A3"/>
+                  <a:srgbClr val="0369a3"/>
                 </a:solidFill>
                 <a:effectLst/>
                 <a:uFillTx/>
@@ -6929,7 +6818,7 @@
               </a:rPr>
               <a:t> .</a:t>
             </a:r>
-            <a:endParaRPr lang="en-US" sz="2000" b="0" u="none" strike="noStrike">
+            <a:endParaRPr lang="en-GB" sz="2000" b="0" u="none" strike="noStrike">
               <a:solidFill>
                 <a:srgbClr val="000000"/>
               </a:solidFill>
@@ -6950,7 +6839,7 @@
                 <a:spcPts val="992"/>
               </a:spcAft>
               <a:buClr>
-                <a:srgbClr val="008C4F"/>
+                <a:srgbClr val="008c4f"/>
               </a:buClr>
               <a:buSzPct val="115000"/>
               <a:buFont typeface="Wingdings 2" charset="2"/>
@@ -6971,7 +6860,7 @@
             <a:r>
               <a:rPr lang="en-US" sz="2000" b="0" u="sng" strike="noStrike">
                 <a:solidFill>
-                  <a:srgbClr val="0000FF"/>
+                  <a:srgbClr val="0000ff"/>
                 </a:solidFill>
                 <a:effectLst/>
                 <a:uFillTx/>
@@ -6993,7 +6882,7 @@
               </a:rPr>
               <a:t>.</a:t>
             </a:r>
-            <a:endParaRPr lang="en-US" sz="2000" b="0" u="none" strike="noStrike">
+            <a:endParaRPr lang="en-GB" sz="2000" b="0" u="none" strike="noStrike">
               <a:solidFill>
                 <a:srgbClr val="000000"/>
               </a:solidFill>
@@ -7043,7 +6932,7 @@
         <p:spPr>
           <a:xfrm>
             <a:off x="335520" y="764640"/>
-            <a:ext cx="10738080" cy="488880"/>
+            <a:ext cx="10737720" cy="488520"/>
           </a:xfrm>
           <a:prstGeom prst="rect">
             <a:avLst/>
@@ -7060,7 +6949,7 @@
           <a:fontRef idx="minor"/>
         </p:style>
         <p:txBody>
-          <a:bodyPr lIns="90000" tIns="45000" rIns="90000" bIns="45000" anchor="t">
+          <a:bodyPr lIns="90000" rIns="90000" tIns="45000" bIns="45000" anchor="t">
             <a:noAutofit/>
           </a:bodyPr>
           <a:p>
@@ -7081,7 +6970,7 @@
               </a:rPr>
               <a:t>Coding Exercise Submission and Grading</a:t>
             </a:r>
-            <a:endParaRPr lang="en-US" sz="2400" b="0" u="none" strike="noStrike">
+            <a:endParaRPr lang="en-GB" sz="2400" b="0" u="none" strike="noStrike">
               <a:solidFill>
                 <a:srgbClr val="000000"/>
               </a:solidFill>
@@ -7101,7 +6990,7 @@
         <p:spPr>
           <a:xfrm>
             <a:off x="335520" y="1600200"/>
-            <a:ext cx="10407960" cy="2742480"/>
+            <a:ext cx="10407600" cy="2742120"/>
           </a:xfrm>
           <a:prstGeom prst="rect">
             <a:avLst/>
@@ -7118,7 +7007,7 @@
           <a:fontRef idx="minor"/>
         </p:style>
         <p:txBody>
-          <a:bodyPr lIns="90000" tIns="45000" rIns="90000" bIns="45000" anchor="t">
+          <a:bodyPr lIns="90000" rIns="90000" tIns="45000" bIns="45000" anchor="t">
             <a:noAutofit/>
           </a:bodyPr>
           <a:p>
@@ -7130,7 +7019,7 @@
                 <a:spcPts val="360"/>
               </a:spcBef>
               <a:buClr>
-                <a:srgbClr val="008C4F"/>
+                <a:srgbClr val="008c4f"/>
               </a:buClr>
               <a:buSzPct val="115000"/>
               <a:buFont typeface="Wingdings 2" charset="2"/>
@@ -7148,7 +7037,7 @@
               </a:rPr>
               <a:t>Submitting Assignments</a:t>
             </a:r>
-            <a:endParaRPr lang="en-US" sz="1800" b="0" u="none" strike="noStrike">
+            <a:endParaRPr lang="en-GB" sz="1800" b="0" u="none" strike="noStrike">
               <a:solidFill>
                 <a:srgbClr val="000000"/>
               </a:solidFill>
@@ -7183,7 +7072,7 @@
               </a:rPr>
               <a:t>Click on “ETCE SoSe26 Exercsies”</a:t>
             </a:r>
-            <a:endParaRPr lang="en-US" sz="1800" b="0" u="none" strike="noStrike">
+            <a:endParaRPr lang="en-GB" sz="1800" b="0" u="none" strike="noStrike">
               <a:solidFill>
                 <a:srgbClr val="000000"/>
               </a:solidFill>
@@ -7218,7 +7107,7 @@
               </a:rPr>
               <a:t>Open the folder of the exercise you want to work on.</a:t>
             </a:r>
-            <a:endParaRPr lang="en-US" sz="1800" b="0" u="none" strike="noStrike">
+            <a:endParaRPr lang="en-GB" sz="1800" b="0" u="none" strike="noStrike">
               <a:solidFill>
                 <a:srgbClr val="000000"/>
               </a:solidFill>
@@ -7253,7 +7142,7 @@
               </a:rPr>
               <a:t>Edit the file in the exercise folder as indicated in the exercise handout PDFs.</a:t>
             </a:r>
-            <a:endParaRPr lang="en-US" sz="1800" b="0" u="none" strike="noStrike">
+            <a:endParaRPr lang="en-GB" sz="1800" b="0" u="none" strike="noStrike">
               <a:solidFill>
                 <a:srgbClr val="000000"/>
               </a:solidFill>
@@ -7273,7 +7162,7 @@
         <p:spPr>
           <a:xfrm>
             <a:off x="4655880" y="476640"/>
-            <a:ext cx="2424240" cy="350280"/>
+            <a:ext cx="2423880" cy="349920"/>
           </a:xfrm>
           <a:prstGeom prst="rect">
             <a:avLst/>
@@ -7290,17 +7179,23 @@
           <a:fontRef idx="minor"/>
         </p:style>
         <p:txBody>
-          <a:bodyPr lIns="90000" tIns="45000" rIns="90000" bIns="45000" anchor="t">
+          <a:bodyPr lIns="90000" rIns="90000" tIns="45000" bIns="45000" anchor="t">
             <a:noAutofit/>
           </a:bodyPr>
           <a:p>
-            <a:endParaRPr lang="en-GB" sz="1800" b="0" u="none" strike="noStrike">
-              <a:solidFill>
-                <a:srgbClr val="000000"/>
-              </a:solidFill>
-              <a:effectLst/>
-              <a:uFillTx/>
-              <a:latin typeface="Arial"/>
+            <a:pPr>
+              <a:lnSpc>
+                <a:spcPct val="100000"/>
+              </a:lnSpc>
+            </a:pPr>
+            <a:endParaRPr lang="en-GB" sz="1800" b="0" u="none" strike="noStrike">
+              <a:solidFill>
+                <a:srgbClr val="000000"/>
+              </a:solidFill>
+              <a:effectLst/>
+              <a:uFillTx/>
+              <a:latin typeface="Arial"/>
+              <a:ea typeface="DejaVu Sans"/>
             </a:endParaRPr>
           </a:p>
         </p:txBody>
@@ -7318,7 +7213,7 @@
         <p:spPr>
           <a:xfrm>
             <a:off x="2124360" y="3706200"/>
-            <a:ext cx="5875920" cy="2693880"/>
+            <a:ext cx="5875560" cy="2693520"/>
           </a:xfrm>
           <a:prstGeom prst="rect">
             <a:avLst/>
@@ -7368,7 +7263,7 @@
         <p:spPr>
           <a:xfrm>
             <a:off x="335520" y="764640"/>
-            <a:ext cx="10738080" cy="488880"/>
+            <a:ext cx="10737720" cy="488520"/>
           </a:xfrm>
           <a:prstGeom prst="rect">
             <a:avLst/>
@@ -7385,7 +7280,7 @@
           <a:fontRef idx="minor"/>
         </p:style>
         <p:txBody>
-          <a:bodyPr lIns="90000" tIns="45000" rIns="90000" bIns="45000" anchor="t">
+          <a:bodyPr lIns="90000" rIns="90000" tIns="45000" bIns="45000" anchor="t">
             <a:noAutofit/>
           </a:bodyPr>
           <a:p>
@@ -7406,7 +7301,7 @@
               </a:rPr>
               <a:t>Coding Exercise Submission and Grading</a:t>
             </a:r>
-            <a:endParaRPr lang="en-US" sz="2400" b="0" u="none" strike="noStrike">
+            <a:endParaRPr lang="en-GB" sz="2400" b="0" u="none" strike="noStrike">
               <a:solidFill>
                 <a:srgbClr val="000000"/>
               </a:solidFill>
@@ -7426,7 +7321,7 @@
         <p:spPr>
           <a:xfrm>
             <a:off x="335520" y="1600200"/>
-            <a:ext cx="10407960" cy="2742480"/>
+            <a:ext cx="10407600" cy="2742120"/>
           </a:xfrm>
           <a:prstGeom prst="rect">
             <a:avLst/>
@@ -7443,7 +7338,7 @@
           <a:fontRef idx="minor"/>
         </p:style>
         <p:txBody>
-          <a:bodyPr lIns="90000" tIns="45000" rIns="90000" bIns="45000" anchor="t">
+          <a:bodyPr lIns="90000" rIns="90000" tIns="45000" bIns="45000" anchor="t">
             <a:noAutofit/>
           </a:bodyPr>
           <a:p>
@@ -7455,7 +7350,7 @@
                 <a:spcPts val="360"/>
               </a:spcBef>
               <a:buClr>
-                <a:srgbClr val="008C4F"/>
+                <a:srgbClr val="008c4f"/>
               </a:buClr>
               <a:buSzPct val="115000"/>
               <a:buFont typeface="Wingdings 2" charset="2"/>
@@ -7473,7 +7368,7 @@
               </a:rPr>
               <a:t>Submitting Assignments</a:t>
             </a:r>
-            <a:endParaRPr lang="en-US" sz="1800" b="0" u="none" strike="noStrike">
+            <a:endParaRPr lang="en-GB" sz="1800" b="0" u="none" strike="noStrike">
               <a:solidFill>
                 <a:srgbClr val="000000"/>
               </a:solidFill>
@@ -7508,7 +7403,7 @@
               </a:rPr>
               <a:t>Click on “ETCE SoSe26 Exercsies”</a:t>
             </a:r>
-            <a:endParaRPr lang="en-US" sz="1800" b="0" u="none" strike="noStrike">
+            <a:endParaRPr lang="en-GB" sz="1800" b="0" u="none" strike="noStrike">
               <a:solidFill>
                 <a:srgbClr val="000000"/>
               </a:solidFill>
@@ -7543,7 +7438,7 @@
               </a:rPr>
               <a:t>Open the folder of the exercise you want to work on.</a:t>
             </a:r>
-            <a:endParaRPr lang="en-US" sz="1800" b="0" u="none" strike="noStrike">
+            <a:endParaRPr lang="en-GB" sz="1800" b="0" u="none" strike="noStrike">
               <a:solidFill>
                 <a:srgbClr val="000000"/>
               </a:solidFill>
@@ -7578,7 +7473,7 @@
               </a:rPr>
               <a:t>Edit the file in the exercise folder as indicated in the exercise handout PDFs.</a:t>
             </a:r>
-            <a:endParaRPr lang="en-US" sz="1800" b="0" u="none" strike="noStrike">
+            <a:endParaRPr lang="en-GB" sz="1800" b="0" u="none" strike="noStrike">
               <a:solidFill>
                 <a:srgbClr val="000000"/>
               </a:solidFill>
@@ -7598,7 +7493,7 @@
         <p:spPr>
           <a:xfrm>
             <a:off x="4655880" y="476640"/>
-            <a:ext cx="2424240" cy="350280"/>
+            <a:ext cx="2423880" cy="349920"/>
           </a:xfrm>
           <a:prstGeom prst="rect">
             <a:avLst/>
@@ -7615,17 +7510,23 @@
           <a:fontRef idx="minor"/>
         </p:style>
         <p:txBody>
-          <a:bodyPr lIns="90000" tIns="45000" rIns="90000" bIns="45000" anchor="t">
+          <a:bodyPr lIns="90000" rIns="90000" tIns="45000" bIns="45000" anchor="t">
             <a:noAutofit/>
           </a:bodyPr>
           <a:p>
-            <a:endParaRPr lang="en-GB" sz="1800" b="0" u="none" strike="noStrike">
-              <a:solidFill>
-                <a:srgbClr val="000000"/>
-              </a:solidFill>
-              <a:effectLst/>
-              <a:uFillTx/>
-              <a:latin typeface="Arial"/>
+            <a:pPr>
+              <a:lnSpc>
+                <a:spcPct val="100000"/>
+              </a:lnSpc>
+            </a:pPr>
+            <a:endParaRPr lang="en-GB" sz="1800" b="0" u="none" strike="noStrike">
+              <a:solidFill>
+                <a:srgbClr val="000000"/>
+              </a:solidFill>
+              <a:effectLst/>
+              <a:uFillTx/>
+              <a:latin typeface="Arial"/>
+              <a:ea typeface="DejaVu Sans"/>
             </a:endParaRPr>
           </a:p>
         </p:txBody>
@@ -7638,13 +7539,13 @@
         </p:nvPicPr>
         <p:blipFill>
           <a:blip r:embed="rId1"/>
-          <a:srcRect l="0" t="24687" r="0" b="0"/>
+          <a:srcRect l="0" t="24682" r="0" b="0"/>
           <a:stretch/>
         </p:blipFill>
         <p:spPr>
           <a:xfrm>
             <a:off x="5063400" y="3056400"/>
-            <a:ext cx="5655960" cy="3656520"/>
+            <a:ext cx="5655600" cy="3656160"/>
           </a:xfrm>
           <a:prstGeom prst="rect">
             <a:avLst/>
@@ -7694,7 +7595,7 @@
         <p:spPr>
           <a:xfrm>
             <a:off x="335520" y="764640"/>
-            <a:ext cx="10738080" cy="488880"/>
+            <a:ext cx="10737720" cy="488520"/>
           </a:xfrm>
           <a:prstGeom prst="rect">
             <a:avLst/>
@@ -7711,7 +7612,7 @@
           <a:fontRef idx="minor"/>
         </p:style>
         <p:txBody>
-          <a:bodyPr lIns="90000" tIns="45000" rIns="90000" bIns="45000" anchor="t">
+          <a:bodyPr lIns="90000" rIns="90000" tIns="45000" bIns="45000" anchor="t">
             <a:noAutofit/>
           </a:bodyPr>
           <a:p>
@@ -7732,7 +7633,7 @@
               </a:rPr>
               <a:t>Coding Exercise Submission and Grading</a:t>
             </a:r>
-            <a:endParaRPr lang="en-US" sz="2400" b="0" u="none" strike="noStrike">
+            <a:endParaRPr lang="en-GB" sz="2400" b="0" u="none" strike="noStrike">
               <a:solidFill>
                 <a:srgbClr val="000000"/>
               </a:solidFill>
@@ -7752,7 +7653,7 @@
         <p:spPr>
           <a:xfrm>
             <a:off x="335520" y="1600200"/>
-            <a:ext cx="10407960" cy="2742480"/>
+            <a:ext cx="10407600" cy="2742120"/>
           </a:xfrm>
           <a:prstGeom prst="rect">
             <a:avLst/>
@@ -7769,7 +7670,7 @@
           <a:fontRef idx="minor"/>
         </p:style>
         <p:txBody>
-          <a:bodyPr lIns="90000" tIns="45000" rIns="90000" bIns="45000" anchor="t">
+          <a:bodyPr lIns="90000" rIns="90000" tIns="45000" bIns="45000" anchor="t">
             <a:noAutofit/>
           </a:bodyPr>
           <a:p>
@@ -7781,7 +7682,7 @@
                 <a:spcPts val="360"/>
               </a:spcBef>
               <a:buClr>
-                <a:srgbClr val="008C4F"/>
+                <a:srgbClr val="008c4f"/>
               </a:buClr>
               <a:buSzPct val="115000"/>
               <a:buFont typeface="Wingdings 2" charset="2"/>
@@ -7799,7 +7700,7 @@
               </a:rPr>
               <a:t>Exercise Grades</a:t>
             </a:r>
-            <a:endParaRPr lang="en-US" sz="1800" b="0" u="none" strike="noStrike">
+            <a:endParaRPr lang="en-GB" sz="1800" b="0" u="none" strike="noStrike">
               <a:solidFill>
                 <a:srgbClr val="000000"/>
               </a:solidFill>
@@ -7835,7 +7736,7 @@
               </a:rPr>
               <a:t>We will collect your exercises after the deadline has elapsed.</a:t>
             </a:r>
-            <a:endParaRPr lang="en-US" sz="1800" b="0" u="none" strike="noStrike">
+            <a:endParaRPr lang="en-GB" sz="1800" b="0" u="none" strike="noStrike">
               <a:solidFill>
                 <a:srgbClr val="000000"/>
               </a:solidFill>
@@ -7871,7 +7772,7 @@
               </a:rPr>
               <a:t>Please ensure to save all changes to the exercise folder BEFORE the deadline.</a:t>
             </a:r>
-            <a:endParaRPr lang="en-US" sz="1800" b="0" u="none" strike="noStrike">
+            <a:endParaRPr lang="en-GB" sz="1800" b="0" u="none" strike="noStrike">
               <a:solidFill>
                 <a:srgbClr val="000000"/>
               </a:solidFill>
@@ -7907,7 +7808,7 @@
               </a:rPr>
               <a:t>DO NOT submit your assignments via email/other means.</a:t>
             </a:r>
-            <a:endParaRPr lang="en-US" sz="1800" b="0" u="none" strike="noStrike">
+            <a:endParaRPr lang="en-GB" sz="1800" b="0" u="none" strike="noStrike">
               <a:solidFill>
                 <a:srgbClr val="000000"/>
               </a:solidFill>
@@ -7925,7 +7826,7 @@
                 <a:spcPts val="360"/>
               </a:spcBef>
             </a:pPr>
-            <a:endParaRPr lang="en-US" sz="1800" b="0" u="none" strike="noStrike">
+            <a:endParaRPr lang="en-GB" sz="1800" b="0" u="none" strike="noStrike">
               <a:solidFill>
                 <a:srgbClr val="000000"/>
               </a:solidFill>
@@ -7945,7 +7846,7 @@
         <p:spPr>
           <a:xfrm>
             <a:off x="4655880" y="476640"/>
-            <a:ext cx="2424240" cy="350280"/>
+            <a:ext cx="2423880" cy="349920"/>
           </a:xfrm>
           <a:prstGeom prst="rect">
             <a:avLst/>
@@ -7962,17 +7863,23 @@
           <a:fontRef idx="minor"/>
         </p:style>
         <p:txBody>
-          <a:bodyPr lIns="90000" tIns="45000" rIns="90000" bIns="45000" anchor="t">
+          <a:bodyPr lIns="90000" rIns="90000" tIns="45000" bIns="45000" anchor="t">
             <a:noAutofit/>
           </a:bodyPr>
           <a:p>
-            <a:endParaRPr lang="en-GB" sz="1800" b="0" u="none" strike="noStrike">
-              <a:solidFill>
-                <a:srgbClr val="000000"/>
-              </a:solidFill>
-              <a:effectLst/>
-              <a:uFillTx/>
-              <a:latin typeface="Arial"/>
+            <a:pPr>
+              <a:lnSpc>
+                <a:spcPct val="100000"/>
+              </a:lnSpc>
+            </a:pPr>
+            <a:endParaRPr lang="en-GB" sz="1800" b="0" u="none" strike="noStrike">
+              <a:solidFill>
+                <a:srgbClr val="000000"/>
+              </a:solidFill>
+              <a:effectLst/>
+              <a:uFillTx/>
+              <a:latin typeface="Arial"/>
+              <a:ea typeface="DejaVu Sans"/>
             </a:endParaRPr>
           </a:p>
         </p:txBody>
@@ -8016,7 +7923,7 @@
         <p:spPr>
           <a:xfrm>
             <a:off x="335520" y="764640"/>
-            <a:ext cx="10738080" cy="488880"/>
+            <a:ext cx="10737720" cy="488520"/>
           </a:xfrm>
           <a:prstGeom prst="rect">
             <a:avLst/>
@@ -8033,7 +7940,7 @@
           <a:fontRef idx="minor"/>
         </p:style>
         <p:txBody>
-          <a:bodyPr lIns="90000" tIns="45000" rIns="90000" bIns="45000" anchor="t">
+          <a:bodyPr lIns="90000" rIns="90000" tIns="45000" bIns="45000" anchor="t">
             <a:noAutofit/>
           </a:bodyPr>
           <a:p>
@@ -8054,7 +7961,7 @@
               </a:rPr>
               <a:t>Coding Exercise Submission and Grading</a:t>
             </a:r>
-            <a:endParaRPr lang="en-US" sz="2400" b="0" u="none" strike="noStrike">
+            <a:endParaRPr lang="en-GB" sz="2400" b="0" u="none" strike="noStrike">
               <a:solidFill>
                 <a:srgbClr val="000000"/>
               </a:solidFill>
@@ -8074,7 +7981,7 @@
         <p:spPr>
           <a:xfrm>
             <a:off x="335520" y="1600200"/>
-            <a:ext cx="10407960" cy="2742480"/>
+            <a:ext cx="10407600" cy="2742120"/>
           </a:xfrm>
           <a:prstGeom prst="rect">
             <a:avLst/>
@@ -8091,7 +7998,7 @@
           <a:fontRef idx="minor"/>
         </p:style>
         <p:txBody>
-          <a:bodyPr lIns="90000" tIns="45000" rIns="90000" bIns="45000" anchor="t">
+          <a:bodyPr lIns="90000" rIns="90000" tIns="45000" bIns="45000" anchor="t">
             <a:noAutofit/>
           </a:bodyPr>
           <a:p>
@@ -8103,7 +8010,7 @@
                 <a:spcPts val="360"/>
               </a:spcBef>
               <a:buClr>
-                <a:srgbClr val="008C4F"/>
+                <a:srgbClr val="008c4f"/>
               </a:buClr>
               <a:buSzPct val="115000"/>
               <a:buFont typeface="Wingdings 2" charset="2"/>
@@ -8121,7 +8028,7 @@
               </a:rPr>
               <a:t>Exercise Grades</a:t>
             </a:r>
-            <a:endParaRPr lang="en-US" sz="1800" b="0" u="none" strike="noStrike">
+            <a:endParaRPr lang="en-GB" sz="1800" b="0" u="none" strike="noStrike">
               <a:solidFill>
                 <a:srgbClr val="000000"/>
               </a:solidFill>
@@ -8157,7 +8064,7 @@
               </a:rPr>
               <a:t>We will collect your exercises after the deadline has elapsed.</a:t>
             </a:r>
-            <a:endParaRPr lang="en-US" sz="1800" b="0" u="none" strike="noStrike">
+            <a:endParaRPr lang="en-GB" sz="1800" b="0" u="none" strike="noStrike">
               <a:solidFill>
                 <a:srgbClr val="000000"/>
               </a:solidFill>
@@ -8193,7 +8100,7 @@
               </a:rPr>
               <a:t>Please ensure to save all changes to the exercise folder BEFORE the deadline.</a:t>
             </a:r>
-            <a:endParaRPr lang="en-US" sz="1800" b="0" u="none" strike="noStrike">
+            <a:endParaRPr lang="en-GB" sz="1800" b="0" u="none" strike="noStrike">
               <a:solidFill>
                 <a:srgbClr val="000000"/>
               </a:solidFill>
@@ -8229,7 +8136,7 @@
               </a:rPr>
               <a:t>DO NOT submit your assignments via email/other means.</a:t>
             </a:r>
-            <a:endParaRPr lang="en-US" sz="1800" b="0" u="none" strike="noStrike">
+            <a:endParaRPr lang="en-GB" sz="1800" b="0" u="none" strike="noStrike">
               <a:solidFill>
                 <a:srgbClr val="000000"/>
               </a:solidFill>
@@ -8265,7 +8172,7 @@
               </a:rPr>
               <a:t>Exercises, once graded will be released back to you.</a:t>
             </a:r>
-            <a:endParaRPr lang="en-US" sz="1800" b="0" u="none" strike="noStrike">
+            <a:endParaRPr lang="en-GB" sz="1800" b="0" u="none" strike="noStrike">
               <a:solidFill>
                 <a:srgbClr val="000000"/>
               </a:solidFill>
@@ -8283,7 +8190,7 @@
                 <a:spcPts val="360"/>
               </a:spcBef>
             </a:pPr>
-            <a:endParaRPr lang="en-US" sz="1800" b="0" u="none" strike="noStrike">
+            <a:endParaRPr lang="en-GB" sz="1800" b="0" u="none" strike="noStrike">
               <a:solidFill>
                 <a:srgbClr val="000000"/>
               </a:solidFill>
@@ -8303,7 +8210,7 @@
         <p:spPr>
           <a:xfrm>
             <a:off x="4655880" y="476640"/>
-            <a:ext cx="2424240" cy="350280"/>
+            <a:ext cx="2423880" cy="349920"/>
           </a:xfrm>
           <a:prstGeom prst="rect">
             <a:avLst/>
@@ -8320,17 +8227,23 @@
           <a:fontRef idx="minor"/>
         </p:style>
         <p:txBody>
-          <a:bodyPr lIns="90000" tIns="45000" rIns="90000" bIns="45000" anchor="t">
+          <a:bodyPr lIns="90000" rIns="90000" tIns="45000" bIns="45000" anchor="t">
             <a:noAutofit/>
           </a:bodyPr>
           <a:p>
-            <a:endParaRPr lang="en-GB" sz="1800" b="0" u="none" strike="noStrike">
-              <a:solidFill>
-                <a:srgbClr val="000000"/>
-              </a:solidFill>
-              <a:effectLst/>
-              <a:uFillTx/>
-              <a:latin typeface="Arial"/>
+            <a:pPr>
+              <a:lnSpc>
+                <a:spcPct val="100000"/>
+              </a:lnSpc>
+            </a:pPr>
+            <a:endParaRPr lang="en-GB" sz="1800" b="0" u="none" strike="noStrike">
+              <a:solidFill>
+                <a:srgbClr val="000000"/>
+              </a:solidFill>
+              <a:effectLst/>
+              <a:uFillTx/>
+              <a:latin typeface="Arial"/>
+              <a:ea typeface="DejaVu Sans"/>
             </a:endParaRPr>
           </a:p>
         </p:txBody>
@@ -8348,7 +8261,7 @@
         <p:spPr>
           <a:xfrm>
             <a:off x="2372040" y="3657600"/>
-            <a:ext cx="7228440" cy="2856600"/>
+            <a:ext cx="7228080" cy="2856240"/>
           </a:xfrm>
           <a:prstGeom prst="rect">
             <a:avLst/>
@@ -8398,7 +8311,7 @@
         <p:spPr>
           <a:xfrm>
             <a:off x="335520" y="764640"/>
-            <a:ext cx="10738080" cy="488880"/>
+            <a:ext cx="10737720" cy="488520"/>
           </a:xfrm>
           <a:prstGeom prst="rect">
             <a:avLst/>
@@ -8415,7 +8328,7 @@
           <a:fontRef idx="minor"/>
         </p:style>
         <p:txBody>
-          <a:bodyPr lIns="90000" tIns="45000" rIns="90000" bIns="45000" anchor="t">
+          <a:bodyPr lIns="90000" rIns="90000" tIns="45000" bIns="45000" anchor="t">
             <a:noAutofit/>
           </a:bodyPr>
           <a:p>
@@ -8436,7 +8349,7 @@
               </a:rPr>
               <a:t>Coding Exercise Submission and Grading</a:t>
             </a:r>
-            <a:endParaRPr lang="en-US" sz="2400" b="0" u="none" strike="noStrike">
+            <a:endParaRPr lang="en-GB" sz="2400" b="0" u="none" strike="noStrike">
               <a:solidFill>
                 <a:srgbClr val="000000"/>
               </a:solidFill>
@@ -8456,7 +8369,7 @@
         <p:spPr>
           <a:xfrm>
             <a:off x="335520" y="1600200"/>
-            <a:ext cx="10407960" cy="2742480"/>
+            <a:ext cx="10407600" cy="2742120"/>
           </a:xfrm>
           <a:prstGeom prst="rect">
             <a:avLst/>
@@ -8473,7 +8386,7 @@
           <a:fontRef idx="minor"/>
         </p:style>
         <p:txBody>
-          <a:bodyPr lIns="90000" tIns="45000" rIns="90000" bIns="45000" anchor="t">
+          <a:bodyPr lIns="90000" rIns="90000" tIns="45000" bIns="45000" anchor="t">
             <a:noAutofit/>
           </a:bodyPr>
           <a:p>
@@ -8485,7 +8398,7 @@
                 <a:spcPts val="360"/>
               </a:spcBef>
               <a:buClr>
-                <a:srgbClr val="008C4F"/>
+                <a:srgbClr val="008c4f"/>
               </a:buClr>
               <a:buSzPct val="115000"/>
               <a:buFont typeface="Wingdings 2" charset="2"/>
@@ -8503,7 +8416,7 @@
               </a:rPr>
               <a:t>Exercise Grades</a:t>
             </a:r>
-            <a:endParaRPr lang="en-US" sz="1800" b="0" u="none" strike="noStrike">
+            <a:endParaRPr lang="en-GB" sz="1800" b="0" u="none" strike="noStrike">
               <a:solidFill>
                 <a:srgbClr val="000000"/>
               </a:solidFill>
@@ -8539,7 +8452,7 @@
               </a:rPr>
               <a:t>We will collect your exercises after the deadline has elapsed.</a:t>
             </a:r>
-            <a:endParaRPr lang="en-US" sz="1800" b="0" u="none" strike="noStrike">
+            <a:endParaRPr lang="en-GB" sz="1800" b="0" u="none" strike="noStrike">
               <a:solidFill>
                 <a:srgbClr val="000000"/>
               </a:solidFill>
@@ -8575,7 +8488,7 @@
               </a:rPr>
               <a:t>Please ensure to save all changes to the exercise folder BEFORE the deadline.</a:t>
             </a:r>
-            <a:endParaRPr lang="en-US" sz="1800" b="0" u="none" strike="noStrike">
+            <a:endParaRPr lang="en-GB" sz="1800" b="0" u="none" strike="noStrike">
               <a:solidFill>
                 <a:srgbClr val="000000"/>
               </a:solidFill>
@@ -8611,7 +8524,7 @@
               </a:rPr>
               <a:t>DO NOT submit your assignments via email/other means.</a:t>
             </a:r>
-            <a:endParaRPr lang="en-US" sz="1800" b="0" u="none" strike="noStrike">
+            <a:endParaRPr lang="en-GB" sz="1800" b="0" u="none" strike="noStrike">
               <a:solidFill>
                 <a:srgbClr val="000000"/>
               </a:solidFill>
@@ -8647,7 +8560,7 @@
               </a:rPr>
               <a:t>Exercises, once graded will be released back to you.</a:t>
             </a:r>
-            <a:endParaRPr lang="en-US" sz="1800" b="0" u="none" strike="noStrike">
+            <a:endParaRPr lang="en-GB" sz="1800" b="0" u="none" strike="noStrike">
               <a:solidFill>
                 <a:srgbClr val="000000"/>
               </a:solidFill>
@@ -8683,7 +8596,7 @@
               </a:rPr>
               <a:t>Your grade is provided inside the “GRADE.md” file.</a:t>
             </a:r>
-            <a:endParaRPr lang="en-US" sz="1800" b="0" u="none" strike="noStrike">
+            <a:endParaRPr lang="en-GB" sz="1800" b="0" u="none" strike="noStrike">
               <a:solidFill>
                 <a:srgbClr val="000000"/>
               </a:solidFill>
@@ -8701,7 +8614,7 @@
                 <a:spcPts val="360"/>
               </a:spcBef>
             </a:pPr>
-            <a:endParaRPr lang="en-US" sz="1800" b="0" u="none" strike="noStrike">
+            <a:endParaRPr lang="en-GB" sz="1800" b="0" u="none" strike="noStrike">
               <a:solidFill>
                 <a:srgbClr val="000000"/>
               </a:solidFill>
@@ -8721,7 +8634,7 @@
         <p:spPr>
           <a:xfrm>
             <a:off x="4655880" y="476640"/>
-            <a:ext cx="2424240" cy="350280"/>
+            <a:ext cx="2423880" cy="349920"/>
           </a:xfrm>
           <a:prstGeom prst="rect">
             <a:avLst/>
@@ -8738,17 +8651,23 @@
           <a:fontRef idx="minor"/>
         </p:style>
         <p:txBody>
-          <a:bodyPr lIns="90000" tIns="45000" rIns="90000" bIns="45000" anchor="t">
+          <a:bodyPr lIns="90000" rIns="90000" tIns="45000" bIns="45000" anchor="t">
             <a:noAutofit/>
           </a:bodyPr>
           <a:p>
-            <a:endParaRPr lang="en-GB" sz="1800" b="0" u="none" strike="noStrike">
-              <a:solidFill>
-                <a:srgbClr val="000000"/>
-              </a:solidFill>
-              <a:effectLst/>
-              <a:uFillTx/>
-              <a:latin typeface="Arial"/>
+            <a:pPr>
+              <a:lnSpc>
+                <a:spcPct val="100000"/>
+              </a:lnSpc>
+            </a:pPr>
+            <a:endParaRPr lang="en-GB" sz="1800" b="0" u="none" strike="noStrike">
+              <a:solidFill>
+                <a:srgbClr val="000000"/>
+              </a:solidFill>
+              <a:effectLst/>
+              <a:uFillTx/>
+              <a:latin typeface="Arial"/>
+              <a:ea typeface="DejaVu Sans"/>
             </a:endParaRPr>
           </a:p>
         </p:txBody>
@@ -8766,7 +8685,7 @@
         <p:spPr>
           <a:xfrm>
             <a:off x="2971800" y="3777480"/>
-            <a:ext cx="6171480" cy="2622600"/>
+            <a:ext cx="6171120" cy="2622240"/>
           </a:xfrm>
           <a:prstGeom prst="rect">
             <a:avLst/>
@@ -8816,7 +8735,7 @@
         <p:spPr>
           <a:xfrm>
             <a:off x="335520" y="764640"/>
-            <a:ext cx="10738080" cy="488880"/>
+            <a:ext cx="10737720" cy="488520"/>
           </a:xfrm>
           <a:prstGeom prst="rect">
             <a:avLst/>
@@ -8833,7 +8752,7 @@
           <a:fontRef idx="minor"/>
         </p:style>
         <p:txBody>
-          <a:bodyPr lIns="90000" tIns="45000" rIns="90000" bIns="45000" anchor="t">
+          <a:bodyPr lIns="90000" rIns="90000" tIns="45000" bIns="45000" anchor="t">
             <a:noAutofit/>
           </a:bodyPr>
           <a:p>
@@ -8854,7 +8773,7 @@
               </a:rPr>
               <a:t>Coding Exercise Submission and Grading</a:t>
             </a:r>
-            <a:endParaRPr lang="en-US" sz="2400" b="0" u="none" strike="noStrike">
+            <a:endParaRPr lang="en-GB" sz="2400" b="0" u="none" strike="noStrike">
               <a:solidFill>
                 <a:srgbClr val="000000"/>
               </a:solidFill>
@@ -8874,7 +8793,7 @@
         <p:spPr>
           <a:xfrm>
             <a:off x="335520" y="1600200"/>
-            <a:ext cx="10407960" cy="2742480"/>
+            <a:ext cx="10407600" cy="2742120"/>
           </a:xfrm>
           <a:prstGeom prst="rect">
             <a:avLst/>
@@ -8891,7 +8810,7 @@
           <a:fontRef idx="minor"/>
         </p:style>
         <p:txBody>
-          <a:bodyPr lIns="90000" tIns="45000" rIns="90000" bIns="45000" anchor="t">
+          <a:bodyPr lIns="90000" rIns="90000" tIns="45000" bIns="45000" anchor="t">
             <a:noAutofit/>
           </a:bodyPr>
           <a:p>
@@ -8903,7 +8822,7 @@
                 <a:spcPts val="360"/>
               </a:spcBef>
               <a:buClr>
-                <a:srgbClr val="008C4F"/>
+                <a:srgbClr val="008c4f"/>
               </a:buClr>
               <a:buSzPct val="115000"/>
               <a:buFont typeface="Wingdings 2" charset="2"/>
@@ -8921,7 +8840,7 @@
               </a:rPr>
               <a:t>Exercise Grades</a:t>
             </a:r>
-            <a:endParaRPr lang="en-US" sz="1800" b="0" u="none" strike="noStrike">
+            <a:endParaRPr lang="en-GB" sz="1800" b="0" u="none" strike="noStrike">
               <a:solidFill>
                 <a:srgbClr val="000000"/>
               </a:solidFill>
@@ -8957,7 +8876,7 @@
               </a:rPr>
               <a:t>We will collect your exercises after the deadline has elapsed.</a:t>
             </a:r>
-            <a:endParaRPr lang="en-US" sz="1800" b="0" u="none" strike="noStrike">
+            <a:endParaRPr lang="en-GB" sz="1800" b="0" u="none" strike="noStrike">
               <a:solidFill>
                 <a:srgbClr val="000000"/>
               </a:solidFill>
@@ -8993,7 +8912,7 @@
               </a:rPr>
               <a:t>Please ensure to save all changes to the exercise folder BEFORE the deadline.</a:t>
             </a:r>
-            <a:endParaRPr lang="en-US" sz="1800" b="0" u="none" strike="noStrike">
+            <a:endParaRPr lang="en-GB" sz="1800" b="0" u="none" strike="noStrike">
               <a:solidFill>
                 <a:srgbClr val="000000"/>
               </a:solidFill>
@@ -9029,7 +8948,7 @@
               </a:rPr>
               <a:t>DO NOT submit your assignments via email/other means.</a:t>
             </a:r>
-            <a:endParaRPr lang="en-US" sz="1800" b="0" u="none" strike="noStrike">
+            <a:endParaRPr lang="en-GB" sz="1800" b="0" u="none" strike="noStrike">
               <a:solidFill>
                 <a:srgbClr val="000000"/>
               </a:solidFill>
@@ -9065,7 +8984,7 @@
               </a:rPr>
               <a:t>Exercises, once graded will be released back to you.</a:t>
             </a:r>
-            <a:endParaRPr lang="en-US" sz="1800" b="0" u="none" strike="noStrike">
+            <a:endParaRPr lang="en-GB" sz="1800" b="0" u="none" strike="noStrike">
               <a:solidFill>
                 <a:srgbClr val="000000"/>
               </a:solidFill>
@@ -9101,7 +9020,7 @@
               </a:rPr>
               <a:t>Your grade is provided inside the “GRADE.md” file.</a:t>
             </a:r>
-            <a:endParaRPr lang="en-US" sz="1800" b="0" u="none" strike="noStrike">
+            <a:endParaRPr lang="en-GB" sz="1800" b="0" u="none" strike="noStrike">
               <a:solidFill>
                 <a:srgbClr val="000000"/>
               </a:solidFill>
@@ -9137,7 +9056,7 @@
               </a:rPr>
               <a:t>Receiving a grade of 0 = FAIL.</a:t>
             </a:r>
-            <a:endParaRPr lang="en-US" sz="1800" b="0" u="none" strike="noStrike">
+            <a:endParaRPr lang="en-GB" sz="1800" b="0" u="none" strike="noStrike">
               <a:solidFill>
                 <a:srgbClr val="000000"/>
               </a:solidFill>
@@ -9155,7 +9074,7 @@
                 <a:spcPts val="360"/>
               </a:spcBef>
             </a:pPr>
-            <a:endParaRPr lang="en-US" sz="1800" b="0" u="none" strike="noStrike">
+            <a:endParaRPr lang="en-GB" sz="1800" b="0" u="none" strike="noStrike">
               <a:solidFill>
                 <a:srgbClr val="000000"/>
               </a:solidFill>
@@ -9175,7 +9094,7 @@
         <p:spPr>
           <a:xfrm>
             <a:off x="4655880" y="476640"/>
-            <a:ext cx="2424240" cy="350280"/>
+            <a:ext cx="2423880" cy="349920"/>
           </a:xfrm>
           <a:prstGeom prst="rect">
             <a:avLst/>
@@ -9192,17 +9111,23 @@
           <a:fontRef idx="minor"/>
         </p:style>
         <p:txBody>
-          <a:bodyPr lIns="90000" tIns="45000" rIns="90000" bIns="45000" anchor="t">
+          <a:bodyPr lIns="90000" rIns="90000" tIns="45000" bIns="45000" anchor="t">
             <a:noAutofit/>
           </a:bodyPr>
           <a:p>
-            <a:endParaRPr lang="en-GB" sz="1800" b="0" u="none" strike="noStrike">
-              <a:solidFill>
-                <a:srgbClr val="000000"/>
-              </a:solidFill>
-              <a:effectLst/>
-              <a:uFillTx/>
-              <a:latin typeface="Arial"/>
+            <a:pPr>
+              <a:lnSpc>
+                <a:spcPct val="100000"/>
+              </a:lnSpc>
+            </a:pPr>
+            <a:endParaRPr lang="en-GB" sz="1800" b="0" u="none" strike="noStrike">
+              <a:solidFill>
+                <a:srgbClr val="000000"/>
+              </a:solidFill>
+              <a:effectLst/>
+              <a:uFillTx/>
+              <a:latin typeface="Arial"/>
+              <a:ea typeface="DejaVu Sans"/>
             </a:endParaRPr>
           </a:p>
         </p:txBody>
@@ -9246,7 +9171,7 @@
         <p:spPr>
           <a:xfrm>
             <a:off x="335520" y="768240"/>
-            <a:ext cx="10738080" cy="488880"/>
+            <a:ext cx="10737720" cy="488520"/>
           </a:xfrm>
           <a:prstGeom prst="rect">
             <a:avLst/>
@@ -9263,7 +9188,7 @@
           <a:fontRef idx="minor"/>
         </p:style>
         <p:txBody>
-          <a:bodyPr lIns="90000" tIns="45000" rIns="90000" bIns="45000" anchor="t">
+          <a:bodyPr lIns="90000" rIns="90000" tIns="45000" bIns="45000" anchor="t">
             <a:noAutofit/>
           </a:bodyPr>
           <a:p>
@@ -9284,7 +9209,7 @@
               </a:rPr>
               <a:t>Multiple-Choice Exercises</a:t>
             </a:r>
-            <a:endParaRPr lang="en-US" sz="2400" b="0" u="none" strike="noStrike">
+            <a:endParaRPr lang="en-GB" sz="2400" b="0" u="none" strike="noStrike">
               <a:solidFill>
                 <a:srgbClr val="000000"/>
               </a:solidFill>
@@ -9304,7 +9229,7 @@
         <p:spPr>
           <a:xfrm>
             <a:off x="388800" y="1488600"/>
-            <a:ext cx="10711800" cy="3505320"/>
+            <a:ext cx="10711440" cy="3505320"/>
           </a:xfrm>
           <a:prstGeom prst="rect">
             <a:avLst/>
@@ -9321,7 +9246,7 @@
           <a:fontRef idx="minor"/>
         </p:style>
         <p:txBody>
-          <a:bodyPr lIns="90000" tIns="45000" rIns="90000" bIns="45000" anchor="t">
+          <a:bodyPr lIns="90000" rIns="90000" tIns="45000" bIns="45000" anchor="t">
             <a:spAutoFit/>
           </a:bodyPr>
           <a:p>
@@ -9333,7 +9258,7 @@
             <a:r>
               <a:rPr lang="de-DE" sz="1400" b="1" u="none" strike="noStrike">
                 <a:solidFill>
-                  <a:srgbClr val="008C4F"/>
+                  <a:srgbClr val="008c4f"/>
                 </a:solidFill>
                 <a:effectLst/>
                 <a:uFillTx/>
@@ -9342,7 +9267,7 @@
               </a:rPr>
               <a:t>Every student enrolled in this course is advised to take the knowledge quiz in first two weeks of the course.  </a:t>
             </a:r>
-            <a:endParaRPr lang="en-US" sz="1400" b="0" u="none" strike="noStrike">
+            <a:endParaRPr lang="en-GB" sz="1400" b="0" u="none" strike="noStrike">
               <a:solidFill>
                 <a:srgbClr val="000000"/>
               </a:solidFill>
@@ -9357,7 +9282,7 @@
                 <a:spcPct val="100000"/>
               </a:lnSpc>
             </a:pPr>
-            <a:endParaRPr lang="en-US" sz="1400" b="0" u="none" strike="noStrike">
+            <a:endParaRPr lang="en-GB" sz="1400" b="0" u="none" strike="noStrike">
               <a:solidFill>
                 <a:srgbClr val="000000"/>
               </a:solidFill>
@@ -9372,7 +9297,7 @@
                 <a:spcPct val="100000"/>
               </a:lnSpc>
             </a:pPr>
-            <a:endParaRPr lang="en-US" sz="1400" b="0" u="none" strike="noStrike">
+            <a:endParaRPr lang="en-GB" sz="1400" b="0" u="none" strike="noStrike">
               <a:solidFill>
                 <a:srgbClr val="000000"/>
               </a:solidFill>
@@ -9387,7 +9312,7 @@
                 <a:spcPct val="100000"/>
               </a:lnSpc>
               <a:buClr>
-                <a:srgbClr val="008C4F"/>
+                <a:srgbClr val="008c4f"/>
               </a:buClr>
               <a:buSzPct val="45000"/>
               <a:buFont typeface="Monotype Sorts" charset="2"/>
@@ -9405,7 +9330,7 @@
               </a:rPr>
               <a:t>Goal of the test:</a:t>
             </a:r>
-            <a:endParaRPr lang="en-US" sz="1400" b="0" u="none" strike="noStrike">
+            <a:endParaRPr lang="en-GB" sz="1400" b="0" u="none" strike="noStrike">
               <a:solidFill>
                 <a:srgbClr val="000000"/>
               </a:solidFill>
@@ -9420,7 +9345,7 @@
                 <a:spcPct val="100000"/>
               </a:lnSpc>
               <a:buClr>
-                <a:srgbClr val="008C4F"/>
+                <a:srgbClr val="008c4f"/>
               </a:buClr>
               <a:buSzPct val="45000"/>
               <a:buFont typeface="OpenSymbol"/>
@@ -9438,7 +9363,7 @@
               </a:rPr>
               <a:t>To check the knowledge level of the student that is relevant to this course of study.</a:t>
             </a:r>
-            <a:endParaRPr lang="en-US" sz="1400" b="0" u="none" strike="noStrike">
+            <a:endParaRPr lang="en-GB" sz="1400" b="0" u="none" strike="noStrike">
               <a:solidFill>
                 <a:srgbClr val="000000"/>
               </a:solidFill>
@@ -9465,7 +9390,7 @@
               </a:rPr>
               <a:t> </a:t>
             </a:r>
-            <a:endParaRPr lang="en-US" sz="1400" b="0" u="none" strike="noStrike">
+            <a:endParaRPr lang="en-GB" sz="1400" b="0" u="none" strike="noStrike">
               <a:solidFill>
                 <a:srgbClr val="000000"/>
               </a:solidFill>
@@ -9480,7 +9405,7 @@
                 <a:spcPct val="100000"/>
               </a:lnSpc>
               <a:buClr>
-                <a:srgbClr val="008C4F"/>
+                <a:srgbClr val="008c4f"/>
               </a:buClr>
               <a:buSzPct val="45000"/>
               <a:buFont typeface="Monotype Sorts" charset="2"/>
@@ -9498,7 +9423,7 @@
               </a:rPr>
               <a:t>Preparation:</a:t>
             </a:r>
-            <a:endParaRPr lang="en-US" sz="1400" b="0" u="none" strike="noStrike">
+            <a:endParaRPr lang="en-GB" sz="1400" b="0" u="none" strike="noStrike">
               <a:solidFill>
                 <a:srgbClr val="000000"/>
               </a:solidFill>
@@ -9513,7 +9438,7 @@
                 <a:spcPct val="100000"/>
               </a:lnSpc>
               <a:buClr>
-                <a:srgbClr val="008C4F"/>
+                <a:srgbClr val="008c4f"/>
               </a:buClr>
               <a:buSzPct val="45000"/>
               <a:buFont typeface="OpenSymbol"/>
@@ -9531,7 +9456,7 @@
               </a:rPr>
               <a:t>A review of basic concepts of Cryptography and Circular Economy is recommended for Week 1 and Week 2 respectively</a:t>
             </a:r>
-            <a:endParaRPr lang="en-US" sz="1400" b="0" u="none" strike="noStrike">
+            <a:endParaRPr lang="en-GB" sz="1400" b="0" u="none" strike="noStrike">
               <a:solidFill>
                 <a:srgbClr val="000000"/>
               </a:solidFill>
@@ -9546,7 +9471,7 @@
                 <a:spcPct val="100000"/>
               </a:lnSpc>
               <a:buClr>
-                <a:srgbClr val="008C4F"/>
+                <a:srgbClr val="008c4f"/>
               </a:buClr>
               <a:buSzPct val="45000"/>
               <a:buFont typeface="OpenSymbol"/>
@@ -9564,7 +9489,7 @@
               </a:rPr>
               <a:t>Knowledge quiz for Week 1 only tests your existing knowledge.</a:t>
             </a:r>
-            <a:endParaRPr lang="en-US" sz="1400" b="0" u="none" strike="noStrike">
+            <a:endParaRPr lang="en-GB" sz="1400" b="0" u="none" strike="noStrike">
               <a:solidFill>
                 <a:srgbClr val="000000"/>
               </a:solidFill>
@@ -9591,7 +9516,7 @@
               </a:rPr>
               <a:t> </a:t>
             </a:r>
-            <a:endParaRPr lang="en-US" sz="1400" b="0" u="none" strike="noStrike">
+            <a:endParaRPr lang="en-GB" sz="1400" b="0" u="none" strike="noStrike">
               <a:solidFill>
                 <a:srgbClr val="000000"/>
               </a:solidFill>
@@ -9606,7 +9531,7 @@
                 <a:spcPct val="100000"/>
               </a:lnSpc>
               <a:buClr>
-                <a:srgbClr val="008C4F"/>
+                <a:srgbClr val="008c4f"/>
               </a:buClr>
               <a:buSzPct val="45000"/>
               <a:buFont typeface="Monotype Sorts" charset="2"/>
@@ -9624,7 +9549,7 @@
               </a:rPr>
               <a:t>THE TEST IS JUST FOR YOU → WE CANNOT CHECK THE TEST RESULTS</a:t>
             </a:r>
-            <a:endParaRPr lang="en-US" sz="1400" b="0" u="none" strike="noStrike">
+            <a:endParaRPr lang="en-GB" sz="1400" b="0" u="none" strike="noStrike">
               <a:solidFill>
                 <a:srgbClr val="000000"/>
               </a:solidFill>
@@ -9639,7 +9564,7 @@
                 <a:spcPct val="100000"/>
               </a:lnSpc>
             </a:pPr>
-            <a:endParaRPr lang="en-US" sz="1400" b="0" u="none" strike="noStrike">
+            <a:endParaRPr lang="en-GB" sz="1400" b="0" u="none" strike="noStrike">
               <a:solidFill>
                 <a:srgbClr val="000000"/>
               </a:solidFill>
@@ -9654,7 +9579,7 @@
                 <a:spcPct val="100000"/>
               </a:lnSpc>
             </a:pPr>
-            <a:endParaRPr lang="en-US" sz="1400" b="0" u="none" strike="noStrike">
+            <a:endParaRPr lang="en-GB" sz="1400" b="0" u="none" strike="noStrike">
               <a:solidFill>
                 <a:srgbClr val="000000"/>
               </a:solidFill>
@@ -9669,7 +9594,7 @@
                 <a:spcPct val="100000"/>
               </a:lnSpc>
             </a:pPr>
-            <a:endParaRPr lang="en-US" sz="1400" b="0" u="none" strike="noStrike">
+            <a:endParaRPr lang="en-GB" sz="1400" b="0" u="none" strike="noStrike">
               <a:solidFill>
                 <a:srgbClr val="000000"/>
               </a:solidFill>
@@ -9719,7 +9644,7 @@
         <p:spPr>
           <a:xfrm>
             <a:off x="335520" y="768240"/>
-            <a:ext cx="10738080" cy="488880"/>
+            <a:ext cx="10737720" cy="488520"/>
           </a:xfrm>
           <a:prstGeom prst="rect">
             <a:avLst/>
@@ -9736,7 +9661,7 @@
           <a:fontRef idx="minor"/>
         </p:style>
         <p:txBody>
-          <a:bodyPr lIns="90000" tIns="45000" rIns="90000" bIns="45000" anchor="t">
+          <a:bodyPr lIns="90000" rIns="90000" tIns="45000" bIns="45000" anchor="t">
             <a:noAutofit/>
           </a:bodyPr>
           <a:p>
@@ -9757,7 +9682,7 @@
               </a:rPr>
               <a:t>Multiple-Choice Exercises</a:t>
             </a:r>
-            <a:endParaRPr lang="en-US" sz="2400" b="0" u="none" strike="noStrike">
+            <a:endParaRPr lang="en-GB" sz="2400" b="0" u="none" strike="noStrike">
               <a:solidFill>
                 <a:srgbClr val="000000"/>
               </a:solidFill>
@@ -9777,7 +9702,7 @@
         <p:spPr>
           <a:xfrm>
             <a:off x="388800" y="1488600"/>
-            <a:ext cx="10711800" cy="3505320"/>
+            <a:ext cx="10711440" cy="3505320"/>
           </a:xfrm>
           <a:prstGeom prst="rect">
             <a:avLst/>
@@ -9794,7 +9719,7 @@
           <a:fontRef idx="minor"/>
         </p:style>
         <p:txBody>
-          <a:bodyPr lIns="90000" tIns="45000" rIns="90000" bIns="45000" anchor="t">
+          <a:bodyPr lIns="90000" rIns="90000" tIns="45000" bIns="45000" anchor="t">
             <a:spAutoFit/>
           </a:bodyPr>
           <a:p>
@@ -9806,7 +9731,7 @@
             <a:r>
               <a:rPr lang="de-DE" sz="1400" b="1" u="none" strike="noStrike">
                 <a:solidFill>
-                  <a:srgbClr val="008C4F"/>
+                  <a:srgbClr val="008c4f"/>
                 </a:solidFill>
                 <a:effectLst/>
                 <a:uFillTx/>
@@ -9815,7 +9740,7 @@
               </a:rPr>
               <a:t>Every student enrolled in this course is advised to take the knowledge quiz in first two weeks of the course.  </a:t>
             </a:r>
-            <a:endParaRPr lang="en-US" sz="1400" b="0" u="none" strike="noStrike">
+            <a:endParaRPr lang="en-GB" sz="1400" b="0" u="none" strike="noStrike">
               <a:solidFill>
                 <a:srgbClr val="000000"/>
               </a:solidFill>
@@ -9830,7 +9755,7 @@
                 <a:spcPct val="100000"/>
               </a:lnSpc>
             </a:pPr>
-            <a:endParaRPr lang="en-US" sz="1400" b="0" u="none" strike="noStrike">
+            <a:endParaRPr lang="en-GB" sz="1400" b="0" u="none" strike="noStrike">
               <a:solidFill>
                 <a:srgbClr val="000000"/>
               </a:solidFill>
@@ -9845,7 +9770,7 @@
                 <a:spcPct val="100000"/>
               </a:lnSpc>
             </a:pPr>
-            <a:endParaRPr lang="en-US" sz="1400" b="0" u="none" strike="noStrike">
+            <a:endParaRPr lang="en-GB" sz="1400" b="0" u="none" strike="noStrike">
               <a:solidFill>
                 <a:srgbClr val="000000"/>
               </a:solidFill>
@@ -9860,7 +9785,7 @@
                 <a:spcPct val="100000"/>
               </a:lnSpc>
               <a:buClr>
-                <a:srgbClr val="008C4F"/>
+                <a:srgbClr val="008c4f"/>
               </a:buClr>
               <a:buSzPct val="45000"/>
               <a:buFont typeface="Monotype Sorts" charset="2"/>
@@ -9878,7 +9803,7 @@
               </a:rPr>
               <a:t>Goal of the test:</a:t>
             </a:r>
-            <a:endParaRPr lang="en-US" sz="1400" b="0" u="none" strike="noStrike">
+            <a:endParaRPr lang="en-GB" sz="1400" b="0" u="none" strike="noStrike">
               <a:solidFill>
                 <a:srgbClr val="000000"/>
               </a:solidFill>
@@ -9893,7 +9818,7 @@
                 <a:spcPct val="100000"/>
               </a:lnSpc>
               <a:buClr>
-                <a:srgbClr val="008C4F"/>
+                <a:srgbClr val="008c4f"/>
               </a:buClr>
               <a:buSzPct val="45000"/>
               <a:buFont typeface="OpenSymbol"/>
@@ -9911,7 +9836,7 @@
               </a:rPr>
               <a:t>To check the knowledge level of the student that is relevant to this course of study.</a:t>
             </a:r>
-            <a:endParaRPr lang="en-US" sz="1400" b="0" u="none" strike="noStrike">
+            <a:endParaRPr lang="en-GB" sz="1400" b="0" u="none" strike="noStrike">
               <a:solidFill>
                 <a:srgbClr val="000000"/>
               </a:solidFill>
@@ -9938,7 +9863,7 @@
               </a:rPr>
               <a:t> </a:t>
             </a:r>
-            <a:endParaRPr lang="en-US" sz="1400" b="0" u="none" strike="noStrike">
+            <a:endParaRPr lang="en-GB" sz="1400" b="0" u="none" strike="noStrike">
               <a:solidFill>
                 <a:srgbClr val="000000"/>
               </a:solidFill>
@@ -9953,7 +9878,7 @@
                 <a:spcPct val="100000"/>
               </a:lnSpc>
               <a:buClr>
-                <a:srgbClr val="008C4F"/>
+                <a:srgbClr val="008c4f"/>
               </a:buClr>
               <a:buSzPct val="45000"/>
               <a:buFont typeface="Monotype Sorts" charset="2"/>
@@ -9971,7 +9896,7 @@
               </a:rPr>
               <a:t>Preparation:</a:t>
             </a:r>
-            <a:endParaRPr lang="en-US" sz="1400" b="0" u="none" strike="noStrike">
+            <a:endParaRPr lang="en-GB" sz="1400" b="0" u="none" strike="noStrike">
               <a:solidFill>
                 <a:srgbClr val="000000"/>
               </a:solidFill>
@@ -9986,7 +9911,7 @@
                 <a:spcPct val="100000"/>
               </a:lnSpc>
               <a:buClr>
-                <a:srgbClr val="008C4F"/>
+                <a:srgbClr val="008c4f"/>
               </a:buClr>
               <a:buSzPct val="45000"/>
               <a:buFont typeface="OpenSymbol"/>
@@ -10004,7 +9929,7 @@
               </a:rPr>
               <a:t>A review of basic concepts of Cryptography and Circular Economy is recommended for Week 1 and Week 2 respectively</a:t>
             </a:r>
-            <a:endParaRPr lang="en-US" sz="1400" b="0" u="none" strike="noStrike">
+            <a:endParaRPr lang="en-GB" sz="1400" b="0" u="none" strike="noStrike">
               <a:solidFill>
                 <a:srgbClr val="000000"/>
               </a:solidFill>
@@ -10019,7 +9944,7 @@
                 <a:spcPct val="100000"/>
               </a:lnSpc>
               <a:buClr>
-                <a:srgbClr val="008C4F"/>
+                <a:srgbClr val="008c4f"/>
               </a:buClr>
               <a:buSzPct val="45000"/>
               <a:buFont typeface="OpenSymbol"/>
@@ -10037,7 +9962,7 @@
               </a:rPr>
               <a:t>Knowledge quiz for Week 1 only tests your existing knowledge.</a:t>
             </a:r>
-            <a:endParaRPr lang="en-US" sz="1400" b="0" u="none" strike="noStrike">
+            <a:endParaRPr lang="en-GB" sz="1400" b="0" u="none" strike="noStrike">
               <a:solidFill>
                 <a:srgbClr val="000000"/>
               </a:solidFill>
@@ -10064,7 +9989,7 @@
               </a:rPr>
               <a:t> </a:t>
             </a:r>
-            <a:endParaRPr lang="en-US" sz="1400" b="0" u="none" strike="noStrike">
+            <a:endParaRPr lang="en-GB" sz="1400" b="0" u="none" strike="noStrike">
               <a:solidFill>
                 <a:srgbClr val="000000"/>
               </a:solidFill>
@@ -10079,7 +10004,7 @@
                 <a:spcPct val="100000"/>
               </a:lnSpc>
               <a:buClr>
-                <a:srgbClr val="008C4F"/>
+                <a:srgbClr val="008c4f"/>
               </a:buClr>
               <a:buSzPct val="45000"/>
               <a:buFont typeface="Monotype Sorts" charset="2"/>
@@ -10097,7 +10022,7 @@
               </a:rPr>
               <a:t>THE TEST IS JUST FOR YOU → WE CANNOT CHECK THE TEST RESULTS</a:t>
             </a:r>
-            <a:endParaRPr lang="en-US" sz="1400" b="0" u="none" strike="noStrike">
+            <a:endParaRPr lang="en-GB" sz="1400" b="0" u="none" strike="noStrike">
               <a:solidFill>
                 <a:srgbClr val="000000"/>
               </a:solidFill>
@@ -10112,7 +10037,7 @@
                 <a:spcPct val="100000"/>
               </a:lnSpc>
             </a:pPr>
-            <a:endParaRPr lang="en-US" sz="1400" b="0" u="none" strike="noStrike">
+            <a:endParaRPr lang="en-GB" sz="1400" b="0" u="none" strike="noStrike">
               <a:solidFill>
                 <a:srgbClr val="000000"/>
               </a:solidFill>
@@ -10127,7 +10052,7 @@
                 <a:spcPct val="100000"/>
               </a:lnSpc>
             </a:pPr>
-            <a:endParaRPr lang="en-US" sz="1400" b="0" u="none" strike="noStrike">
+            <a:endParaRPr lang="en-GB" sz="1400" b="0" u="none" strike="noStrike">
               <a:solidFill>
                 <a:srgbClr val="000000"/>
               </a:solidFill>
@@ -10145,7 +10070,7 @@
             <a:r>
               <a:rPr lang="de-DE" sz="1400" b="1" u="none" strike="noStrike">
                 <a:solidFill>
-                  <a:srgbClr val="C9211E"/>
+                  <a:srgbClr val="c9211e"/>
                 </a:solidFill>
                 <a:effectLst/>
                 <a:uFillTx/>
@@ -10157,7 +10082,7 @@
             <a:r>
               <a:rPr lang="de-DE" sz="1400" b="0" u="none" strike="noStrike">
                 <a:solidFill>
-                  <a:srgbClr val="C9211E"/>
+                  <a:srgbClr val="c9211e"/>
                 </a:solidFill>
                 <a:effectLst/>
                 <a:uFillTx/>
@@ -10166,7 +10091,7 @@
               </a:rPr>
               <a:t>etce.etce-lab.de</a:t>
             </a:r>
-            <a:endParaRPr lang="en-US" sz="1400" b="0" u="none" strike="noStrike">
+            <a:endParaRPr lang="en-GB" sz="1400" b="0" u="none" strike="noStrike">
               <a:solidFill>
                 <a:srgbClr val="000000"/>
               </a:solidFill>
@@ -10216,7 +10141,7 @@
         <p:spPr>
           <a:xfrm>
             <a:off x="335520" y="764640"/>
-            <a:ext cx="10738080" cy="488880"/>
+            <a:ext cx="10737720" cy="488520"/>
           </a:xfrm>
           <a:prstGeom prst="rect">
             <a:avLst/>
@@ -10233,7 +10158,7 @@
           <a:fontRef idx="minor"/>
         </p:style>
         <p:txBody>
-          <a:bodyPr lIns="90000" tIns="45000" rIns="90000" bIns="45000" anchor="t">
+          <a:bodyPr lIns="90000" rIns="90000" tIns="45000" bIns="45000" anchor="t">
             <a:noAutofit/>
           </a:bodyPr>
           <a:p>
@@ -10254,7 +10179,7 @@
               </a:rPr>
               <a:t>Multiple-Choice Exercises </a:t>
             </a:r>
-            <a:endParaRPr lang="en-US" sz="2400" b="0" u="none" strike="noStrike">
+            <a:endParaRPr lang="en-GB" sz="2400" b="0" u="none" strike="noStrike">
               <a:solidFill>
                 <a:srgbClr val="000000"/>
               </a:solidFill>
@@ -10278,7 +10203,7 @@
         <p:spPr>
           <a:xfrm>
             <a:off x="3200400" y="685800"/>
-            <a:ext cx="5272920" cy="5997600"/>
+            <a:ext cx="5272560" cy="5997240"/>
           </a:xfrm>
           <a:prstGeom prst="rect">
             <a:avLst/>
@@ -10328,7 +10253,7 @@
         <p:spPr>
           <a:xfrm>
             <a:off x="335520" y="764640"/>
-            <a:ext cx="10738080" cy="488880"/>
+            <a:ext cx="10737720" cy="488520"/>
           </a:xfrm>
           <a:prstGeom prst="rect">
             <a:avLst/>
@@ -10345,7 +10270,7 @@
           <a:fontRef idx="minor"/>
         </p:style>
         <p:txBody>
-          <a:bodyPr lIns="90000" tIns="45000" rIns="90000" bIns="45000" anchor="t">
+          <a:bodyPr lIns="90000" rIns="90000" tIns="45000" bIns="45000" anchor="t">
             <a:noAutofit/>
           </a:bodyPr>
           <a:p>
@@ -10366,7 +10291,7 @@
               </a:rPr>
               <a:t>Multiple-Choice Exercises </a:t>
             </a:r>
-            <a:endParaRPr lang="en-US" sz="2400" b="0" u="none" strike="noStrike">
+            <a:endParaRPr lang="en-GB" sz="2400" b="0" u="none" strike="noStrike">
               <a:solidFill>
                 <a:srgbClr val="000000"/>
               </a:solidFill>
@@ -10390,7 +10315,7 @@
         <p:spPr>
           <a:xfrm>
             <a:off x="1600200" y="1600200"/>
-            <a:ext cx="8359200" cy="4627800"/>
+            <a:ext cx="8358840" cy="4627440"/>
           </a:xfrm>
           <a:prstGeom prst="rect">
             <a:avLst/>
@@ -10440,7 +10365,7 @@
         <p:spPr>
           <a:xfrm>
             <a:off x="335520" y="764640"/>
-            <a:ext cx="10738080" cy="488880"/>
+            <a:ext cx="10737720" cy="488520"/>
           </a:xfrm>
           <a:prstGeom prst="rect">
             <a:avLst/>
@@ -10457,7 +10382,7 @@
           <a:fontRef idx="minor"/>
         </p:style>
         <p:txBody>
-          <a:bodyPr lIns="90000" tIns="45000" rIns="90000" bIns="45000" anchor="t">
+          <a:bodyPr lIns="90000" rIns="90000" tIns="45000" bIns="45000" anchor="t">
             <a:noAutofit/>
           </a:bodyPr>
           <a:p>
@@ -10478,7 +10403,7 @@
               </a:rPr>
               <a:t>Team</a:t>
             </a:r>
-            <a:endParaRPr lang="en-US" sz="2400" b="0" u="none" strike="noStrike">
+            <a:endParaRPr lang="en-GB" sz="2400" b="0" u="none" strike="noStrike">
               <a:solidFill>
                 <a:srgbClr val="000000"/>
               </a:solidFill>
@@ -10502,7 +10427,7 @@
         <p:spPr>
           <a:xfrm>
             <a:off x="4923720" y="1257120"/>
-            <a:ext cx="1460880" cy="2162160"/>
+            <a:ext cx="1460520" cy="2161800"/>
           </a:xfrm>
           <a:prstGeom prst="rect">
             <a:avLst/>
@@ -10526,7 +10451,7 @@
         <p:spPr>
           <a:xfrm>
             <a:off x="2207880" y="4110120"/>
-            <a:ext cx="1774800" cy="1766880"/>
+            <a:ext cx="1774440" cy="1766520"/>
           </a:xfrm>
           <a:prstGeom prst="rect">
             <a:avLst/>
@@ -10546,7 +10471,7 @@
         <p:spPr>
           <a:xfrm>
             <a:off x="3859200" y="3373200"/>
-            <a:ext cx="3625560" cy="667080"/>
+            <a:ext cx="3625200" cy="666720"/>
           </a:xfrm>
           <a:prstGeom prst="rect">
             <a:avLst/>
@@ -10563,7 +10488,7 @@
           <a:fontRef idx="minor"/>
         </p:style>
         <p:txBody>
-          <a:bodyPr lIns="90000" tIns="45000" rIns="90000" bIns="45000" anchor="ctr">
+          <a:bodyPr lIns="90000" rIns="90000" tIns="45000" bIns="45000" anchor="ctr">
             <a:noAutofit/>
           </a:bodyPr>
           <a:p>
@@ -10587,7 +10512,7 @@
               </a:rPr>
               <a:t>Prof. Dr. Benjamin Leiding</a:t>
             </a:r>
-            <a:endParaRPr lang="en-US" sz="1600" b="0" u="none" strike="noStrike">
+            <a:endParaRPr lang="en-GB" sz="1600" b="0" u="none" strike="noStrike">
               <a:solidFill>
                 <a:srgbClr val="000000"/>
               </a:solidFill>
@@ -10607,7 +10532,7 @@
         <p:spPr>
           <a:xfrm>
             <a:off x="1312200" y="5920200"/>
-            <a:ext cx="3625560" cy="667080"/>
+            <a:ext cx="3625200" cy="666720"/>
           </a:xfrm>
           <a:prstGeom prst="rect">
             <a:avLst/>
@@ -10624,10 +10549,15 @@
           <a:fontRef idx="minor"/>
         </p:style>
         <p:txBody>
-          <a:bodyPr lIns="90000" tIns="45000" rIns="90000" bIns="45000" anchor="ctr">
+          <a:bodyPr lIns="90000" rIns="90000" tIns="45000" bIns="45000" anchor="ctr">
             <a:noAutofit/>
           </a:bodyPr>
           <a:p>
+            <a:pPr>
+              <a:lnSpc>
+                <a:spcPct val="100000"/>
+              </a:lnSpc>
+            </a:pPr>
             <a:endParaRPr lang="en-US" sz="1800" b="0" u="none" strike="noStrike">
               <a:solidFill>
                 <a:srgbClr val="000000"/>
@@ -10635,6 +10565,7 @@
               <a:effectLst/>
               <a:uFillTx/>
               <a:latin typeface="Arial"/>
+              <a:ea typeface="DejaVu Sans"/>
             </a:endParaRPr>
           </a:p>
         </p:txBody>
@@ -10648,7 +10579,7 @@
         <p:spPr>
           <a:xfrm>
             <a:off x="1312200" y="5807160"/>
-            <a:ext cx="3625560" cy="667080"/>
+            <a:ext cx="3625200" cy="666720"/>
           </a:xfrm>
           <a:prstGeom prst="rect">
             <a:avLst/>
@@ -10665,7 +10596,7 @@
           <a:fontRef idx="minor"/>
         </p:style>
         <p:txBody>
-          <a:bodyPr lIns="90000" tIns="45000" rIns="90000" bIns="45000" anchor="ctr">
+          <a:bodyPr lIns="90000" rIns="90000" tIns="45000" bIns="45000" anchor="ctr">
             <a:noAutofit/>
           </a:bodyPr>
           <a:p>
@@ -10689,7 +10620,7 @@
               </a:rPr>
               <a:t>M.Sc. Anant Sujatanagarjuna</a:t>
             </a:r>
-            <a:endParaRPr lang="en-US" sz="1600" b="0" u="none" strike="noStrike">
+            <a:endParaRPr lang="en-GB" sz="1600" b="0" u="none" strike="noStrike">
               <a:solidFill>
                 <a:srgbClr val="000000"/>
               </a:solidFill>
@@ -10709,7 +10640,7 @@
         <p:spPr>
           <a:xfrm>
             <a:off x="4860000" y="5920200"/>
-            <a:ext cx="3625560" cy="667080"/>
+            <a:ext cx="3625200" cy="666720"/>
           </a:xfrm>
           <a:prstGeom prst="rect">
             <a:avLst/>
@@ -10726,17 +10657,23 @@
           <a:fontRef idx="minor"/>
         </p:style>
         <p:txBody>
-          <a:bodyPr lIns="90000" tIns="45000" rIns="90000" bIns="45000" anchor="ctr">
+          <a:bodyPr lIns="90000" rIns="90000" tIns="45000" bIns="45000" anchor="ctr">
             <a:noAutofit/>
           </a:bodyPr>
           <a:p>
-            <a:endParaRPr lang="en-GB" sz="1800" b="0" u="none" strike="noStrike">
-              <a:solidFill>
-                <a:srgbClr val="000000"/>
-              </a:solidFill>
-              <a:effectLst/>
-              <a:uFillTx/>
-              <a:latin typeface="Arial"/>
+            <a:pPr>
+              <a:lnSpc>
+                <a:spcPct val="100000"/>
+              </a:lnSpc>
+            </a:pPr>
+            <a:endParaRPr lang="en-GB" sz="1800" b="0" u="none" strike="noStrike">
+              <a:solidFill>
+                <a:srgbClr val="000000"/>
+              </a:solidFill>
+              <a:effectLst/>
+              <a:uFillTx/>
+              <a:latin typeface="Arial"/>
+              <a:ea typeface="DejaVu Sans"/>
             </a:endParaRPr>
           </a:p>
         </p:txBody>
@@ -10750,7 +10687,7 @@
         <p:spPr>
           <a:xfrm>
             <a:off x="6300000" y="5807160"/>
-            <a:ext cx="3625560" cy="667080"/>
+            <a:ext cx="3625200" cy="666720"/>
           </a:xfrm>
           <a:prstGeom prst="rect">
             <a:avLst/>
@@ -10767,7 +10704,7 @@
           <a:fontRef idx="minor"/>
         </p:style>
         <p:txBody>
-          <a:bodyPr lIns="90000" tIns="45000" rIns="90000" bIns="45000" anchor="ctr">
+          <a:bodyPr lIns="90000" rIns="90000" tIns="45000" bIns="45000" anchor="ctr">
             <a:noAutofit/>
           </a:bodyPr>
           <a:p>
@@ -10791,7 +10728,7 @@
               </a:rPr>
               <a:t>M.Sc. Chintan Patel</a:t>
             </a:r>
-            <a:endParaRPr lang="en-US" sz="1600" b="0" u="none" strike="noStrike">
+            <a:endParaRPr lang="en-GB" sz="1600" b="0" u="none" strike="noStrike">
               <a:solidFill>
                 <a:srgbClr val="000000"/>
               </a:solidFill>
@@ -10816,7 +10753,7 @@
         <p:spPr>
           <a:xfrm>
             <a:off x="7203960" y="4143960"/>
-            <a:ext cx="1794240" cy="1794240"/>
+            <a:ext cx="1793880" cy="1793880"/>
           </a:xfrm>
           <a:prstGeom prst="rect">
             <a:avLst/>
@@ -10866,7 +10803,7 @@
         <p:spPr>
           <a:xfrm>
             <a:off x="335520" y="764640"/>
-            <a:ext cx="10738080" cy="488880"/>
+            <a:ext cx="10737720" cy="488520"/>
           </a:xfrm>
           <a:prstGeom prst="rect">
             <a:avLst/>
@@ -10883,7 +10820,7 @@
           <a:fontRef idx="minor"/>
         </p:style>
         <p:txBody>
-          <a:bodyPr lIns="90000" tIns="45000" rIns="90000" bIns="45000" anchor="t">
+          <a:bodyPr lIns="90000" rIns="90000" tIns="45000" bIns="45000" anchor="t">
             <a:noAutofit/>
           </a:bodyPr>
           <a:p>
@@ -10904,7 +10841,7 @@
               </a:rPr>
               <a:t>Examination</a:t>
             </a:r>
-            <a:endParaRPr lang="en-US" sz="2400" b="0" u="none" strike="noStrike">
+            <a:endParaRPr lang="en-GB" sz="2400" b="0" u="none" strike="noStrike">
               <a:solidFill>
                 <a:srgbClr val="000000"/>
               </a:solidFill>
@@ -10924,7 +10861,7 @@
         <p:spPr>
           <a:xfrm>
             <a:off x="335520" y="1268640"/>
-            <a:ext cx="10738080" cy="5025600"/>
+            <a:ext cx="10737720" cy="5025240"/>
           </a:xfrm>
           <a:prstGeom prst="rect">
             <a:avLst/>
@@ -10941,7 +10878,7 @@
           <a:fontRef idx="minor"/>
         </p:style>
         <p:txBody>
-          <a:bodyPr lIns="90000" tIns="45000" rIns="90000" bIns="45000" anchor="ctr">
+          <a:bodyPr lIns="90000" rIns="90000" tIns="45000" bIns="45000" anchor="ctr">
             <a:noAutofit/>
           </a:bodyPr>
           <a:p>
@@ -10953,7 +10890,7 @@
                 <a:spcPts val="360"/>
               </a:spcBef>
               <a:buClr>
-                <a:srgbClr val="008C4F"/>
+                <a:srgbClr val="008c4f"/>
               </a:buClr>
               <a:buSzPct val="45000"/>
               <a:buFont typeface="Monotype Sorts" charset="2"/>
@@ -10971,7 +10908,7 @@
               </a:rPr>
               <a:t>Prerequisite for admission to the final exam (all criteria have to be fulfilled):</a:t>
             </a:r>
-            <a:endParaRPr lang="en-US" sz="1800" b="0" u="none" strike="noStrike">
+            <a:endParaRPr lang="en-GB" sz="1800" b="0" u="none" strike="noStrike">
               <a:solidFill>
                 <a:srgbClr val="000000"/>
               </a:solidFill>
@@ -10989,7 +10926,7 @@
                 <a:spcPts val="360"/>
               </a:spcBef>
               <a:buClr>
-                <a:srgbClr val="008C4F"/>
+                <a:srgbClr val="008c4f"/>
               </a:buClr>
               <a:buSzPct val="45000"/>
               <a:buFont typeface="OpenSymbol"/>
@@ -11007,7 +10944,7 @@
               </a:rPr>
               <a:t>Submit all exercises (except for the MC exercises).</a:t>
             </a:r>
-            <a:endParaRPr lang="en-US" sz="1800" b="0" u="none" strike="noStrike">
+            <a:endParaRPr lang="en-GB" sz="1800" b="0" u="none" strike="noStrike">
               <a:solidFill>
                 <a:srgbClr val="000000"/>
               </a:solidFill>
@@ -11025,7 +10962,7 @@
                 <a:spcPts val="360"/>
               </a:spcBef>
             </a:pPr>
-            <a:endParaRPr lang="en-US" sz="1800" b="0" u="none" strike="noStrike">
+            <a:endParaRPr lang="en-GB" sz="1800" b="0" u="none" strike="noStrike">
               <a:solidFill>
                 <a:srgbClr val="000000"/>
               </a:solidFill>
@@ -11043,7 +10980,7 @@
                 <a:spcPts val="360"/>
               </a:spcBef>
               <a:buClr>
-                <a:srgbClr val="008C4F"/>
+                <a:srgbClr val="008c4f"/>
               </a:buClr>
               <a:buSzPct val="45000"/>
               <a:buFont typeface="Monotype Sorts" charset="2"/>
@@ -11061,7 +10998,7 @@
               </a:rPr>
               <a:t>Final exam:</a:t>
             </a:r>
-            <a:endParaRPr lang="en-US" sz="1800" b="0" u="none" strike="noStrike">
+            <a:endParaRPr lang="en-GB" sz="1800" b="0" u="none" strike="noStrike">
               <a:solidFill>
                 <a:srgbClr val="000000"/>
               </a:solidFill>
@@ -11079,7 +11016,7 @@
                 <a:spcPts val="360"/>
               </a:spcBef>
               <a:buClr>
-                <a:srgbClr val="008C4F"/>
+                <a:srgbClr val="008c4f"/>
               </a:buClr>
               <a:buSzPct val="45000"/>
               <a:buFont typeface="OpenSymbol"/>
@@ -11097,7 +11034,7 @@
               </a:rPr>
               <a:t>Written exam (120min) via Moodle</a:t>
             </a:r>
-            <a:endParaRPr lang="en-US" sz="1800" b="0" u="none" strike="noStrike">
+            <a:endParaRPr lang="en-GB" sz="1800" b="0" u="none" strike="noStrike">
               <a:solidFill>
                 <a:srgbClr val="000000"/>
               </a:solidFill>
@@ -11115,7 +11052,7 @@
                 <a:spcPts val="360"/>
               </a:spcBef>
               <a:buClr>
-                <a:srgbClr val="008C4F"/>
+                <a:srgbClr val="008c4f"/>
               </a:buClr>
               <a:buSzPct val="45000"/>
               <a:buFont typeface="OpenSymbol"/>
@@ -11145,7 +11082,7 @@
               </a:rPr>
               <a:t>03.08.2026 from 2 pm – 4 pm</a:t>
             </a:r>
-            <a:endParaRPr lang="en-US" sz="1800" b="0" u="none" strike="noStrike">
+            <a:endParaRPr lang="en-GB" sz="1800" b="0" u="none" strike="noStrike">
               <a:solidFill>
                 <a:srgbClr val="000000"/>
               </a:solidFill>
@@ -11195,7 +11132,7 @@
         <p:spPr>
           <a:xfrm>
             <a:off x="335520" y="764640"/>
-            <a:ext cx="10736280" cy="487080"/>
+            <a:ext cx="10735920" cy="486720"/>
           </a:xfrm>
           <a:prstGeom prst="rect">
             <a:avLst/>
@@ -11212,7 +11149,7 @@
           <a:fontRef idx="minor"/>
         </p:style>
         <p:txBody>
-          <a:bodyPr lIns="90000" tIns="45000" rIns="90000" bIns="45000" anchor="t">
+          <a:bodyPr lIns="90000" rIns="90000" tIns="45000" bIns="45000" anchor="t">
             <a:noAutofit/>
           </a:bodyPr>
           <a:p>
@@ -11233,7 +11170,7 @@
               </a:rPr>
               <a:t>Self-Study Star</a:t>
             </a:r>
-            <a:endParaRPr lang="en-US" sz="2400" b="0" u="none" strike="noStrike">
+            <a:endParaRPr lang="en-GB" sz="2400" b="0" u="none" strike="noStrike">
               <a:solidFill>
                 <a:srgbClr val="000000"/>
               </a:solidFill>
@@ -11253,7 +11190,7 @@
         <p:spPr>
           <a:xfrm>
             <a:off x="335520" y="1268280"/>
-            <a:ext cx="10736280" cy="5023800"/>
+            <a:ext cx="10735920" cy="5023440"/>
           </a:xfrm>
           <a:prstGeom prst="rect">
             <a:avLst/>
@@ -11270,7 +11207,7 @@
           <a:fontRef idx="minor"/>
         </p:style>
         <p:txBody>
-          <a:bodyPr lIns="90000" tIns="45000" rIns="90000" bIns="45000" anchor="ctr">
+          <a:bodyPr lIns="90000" rIns="90000" tIns="45000" bIns="45000" anchor="ctr">
             <a:noAutofit/>
           </a:bodyPr>
           <a:p>
@@ -11282,7 +11219,7 @@
                 <a:spcPts val="360"/>
               </a:spcBef>
             </a:pPr>
-            <a:endParaRPr lang="en-US" sz="1800" b="0" u="none" strike="noStrike">
+            <a:endParaRPr lang="en-GB" sz="1800" b="0" u="none" strike="noStrike">
               <a:solidFill>
                 <a:srgbClr val="000000"/>
               </a:solidFill>
@@ -11297,7 +11234,7 @@
                 <a:spcPct val="100000"/>
               </a:lnSpc>
               <a:buClr>
-                <a:srgbClr val="008C4F"/>
+                <a:srgbClr val="008c4f"/>
               </a:buClr>
               <a:buSzPct val="80000"/>
               <a:buFont typeface="Wingdings" charset="2"/>
@@ -11339,7 +11276,7 @@
               </a:rPr>
               <a:t> mandatory but could be helpful or interesting</a:t>
             </a:r>
-            <a:endParaRPr lang="en-US" sz="1800" b="0" u="none" strike="noStrike">
+            <a:endParaRPr lang="en-GB" sz="1800" b="0" u="none" strike="noStrike">
               <a:solidFill>
                 <a:srgbClr val="000000"/>
               </a:solidFill>
@@ -11359,7 +11296,7 @@
         <p:spPr>
           <a:xfrm>
             <a:off x="6285600" y="2132640"/>
-            <a:ext cx="505800" cy="485640"/>
+            <a:ext cx="505440" cy="485280"/>
           </a:xfrm>
           <a:prstGeom prst="star5">
             <a:avLst>
@@ -11369,11 +11306,11 @@
             </a:avLst>
           </a:prstGeom>
           <a:solidFill>
-            <a:srgbClr val="92D050"/>
+            <a:srgbClr val="92d050"/>
           </a:solidFill>
           <a:ln>
             <a:solidFill>
-              <a:srgbClr val="0D0D0D"/>
+              <a:srgbClr val="0d0d0d"/>
             </a:solidFill>
           </a:ln>
         </p:spPr>
@@ -11392,17 +11329,23 @@
           <a:fontRef idx="minor"/>
         </p:style>
         <p:txBody>
-          <a:bodyPr lIns="90000" tIns="45000" rIns="90000" bIns="45000" anchor="t">
+          <a:bodyPr lIns="90000" rIns="90000" tIns="45000" bIns="45000" anchor="t">
             <a:noAutofit/>
           </a:bodyPr>
           <a:p>
-            <a:endParaRPr lang="en-GB" sz="1800" b="0" u="none" strike="noStrike">
-              <a:solidFill>
-                <a:srgbClr val="000000"/>
-              </a:solidFill>
-              <a:effectLst/>
-              <a:uFillTx/>
-              <a:latin typeface="Arial"/>
+            <a:pPr>
+              <a:lnSpc>
+                <a:spcPct val="100000"/>
+              </a:lnSpc>
+            </a:pPr>
+            <a:endParaRPr lang="en-GB" sz="1800" b="0" u="none" strike="noStrike">
+              <a:solidFill>
+                <a:srgbClr val="000000"/>
+              </a:solidFill>
+              <a:effectLst/>
+              <a:uFillTx/>
+              <a:latin typeface="Arial"/>
+              <a:ea typeface="DejaVu Sans"/>
             </a:endParaRPr>
           </a:p>
         </p:txBody>
@@ -11416,7 +11359,7 @@
         <p:spPr>
           <a:xfrm>
             <a:off x="4089960" y="2247480"/>
-            <a:ext cx="2274120" cy="363960"/>
+            <a:ext cx="2273760" cy="363960"/>
           </a:xfrm>
           <a:prstGeom prst="rect">
             <a:avLst/>
@@ -11433,7 +11376,7 @@
           <a:fontRef idx="minor"/>
         </p:style>
         <p:txBody>
-          <a:bodyPr lIns="90000" tIns="45000" rIns="90000" bIns="45000" anchor="t">
+          <a:bodyPr lIns="90000" rIns="90000" tIns="45000" bIns="45000" anchor="t">
             <a:spAutoFit/>
           </a:bodyPr>
           <a:p>
@@ -11478,7 +11421,7 @@
               </a:rPr>
               <a:t> </a:t>
             </a:r>
-            <a:endParaRPr lang="en-US" sz="1800" b="0" u="none" strike="noStrike">
+            <a:endParaRPr lang="en-GB" sz="1800" b="0" u="none" strike="noStrike">
               <a:solidFill>
                 <a:srgbClr val="000000"/>
               </a:solidFill>
@@ -11528,7 +11471,7 @@
         <p:spPr>
           <a:xfrm>
             <a:off x="335520" y="764640"/>
-            <a:ext cx="10736280" cy="487080"/>
+            <a:ext cx="10735920" cy="486720"/>
           </a:xfrm>
           <a:prstGeom prst="rect">
             <a:avLst/>
@@ -11545,7 +11488,7 @@
           <a:fontRef idx="minor"/>
         </p:style>
         <p:txBody>
-          <a:bodyPr lIns="90000" tIns="45000" rIns="90000" bIns="45000" anchor="t">
+          <a:bodyPr lIns="90000" rIns="90000" tIns="45000" bIns="45000" anchor="t">
             <a:noAutofit/>
           </a:bodyPr>
           <a:p>
@@ -11566,7 +11509,7 @@
               </a:rPr>
               <a:t>Literature</a:t>
             </a:r>
-            <a:endParaRPr lang="en-US" sz="2400" b="0" u="none" strike="noStrike">
+            <a:endParaRPr lang="en-GB" sz="2400" b="0" u="none" strike="noStrike">
               <a:solidFill>
                 <a:srgbClr val="000000"/>
               </a:solidFill>
@@ -11586,7 +11529,7 @@
         <p:spPr>
           <a:xfrm>
             <a:off x="335520" y="1268640"/>
-            <a:ext cx="10736280" cy="5023800"/>
+            <a:ext cx="10735920" cy="5023440"/>
           </a:xfrm>
           <a:prstGeom prst="rect">
             <a:avLst/>
@@ -11603,7 +11546,7 @@
           <a:fontRef idx="minor"/>
         </p:style>
         <p:txBody>
-          <a:bodyPr lIns="90000" tIns="45000" rIns="90000" bIns="45000" anchor="ctr">
+          <a:bodyPr lIns="90000" rIns="90000" tIns="45000" bIns="45000" anchor="ctr">
             <a:noAutofit/>
           </a:bodyPr>
           <a:p>
@@ -11615,7 +11558,7 @@
                 <a:spcPts val="360"/>
               </a:spcBef>
               <a:buClr>
-                <a:srgbClr val="008C4F"/>
+                <a:srgbClr val="008c4f"/>
               </a:buClr>
               <a:buSzPct val="80000"/>
               <a:buFont typeface="Wingdings" charset="2"/>
@@ -11657,7 +11600,7 @@
               </a:rPr>
               <a:t> need to buy a book to pass the exam.</a:t>
             </a:r>
-            <a:endParaRPr lang="en-US" sz="1800" b="0" u="none" strike="noStrike">
+            <a:endParaRPr lang="en-GB" sz="1800" b="0" u="none" strike="noStrike">
               <a:solidFill>
                 <a:srgbClr val="000000"/>
               </a:solidFill>
@@ -11675,7 +11618,7 @@
                 <a:spcPts val="360"/>
               </a:spcBef>
             </a:pPr>
-            <a:endParaRPr lang="en-US" sz="1800" b="0" u="none" strike="noStrike">
+            <a:endParaRPr lang="en-GB" sz="1800" b="0" u="none" strike="noStrike">
               <a:solidFill>
                 <a:srgbClr val="000000"/>
               </a:solidFill>
@@ -11693,7 +11636,7 @@
                 <a:spcPts val="360"/>
               </a:spcBef>
               <a:buClr>
-                <a:srgbClr val="008C4F"/>
+                <a:srgbClr val="008c4f"/>
               </a:buClr>
               <a:buSzPct val="80000"/>
               <a:buFont typeface="Wingdings" charset="2"/>
@@ -11735,7 +11678,7 @@
               </a:rPr>
               <a:t> (1972).</a:t>
             </a:r>
-            <a:endParaRPr lang="en-US" sz="1800" b="0" u="none" strike="noStrike">
+            <a:endParaRPr lang="en-GB" sz="1800" b="0" u="none" strike="noStrike">
               <a:solidFill>
                 <a:srgbClr val="000000"/>
               </a:solidFill>
@@ -11753,7 +11696,7 @@
                 <a:spcPts val="360"/>
               </a:spcBef>
               <a:buClr>
-                <a:srgbClr val="008C4F"/>
+                <a:srgbClr val="008c4f"/>
               </a:buClr>
               <a:buSzPct val="80000"/>
               <a:buFont typeface="Wingdings" charset="2"/>
@@ -11795,7 +11738,7 @@
               </a:rPr>
               <a:t> (2004).</a:t>
             </a:r>
-            <a:endParaRPr lang="en-US" sz="1800" b="0" u="none" strike="noStrike">
+            <a:endParaRPr lang="en-GB" sz="1800" b="0" u="none" strike="noStrike">
               <a:solidFill>
                 <a:srgbClr val="000000"/>
               </a:solidFill>
@@ -11813,7 +11756,7 @@
                 <a:spcPts val="360"/>
               </a:spcBef>
               <a:buClr>
-                <a:srgbClr val="008C4F"/>
+                <a:srgbClr val="008c4f"/>
               </a:buClr>
               <a:buSzPct val="80000"/>
               <a:buFont typeface="Wingdings" charset="2"/>
@@ -11855,7 +11798,7 @@
               </a:rPr>
               <a:t>(2012).</a:t>
             </a:r>
-            <a:endParaRPr lang="en-US" sz="1800" b="0" u="none" strike="noStrike">
+            <a:endParaRPr lang="en-GB" sz="1800" b="0" u="none" strike="noStrike">
               <a:solidFill>
                 <a:srgbClr val="000000"/>
               </a:solidFill>
@@ -11873,7 +11816,7 @@
                 <a:spcPts val="360"/>
               </a:spcBef>
               <a:buClr>
-                <a:srgbClr val="008C4F"/>
+                <a:srgbClr val="008c4f"/>
               </a:buClr>
               <a:buSzPct val="80000"/>
               <a:buFont typeface="Wingdings" charset="2"/>
@@ -11915,7 +11858,7 @@
               </a:rPr>
               <a:t> (2019).</a:t>
             </a:r>
-            <a:endParaRPr lang="en-US" sz="1800" b="0" u="none" strike="noStrike">
+            <a:endParaRPr lang="en-GB" sz="1800" b="0" u="none" strike="noStrike">
               <a:solidFill>
                 <a:srgbClr val="000000"/>
               </a:solidFill>
@@ -11933,7 +11876,7 @@
                 <a:spcPts val="360"/>
               </a:spcBef>
               <a:buClr>
-                <a:srgbClr val="008C4F"/>
+                <a:srgbClr val="008c4f"/>
               </a:buClr>
               <a:buSzPct val="80000"/>
               <a:buFont typeface="Wingdings" charset="2"/>
@@ -11975,7 +11918,7 @@
               </a:rPr>
               <a:t> (2011).</a:t>
             </a:r>
-            <a:endParaRPr lang="en-US" sz="1800" b="0" u="none" strike="noStrike">
+            <a:endParaRPr lang="en-GB" sz="1800" b="0" u="none" strike="noStrike">
               <a:solidFill>
                 <a:srgbClr val="000000"/>
               </a:solidFill>
@@ -11993,7 +11936,7 @@
                 <a:spcPts val="360"/>
               </a:spcBef>
               <a:buClr>
-                <a:srgbClr val="008C4F"/>
+                <a:srgbClr val="008c4f"/>
               </a:buClr>
               <a:buSzPct val="80000"/>
               <a:buFont typeface="Wingdings" charset="2"/>
@@ -12035,7 +11978,7 @@
               </a:rPr>
               <a:t> (2017).</a:t>
             </a:r>
-            <a:endParaRPr lang="en-US" sz="1800" b="0" u="none" strike="noStrike">
+            <a:endParaRPr lang="en-GB" sz="1800" b="0" u="none" strike="noStrike">
               <a:solidFill>
                 <a:srgbClr val="000000"/>
               </a:solidFill>
@@ -12053,7 +11996,7 @@
                 <a:spcPts val="360"/>
               </a:spcBef>
               <a:buClr>
-                <a:srgbClr val="008C4F"/>
+                <a:srgbClr val="008c4f"/>
               </a:buClr>
               <a:buSzPct val="80000"/>
               <a:buFont typeface="Wingdings" charset="2"/>
@@ -12095,7 +12038,7 @@
               </a:rPr>
               <a:t> (2019).</a:t>
             </a:r>
-            <a:endParaRPr lang="en-US" sz="1800" b="0" u="none" strike="noStrike">
+            <a:endParaRPr lang="en-GB" sz="1800" b="0" u="none" strike="noStrike">
               <a:solidFill>
                 <a:srgbClr val="000000"/>
               </a:solidFill>
@@ -12145,7 +12088,7 @@
         <p:spPr>
           <a:xfrm>
             <a:off x="335520" y="764640"/>
-            <a:ext cx="10738080" cy="488880"/>
+            <a:ext cx="10737720" cy="488520"/>
           </a:xfrm>
           <a:prstGeom prst="rect">
             <a:avLst/>
@@ -12162,7 +12105,7 @@
           <a:fontRef idx="minor"/>
         </p:style>
         <p:txBody>
-          <a:bodyPr lIns="90000" tIns="45000" rIns="90000" bIns="45000" anchor="t">
+          <a:bodyPr lIns="90000" rIns="90000" tIns="45000" bIns="45000" anchor="t">
             <a:noAutofit/>
           </a:bodyPr>
           <a:p>
@@ -12183,7 +12126,7 @@
               </a:rPr>
               <a:t>Literature</a:t>
             </a:r>
-            <a:endParaRPr lang="en-US" sz="2400" b="0" u="none" strike="noStrike">
+            <a:endParaRPr lang="en-GB" sz="2400" b="0" u="none" strike="noStrike">
               <a:solidFill>
                 <a:srgbClr val="000000"/>
               </a:solidFill>
@@ -12203,7 +12146,7 @@
         <p:spPr>
           <a:xfrm>
             <a:off x="335520" y="1268640"/>
-            <a:ext cx="10738080" cy="5025600"/>
+            <a:ext cx="10737720" cy="5025240"/>
           </a:xfrm>
           <a:prstGeom prst="rect">
             <a:avLst/>
@@ -12220,7 +12163,7 @@
           <a:fontRef idx="minor"/>
         </p:style>
         <p:txBody>
-          <a:bodyPr lIns="90000" tIns="45000" rIns="90000" bIns="45000" anchor="ctr">
+          <a:bodyPr lIns="90000" rIns="90000" tIns="45000" bIns="45000" anchor="ctr">
             <a:noAutofit/>
           </a:bodyPr>
           <a:p>
@@ -12232,7 +12175,7 @@
                 <a:spcPts val="360"/>
               </a:spcBef>
             </a:pPr>
-            <a:endParaRPr lang="en-US" sz="1800" b="0" u="none" strike="noStrike">
+            <a:endParaRPr lang="en-GB" sz="1800" b="0" u="none" strike="noStrike">
               <a:solidFill>
                 <a:srgbClr val="000000"/>
               </a:solidFill>
@@ -12250,7 +12193,7 @@
                 <a:spcPts val="360"/>
               </a:spcBef>
               <a:buClr>
-                <a:srgbClr val="008C4F"/>
+                <a:srgbClr val="008c4f"/>
               </a:buClr>
               <a:buSzPct val="115000"/>
               <a:buFont typeface="Wingdings" charset="2"/>
@@ -12292,7 +12235,7 @@
               </a:rPr>
               <a:t> (2020).</a:t>
             </a:r>
-            <a:endParaRPr lang="en-US" sz="1800" b="0" u="none" strike="noStrike">
+            <a:endParaRPr lang="en-GB" sz="1800" b="0" u="none" strike="noStrike">
               <a:solidFill>
                 <a:srgbClr val="000000"/>
               </a:solidFill>
@@ -12310,7 +12253,7 @@
                 <a:spcPts val="360"/>
               </a:spcBef>
               <a:buClr>
-                <a:srgbClr val="008C4F"/>
+                <a:srgbClr val="008c4f"/>
               </a:buClr>
               <a:buSzPct val="115000"/>
               <a:buFont typeface="Wingdings" charset="2"/>
@@ -12352,7 +12295,7 @@
               </a:rPr>
               <a:t> (2018).</a:t>
             </a:r>
-            <a:endParaRPr lang="en-US" sz="1800" b="0" u="none" strike="noStrike">
+            <a:endParaRPr lang="en-GB" sz="1800" b="0" u="none" strike="noStrike">
               <a:solidFill>
                 <a:srgbClr val="000000"/>
               </a:solidFill>
@@ -12370,7 +12313,7 @@
                 <a:spcPts val="360"/>
               </a:spcBef>
               <a:buClr>
-                <a:srgbClr val="008C4F"/>
+                <a:srgbClr val="008c4f"/>
               </a:buClr>
               <a:buSzPct val="115000"/>
               <a:buFont typeface="Wingdings" charset="2"/>
@@ -12412,7 +12355,7 @@
               </a:rPr>
               <a:t> (2018).</a:t>
             </a:r>
-            <a:endParaRPr lang="en-US" sz="1800" b="0" u="none" strike="noStrike">
+            <a:endParaRPr lang="en-GB" sz="1800" b="0" u="none" strike="noStrike">
               <a:solidFill>
                 <a:srgbClr val="000000"/>
               </a:solidFill>
@@ -12430,7 +12373,7 @@
                 <a:spcPts val="360"/>
               </a:spcBef>
               <a:buClr>
-                <a:srgbClr val="008C4F"/>
+                <a:srgbClr val="008c4f"/>
               </a:buClr>
               <a:buSzPct val="115000"/>
               <a:buFont typeface="Wingdings" charset="2"/>
@@ -12472,7 +12415,7 @@
               </a:rPr>
               <a:t> (2010).</a:t>
             </a:r>
-            <a:endParaRPr lang="en-US" sz="1800" b="0" u="none" strike="noStrike">
+            <a:endParaRPr lang="en-GB" sz="1800" b="0" u="none" strike="noStrike">
               <a:solidFill>
                 <a:srgbClr val="000000"/>
               </a:solidFill>
@@ -12522,7 +12465,7 @@
         <p:spPr>
           <a:xfrm>
             <a:off x="335520" y="1268640"/>
-            <a:ext cx="10738080" cy="5025600"/>
+            <a:ext cx="10737720" cy="5025240"/>
           </a:xfrm>
           <a:prstGeom prst="rect">
             <a:avLst/>
@@ -12539,7 +12482,7 @@
           <a:fontRef idx="minor"/>
         </p:style>
         <p:txBody>
-          <a:bodyPr lIns="90000" tIns="45000" rIns="90000" bIns="45000" anchor="ctr">
+          <a:bodyPr lIns="90000" rIns="90000" tIns="45000" bIns="45000" anchor="ctr">
             <a:noAutofit/>
           </a:bodyPr>
           <a:p>
@@ -12551,7 +12494,7 @@
                 <a:spcPts val="799"/>
               </a:spcBef>
               <a:tabLst>
-                <a:tab pos="0" algn="l"/>
+                <a:tab algn="l" pos="0"/>
               </a:tabLst>
             </a:pPr>
             <a:r>
@@ -12566,7 +12509,7 @@
               </a:rPr>
               <a:t>Questions?</a:t>
             </a:r>
-            <a:endParaRPr lang="en-US" sz="4000" b="0" u="none" strike="noStrike">
+            <a:endParaRPr lang="en-GB" sz="4000" b="0" u="none" strike="noStrike">
               <a:solidFill>
                 <a:srgbClr val="000000"/>
               </a:solidFill>
@@ -12586,7 +12529,7 @@
         <p:spPr>
           <a:xfrm>
             <a:off x="335520" y="764640"/>
-            <a:ext cx="10738080" cy="488880"/>
+            <a:ext cx="10737720" cy="488520"/>
           </a:xfrm>
           <a:prstGeom prst="rect">
             <a:avLst/>
@@ -12603,17 +12546,23 @@
           <a:fontRef idx="minor"/>
         </p:style>
         <p:txBody>
-          <a:bodyPr lIns="90000" tIns="45000" rIns="90000" bIns="45000" anchor="t">
+          <a:bodyPr lIns="90000" rIns="90000" tIns="45000" bIns="45000" anchor="t">
             <a:noAutofit/>
           </a:bodyPr>
           <a:p>
-            <a:endParaRPr lang="en-GB" sz="1800" b="0" u="none" strike="noStrike">
-              <a:solidFill>
-                <a:srgbClr val="000000"/>
-              </a:solidFill>
-              <a:effectLst/>
-              <a:uFillTx/>
-              <a:latin typeface="Arial"/>
+            <a:pPr>
+              <a:lnSpc>
+                <a:spcPct val="100000"/>
+              </a:lnSpc>
+            </a:pPr>
+            <a:endParaRPr lang="en-GB" sz="1800" b="0" u="none" strike="noStrike">
+              <a:solidFill>
+                <a:srgbClr val="000000"/>
+              </a:solidFill>
+              <a:effectLst/>
+              <a:uFillTx/>
+              <a:latin typeface="Arial"/>
+              <a:ea typeface="DejaVu Sans"/>
             </a:endParaRPr>
           </a:p>
         </p:txBody>
@@ -12657,7 +12606,7 @@
         <p:spPr>
           <a:xfrm>
             <a:off x="542880" y="721800"/>
-            <a:ext cx="10342440" cy="483120"/>
+            <a:ext cx="10342080" cy="482760"/>
           </a:xfrm>
           <a:prstGeom prst="rect">
             <a:avLst/>
@@ -12674,7 +12623,7 @@
           <a:fontRef idx="minor"/>
         </p:style>
         <p:txBody>
-          <a:bodyPr lIns="0" tIns="0" rIns="0" bIns="0" anchor="ctr">
+          <a:bodyPr lIns="0" rIns="0" tIns="0" bIns="0" anchor="ctr">
             <a:noAutofit/>
           </a:bodyPr>
           <a:p>
@@ -12695,7 +12644,7 @@
               </a:rPr>
               <a:t>ETCE Research Group</a:t>
             </a:r>
-            <a:endParaRPr lang="en-US" sz="2200" b="0" u="none" strike="noStrike">
+            <a:endParaRPr lang="en-GB" sz="2200" b="0" u="none" strike="noStrike">
               <a:solidFill>
                 <a:srgbClr val="000000"/>
               </a:solidFill>
@@ -12715,7 +12664,7 @@
         <p:spPr>
           <a:xfrm>
             <a:off x="451800" y="1709280"/>
-            <a:ext cx="8209800" cy="4338000"/>
+            <a:ext cx="8209440" cy="4337640"/>
           </a:xfrm>
           <a:prstGeom prst="rect">
             <a:avLst/>
@@ -12732,17 +12681,23 @@
           <a:fontRef idx="minor"/>
         </p:style>
         <p:txBody>
-          <a:bodyPr lIns="90000" tIns="45000" rIns="90000" bIns="45000" anchor="t">
+          <a:bodyPr lIns="90000" rIns="90000" tIns="45000" bIns="45000" anchor="t">
             <a:noAutofit/>
           </a:bodyPr>
           <a:p>
-            <a:endParaRPr lang="en-GB" sz="1800" b="0" u="none" strike="noStrike">
-              <a:solidFill>
-                <a:srgbClr val="000000"/>
-              </a:solidFill>
-              <a:effectLst/>
-              <a:uFillTx/>
-              <a:latin typeface="Arial"/>
+            <a:pPr>
+              <a:lnSpc>
+                <a:spcPct val="100000"/>
+              </a:lnSpc>
+            </a:pPr>
+            <a:endParaRPr lang="en-GB" sz="1800" b="0" u="none" strike="noStrike">
+              <a:solidFill>
+                <a:srgbClr val="000000"/>
+              </a:solidFill>
+              <a:effectLst/>
+              <a:uFillTx/>
+              <a:latin typeface="Arial"/>
+              <a:ea typeface="DejaVu Sans"/>
             </a:endParaRPr>
           </a:p>
         </p:txBody>
@@ -12756,7 +12711,7 @@
         <p:spPr>
           <a:xfrm>
             <a:off x="609480" y="1769400"/>
-            <a:ext cx="10572840" cy="4840920"/>
+            <a:ext cx="10572480" cy="4840560"/>
           </a:xfrm>
           <a:prstGeom prst="rect">
             <a:avLst/>
@@ -12773,7 +12728,7 @@
           <a:fontRef idx="minor"/>
         </p:style>
         <p:txBody>
-          <a:bodyPr lIns="0" tIns="0" rIns="0" bIns="0" anchor="ctr">
+          <a:bodyPr lIns="0" rIns="0" tIns="0" bIns="0" anchor="ctr">
             <a:normAutofit/>
           </a:bodyPr>
           <a:p>
@@ -12785,7 +12740,7 @@
                 <a:spcPts val="1009"/>
               </a:spcBef>
               <a:buClr>
-                <a:srgbClr val="008C4F"/>
+                <a:srgbClr val="008c4f"/>
               </a:buClr>
               <a:buSzPct val="80000"/>
               <a:buFont typeface="Wingdings 2" charset="2"/>
@@ -12899,7 +12854,7 @@
               </a:rPr>
               <a:t>ETCE</a:t>
             </a:r>
-            <a:endParaRPr lang="en-US" sz="2000" b="0" u="none" strike="noStrike">
+            <a:endParaRPr lang="en-GB" sz="2000" b="0" u="none" strike="noStrike">
               <a:solidFill>
                 <a:srgbClr val="000000"/>
               </a:solidFill>
@@ -12917,7 +12872,7 @@
                 <a:spcPts val="1009"/>
               </a:spcBef>
               <a:buClr>
-                <a:srgbClr val="008C4F"/>
+                <a:srgbClr val="008c4f"/>
               </a:buClr>
               <a:buSzPct val="80000"/>
               <a:buFont typeface="Wingdings 2" charset="2"/>
@@ -12935,7 +12890,7 @@
               </a:rPr>
               <a:t>Research focus:</a:t>
             </a:r>
-            <a:endParaRPr lang="en-US" sz="2000" b="0" u="none" strike="noStrike">
+            <a:endParaRPr lang="en-GB" sz="2000" b="0" u="none" strike="noStrike">
               <a:solidFill>
                 <a:srgbClr val="000000"/>
               </a:solidFill>
@@ -12953,7 +12908,7 @@
                 <a:spcPts val="1009"/>
               </a:spcBef>
               <a:buClr>
-                <a:srgbClr val="008C4F"/>
+                <a:srgbClr val="008c4f"/>
               </a:buClr>
               <a:buSzPct val="45000"/>
               <a:buFont typeface="Arial"/>
@@ -12971,7 +12926,7 @@
               </a:rPr>
               <a:t>Intersection of IT and sustainability</a:t>
             </a:r>
-            <a:endParaRPr lang="en-US" sz="1800" b="0" u="none" strike="noStrike">
+            <a:endParaRPr lang="en-GB" sz="1800" b="0" u="none" strike="noStrike">
               <a:solidFill>
                 <a:srgbClr val="000000"/>
               </a:solidFill>
@@ -12989,7 +12944,7 @@
                 <a:spcPts val="1009"/>
               </a:spcBef>
               <a:buClr>
-                <a:srgbClr val="008C4F"/>
+                <a:srgbClr val="008c4f"/>
               </a:buClr>
               <a:buSzPct val="45000"/>
               <a:buFont typeface="Arial"/>
@@ -13007,7 +12962,7 @@
               </a:rPr>
               <a:t>Circular Economy</a:t>
             </a:r>
-            <a:endParaRPr lang="en-US" sz="1800" b="0" u="none" strike="noStrike">
+            <a:endParaRPr lang="en-GB" sz="1800" b="0" u="none" strike="noStrike">
               <a:solidFill>
                 <a:srgbClr val="000000"/>
               </a:solidFill>
@@ -13025,7 +12980,7 @@
                 <a:spcPts val="1009"/>
               </a:spcBef>
               <a:buClr>
-                <a:srgbClr val="008C4F"/>
+                <a:srgbClr val="008c4f"/>
               </a:buClr>
               <a:buSzPct val="45000"/>
               <a:buFont typeface="Arial"/>
@@ -13043,7 +12998,7 @@
               </a:rPr>
               <a:t>Self-organized, decentralized and distributed systems</a:t>
             </a:r>
-            <a:endParaRPr lang="en-US" sz="1800" b="0" u="none" strike="noStrike">
+            <a:endParaRPr lang="en-GB" sz="1800" b="0" u="none" strike="noStrike">
               <a:solidFill>
                 <a:srgbClr val="000000"/>
               </a:solidFill>
@@ -13061,7 +13016,7 @@
                 <a:spcPts val="1009"/>
               </a:spcBef>
               <a:buClr>
-                <a:srgbClr val="008C4F"/>
+                <a:srgbClr val="008c4f"/>
               </a:buClr>
               <a:buSzPct val="45000"/>
               <a:buFont typeface="Arial"/>
@@ -13079,7 +13034,7 @@
               </a:rPr>
               <a:t>Sustainable and resilient food production</a:t>
             </a:r>
-            <a:endParaRPr lang="en-US" sz="1800" b="0" u="none" strike="noStrike">
+            <a:endParaRPr lang="en-GB" sz="1800" b="0" u="none" strike="noStrike">
               <a:solidFill>
                 <a:srgbClr val="000000"/>
               </a:solidFill>
@@ -13097,7 +13052,7 @@
                 <a:spcPts val="1009"/>
               </a:spcBef>
               <a:buClr>
-                <a:srgbClr val="008C4F"/>
+                <a:srgbClr val="008c4f"/>
               </a:buClr>
               <a:buSzPct val="80000"/>
               <a:buFont typeface="Wingdings 2" charset="2"/>
@@ -13115,7 +13070,7 @@
               </a:rPr>
               <a:t>Other courses:</a:t>
             </a:r>
-            <a:endParaRPr lang="en-US" sz="2000" b="0" u="none" strike="noStrike">
+            <a:endParaRPr lang="en-GB" sz="2000" b="0" u="none" strike="noStrike">
               <a:solidFill>
                 <a:srgbClr val="000000"/>
               </a:solidFill>
@@ -13133,7 +13088,7 @@
                 <a:spcPts val="1009"/>
               </a:spcBef>
               <a:buClr>
-                <a:srgbClr val="008C4F"/>
+                <a:srgbClr val="008c4f"/>
               </a:buClr>
               <a:buSzPct val="45000"/>
               <a:buFont typeface="Arial"/>
@@ -13151,7 +13106,7 @@
               </a:rPr>
               <a:t>The Limits to Growth – Sustainability and the Circular Economy (WS – open for everyone)</a:t>
             </a:r>
-            <a:endParaRPr lang="en-US" sz="1800" b="0" u="none" strike="noStrike">
+            <a:endParaRPr lang="en-GB" sz="1800" b="0" u="none" strike="noStrike">
               <a:solidFill>
                 <a:srgbClr val="000000"/>
               </a:solidFill>
@@ -13169,7 +13124,7 @@
                 <a:spcPts val="1009"/>
               </a:spcBef>
               <a:buClr>
-                <a:srgbClr val="008C4F"/>
+                <a:srgbClr val="008c4f"/>
               </a:buClr>
               <a:buSzPct val="45000"/>
               <a:buFont typeface="Arial"/>
@@ -13187,7 +13142,7 @@
               </a:rPr>
               <a:t>Requirements Engineering (WS – M.Sc.)</a:t>
             </a:r>
-            <a:endParaRPr lang="en-US" sz="1800" b="0" u="none" strike="noStrike">
+            <a:endParaRPr lang="en-GB" sz="1800" b="0" u="none" strike="noStrike">
               <a:solidFill>
                 <a:srgbClr val="000000"/>
               </a:solidFill>
@@ -13237,7 +13192,7 @@
         <p:spPr>
           <a:xfrm>
             <a:off x="542880" y="721800"/>
-            <a:ext cx="10342440" cy="483120"/>
+            <a:ext cx="10342080" cy="482760"/>
           </a:xfrm>
           <a:prstGeom prst="rect">
             <a:avLst/>
@@ -13254,7 +13209,7 @@
           <a:fontRef idx="minor"/>
         </p:style>
         <p:txBody>
-          <a:bodyPr lIns="0" tIns="0" rIns="0" bIns="0" anchor="ctr">
+          <a:bodyPr lIns="0" rIns="0" tIns="0" bIns="0" anchor="ctr">
             <a:noAutofit/>
           </a:bodyPr>
           <a:p>
@@ -13275,7 +13230,7 @@
               </a:rPr>
               <a:t>ETCE Research Group</a:t>
             </a:r>
-            <a:endParaRPr lang="en-US" sz="2200" b="0" u="none" strike="noStrike">
+            <a:endParaRPr lang="en-GB" sz="2200" b="0" u="none" strike="noStrike">
               <a:solidFill>
                 <a:srgbClr val="000000"/>
               </a:solidFill>
@@ -13295,7 +13250,7 @@
         <p:spPr>
           <a:xfrm>
             <a:off x="451800" y="1709280"/>
-            <a:ext cx="8209800" cy="4338000"/>
+            <a:ext cx="8209440" cy="4337640"/>
           </a:xfrm>
           <a:prstGeom prst="rect">
             <a:avLst/>
@@ -13312,17 +13267,23 @@
           <a:fontRef idx="minor"/>
         </p:style>
         <p:txBody>
-          <a:bodyPr lIns="90000" tIns="45000" rIns="90000" bIns="45000" anchor="t">
+          <a:bodyPr lIns="90000" rIns="90000" tIns="45000" bIns="45000" anchor="t">
             <a:noAutofit/>
           </a:bodyPr>
           <a:p>
-            <a:endParaRPr lang="en-GB" sz="1800" b="0" u="none" strike="noStrike">
-              <a:solidFill>
-                <a:srgbClr val="000000"/>
-              </a:solidFill>
-              <a:effectLst/>
-              <a:uFillTx/>
-              <a:latin typeface="Arial"/>
+            <a:pPr>
+              <a:lnSpc>
+                <a:spcPct val="100000"/>
+              </a:lnSpc>
+            </a:pPr>
+            <a:endParaRPr lang="en-GB" sz="1800" b="0" u="none" strike="noStrike">
+              <a:solidFill>
+                <a:srgbClr val="000000"/>
+              </a:solidFill>
+              <a:effectLst/>
+              <a:uFillTx/>
+              <a:latin typeface="Arial"/>
+              <a:ea typeface="DejaVu Sans"/>
             </a:endParaRPr>
           </a:p>
         </p:txBody>
@@ -13336,7 +13297,7 @@
         <p:spPr>
           <a:xfrm>
             <a:off x="609480" y="1769400"/>
-            <a:ext cx="10572840" cy="4840920"/>
+            <a:ext cx="10572480" cy="4840560"/>
           </a:xfrm>
           <a:prstGeom prst="rect">
             <a:avLst/>
@@ -13353,7 +13314,7 @@
           <a:fontRef idx="minor"/>
         </p:style>
         <p:txBody>
-          <a:bodyPr lIns="0" tIns="0" rIns="0" bIns="0" anchor="ctr">
+          <a:bodyPr lIns="0" rIns="0" tIns="0" bIns="0" anchor="ctr">
             <a:normAutofit/>
           </a:bodyPr>
           <a:p>
@@ -13365,7 +13326,7 @@
                 <a:spcPts val="1009"/>
               </a:spcBef>
               <a:buClr>
-                <a:srgbClr val="008C4F"/>
+                <a:srgbClr val="008c4f"/>
               </a:buClr>
               <a:buSzPct val="80000"/>
               <a:buFont typeface="Wingdings 2" charset="2"/>
@@ -13386,7 +13347,7 @@
             <a:r>
               <a:rPr lang="de-DE" sz="2000" b="0" u="sng" strike="noStrike">
                 <a:solidFill>
-                  <a:srgbClr val="0000FF"/>
+                  <a:srgbClr val="0000ff"/>
                 </a:solidFill>
                 <a:effectLst/>
                 <a:uFillTx/>
@@ -13408,7 +13369,7 @@
               </a:rPr>
               <a:t> </a:t>
             </a:r>
-            <a:endParaRPr lang="en-US" sz="2000" b="0" u="none" strike="noStrike">
+            <a:endParaRPr lang="en-GB" sz="2000" b="0" u="none" strike="noStrike">
               <a:solidFill>
                 <a:srgbClr val="000000"/>
               </a:solidFill>
@@ -13426,7 +13387,7 @@
                 <a:spcPts val="1009"/>
               </a:spcBef>
               <a:buClr>
-                <a:srgbClr val="008C4F"/>
+                <a:srgbClr val="008c4f"/>
               </a:buClr>
               <a:buSzPct val="45000"/>
               <a:buFont typeface="Arial"/>
@@ -13444,7 +13405,7 @@
               </a:rPr>
               <a:t>Course material </a:t>
             </a:r>
-            <a:endParaRPr lang="en-US" sz="1800" b="0" u="none" strike="noStrike">
+            <a:endParaRPr lang="en-GB" sz="1800" b="0" u="none" strike="noStrike">
               <a:solidFill>
                 <a:srgbClr val="000000"/>
               </a:solidFill>
@@ -13462,7 +13423,7 @@
                 <a:spcPts val="1009"/>
               </a:spcBef>
               <a:buClr>
-                <a:srgbClr val="008C4F"/>
+                <a:srgbClr val="008c4f"/>
               </a:buClr>
               <a:buSzPct val="45000"/>
               <a:buFont typeface="Arial"/>
@@ -13480,7 +13441,7 @@
               </a:rPr>
               <a:t>Theses/project topics</a:t>
             </a:r>
-            <a:endParaRPr lang="en-US" sz="1800" b="0" u="none" strike="noStrike">
+            <a:endParaRPr lang="en-GB" sz="1800" b="0" u="none" strike="noStrike">
               <a:solidFill>
                 <a:srgbClr val="000000"/>
               </a:solidFill>
@@ -13498,10 +13459,10 @@
                 <a:spcPts val="1417"/>
               </a:spcBef>
               <a:tabLst>
-                <a:tab pos="0" algn="l"/>
+                <a:tab algn="l" pos="0"/>
               </a:tabLst>
             </a:pPr>
-            <a:endParaRPr lang="en-US" sz="1800" b="0" u="none" strike="noStrike">
+            <a:endParaRPr lang="en-GB" sz="1800" b="0" u="none" strike="noStrike">
               <a:solidFill>
                 <a:srgbClr val="000000"/>
               </a:solidFill>
@@ -13519,13 +13480,13 @@
                 <a:spcPts val="1417"/>
               </a:spcBef>
               <a:tabLst>
-                <a:tab pos="0" algn="l"/>
+                <a:tab algn="l" pos="0"/>
               </a:tabLst>
             </a:pPr>
             <a:r>
               <a:rPr lang="en-GB" sz="2000" b="0" u="none" strike="noStrike">
                 <a:solidFill>
-                  <a:srgbClr val="FFFFFF"/>
+                  <a:srgbClr val="ffffff"/>
                 </a:solidFill>
                 <a:effectLst/>
                 <a:uFillTx/>
@@ -13534,7 +13495,7 @@
               </a:rPr>
               <a:t>You want join us? Write us an email! </a:t>
             </a:r>
-            <a:endParaRPr lang="en-US" sz="2000" b="0" u="none" strike="noStrike">
+            <a:endParaRPr lang="en-GB" sz="2000" b="0" u="none" strike="noStrike">
               <a:solidFill>
                 <a:srgbClr val="000000"/>
               </a:solidFill>
@@ -13552,13 +13513,13 @@
                 <a:spcPts val="1009"/>
               </a:spcBef>
               <a:tabLst>
-                <a:tab pos="0" algn="l"/>
+                <a:tab algn="l" pos="0"/>
               </a:tabLst>
             </a:pPr>
             <a:r>
               <a:rPr lang="en-GB" sz="1600" b="0" u="none" strike="noStrike">
                 <a:solidFill>
-                  <a:srgbClr val="FFFFFF"/>
+                  <a:srgbClr val="ffffff"/>
                 </a:solidFill>
                 <a:effectLst/>
                 <a:uFillTx/>
@@ -13567,7 +13528,7 @@
               </a:rPr>
               <a:t>→ benjamin.leiding@tu-clausthal.de</a:t>
             </a:r>
-            <a:endParaRPr lang="en-US" sz="1600" b="0" u="none" strike="noStrike">
+            <a:endParaRPr lang="en-GB" sz="1600" b="0" u="none" strike="noStrike">
               <a:solidFill>
                 <a:srgbClr val="000000"/>
               </a:solidFill>
@@ -13617,7 +13578,7 @@
         <p:spPr>
           <a:xfrm>
             <a:off x="542880" y="721800"/>
-            <a:ext cx="10342440" cy="483120"/>
+            <a:ext cx="10342080" cy="482760"/>
           </a:xfrm>
           <a:prstGeom prst="rect">
             <a:avLst/>
@@ -13634,7 +13595,7 @@
           <a:fontRef idx="minor"/>
         </p:style>
         <p:txBody>
-          <a:bodyPr lIns="0" tIns="0" rIns="0" bIns="0" anchor="ctr">
+          <a:bodyPr lIns="0" rIns="0" tIns="0" bIns="0" anchor="ctr">
             <a:noAutofit/>
           </a:bodyPr>
           <a:p>
@@ -13655,7 +13616,7 @@
               </a:rPr>
               <a:t>ETCE Research Group</a:t>
             </a:r>
-            <a:endParaRPr lang="en-US" sz="2200" b="0" u="none" strike="noStrike">
+            <a:endParaRPr lang="en-GB" sz="2200" b="0" u="none" strike="noStrike">
               <a:solidFill>
                 <a:srgbClr val="000000"/>
               </a:solidFill>
@@ -13675,7 +13636,7 @@
         <p:spPr>
           <a:xfrm>
             <a:off x="451800" y="1709280"/>
-            <a:ext cx="8209800" cy="4338000"/>
+            <a:ext cx="8209440" cy="4337640"/>
           </a:xfrm>
           <a:prstGeom prst="rect">
             <a:avLst/>
@@ -13692,17 +13653,23 @@
           <a:fontRef idx="minor"/>
         </p:style>
         <p:txBody>
-          <a:bodyPr lIns="90000" tIns="45000" rIns="90000" bIns="45000" anchor="t">
+          <a:bodyPr lIns="90000" rIns="90000" tIns="45000" bIns="45000" anchor="t">
             <a:noAutofit/>
           </a:bodyPr>
           <a:p>
-            <a:endParaRPr lang="en-GB" sz="1800" b="0" u="none" strike="noStrike">
-              <a:solidFill>
-                <a:srgbClr val="000000"/>
-              </a:solidFill>
-              <a:effectLst/>
-              <a:uFillTx/>
-              <a:latin typeface="Arial"/>
+            <a:pPr>
+              <a:lnSpc>
+                <a:spcPct val="100000"/>
+              </a:lnSpc>
+            </a:pPr>
+            <a:endParaRPr lang="en-GB" sz="1800" b="0" u="none" strike="noStrike">
+              <a:solidFill>
+                <a:srgbClr val="000000"/>
+              </a:solidFill>
+              <a:effectLst/>
+              <a:uFillTx/>
+              <a:latin typeface="Arial"/>
+              <a:ea typeface="DejaVu Sans"/>
             </a:endParaRPr>
           </a:p>
         </p:txBody>
@@ -13716,7 +13683,7 @@
         <p:spPr>
           <a:xfrm>
             <a:off x="609480" y="1769400"/>
-            <a:ext cx="10572840" cy="4840920"/>
+            <a:ext cx="10572480" cy="4840560"/>
           </a:xfrm>
           <a:prstGeom prst="rect">
             <a:avLst/>
@@ -13733,7 +13700,7 @@
           <a:fontRef idx="minor"/>
         </p:style>
         <p:txBody>
-          <a:bodyPr lIns="0" tIns="0" rIns="0" bIns="0" anchor="ctr">
+          <a:bodyPr lIns="0" rIns="0" tIns="0" bIns="0" anchor="ctr">
             <a:normAutofit/>
           </a:bodyPr>
           <a:p>
@@ -13745,7 +13712,7 @@
                 <a:spcPts val="1009"/>
               </a:spcBef>
               <a:buClr>
-                <a:srgbClr val="008C4F"/>
+                <a:srgbClr val="008c4f"/>
               </a:buClr>
               <a:buSzPct val="80000"/>
               <a:buFont typeface="Wingdings 2" charset="2"/>
@@ -13766,7 +13733,7 @@
             <a:r>
               <a:rPr lang="de-DE" sz="2000" b="0" u="sng" strike="noStrike">
                 <a:solidFill>
-                  <a:srgbClr val="0000FF"/>
+                  <a:srgbClr val="0000ff"/>
                 </a:solidFill>
                 <a:effectLst/>
                 <a:uFillTx/>
@@ -13788,7 +13755,7 @@
               </a:rPr>
               <a:t> </a:t>
             </a:r>
-            <a:endParaRPr lang="en-US" sz="2000" b="0" u="none" strike="noStrike">
+            <a:endParaRPr lang="en-GB" sz="2000" b="0" u="none" strike="noStrike">
               <a:solidFill>
                 <a:srgbClr val="000000"/>
               </a:solidFill>
@@ -13806,7 +13773,7 @@
                 <a:spcPts val="1009"/>
               </a:spcBef>
               <a:buClr>
-                <a:srgbClr val="008C4F"/>
+                <a:srgbClr val="008c4f"/>
               </a:buClr>
               <a:buSzPct val="45000"/>
               <a:buFont typeface="Arial"/>
@@ -13824,7 +13791,7 @@
               </a:rPr>
               <a:t>Course material </a:t>
             </a:r>
-            <a:endParaRPr lang="en-US" sz="1800" b="0" u="none" strike="noStrike">
+            <a:endParaRPr lang="en-GB" sz="1800" b="0" u="none" strike="noStrike">
               <a:solidFill>
                 <a:srgbClr val="000000"/>
               </a:solidFill>
@@ -13842,7 +13809,7 @@
                 <a:spcPts val="1009"/>
               </a:spcBef>
               <a:buClr>
-                <a:srgbClr val="008C4F"/>
+                <a:srgbClr val="008c4f"/>
               </a:buClr>
               <a:buSzPct val="45000"/>
               <a:buFont typeface="Arial"/>
@@ -13860,7 +13827,7 @@
               </a:rPr>
               <a:t>Theses/project topics</a:t>
             </a:r>
-            <a:endParaRPr lang="en-US" sz="1800" b="0" u="none" strike="noStrike">
+            <a:endParaRPr lang="en-GB" sz="1800" b="0" u="none" strike="noStrike">
               <a:solidFill>
                 <a:srgbClr val="000000"/>
               </a:solidFill>
@@ -13878,10 +13845,10 @@
                 <a:spcPts val="1417"/>
               </a:spcBef>
               <a:tabLst>
-                <a:tab pos="0" algn="l"/>
+                <a:tab algn="l" pos="0"/>
               </a:tabLst>
             </a:pPr>
-            <a:endParaRPr lang="en-US" sz="1800" b="0" u="none" strike="noStrike">
+            <a:endParaRPr lang="en-GB" sz="1800" b="0" u="none" strike="noStrike">
               <a:solidFill>
                 <a:srgbClr val="000000"/>
               </a:solidFill>
@@ -13899,7 +13866,7 @@
                 <a:spcPts val="1417"/>
               </a:spcBef>
               <a:tabLst>
-                <a:tab pos="0" algn="l"/>
+                <a:tab algn="l" pos="0"/>
               </a:tabLst>
             </a:pPr>
             <a:r>
@@ -13914,7 +13881,7 @@
               </a:rPr>
               <a:t>You want join us? Write us an email! </a:t>
             </a:r>
-            <a:endParaRPr lang="en-US" sz="2000" b="0" u="none" strike="noStrike">
+            <a:endParaRPr lang="en-GB" sz="2000" b="0" u="none" strike="noStrike">
               <a:solidFill>
                 <a:srgbClr val="000000"/>
               </a:solidFill>
@@ -13932,7 +13899,7 @@
                 <a:spcPts val="1009"/>
               </a:spcBef>
               <a:tabLst>
-                <a:tab pos="0" algn="l"/>
+                <a:tab algn="l" pos="0"/>
               </a:tabLst>
             </a:pPr>
             <a:r>
@@ -13947,7 +13914,7 @@
               </a:rPr>
               <a:t>→ benjamin.leiding@tu-clausthal.de</a:t>
             </a:r>
-            <a:endParaRPr lang="en-US" sz="1600" b="0" u="none" strike="noStrike">
+            <a:endParaRPr lang="en-GB" sz="1600" b="0" u="none" strike="noStrike">
               <a:solidFill>
                 <a:srgbClr val="000000"/>
               </a:solidFill>
@@ -13997,7 +13964,7 @@
         <p:spPr>
           <a:xfrm>
             <a:off x="335520" y="764640"/>
-            <a:ext cx="10738080" cy="488880"/>
+            <a:ext cx="10737720" cy="488520"/>
           </a:xfrm>
           <a:prstGeom prst="rect">
             <a:avLst/>
@@ -14014,7 +13981,7 @@
           <a:fontRef idx="minor"/>
         </p:style>
         <p:txBody>
-          <a:bodyPr lIns="90000" tIns="45000" rIns="90000" bIns="45000" anchor="t">
+          <a:bodyPr lIns="90000" rIns="90000" tIns="45000" bIns="45000" anchor="t">
             <a:noAutofit/>
           </a:bodyPr>
           <a:p>
@@ -14035,7 +14002,7 @@
               </a:rPr>
               <a:t>Learning Outcome</a:t>
             </a:r>
-            <a:endParaRPr lang="en-US" sz="2400" b="0" u="none" strike="noStrike">
+            <a:endParaRPr lang="en-GB" sz="2400" b="0" u="none" strike="noStrike">
               <a:solidFill>
                 <a:srgbClr val="000000"/>
               </a:solidFill>
@@ -14050,7 +14017,7 @@
                 <a:spcPct val="100000"/>
               </a:lnSpc>
             </a:pPr>
-            <a:endParaRPr lang="en-US" sz="2400" b="0" u="none" strike="noStrike">
+            <a:endParaRPr lang="en-GB" sz="2400" b="0" u="none" strike="noStrike">
               <a:solidFill>
                 <a:srgbClr val="000000"/>
               </a:solidFill>
@@ -14070,7 +14037,7 @@
         <p:spPr>
           <a:xfrm>
             <a:off x="335520" y="2408400"/>
-            <a:ext cx="10738080" cy="3885840"/>
+            <a:ext cx="10737720" cy="3885480"/>
           </a:xfrm>
           <a:prstGeom prst="rect">
             <a:avLst/>
@@ -14087,7 +14054,7 @@
           <a:fontRef idx="minor"/>
         </p:style>
         <p:txBody>
-          <a:bodyPr lIns="90000" tIns="45000" rIns="90000" bIns="45000" anchor="t">
+          <a:bodyPr lIns="90000" rIns="90000" tIns="45000" bIns="45000" anchor="t">
             <a:noAutofit/>
           </a:bodyPr>
           <a:p>
@@ -14099,7 +14066,7 @@
                 <a:spcPts val="360"/>
               </a:spcBef>
               <a:buClr>
-                <a:srgbClr val="008C4F"/>
+                <a:srgbClr val="008c4f"/>
               </a:buClr>
               <a:buSzPct val="115000"/>
               <a:buFont typeface="Wingdings" charset="2"/>
@@ -14117,7 +14084,7 @@
               </a:rPr>
               <a:t>Basic understanding of the concept of the circular economy</a:t>
             </a:r>
-            <a:endParaRPr lang="en-US" sz="1800" b="0" u="none" strike="noStrike">
+            <a:endParaRPr lang="en-GB" sz="1800" b="0" u="none" strike="noStrike">
               <a:solidFill>
                 <a:srgbClr val="000000"/>
               </a:solidFill>
@@ -14135,7 +14102,7 @@
                 <a:spcPts val="360"/>
               </a:spcBef>
               <a:buClr>
-                <a:srgbClr val="008C4F"/>
+                <a:srgbClr val="008c4f"/>
               </a:buClr>
               <a:buSzPct val="115000"/>
               <a:buFont typeface="Wingdings" charset="2"/>
@@ -14153,7 +14120,7 @@
               </a:rPr>
               <a:t>Basic understanding of emerging technologies at the intersection of digital technologies and sustainability</a:t>
             </a:r>
-            <a:endParaRPr lang="en-US" sz="1800" b="0" u="none" strike="noStrike">
+            <a:endParaRPr lang="en-GB" sz="1800" b="0" u="none" strike="noStrike">
               <a:solidFill>
                 <a:srgbClr val="000000"/>
               </a:solidFill>
@@ -14171,7 +14138,7 @@
                 <a:spcPts val="360"/>
               </a:spcBef>
               <a:buClr>
-                <a:srgbClr val="008C4F"/>
+                <a:srgbClr val="008c4f"/>
               </a:buClr>
               <a:buSzPct val="115000"/>
               <a:buFont typeface="Wingdings" charset="2"/>
@@ -14189,7 +14156,7 @@
               </a:rPr>
               <a:t>Understanding and overview of the Internet of Things and related concepts</a:t>
             </a:r>
-            <a:endParaRPr lang="en-US" sz="1800" b="0" u="none" strike="noStrike">
+            <a:endParaRPr lang="en-GB" sz="1800" b="0" u="none" strike="noStrike">
               <a:solidFill>
                 <a:srgbClr val="000000"/>
               </a:solidFill>
@@ -14207,7 +14174,7 @@
                 <a:spcPts val="360"/>
               </a:spcBef>
               <a:buClr>
-                <a:srgbClr val="008C4F"/>
+                <a:srgbClr val="008c4f"/>
               </a:buClr>
               <a:buSzPct val="115000"/>
               <a:buFont typeface="Wingdings" charset="2"/>
@@ -14225,7 +14192,7 @@
               </a:rPr>
               <a:t>Ability to design smart systems and applications in the context of connected sensor systems and other stakeholders.</a:t>
             </a:r>
-            <a:endParaRPr lang="en-US" sz="1800" b="0" u="none" strike="noStrike">
+            <a:endParaRPr lang="en-GB" sz="1800" b="0" u="none" strike="noStrike">
               <a:solidFill>
                 <a:srgbClr val="000000"/>
               </a:solidFill>
@@ -14243,7 +14210,7 @@
                 <a:spcPts val="360"/>
               </a:spcBef>
               <a:buClr>
-                <a:srgbClr val="008C4F"/>
+                <a:srgbClr val="008c4f"/>
               </a:buClr>
               <a:buSzPct val="115000"/>
               <a:buFont typeface="Wingdings" charset="2"/>
@@ -14261,7 +14228,7 @@
               </a:rPr>
               <a:t>Experience in prototyping applications and systems</a:t>
             </a:r>
-            <a:endParaRPr lang="en-US" sz="1800" b="0" u="none" strike="noStrike">
+            <a:endParaRPr lang="en-GB" sz="1800" b="0" u="none" strike="noStrike">
               <a:solidFill>
                 <a:srgbClr val="000000"/>
               </a:solidFill>
@@ -14311,7 +14278,7 @@
         <p:spPr>
           <a:xfrm>
             <a:off x="335520" y="764640"/>
-            <a:ext cx="10738080" cy="488880"/>
+            <a:ext cx="10737720" cy="488520"/>
           </a:xfrm>
           <a:prstGeom prst="rect">
             <a:avLst/>
@@ -14328,7 +14295,7 @@
           <a:fontRef idx="minor"/>
         </p:style>
         <p:txBody>
-          <a:bodyPr lIns="90000" tIns="45000" rIns="90000" bIns="45000" anchor="t">
+          <a:bodyPr lIns="90000" rIns="90000" tIns="45000" bIns="45000" anchor="t">
             <a:noAutofit/>
           </a:bodyPr>
           <a:p>
@@ -14349,7 +14316,7 @@
               </a:rPr>
               <a:t>Lectures</a:t>
             </a:r>
-            <a:endParaRPr lang="en-US" sz="2400" b="0" u="none" strike="noStrike">
+            <a:endParaRPr lang="en-GB" sz="2400" b="0" u="none" strike="noStrike">
               <a:solidFill>
                 <a:srgbClr val="000000"/>
               </a:solidFill>
@@ -14369,7 +14336,7 @@
         <p:spPr>
           <a:xfrm>
             <a:off x="335520" y="1268640"/>
-            <a:ext cx="10738080" cy="5025600"/>
+            <a:ext cx="10737720" cy="5025240"/>
           </a:xfrm>
           <a:prstGeom prst="rect">
             <a:avLst/>
@@ -14386,7 +14353,7 @@
           <a:fontRef idx="minor"/>
         </p:style>
         <p:txBody>
-          <a:bodyPr lIns="90000" tIns="45000" rIns="90000" bIns="45000" anchor="ctr">
+          <a:bodyPr lIns="90000" rIns="90000" tIns="45000" bIns="45000" anchor="ctr">
             <a:noAutofit/>
           </a:bodyPr>
           <a:p>
@@ -14398,7 +14365,7 @@
                 <a:spcPts val="360"/>
               </a:spcBef>
               <a:buClr>
-                <a:srgbClr val="008C4F"/>
+                <a:srgbClr val="008c4f"/>
               </a:buClr>
               <a:buSzPct val="115000"/>
               <a:buFont typeface="Wingdings" charset="2"/>
@@ -14416,7 +14383,7 @@
               </a:rPr>
               <a:t>27.04.2026 → Organization (L00) </a:t>
             </a:r>
-            <a:endParaRPr lang="en-US" sz="1800" b="0" u="none" strike="noStrike">
+            <a:endParaRPr lang="en-GB" sz="1800" b="0" u="none" strike="noStrike">
               <a:solidFill>
                 <a:srgbClr val="000000"/>
               </a:solidFill>
@@ -14434,7 +14401,7 @@
                 <a:spcPts val="360"/>
               </a:spcBef>
               <a:buClr>
-                <a:srgbClr val="008C4F"/>
+                <a:srgbClr val="008c4f"/>
               </a:buClr>
               <a:buSzPct val="115000"/>
               <a:buFont typeface="Wingdings" charset="2"/>
@@ -14452,7 +14419,7 @@
               </a:rPr>
               <a:t>04.05.2026 → Introduction (L01)</a:t>
             </a:r>
-            <a:endParaRPr lang="en-US" sz="1800" b="0" u="none" strike="noStrike">
+            <a:endParaRPr lang="en-GB" sz="1800" b="0" u="none" strike="noStrike">
               <a:solidFill>
                 <a:srgbClr val="000000"/>
               </a:solidFill>
@@ -14470,7 +14437,7 @@
                 <a:spcPts val="360"/>
               </a:spcBef>
               <a:buClr>
-                <a:srgbClr val="008C4F"/>
+                <a:srgbClr val="008c4f"/>
               </a:buClr>
               <a:buSzPct val="115000"/>
               <a:buFont typeface="Wingdings" charset="2"/>
@@ -14488,7 +14455,7 @@
               </a:rPr>
               <a:t>11.05.2026 → Circular Economy (L02) </a:t>
             </a:r>
-            <a:endParaRPr lang="en-US" sz="1800" b="0" u="none" strike="noStrike">
+            <a:endParaRPr lang="en-GB" sz="1800" b="0" u="none" strike="noStrike">
               <a:solidFill>
                 <a:srgbClr val="000000"/>
               </a:solidFill>
@@ -14506,7 +14473,7 @@
                 <a:spcPts val="360"/>
               </a:spcBef>
               <a:buClr>
-                <a:srgbClr val="008C4F"/>
+                <a:srgbClr val="008c4f"/>
               </a:buClr>
               <a:buSzPct val="115000"/>
               <a:buFont typeface="Wingdings" charset="2"/>
@@ -14524,7 +14491,7 @@
               </a:rPr>
               <a:t>18.05.2026 → Lifecycle Assessment – LCA I (L03)</a:t>
             </a:r>
-            <a:endParaRPr lang="en-US" sz="1800" b="0" u="none" strike="noStrike">
+            <a:endParaRPr lang="en-GB" sz="1800" b="0" u="none" strike="noStrike">
               <a:solidFill>
                 <a:srgbClr val="000000"/>
               </a:solidFill>
@@ -14542,7 +14509,7 @@
                 <a:spcPts val="360"/>
               </a:spcBef>
               <a:buClr>
-                <a:srgbClr val="008C4F"/>
+                <a:srgbClr val="008c4f"/>
               </a:buClr>
               <a:buSzPct val="115000"/>
               <a:buFont typeface="Wingdings" charset="2"/>
@@ -14560,7 +14527,7 @@
               </a:rPr>
               <a:t>01.06.2026 → Lifecycle Assessment – LCA 2 (L04)</a:t>
             </a:r>
-            <a:endParaRPr lang="en-US" sz="1800" b="0" u="none" strike="noStrike">
+            <a:endParaRPr lang="en-GB" sz="1800" b="0" u="none" strike="noStrike">
               <a:solidFill>
                 <a:srgbClr val="000000"/>
               </a:solidFill>
@@ -14578,7 +14545,7 @@
                 <a:spcPts val="360"/>
               </a:spcBef>
               <a:buClr>
-                <a:srgbClr val="008C4F"/>
+                <a:srgbClr val="008c4f"/>
               </a:buClr>
               <a:buSzPct val="115000"/>
               <a:buFont typeface="Wingdings" charset="2"/>
@@ -14596,7 +14563,7 @@
               </a:rPr>
               <a:t>08.06.2026 → Introduction to the Internet of Things (L05)</a:t>
             </a:r>
-            <a:endParaRPr lang="en-US" sz="1800" b="0" u="none" strike="noStrike">
+            <a:endParaRPr lang="en-GB" sz="1800" b="0" u="none" strike="noStrike">
               <a:solidFill>
                 <a:srgbClr val="000000"/>
               </a:solidFill>
@@ -14614,7 +14581,7 @@
                 <a:spcPts val="360"/>
               </a:spcBef>
               <a:buClr>
-                <a:srgbClr val="008C4F"/>
+                <a:srgbClr val="008c4f"/>
               </a:buClr>
               <a:buSzPct val="115000"/>
               <a:buFont typeface="Wingdings" charset="2"/>
@@ -14632,7 +14599,7 @@
               </a:rPr>
               <a:t>15.06.2026 → Internet of Things – Communication (L06) + Security and Privacy (L07)</a:t>
             </a:r>
-            <a:endParaRPr lang="en-US" sz="1800" b="0" u="none" strike="noStrike">
+            <a:endParaRPr lang="en-GB" sz="1800" b="0" u="none" strike="noStrike">
               <a:solidFill>
                 <a:srgbClr val="000000"/>
               </a:solidFill>
@@ -14650,7 +14617,7 @@
                 <a:spcPts val="360"/>
               </a:spcBef>
               <a:buClr>
-                <a:srgbClr val="008C4F"/>
+                <a:srgbClr val="008c4f"/>
               </a:buClr>
               <a:buSzPct val="115000"/>
               <a:buFont typeface="Wingdings" charset="2"/>
@@ -14668,7 +14635,7 @@
               </a:rPr>
               <a:t>22.06.2026 → Internet of Things – Data Processing and Big Data (L08)</a:t>
             </a:r>
-            <a:endParaRPr lang="en-US" sz="1800" b="0" u="none" strike="noStrike">
+            <a:endParaRPr lang="en-GB" sz="1800" b="0" u="none" strike="noStrike">
               <a:solidFill>
                 <a:srgbClr val="000000"/>
               </a:solidFill>
@@ -14686,7 +14653,7 @@
                 <a:spcPts val="360"/>
               </a:spcBef>
               <a:buClr>
-                <a:srgbClr val="008C4F"/>
+                <a:srgbClr val="008c4f"/>
               </a:buClr>
               <a:buSzPct val="115000"/>
               <a:buFont typeface="Wingdings" charset="2"/>
@@ -14702,9 +14669,21 @@
                 <a:latin typeface="DejaVu Sans"/>
                 <a:ea typeface="DejaVu Sans"/>
               </a:rPr>
-              <a:t>29.06.2026 → IoT Applications I – Resilient and Sustainable Food Production (L09)</a:t>
-            </a:r>
-            <a:endParaRPr lang="en-US" sz="1800" b="0" u="none" strike="noStrike">
+              <a:t>06.07.2026 → </a:t>
+            </a:r>
+            <a:r>
+              <a:rPr lang="en-US" sz="1800" b="0" u="none" strike="noStrike">
+                <a:solidFill>
+                  <a:srgbClr val="000000"/>
+                </a:solidFill>
+                <a:effectLst/>
+                <a:uFillTx/>
+                <a:latin typeface="DejaVu Sans"/>
+                <a:ea typeface="DejaVu Sans"/>
+              </a:rPr>
+              <a:t>IoT Applications I – Resilient and Sustainable Food Production (L09)</a:t>
+            </a:r>
+            <a:endParaRPr lang="en-GB" sz="1800" b="0" u="none" strike="noStrike">
               <a:solidFill>
                 <a:srgbClr val="000000"/>
               </a:solidFill>
@@ -14722,7 +14701,7 @@
                 <a:spcPts val="360"/>
               </a:spcBef>
               <a:buClr>
-                <a:srgbClr val="008C4F"/>
+                <a:srgbClr val="008c4f"/>
               </a:buClr>
               <a:buSzPct val="115000"/>
               <a:buFont typeface="Wingdings" charset="2"/>
@@ -14738,9 +14717,27 @@
                 <a:latin typeface="DejaVu Sans"/>
                 <a:ea typeface="DejaVu Sans"/>
               </a:rPr>
-              <a:t>06.07.2026 → IoT Applications II – Biodiversity Monitoring (L10)</a:t>
-            </a:r>
-            <a:endParaRPr lang="en-US" sz="1800" b="0" u="none" strike="noStrike">
+              <a:t>13.07.2026 → Digital Technologies and Greenwashing (L10)</a:t>
+            </a:r>
+            <a:endParaRPr lang="en-GB" sz="1800" b="0" u="none" strike="noStrike">
+              <a:solidFill>
+                <a:srgbClr val="000000"/>
+              </a:solidFill>
+              <a:effectLst/>
+              <a:uFillTx/>
+              <a:latin typeface="Arial"/>
+            </a:endParaRPr>
+          </a:p>
+          <a:p>
+            <a:pPr>
+              <a:lnSpc>
+                <a:spcPct val="100000"/>
+              </a:lnSpc>
+              <a:spcBef>
+                <a:spcPts val="360"/>
+              </a:spcBef>
+            </a:pPr>
+            <a:endParaRPr lang="en-GB" sz="1800" b="0" u="none" strike="noStrike">
               <a:solidFill>
                 <a:srgbClr val="000000"/>
               </a:solidFill>
@@ -14758,7 +14755,7 @@
                 <a:spcPts val="360"/>
               </a:spcBef>
               <a:buClr>
-                <a:srgbClr val="008C4F"/>
+                <a:srgbClr val="008c4f"/>
               </a:buClr>
               <a:buSzPct val="115000"/>
               <a:buFont typeface="Wingdings" charset="2"/>
@@ -14774,63 +14771,9 @@
                 <a:latin typeface="DejaVu Sans"/>
                 <a:ea typeface="DejaVu Sans"/>
               </a:rPr>
-              <a:t>13.07.2026 → Digital Technologies and Greenwashing (L11)</a:t>
-            </a:r>
-            <a:endParaRPr lang="en-US" sz="1800" b="0" u="none" strike="noStrike">
-              <a:solidFill>
-                <a:srgbClr val="000000"/>
-              </a:solidFill>
-              <a:effectLst/>
-              <a:uFillTx/>
-              <a:latin typeface="Arial"/>
-            </a:endParaRPr>
-          </a:p>
-          <a:p>
-            <a:pPr>
-              <a:lnSpc>
-                <a:spcPct val="100000"/>
-              </a:lnSpc>
-              <a:spcBef>
-                <a:spcPts val="360"/>
-              </a:spcBef>
-            </a:pPr>
-            <a:endParaRPr lang="en-US" sz="1800" b="0" u="none" strike="noStrike">
-              <a:solidFill>
-                <a:srgbClr val="000000"/>
-              </a:solidFill>
-              <a:effectLst/>
-              <a:uFillTx/>
-              <a:latin typeface="Arial"/>
-            </a:endParaRPr>
-          </a:p>
-          <a:p>
-            <a:pPr marL="195120" indent="-189720">
-              <a:lnSpc>
-                <a:spcPct val="100000"/>
-              </a:lnSpc>
-              <a:spcBef>
-                <a:spcPts val="360"/>
-              </a:spcBef>
-              <a:buClr>
-                <a:srgbClr val="008C4F"/>
-              </a:buClr>
-              <a:buSzPct val="115000"/>
-              <a:buFont typeface="Wingdings" charset="2"/>
-              <a:buChar char=""/>
-            </a:pPr>
-            <a:r>
-              <a:rPr lang="en-US" sz="1800" b="0" u="none" strike="noStrike">
-                <a:solidFill>
-                  <a:srgbClr val="000000"/>
-                </a:solidFill>
-                <a:effectLst/>
-                <a:uFillTx/>
-                <a:latin typeface="DejaVu Sans"/>
-                <a:ea typeface="DejaVu Sans"/>
-              </a:rPr>
               <a:t>20.07.2026 → Exam Q&amp;A</a:t>
             </a:r>
-            <a:endParaRPr lang="en-US" sz="1800" b="0" u="none" strike="noStrike">
+            <a:endParaRPr lang="en-GB" sz="1800" b="0" u="none" strike="noStrike">
               <a:solidFill>
                 <a:srgbClr val="000000"/>
               </a:solidFill>
@@ -14880,7 +14823,7 @@
         <p:spPr>
           <a:xfrm>
             <a:off x="335520" y="764640"/>
-            <a:ext cx="10738080" cy="488880"/>
+            <a:ext cx="10737720" cy="488520"/>
           </a:xfrm>
           <a:prstGeom prst="rect">
             <a:avLst/>
@@ -14897,7 +14840,7 @@
           <a:fontRef idx="minor"/>
         </p:style>
         <p:txBody>
-          <a:bodyPr lIns="90000" tIns="45000" rIns="90000" bIns="45000" anchor="t">
+          <a:bodyPr lIns="90000" rIns="90000" tIns="45000" bIns="45000" anchor="t">
             <a:noAutofit/>
           </a:bodyPr>
           <a:p>
@@ -14918,7 +14861,7 @@
               </a:rPr>
               <a:t>Exercises (Deadlines)</a:t>
             </a:r>
-            <a:endParaRPr lang="en-US" sz="2400" b="0" u="none" strike="noStrike">
+            <a:endParaRPr lang="en-GB" sz="2400" b="0" u="none" strike="noStrike">
               <a:solidFill>
                 <a:srgbClr val="000000"/>
               </a:solidFill>
@@ -14938,7 +14881,7 @@
         <p:spPr>
           <a:xfrm>
             <a:off x="335520" y="1268640"/>
-            <a:ext cx="10738080" cy="5025600"/>
+            <a:ext cx="10737720" cy="5025240"/>
           </a:xfrm>
           <a:prstGeom prst="rect">
             <a:avLst/>
@@ -14955,7 +14898,7 @@
           <a:fontRef idx="minor"/>
         </p:style>
         <p:txBody>
-          <a:bodyPr lIns="90000" tIns="45000" rIns="90000" bIns="45000" anchor="ctr">
+          <a:bodyPr lIns="90000" rIns="90000" tIns="45000" bIns="45000" anchor="ctr">
             <a:noAutofit/>
           </a:bodyPr>
           <a:p>
@@ -14967,7 +14910,7 @@
                 <a:spcPts val="360"/>
               </a:spcBef>
               <a:buClr>
-                <a:srgbClr val="008C4F"/>
+                <a:srgbClr val="008c4f"/>
               </a:buClr>
               <a:buSzPct val="115000"/>
               <a:buFont typeface="Wingdings" charset="2"/>
@@ -15009,7 +14952,7 @@
               </a:rPr>
               <a:t> Exercise 01 – Knowledge Test (MC)</a:t>
             </a:r>
-            <a:endParaRPr lang="en-US" sz="1800" b="0" u="none" strike="noStrike">
+            <a:endParaRPr lang="en-GB" sz="1800" b="0" u="none" strike="noStrike">
               <a:solidFill>
                 <a:srgbClr val="000000"/>
               </a:solidFill>
@@ -15027,7 +14970,7 @@
                 <a:spcPts val="360"/>
               </a:spcBef>
               <a:buClr>
-                <a:srgbClr val="008C4F"/>
+                <a:srgbClr val="008c4f"/>
               </a:buClr>
               <a:buSzPct val="115000"/>
               <a:buFont typeface="Wingdings" charset="2"/>
@@ -15069,7 +15012,7 @@
               </a:rPr>
               <a:t> Exercise 02 – Circular Economy (MC)</a:t>
             </a:r>
-            <a:endParaRPr lang="en-US" sz="1800" b="0" u="none" strike="noStrike">
+            <a:endParaRPr lang="en-GB" sz="1800" b="0" u="none" strike="noStrike">
               <a:solidFill>
                 <a:srgbClr val="000000"/>
               </a:solidFill>
@@ -15087,7 +15030,7 @@
                 <a:spcPts val="360"/>
               </a:spcBef>
               <a:buClr>
-                <a:srgbClr val="008C4F"/>
+                <a:srgbClr val="008c4f"/>
               </a:buClr>
               <a:buSzPct val="115000"/>
               <a:buFont typeface="Wingdings" charset="2"/>
@@ -15129,7 +15072,7 @@
               </a:rPr>
               <a:t> Exercise 03 – Lifecycle Assessment (LCA) – Part 1</a:t>
             </a:r>
-            <a:endParaRPr lang="en-US" sz="1800" b="0" u="none" strike="noStrike">
+            <a:endParaRPr lang="en-GB" sz="1800" b="0" u="none" strike="noStrike">
               <a:solidFill>
                 <a:srgbClr val="000000"/>
               </a:solidFill>
@@ -15147,7 +15090,7 @@
                 <a:spcPts val="360"/>
               </a:spcBef>
               <a:buClr>
-                <a:srgbClr val="008C4F"/>
+                <a:srgbClr val="008c4f"/>
               </a:buClr>
               <a:buSzPct val="115000"/>
               <a:buFont typeface="Wingdings" charset="2"/>
@@ -15189,7 +15132,7 @@
               </a:rPr>
               <a:t> Exercise 04 – Lifecycle Assessment (LCA) – Part 2</a:t>
             </a:r>
-            <a:endParaRPr lang="en-US" sz="1800" b="0" u="none" strike="noStrike">
+            <a:endParaRPr lang="en-GB" sz="1800" b="0" u="none" strike="noStrike">
               <a:solidFill>
                 <a:srgbClr val="000000"/>
               </a:solidFill>
@@ -15207,7 +15150,7 @@
                 <a:spcPts val="360"/>
               </a:spcBef>
               <a:buClr>
-                <a:srgbClr val="008C4F"/>
+                <a:srgbClr val="008c4f"/>
               </a:buClr>
               <a:buSzPct val="115000"/>
               <a:buFont typeface="Wingdings" charset="2"/>
@@ -15249,7 +15192,7 @@
               </a:rPr>
               <a:t> Exercise 05 – IoT Sensing and Gathering Data</a:t>
             </a:r>
-            <a:endParaRPr lang="en-US" sz="1800" b="0" u="none" strike="noStrike">
+            <a:endParaRPr lang="en-GB" sz="1800" b="0" u="none" strike="noStrike">
               <a:solidFill>
                 <a:srgbClr val="000000"/>
               </a:solidFill>
@@ -15267,7 +15210,7 @@
                 <a:spcPts val="360"/>
               </a:spcBef>
               <a:buClr>
-                <a:srgbClr val="008C4F"/>
+                <a:srgbClr val="008c4f"/>
               </a:buClr>
               <a:buSzPct val="115000"/>
               <a:buFont typeface="Wingdings" charset="2"/>
@@ -15309,7 +15252,7 @@
               </a:rPr>
               <a:t> Exercise 06 – IoT Data Processing</a:t>
             </a:r>
-            <a:endParaRPr lang="en-US" sz="1800" b="0" u="none" strike="noStrike">
+            <a:endParaRPr lang="en-GB" sz="1800" b="0" u="none" strike="noStrike">
               <a:solidFill>
                 <a:srgbClr val="000000"/>
               </a:solidFill>
@@ -15327,7 +15270,7 @@
                 <a:spcPts val="360"/>
               </a:spcBef>
               <a:buClr>
-                <a:srgbClr val="008C4F"/>
+                <a:srgbClr val="008c4f"/>
               </a:buClr>
               <a:buSzPct val="115000"/>
               <a:buFont typeface="Wingdings" charset="2"/>
@@ -15369,7 +15312,7 @@
               </a:rPr>
               <a:t> Exercise 07 – IoT Security</a:t>
             </a:r>
-            <a:endParaRPr lang="en-US" sz="1800" b="0" u="none" strike="noStrike">
+            <a:endParaRPr lang="en-GB" sz="1800" b="0" u="none" strike="noStrike">
               <a:solidFill>
                 <a:srgbClr val="000000"/>
               </a:solidFill>
@@ -15387,7 +15330,7 @@
                 <a:spcPts val="360"/>
               </a:spcBef>
               <a:buClr>
-                <a:srgbClr val="008C4F"/>
+                <a:srgbClr val="008c4f"/>
               </a:buClr>
               <a:buSzPct val="115000"/>
               <a:buFont typeface="Wingdings" charset="2"/>
@@ -15403,81 +15346,9 @@
                 <a:latin typeface="DejaVu Sans"/>
                 <a:ea typeface="DejaVu Sans"/>
               </a:rPr>
-              <a:t>06.07.2026 → Exercise 08 – TBA</a:t>
-            </a:r>
-            <a:endParaRPr lang="en-US" sz="1800" b="0" u="none" strike="noStrike">
-              <a:solidFill>
-                <a:srgbClr val="000000"/>
-              </a:solidFill>
-              <a:effectLst/>
-              <a:uFillTx/>
-              <a:latin typeface="Arial"/>
-            </a:endParaRPr>
-          </a:p>
-          <a:p>
-            <a:pPr marL="195120" indent="-189720">
-              <a:lnSpc>
-                <a:spcPct val="100000"/>
-              </a:lnSpc>
-              <a:spcBef>
-                <a:spcPts val="360"/>
-              </a:spcBef>
-              <a:buClr>
-                <a:srgbClr val="008C4F"/>
-              </a:buClr>
-              <a:buSzPct val="115000"/>
-              <a:buFont typeface="Wingdings" charset="2"/>
-              <a:buChar char=""/>
-            </a:pPr>
-            <a:r>
-              <a:rPr lang="de-DE" sz="1800" b="0" u="none" strike="noStrike">
-                <a:solidFill>
-                  <a:srgbClr val="000000"/>
-                </a:solidFill>
-                <a:effectLst/>
-                <a:uFillTx/>
-                <a:latin typeface="DejaVu Sans"/>
-                <a:ea typeface="DejaVu Sans"/>
-              </a:rPr>
-              <a:t>13.07.2026 → Exercise 09 – TBA</a:t>
-            </a:r>
-            <a:endParaRPr lang="en-US" sz="1800" b="0" u="none" strike="noStrike">
-              <a:solidFill>
-                <a:srgbClr val="000000"/>
-              </a:solidFill>
-              <a:effectLst/>
-              <a:uFillTx/>
-              <a:latin typeface="Arial"/>
-            </a:endParaRPr>
-          </a:p>
-          <a:p>
-            <a:pPr marL="195120" indent="-189720">
-              <a:lnSpc>
-                <a:spcPct val="100000"/>
-              </a:lnSpc>
-              <a:spcBef>
-                <a:spcPts val="360"/>
-              </a:spcBef>
-              <a:buClr>
-                <a:srgbClr val="008C4F"/>
-              </a:buClr>
-              <a:buSzPct val="115000"/>
-              <a:buFont typeface="Wingdings" charset="2"/>
-              <a:buChar char=""/>
-            </a:pPr>
-            <a:r>
-              <a:rPr lang="de-DE" sz="1800" b="0" u="none" strike="noStrike">
-                <a:solidFill>
-                  <a:srgbClr val="000000"/>
-                </a:solidFill>
-                <a:effectLst/>
-                <a:uFillTx/>
-                <a:latin typeface="DejaVu Sans"/>
-                <a:ea typeface="DejaVu Sans"/>
-              </a:rPr>
-              <a:t>20.07.2026 → Exercise 10 – TBA</a:t>
-            </a:r>
-            <a:endParaRPr lang="en-US" sz="1800" b="0" u="none" strike="noStrike">
+              <a:t>06.07.2026 → Exercise 08 – IoT and Food Production</a:t>
+            </a:r>
+            <a:endParaRPr lang="en-GB" sz="1800" b="0" u="none" strike="noStrike">
               <a:solidFill>
                 <a:srgbClr val="000000"/>
               </a:solidFill>
@@ -15509,34 +15380,34 @@
         <a:srgbClr val="000000"/>
       </a:dk1>
       <a:lt1>
-        <a:srgbClr val="FFFFFF"/>
+        <a:srgbClr val="ffffff"/>
       </a:lt1>
       <a:dk2>
-        <a:srgbClr val="1F497D"/>
+        <a:srgbClr val="1f497d"/>
       </a:dk2>
       <a:lt2>
-        <a:srgbClr val="EEECE1"/>
+        <a:srgbClr val="eeece1"/>
       </a:lt2>
       <a:accent1>
-        <a:srgbClr val="4F81BD"/>
+        <a:srgbClr val="4f81bd"/>
       </a:accent1>
       <a:accent2>
-        <a:srgbClr val="C0504D"/>
+        <a:srgbClr val="c0504d"/>
       </a:accent2>
       <a:accent3>
-        <a:srgbClr val="9BBB59"/>
+        <a:srgbClr val="9bbb59"/>
       </a:accent3>
       <a:accent4>
-        <a:srgbClr val="8064A2"/>
+        <a:srgbClr val="8064a2"/>
       </a:accent4>
       <a:accent5>
-        <a:srgbClr val="4BACC6"/>
+        <a:srgbClr val="4bacc6"/>
       </a:accent5>
       <a:accent6>
-        <a:srgbClr val="F79646"/>
+        <a:srgbClr val="f79646"/>
       </a:accent6>
       <a:hlink>
-        <a:srgbClr val="0000FF"/>
+        <a:srgbClr val="0000ff"/>
       </a:hlink>
       <a:folHlink>
         <a:srgbClr val="800080"/>
@@ -15687,34 +15558,34 @@
         <a:srgbClr val="000000"/>
       </a:dk1>
       <a:lt1>
-        <a:srgbClr val="FFFFFF"/>
+        <a:srgbClr val="ffffff"/>
       </a:lt1>
       <a:dk2>
-        <a:srgbClr val="1F497D"/>
+        <a:srgbClr val="1f497d"/>
       </a:dk2>
       <a:lt2>
-        <a:srgbClr val="EEECE1"/>
+        <a:srgbClr val="eeece1"/>
       </a:lt2>
       <a:accent1>
-        <a:srgbClr val="4F81BD"/>
+        <a:srgbClr val="4f81bd"/>
       </a:accent1>
       <a:accent2>
-        <a:srgbClr val="C0504D"/>
+        <a:srgbClr val="c0504d"/>
       </a:accent2>
       <a:accent3>
-        <a:srgbClr val="9BBB59"/>
+        <a:srgbClr val="9bbb59"/>
       </a:accent3>
       <a:accent4>
-        <a:srgbClr val="8064A2"/>
+        <a:srgbClr val="8064a2"/>
       </a:accent4>
       <a:accent5>
-        <a:srgbClr val="4BACC6"/>
+        <a:srgbClr val="4bacc6"/>
       </a:accent5>
       <a:accent6>
-        <a:srgbClr val="F79646"/>
+        <a:srgbClr val="f79646"/>
       </a:accent6>
       <a:hlink>
-        <a:srgbClr val="0000FF"/>
+        <a:srgbClr val="0000ff"/>
       </a:hlink>
       <a:folHlink>
         <a:srgbClr val="800080"/>
@@ -15865,37 +15736,37 @@
         <a:srgbClr val="000000"/>
       </a:dk1>
       <a:lt1>
-        <a:srgbClr val="FFFFFF"/>
+        <a:srgbClr val="ffffff"/>
       </a:lt1>
       <a:dk2>
         <a:srgbClr val="000000"/>
       </a:dk2>
       <a:lt2>
-        <a:srgbClr val="FFFFFF"/>
+        <a:srgbClr val="ffffff"/>
       </a:lt2>
       <a:accent1>
-        <a:srgbClr val="18A303"/>
+        <a:srgbClr val="18a303"/>
       </a:accent1>
       <a:accent2>
-        <a:srgbClr val="0369A3"/>
+        <a:srgbClr val="0369a3"/>
       </a:accent2>
       <a:accent3>
-        <a:srgbClr val="A33E03"/>
+        <a:srgbClr val="a33e03"/>
       </a:accent3>
       <a:accent4>
-        <a:srgbClr val="8E03A3"/>
+        <a:srgbClr val="8e03a3"/>
       </a:accent4>
       <a:accent5>
-        <a:srgbClr val="C99C00"/>
+        <a:srgbClr val="c99c00"/>
       </a:accent5>
       <a:accent6>
-        <a:srgbClr val="C9211E"/>
+        <a:srgbClr val="c9211e"/>
       </a:accent6>
       <a:hlink>
-        <a:srgbClr val="0000EE"/>
+        <a:srgbClr val="0000ee"/>
       </a:hlink>
       <a:folHlink>
-        <a:srgbClr val="551A8B"/>
+        <a:srgbClr val="551a8b"/>
       </a:folHlink>
     </a:clrScheme>
     <a:fontScheme name="Office">
